--- a/talks/serasa-ia-automacao/deck.pptx
+++ b/talks/serasa-ia-automacao/deck.pptx
@@ -2366,7 +2366,7 @@
                 <a:ea typeface="Arial" pitchFamily="34" charset="-122"/>
                 <a:cs typeface="Arial" pitchFamily="34" charset="-120"/>
               </a:rPr>
-              <a:t>Automatização de</a:t>
+              <a:t>Automação de</a:t>
             </a:r>
             <a:endParaRPr lang="en-US" sz="4200" dirty="0"/>
           </a:p>
@@ -2448,7 +2448,7 @@
                 <a:ea typeface="Arial" pitchFamily="34" charset="-122"/>
                 <a:cs typeface="Arial" pitchFamily="34" charset="-120"/>
               </a:rPr>
-              <a:t>Como mapear, decidir o que automatizar e onde manter o humano na alça — sem virar mais um piloto abandonado.</a:t>
+              <a:t>Como mapear o processo, implementar com eval e levar para produção.</a:t>
             </a:r>
             <a:endParaRPr lang="en-US" sz="1500" dirty="0"/>
           </a:p>
@@ -3518,7 +3518,7 @@
                 <a:ea typeface="Arial" pitchFamily="34" charset="-122"/>
                 <a:cs typeface="Arial" pitchFamily="34" charset="-120"/>
               </a:rPr>
-              <a:t>Automatização de processos com IA</a:t>
+              <a:t>Automação de processos com IA</a:t>
             </a:r>
             <a:endParaRPr lang="en-US" sz="900" dirty="0"/>
           </a:p>
@@ -4791,7 +4791,7 @@
                 <a:ea typeface="Arial" pitchFamily="34" charset="-122"/>
                 <a:cs typeface="Arial" pitchFamily="34" charset="-120"/>
               </a:rPr>
-              <a:t>Automatização de processos com IA</a:t>
+              <a:t>Automação de processos com IA</a:t>
             </a:r>
             <a:endParaRPr lang="en-US" sz="900" dirty="0"/>
           </a:p>
@@ -6643,7 +6643,7 @@
                 <a:ea typeface="Arial" pitchFamily="34" charset="-122"/>
                 <a:cs typeface="Arial" pitchFamily="34" charset="-120"/>
               </a:rPr>
-              <a:t>Automatização de processos com IA</a:t>
+              <a:t>Automação de processos com IA</a:t>
             </a:r>
             <a:endParaRPr lang="en-US" sz="900" dirty="0"/>
           </a:p>
@@ -8042,7 +8042,7 @@
                 <a:ea typeface="Arial" pitchFamily="34" charset="-122"/>
                 <a:cs typeface="Arial" pitchFamily="34" charset="-120"/>
               </a:rPr>
-              <a:t>Automatização de processos com IA</a:t>
+              <a:t>Automação de processos com IA</a:t>
             </a:r>
             <a:endParaRPr lang="en-US" sz="900" dirty="0"/>
           </a:p>
@@ -9020,7 +9020,7 @@
                 <a:ea typeface="Arial" pitchFamily="34" charset="-122"/>
                 <a:cs typeface="Arial" pitchFamily="34" charset="-120"/>
               </a:rPr>
-              <a:t>Automatização de processos com IA</a:t>
+              <a:t>Automação de processos com IA</a:t>
             </a:r>
             <a:endParaRPr lang="en-US" sz="900" dirty="0"/>
           </a:p>
@@ -9775,7 +9775,7 @@
                 <a:ea typeface="Arial" pitchFamily="34" charset="-122"/>
                 <a:cs typeface="Arial" pitchFamily="34" charset="-120"/>
               </a:rPr>
-              <a:t>Automatização de processos com IA</a:t>
+              <a:t>Automação de processos com IA</a:t>
             </a:r>
             <a:endParaRPr lang="en-US" sz="900" dirty="0"/>
           </a:p>
@@ -12065,7 +12065,7 @@
                 <a:ea typeface="Arial" pitchFamily="34" charset="-122"/>
                 <a:cs typeface="Arial" pitchFamily="34" charset="-120"/>
               </a:rPr>
-              <a:t>Automatização de processos com IA</a:t>
+              <a:t>Automação de processos com IA</a:t>
             </a:r>
             <a:endParaRPr lang="en-US" sz="900" dirty="0"/>
           </a:p>
@@ -13477,7 +13477,7 @@
                 <a:ea typeface="Arial" pitchFamily="34" charset="-122"/>
                 <a:cs typeface="Arial" pitchFamily="34" charset="-120"/>
               </a:rPr>
-              <a:t>Automatização de processos com IA</a:t>
+              <a:t>Automação de processos com IA</a:t>
             </a:r>
             <a:endParaRPr lang="en-US" sz="900" dirty="0"/>
           </a:p>
@@ -17283,7 +17283,7 @@
                 <a:ea typeface="Arial" pitchFamily="34" charset="-122"/>
                 <a:cs typeface="Arial" pitchFamily="34" charset="-120"/>
               </a:rPr>
-              <a:t>Automatização de processos com IA</a:t>
+              <a:t>Automação de processos com IA</a:t>
             </a:r>
             <a:endParaRPr lang="en-US" sz="900" dirty="0"/>
           </a:p>
@@ -18803,7 +18803,7 @@
                 <a:ea typeface="Arial" pitchFamily="34" charset="-122"/>
                 <a:cs typeface="Arial" pitchFamily="34" charset="-120"/>
               </a:rPr>
-              <a:t>Automatização de processos com IA</a:t>
+              <a:t>Automação de processos com IA</a:t>
             </a:r>
             <a:endParaRPr lang="en-US" sz="900" dirty="0"/>
           </a:p>
@@ -20511,7 +20511,7 @@
                 <a:ea typeface="Arial" pitchFamily="34" charset="-122"/>
                 <a:cs typeface="Arial" pitchFamily="34" charset="-120"/>
               </a:rPr>
-              <a:t>Automatização de processos com IA</a:t>
+              <a:t>Automação de processos com IA</a:t>
             </a:r>
             <a:endParaRPr lang="en-US" sz="900" dirty="0"/>
           </a:p>
@@ -21885,7 +21885,7 @@
                 <a:ea typeface="Arial" pitchFamily="34" charset="-122"/>
                 <a:cs typeface="Arial" pitchFamily="34" charset="-120"/>
               </a:rPr>
-              <a:t>Automatização de processos com IA</a:t>
+              <a:t>Automação de processos com IA</a:t>
             </a:r>
             <a:endParaRPr lang="en-US" sz="900" dirty="0"/>
           </a:p>
@@ -22599,7 +22599,7 @@
                 <a:ea typeface="Arial" pitchFamily="34" charset="-122"/>
                 <a:cs typeface="Arial" pitchFamily="34" charset="-120"/>
               </a:rPr>
-              <a:t>Automatização de processos com IA</a:t>
+              <a:t>Automação de processos com IA</a:t>
             </a:r>
             <a:endParaRPr lang="en-US" sz="900" dirty="0"/>
           </a:p>

--- a/talks/serasa-ia-automacao/deck.pptx
+++ b/talks/serasa-ia-automacao/deck.pptx
@@ -2487,7 +2487,7 @@
                 <a:ea typeface="Arial" pitchFamily="34" charset="-122"/>
                 <a:cs typeface="Arial" pitchFamily="34" charset="-120"/>
               </a:rPr>
-              <a:t>Gabriel Corrêa</a:t>
+              <a:t>Bruno Prata</a:t>
             </a:r>
             <a:endParaRPr lang="en-US" sz="1300" dirty="0"/>
           </a:p>

--- a/talks/serasa-ia-automacao/deck.pptx
+++ b/talks/serasa-ia-automacao/deck.pptx
@@ -1131,7 +1131,7 @@
           <a:p>
             <a:r>
               <a:rPr lang="en-US" dirty="0"/>
-              <a:t>Slide de pontuação. Fale a pergunta errada em voz alta e espere o riso de reconhecimento. A linha de baixo é o roteiro — aponte pra ela. ~1,5 min.</a:t>
+              <a:t>Slide de pontuação. Encene o diálogo: faça a pergunta errada em voz alta e dê a resposta que sempre vem. A linha de baixo é o roteiro — aponte pra ela. ~1,5 min.</a:t>
             </a:r>
             <a:endParaRPr lang="en-US" dirty="0"/>
           </a:p>
@@ -6362,12 +6362,12 @@
         </p:nvSpPr>
         <p:spPr>
           <a:xfrm>
-            <a:off x="658368" y="5468112"/>
-            <a:ext cx="10874959" cy="822960"/>
+            <a:off x="658368" y="5559552"/>
+            <a:ext cx="10874959" cy="530352"/>
           </a:xfrm>
           <a:prstGeom prst="roundRect">
             <a:avLst>
-              <a:gd name="adj" fmla="val 11111"/>
+              <a:gd name="adj" fmla="val 17241"/>
             </a:avLst>
           </a:prstGeom>
           <a:solidFill>
@@ -6389,8 +6389,8 @@
         </p:nvSpPr>
         <p:spPr>
           <a:xfrm>
-            <a:off x="658368" y="5468112"/>
-            <a:ext cx="45720" cy="822960"/>
+            <a:off x="658368" y="5559552"/>
+            <a:ext cx="45720" cy="530352"/>
           </a:xfrm>
           <a:prstGeom prst="rect">
             <a:avLst/>
@@ -6414,8 +6414,8 @@
         </p:nvSpPr>
         <p:spPr>
           <a:xfrm>
-            <a:off x="914400" y="5559552"/>
-            <a:ext cx="7315200" cy="201168"/>
+            <a:off x="914400" y="5687568"/>
+            <a:ext cx="10362895" cy="274320"/>
           </a:xfrm>
           <a:prstGeom prst="rect">
             <a:avLst/>
@@ -6428,153 +6428,114 @@
           <a:lstStyle/>
           <a:p>
             <a:pPr indent="0" marL="0">
-              <a:buNone/>
-            </a:pPr>
-            <a:r>
-              <a:rPr lang="en-US" sz="950" b="1" spc="180" kern="0" dirty="0">
-                <a:solidFill>
-                  <a:srgbClr val="E80070"/>
-                </a:solidFill>
-                <a:latin typeface="Arial" pitchFamily="34" charset="0"/>
-                <a:ea typeface="Arial" pitchFamily="34" charset="-122"/>
-                <a:cs typeface="Arial" pitchFamily="34" charset="-120"/>
-              </a:rPr>
-              <a:t>TRÊS CONFUSÕES DE VOCABULÁRIO QUE ATRAPALHAM A CONVERSA</a:t>
-            </a:r>
-            <a:endParaRPr lang="en-US" sz="950" dirty="0"/>
+              <a:lnSpc>
+                <a:spcPts val="1600"/>
+              </a:lnSpc>
+              <a:buNone/>
+            </a:pPr>
+            <a:r>
+              <a:rPr lang="en-US" sz="1200" b="1" dirty="0">
+                <a:solidFill>
+                  <a:srgbClr val="16224E"/>
+                </a:solidFill>
+                <a:latin typeface="Arial" pitchFamily="34" charset="0"/>
+                <a:ea typeface="Arial" pitchFamily="34" charset="-122"/>
+                <a:cs typeface="Arial" pitchFamily="34" charset="-120"/>
+              </a:rPr>
+              <a:t>Claude Code não é modelo</a:t>
+            </a:r>
+            <a:pPr indent="0" marL="0">
+              <a:lnSpc>
+                <a:spcPts val="1600"/>
+              </a:lnSpc>
+              <a:buNone/>
+            </a:pPr>
+            <a:r>
+              <a:rPr lang="en-US" sz="1200" dirty="0">
+                <a:solidFill>
+                  <a:srgbClr val="16224E"/>
+                </a:solidFill>
+                <a:latin typeface="Arial" pitchFamily="34" charset="0"/>
+                <a:ea typeface="Arial" pitchFamily="34" charset="-122"/>
+                <a:cs typeface="Arial" pitchFamily="34" charset="-120"/>
+              </a:rPr>
+              <a:t> — é agente. </a:t>
+            </a:r>
+            <a:pPr indent="0" marL="0">
+              <a:lnSpc>
+                <a:spcPts val="1600"/>
+              </a:lnSpc>
+              <a:buNone/>
+            </a:pPr>
+            <a:r>
+              <a:rPr lang="en-US" sz="1200" b="1" dirty="0">
+                <a:solidFill>
+                  <a:srgbClr val="16224E"/>
+                </a:solidFill>
+                <a:latin typeface="Arial" pitchFamily="34" charset="0"/>
+                <a:ea typeface="Arial" pitchFamily="34" charset="-122"/>
+                <a:cs typeface="Arial" pitchFamily="34" charset="-120"/>
+              </a:rPr>
+              <a:t>Cursor não é orquestrador</a:t>
+            </a:r>
+            <a:pPr indent="0" marL="0">
+              <a:lnSpc>
+                <a:spcPts val="1600"/>
+              </a:lnSpc>
+              <a:buNone/>
+            </a:pPr>
+            <a:r>
+              <a:rPr lang="en-US" sz="1200" dirty="0">
+                <a:solidFill>
+                  <a:srgbClr val="16224E"/>
+                </a:solidFill>
+                <a:latin typeface="Arial" pitchFamily="34" charset="0"/>
+                <a:ea typeface="Arial" pitchFamily="34" charset="-122"/>
+                <a:cs typeface="Arial" pitchFamily="34" charset="-120"/>
+              </a:rPr>
+              <a:t> — é editor com agente. </a:t>
+            </a:r>
+            <a:pPr indent="0" marL="0">
+              <a:lnSpc>
+                <a:spcPts val="1600"/>
+              </a:lnSpc>
+              <a:buNone/>
+            </a:pPr>
+            <a:r>
+              <a:rPr lang="en-US" sz="1200" b="1" dirty="0">
+                <a:solidFill>
+                  <a:srgbClr val="16224E"/>
+                </a:solidFill>
+                <a:latin typeface="Arial" pitchFamily="34" charset="0"/>
+                <a:ea typeface="Arial" pitchFamily="34" charset="-122"/>
+                <a:cs typeface="Arial" pitchFamily="34" charset="-120"/>
+              </a:rPr>
+              <a:t>GitHub Actions é gatilho</a:t>
+            </a:r>
+            <a:pPr indent="0" marL="0">
+              <a:lnSpc>
+                <a:spcPts val="1600"/>
+              </a:lnSpc>
+              <a:buNone/>
+            </a:pPr>
+            <a:r>
+              <a:rPr lang="en-US" sz="1200" dirty="0">
+                <a:solidFill>
+                  <a:srgbClr val="16224E"/>
+                </a:solidFill>
+                <a:latin typeface="Arial" pitchFamily="34" charset="0"/>
+                <a:ea typeface="Arial" pitchFamily="34" charset="-122"/>
+                <a:cs typeface="Arial" pitchFamily="34" charset="-120"/>
+              </a:rPr>
+              <a:t>, não orquestrador.</a:t>
+            </a:r>
+            <a:endParaRPr lang="en-US" sz="1200" dirty="0"/>
           </a:p>
         </p:txBody>
       </p:sp>
       <p:sp>
         <p:nvSpPr>
           <p:cNvPr id="63" name="Text 61"/>
-          <p:cNvSpPr/>
-          <p:nvPr/>
-        </p:nvSpPr>
-        <p:spPr>
-          <a:xfrm>
-            <a:off x="914400" y="5779008"/>
-            <a:ext cx="10362895" cy="438912"/>
-          </a:xfrm>
-          <a:prstGeom prst="rect">
-            <a:avLst/>
-          </a:prstGeom>
-          <a:noFill/>
-          <a:ln/>
-        </p:spPr>
-        <p:txBody>
-          <a:bodyPr wrap="square" lIns="0" tIns="0" rIns="0" bIns="0" rtlCol="0" anchor="t"/>
-          <a:lstStyle/>
-          <a:p>
-            <a:pPr indent="0" marL="0">
-              <a:lnSpc>
-                <a:spcPts val="1600"/>
-              </a:lnSpc>
-              <a:buNone/>
-            </a:pPr>
-            <a:r>
-              <a:rPr lang="en-US" sz="1200" b="1" dirty="0">
-                <a:solidFill>
-                  <a:srgbClr val="16224E"/>
-                </a:solidFill>
-                <a:latin typeface="Arial" pitchFamily="34" charset="0"/>
-                <a:ea typeface="Arial" pitchFamily="34" charset="-122"/>
-                <a:cs typeface="Arial" pitchFamily="34" charset="-120"/>
-              </a:rPr>
-              <a:t>Claude Code não é modelo</a:t>
-            </a:r>
-            <a:pPr indent="0" marL="0">
-              <a:lnSpc>
-                <a:spcPts val="1600"/>
-              </a:lnSpc>
-              <a:buNone/>
-            </a:pPr>
-            <a:r>
-              <a:rPr lang="en-US" sz="1200" dirty="0">
-                <a:solidFill>
-                  <a:srgbClr val="16224E"/>
-                </a:solidFill>
-                <a:latin typeface="Arial" pitchFamily="34" charset="0"/>
-                <a:ea typeface="Arial" pitchFamily="34" charset="-122"/>
-                <a:cs typeface="Arial" pitchFamily="34" charset="-120"/>
-              </a:rPr>
-              <a:t> — é um agente que usa modelos. </a:t>
-            </a:r>
-            <a:pPr indent="0" marL="0">
-              <a:lnSpc>
-                <a:spcPts val="1600"/>
-              </a:lnSpc>
-              <a:buNone/>
-            </a:pPr>
-            <a:r>
-              <a:rPr lang="en-US" sz="1200" b="1" dirty="0">
-                <a:solidFill>
-                  <a:srgbClr val="16224E"/>
-                </a:solidFill>
-                <a:latin typeface="Arial" pitchFamily="34" charset="0"/>
-                <a:ea typeface="Arial" pitchFamily="34" charset="-122"/>
-                <a:cs typeface="Arial" pitchFamily="34" charset="-120"/>
-              </a:rPr>
-              <a:t>Cursor não é orquestrador</a:t>
-            </a:r>
-            <a:pPr indent="0" marL="0">
-              <a:lnSpc>
-                <a:spcPts val="1600"/>
-              </a:lnSpc>
-              <a:buNone/>
-            </a:pPr>
-            <a:r>
-              <a:rPr lang="en-US" sz="1200" dirty="0">
-                <a:solidFill>
-                  <a:srgbClr val="16224E"/>
-                </a:solidFill>
-                <a:latin typeface="Arial" pitchFamily="34" charset="0"/>
-                <a:ea typeface="Arial" pitchFamily="34" charset="-122"/>
-                <a:cs typeface="Arial" pitchFamily="34" charset="-120"/>
-              </a:rPr>
-              <a:t> — é editor com agente dentro. </a:t>
-            </a:r>
-            <a:pPr indent="0" marL="0">
-              <a:lnSpc>
-                <a:spcPts val="1600"/>
-              </a:lnSpc>
-              <a:buNone/>
-            </a:pPr>
-            <a:r>
-              <a:rPr lang="en-US" sz="1200" b="1" dirty="0">
-                <a:solidFill>
-                  <a:srgbClr val="16224E"/>
-                </a:solidFill>
-                <a:latin typeface="Arial" pitchFamily="34" charset="0"/>
-                <a:ea typeface="Arial" pitchFamily="34" charset="-122"/>
-                <a:cs typeface="Arial" pitchFamily="34" charset="-120"/>
-              </a:rPr>
-              <a:t>GitHub Actions não orquestra IA</a:t>
-            </a:r>
-            <a:pPr indent="0" marL="0">
-              <a:lnSpc>
-                <a:spcPts val="1600"/>
-              </a:lnSpc>
-              <a:buNone/>
-            </a:pPr>
-            <a:r>
-              <a:rPr lang="en-US" sz="1200" dirty="0">
-                <a:solidFill>
-                  <a:srgbClr val="16224E"/>
-                </a:solidFill>
-                <a:latin typeface="Arial" pitchFamily="34" charset="0"/>
-                <a:ea typeface="Arial" pitchFamily="34" charset="-122"/>
-                <a:cs typeface="Arial" pitchFamily="34" charset="-120"/>
-              </a:rPr>
-              <a:t> — é gatilho: ótimo pra disparar, ruim pra manter estado entre etapas.</a:t>
-            </a:r>
-            <a:endParaRPr lang="en-US" sz="1200" dirty="0"/>
-          </a:p>
-        </p:txBody>
-      </p:sp>
-      <p:sp>
-        <p:nvSpPr>
-          <p:cNvPr id="64" name="Text 62"/>
           <p:cNvSpPr/>
           <p:nvPr/>
         </p:nvSpPr>
@@ -6613,7 +6574,7 @@
       </p:sp>
       <p:sp>
         <p:nvSpPr>
-          <p:cNvPr id="65" name="Text 63"/>
+          <p:cNvPr id="64" name="Text 62"/>
           <p:cNvSpPr/>
           <p:nvPr/>
         </p:nvSpPr>
@@ -8010,7 +7971,7 @@
                 <a:ea typeface="Arial" pitchFamily="34" charset="-122"/>
                 <a:cs typeface="Arial" pitchFamily="34" charset="-120"/>
               </a:rPr>
-              <a:t>: entrada, saída, dono, volume/mês, exceções, custo do erro.</a:t>
+              <a:t>: entrada, saída, dono, frequência, exceções, custo do erro.</a:t>
             </a:r>
             <a:endParaRPr lang="en-US" sz="1050" dirty="0"/>
           </a:p>
@@ -10193,8 +10154,100 @@
         </p:nvSpPr>
         <p:spPr>
           <a:xfrm>
+            <a:off x="658368" y="868680"/>
+            <a:ext cx="8229600" cy="274320"/>
+          </a:xfrm>
+          <a:prstGeom prst="rect">
+            <a:avLst/>
+          </a:prstGeom>
+          <a:noFill/>
+          <a:ln/>
+        </p:spPr>
+        <p:txBody>
+          <a:bodyPr wrap="square" lIns="0" tIns="0" rIns="0" bIns="0" rtlCol="0" anchor="ctr"/>
+          <a:lstStyle/>
+          <a:p>
+            <a:pPr indent="0" marL="0">
+              <a:buNone/>
+            </a:pPr>
+            <a:r>
+              <a:rPr lang="en-US" sz="1100" b="1" spc="220" kern="0" dirty="0">
+                <a:solidFill>
+                  <a:srgbClr val="FF8FC0"/>
+                </a:solidFill>
+                <a:latin typeface="Arial" pitchFamily="34" charset="0"/>
+                <a:ea typeface="Arial" pitchFamily="34" charset="-122"/>
+                <a:cs typeface="Arial" pitchFamily="34" charset="-120"/>
+              </a:rPr>
+              <a:t>COMO ISSO COMEÇA ERRADO</a:t>
+            </a:r>
+            <a:endParaRPr lang="en-US" sz="1100" dirty="0"/>
+          </a:p>
+        </p:txBody>
+      </p:sp>
+      <p:sp>
+        <p:nvSpPr>
+          <p:cNvPr id="3" name="Text 1"/>
+          <p:cNvSpPr/>
+          <p:nvPr/>
+        </p:nvSpPr>
+        <p:spPr>
+          <a:xfrm>
             <a:off x="658368" y="1234440"/>
-            <a:ext cx="8229600" cy="274320"/>
+            <a:ext cx="10058400" cy="640080"/>
+          </a:xfrm>
+          <a:prstGeom prst="rect">
+            <a:avLst/>
+          </a:prstGeom>
+          <a:noFill/>
+          <a:ln/>
+        </p:spPr>
+        <p:txBody>
+          <a:bodyPr wrap="square" lIns="0" tIns="0" rIns="0" bIns="0" rtlCol="0" anchor="t"/>
+          <a:lstStyle/>
+          <a:p>
+            <a:pPr indent="0" marL="0">
+              <a:buNone/>
+            </a:pPr>
+            <a:r>
+              <a:rPr lang="en-US" sz="3200" b="1" dirty="0">
+                <a:solidFill>
+                  <a:srgbClr val="FFFFFF"/>
+                </a:solidFill>
+                <a:latin typeface="Arial" pitchFamily="34" charset="0"/>
+                <a:ea typeface="Arial" pitchFamily="34" charset="-122"/>
+                <a:cs typeface="Arial" pitchFamily="34" charset="-120"/>
+              </a:rPr>
+              <a:t>A primeira pergunta é sempre </a:t>
+            </a:r>
+            <a:pPr indent="0" marL="0">
+              <a:buNone/>
+            </a:pPr>
+            <a:r>
+              <a:rPr lang="en-US" sz="3200" b="1" dirty="0">
+                <a:solidFill>
+                  <a:srgbClr val="FF8FC0"/>
+                </a:solidFill>
+                <a:latin typeface="Arial" pitchFamily="34" charset="0"/>
+                <a:ea typeface="Arial" pitchFamily="34" charset="-122"/>
+                <a:cs typeface="Arial" pitchFamily="34" charset="-120"/>
+              </a:rPr>
+              <a:t>a errada</a:t>
+            </a:r>
+            <a:endParaRPr lang="en-US" sz="3200" dirty="0"/>
+          </a:p>
+        </p:txBody>
+      </p:sp>
+      <p:sp>
+        <p:nvSpPr>
+          <p:cNvPr id="4" name="Text 2"/>
+          <p:cNvSpPr/>
+          <p:nvPr/>
+        </p:nvSpPr>
+        <p:spPr>
+          <a:xfrm>
+            <a:off x="658368" y="2340864"/>
+            <a:ext cx="1920240" cy="237744"/>
           </a:xfrm>
           <a:prstGeom prst="rect">
             <a:avLst/>
@@ -10210,30 +10263,228 @@
               <a:buNone/>
             </a:pPr>
             <a:r>
-              <a:rPr lang="en-US" sz="1100" b="1" spc="220" kern="0" dirty="0">
+              <a:rPr lang="en-US" sz="900" spc="120" kern="0" dirty="0">
+                <a:solidFill>
+                  <a:srgbClr val="C9B6D4"/>
+                </a:solidFill>
+                <a:latin typeface="Courier New" pitchFamily="34" charset="0"/>
+                <a:ea typeface="Courier New" pitchFamily="34" charset="-122"/>
+                <a:cs typeface="Courier New" pitchFamily="34" charset="-120"/>
+              </a:rPr>
+              <a:t>VOCÊ PERGUNTA</a:t>
+            </a:r>
+            <a:endParaRPr lang="en-US" sz="900" dirty="0"/>
+          </a:p>
+        </p:txBody>
+      </p:sp>
+      <p:sp>
+        <p:nvSpPr>
+          <p:cNvPr id="5" name="Text 3"/>
+          <p:cNvSpPr/>
+          <p:nvPr/>
+        </p:nvSpPr>
+        <p:spPr>
+          <a:xfrm>
+            <a:off x="2807208" y="2286000"/>
+            <a:ext cx="8229600" cy="384048"/>
+          </a:xfrm>
+          <a:prstGeom prst="rect">
+            <a:avLst/>
+          </a:prstGeom>
+          <a:noFill/>
+          <a:ln/>
+        </p:spPr>
+        <p:txBody>
+          <a:bodyPr wrap="square" lIns="0" tIns="0" rIns="0" bIns="0" rtlCol="0" anchor="t"/>
+          <a:lstStyle/>
+          <a:p>
+            <a:pPr indent="0" marL="0">
+              <a:buNone/>
+            </a:pPr>
+            <a:r>
+              <a:rPr lang="en-US" sz="1900" dirty="0">
+                <a:solidFill>
+                  <a:srgbClr val="FFFFFF"/>
+                </a:solidFill>
+                <a:latin typeface="Arial" pitchFamily="34" charset="0"/>
+                <a:ea typeface="Arial" pitchFamily="34" charset="-122"/>
+                <a:cs typeface="Arial" pitchFamily="34" charset="-120"/>
+              </a:rPr>
+              <a:t>“O que vocês querem automatizar?”</a:t>
+            </a:r>
+            <a:endParaRPr lang="en-US" sz="1900" dirty="0"/>
+          </a:p>
+        </p:txBody>
+      </p:sp>
+      <p:sp>
+        <p:nvSpPr>
+          <p:cNvPr id="6" name="Text 4"/>
+          <p:cNvSpPr/>
+          <p:nvPr/>
+        </p:nvSpPr>
+        <p:spPr>
+          <a:xfrm>
+            <a:off x="658368" y="2999232"/>
+            <a:ext cx="1920240" cy="237744"/>
+          </a:xfrm>
+          <a:prstGeom prst="rect">
+            <a:avLst/>
+          </a:prstGeom>
+          <a:noFill/>
+          <a:ln/>
+        </p:spPr>
+        <p:txBody>
+          <a:bodyPr wrap="square" lIns="0" tIns="0" rIns="0" bIns="0" rtlCol="0" anchor="ctr"/>
+          <a:lstStyle/>
+          <a:p>
+            <a:pPr indent="0" marL="0">
+              <a:buNone/>
+            </a:pPr>
+            <a:r>
+              <a:rPr lang="en-US" sz="900" spc="120" kern="0" dirty="0">
+                <a:solidFill>
+                  <a:srgbClr val="C9B6D4"/>
+                </a:solidFill>
+                <a:latin typeface="Courier New" pitchFamily="34" charset="0"/>
+                <a:ea typeface="Courier New" pitchFamily="34" charset="-122"/>
+                <a:cs typeface="Courier New" pitchFamily="34" charset="-120"/>
+              </a:rPr>
+              <a:t>A PESSOA RESPONDE</a:t>
+            </a:r>
+            <a:endParaRPr lang="en-US" sz="900" dirty="0"/>
+          </a:p>
+        </p:txBody>
+      </p:sp>
+      <p:sp>
+        <p:nvSpPr>
+          <p:cNvPr id="7" name="Text 5"/>
+          <p:cNvSpPr/>
+          <p:nvPr/>
+        </p:nvSpPr>
+        <p:spPr>
+          <a:xfrm>
+            <a:off x="2807208" y="2944368"/>
+            <a:ext cx="8229600" cy="384048"/>
+          </a:xfrm>
+          <a:prstGeom prst="rect">
+            <a:avLst/>
+          </a:prstGeom>
+          <a:noFill/>
+          <a:ln/>
+        </p:spPr>
+        <p:txBody>
+          <a:bodyPr wrap="square" lIns="0" tIns="0" rIns="0" bIns="0" rtlCol="0" anchor="t"/>
+          <a:lstStyle/>
+          <a:p>
+            <a:pPr indent="0" marL="0">
+              <a:buNone/>
+            </a:pPr>
+            <a:r>
+              <a:rPr lang="en-US" sz="1900" dirty="0">
+                <a:solidFill>
+                  <a:srgbClr val="FFFFFF"/>
+                </a:solidFill>
+                <a:latin typeface="Arial" pitchFamily="34" charset="0"/>
+                <a:ea typeface="Arial" pitchFamily="34" charset="-122"/>
+                <a:cs typeface="Arial" pitchFamily="34" charset="-120"/>
+              </a:rPr>
+              <a:t>“Queria um bot que respondesse os chamados.”</a:t>
+            </a:r>
+            <a:endParaRPr lang="en-US" sz="1900" dirty="0"/>
+          </a:p>
+        </p:txBody>
+      </p:sp>
+      <p:sp>
+        <p:nvSpPr>
+          <p:cNvPr id="8" name="Text 6"/>
+          <p:cNvSpPr/>
+          <p:nvPr/>
+        </p:nvSpPr>
+        <p:spPr>
+          <a:xfrm>
+            <a:off x="2807208" y="3621024"/>
+            <a:ext cx="7863840" cy="566928"/>
+          </a:xfrm>
+          <a:prstGeom prst="rect">
+            <a:avLst/>
+          </a:prstGeom>
+          <a:noFill/>
+          <a:ln/>
+        </p:spPr>
+        <p:txBody>
+          <a:bodyPr wrap="square" lIns="0" tIns="0" rIns="0" bIns="0" rtlCol="0" anchor="t"/>
+          <a:lstStyle/>
+          <a:p>
+            <a:pPr indent="0" marL="0">
+              <a:lnSpc>
+                <a:spcPts val="1900"/>
+              </a:lnSpc>
+              <a:buNone/>
+            </a:pPr>
+            <a:r>
+              <a:rPr lang="en-US" sz="1350" dirty="0">
+                <a:solidFill>
+                  <a:srgbClr val="E7DCEF"/>
+                </a:solidFill>
+                <a:latin typeface="Arial" pitchFamily="34" charset="0"/>
+                <a:ea typeface="Arial" pitchFamily="34" charset="-122"/>
+                <a:cs typeface="Arial" pitchFamily="34" charset="-120"/>
+              </a:rPr>
+              <a:t>Isso não é o processo. É um palpite de solução — e quem constrói em cima dele automatiza o que alguém imaginou, não o trabalho que existe.</a:t>
+            </a:r>
+            <a:endParaRPr lang="en-US" sz="1350" dirty="0"/>
+          </a:p>
+        </p:txBody>
+      </p:sp>
+      <p:sp>
+        <p:nvSpPr>
+          <p:cNvPr id="9" name="Text 7"/>
+          <p:cNvSpPr/>
+          <p:nvPr/>
+        </p:nvSpPr>
+        <p:spPr>
+          <a:xfrm>
+            <a:off x="658368" y="4526280"/>
+            <a:ext cx="1920240" cy="237744"/>
+          </a:xfrm>
+          <a:prstGeom prst="rect">
+            <a:avLst/>
+          </a:prstGeom>
+          <a:noFill/>
+          <a:ln/>
+        </p:spPr>
+        <p:txBody>
+          <a:bodyPr wrap="square" lIns="0" tIns="0" rIns="0" bIns="0" rtlCol="0" anchor="ctr"/>
+          <a:lstStyle/>
+          <a:p>
+            <a:pPr indent="0" marL="0">
+              <a:buNone/>
+            </a:pPr>
+            <a:r>
+              <a:rPr lang="en-US" sz="900" b="1" spc="120" kern="0" dirty="0">
                 <a:solidFill>
                   <a:srgbClr val="FF8FC0"/>
                 </a:solidFill>
-                <a:latin typeface="Arial" pitchFamily="34" charset="0"/>
-                <a:ea typeface="Arial" pitchFamily="34" charset="-122"/>
-                <a:cs typeface="Arial" pitchFamily="34" charset="-120"/>
-              </a:rPr>
-              <a:t>COMO ISSO COMEÇA ERRADO</a:t>
-            </a:r>
-            <a:endParaRPr lang="en-US" sz="1100" dirty="0"/>
-          </a:p>
-        </p:txBody>
-      </p:sp>
-      <p:sp>
-        <p:nvSpPr>
-          <p:cNvPr id="3" name="Text 1"/>
-          <p:cNvSpPr/>
-          <p:nvPr/>
-        </p:nvSpPr>
-        <p:spPr>
-          <a:xfrm>
-            <a:off x="658368" y="1627632"/>
-            <a:ext cx="9692640" cy="1554480"/>
+                <a:latin typeface="Courier New" pitchFamily="34" charset="0"/>
+                <a:ea typeface="Courier New" pitchFamily="34" charset="-122"/>
+                <a:cs typeface="Courier New" pitchFamily="34" charset="-120"/>
+              </a:rPr>
+              <a:t>PERGUNTE ASSIM</a:t>
+            </a:r>
+            <a:endParaRPr lang="en-US" sz="900" dirty="0"/>
+          </a:p>
+        </p:txBody>
+      </p:sp>
+      <p:sp>
+        <p:nvSpPr>
+          <p:cNvPr id="10" name="Text 8"/>
+          <p:cNvSpPr/>
+          <p:nvPr/>
+        </p:nvSpPr>
+        <p:spPr>
+          <a:xfrm>
+            <a:off x="2807208" y="4471416"/>
+            <a:ext cx="8229600" cy="411480"/>
           </a:xfrm>
           <a:prstGeom prst="rect">
             <a:avLst/>
@@ -10246,13 +10497,10 @@
           <a:lstStyle/>
           <a:p>
             <a:pPr indent="0" marL="0">
-              <a:lnSpc>
-                <a:spcPts val="3800"/>
-              </a:lnSpc>
-              <a:buNone/>
-            </a:pPr>
-            <a:r>
-              <a:rPr lang="en-US" sz="3200" b="1" dirty="0">
+              <a:buNone/>
+            </a:pPr>
+            <a:r>
+              <a:rPr lang="en-US" sz="1900" b="1" dirty="0">
                 <a:solidFill>
                   <a:srgbClr val="FFFFFF"/>
                 </a:solidFill>
@@ -10260,99 +10508,22 @@
                 <a:ea typeface="Arial" pitchFamily="34" charset="-122"/>
                 <a:cs typeface="Arial" pitchFamily="34" charset="-120"/>
               </a:rPr>
-              <a:t>“O que vocês querem automatizar?” só devolve </a:t>
-            </a:r>
-            <a:pPr indent="0" marL="0">
-              <a:lnSpc>
-                <a:spcPts val="3800"/>
-              </a:lnSpc>
-              <a:buNone/>
-            </a:pPr>
-            <a:r>
-              <a:rPr lang="en-US" sz="3200" b="1" dirty="0">
-                <a:solidFill>
-                  <a:srgbClr val="FF8FC0"/>
-                </a:solidFill>
-                <a:latin typeface="Arial" pitchFamily="34" charset="0"/>
-                <a:ea typeface="Arial" pitchFamily="34" charset="-122"/>
-                <a:cs typeface="Arial" pitchFamily="34" charset="-120"/>
-              </a:rPr>
-              <a:t>a solução que a pessoa já imaginou</a:t>
-            </a:r>
-            <a:endParaRPr lang="en-US" sz="3200" dirty="0"/>
-          </a:p>
-        </p:txBody>
-      </p:sp>
-      <p:sp>
-        <p:nvSpPr>
-          <p:cNvPr id="4" name="Text 2"/>
-          <p:cNvSpPr/>
-          <p:nvPr/>
-        </p:nvSpPr>
-        <p:spPr>
-          <a:xfrm>
-            <a:off x="658368" y="3310128"/>
-            <a:ext cx="9326880" cy="1463040"/>
-          </a:xfrm>
-          <a:prstGeom prst="rect">
-            <a:avLst/>
-          </a:prstGeom>
-          <a:noFill/>
-          <a:ln/>
-        </p:spPr>
-        <p:txBody>
-          <a:bodyPr wrap="square" lIns="0" tIns="0" rIns="0" bIns="0" rtlCol="0" anchor="t"/>
-          <a:lstStyle/>
-          <a:p>
-            <a:pPr indent="0" marL="0">
-              <a:lnSpc>
-                <a:spcPts val="2200"/>
-              </a:lnSpc>
-              <a:buNone/>
-            </a:pPr>
-            <a:r>
-              <a:rPr lang="en-US" sz="1500" dirty="0">
-                <a:solidFill>
-                  <a:srgbClr val="E7DCEF"/>
-                </a:solidFill>
-                <a:latin typeface="Arial" pitchFamily="34" charset="0"/>
-                <a:ea typeface="Arial" pitchFamily="34" charset="-122"/>
-                <a:cs typeface="Arial" pitchFamily="34" charset="-120"/>
-              </a:rPr>
-              <a:t>Ninguém responde com o processo. Responde com “queria um bot que respondesse os chamados”. Aí você automatiza a imaginação de alguém, não o trabalho que existe.
-</a:t>
-            </a:r>
-            <a:pPr indent="0" marL="0">
-              <a:lnSpc>
-                <a:spcPts val="2200"/>
-              </a:lnSpc>
-              <a:buNone/>
-            </a:pPr>
-            <a:r>
-              <a:rPr lang="en-US" sz="1500" b="1" dirty="0">
-                <a:solidFill>
-                  <a:srgbClr val="FFFFFF"/>
-                </a:solidFill>
-                <a:latin typeface="Arial" pitchFamily="34" charset="0"/>
-                <a:ea typeface="Arial" pitchFamily="34" charset="-122"/>
-                <a:cs typeface="Arial" pitchFamily="34" charset="-120"/>
-              </a:rPr>
-              <a:t>A pergunta que funciona é outra: “me conta o que você fez ontem, na ordem.”</a:t>
-            </a:r>
-            <a:endParaRPr lang="en-US" sz="1500" dirty="0"/>
-          </a:p>
-        </p:txBody>
-      </p:sp>
-      <p:sp>
-        <p:nvSpPr>
-          <p:cNvPr id="5" name="Text 3"/>
-          <p:cNvSpPr/>
-          <p:nvPr/>
-        </p:nvSpPr>
-        <p:spPr>
-          <a:xfrm>
-            <a:off x="658368" y="5623560"/>
-            <a:ext cx="10881360" cy="457200"/>
+              <a:t>“Me conta o que você fez ontem, na ordem.”</a:t>
+            </a:r>
+            <a:endParaRPr lang="en-US" sz="1900" dirty="0"/>
+          </a:p>
+        </p:txBody>
+      </p:sp>
+      <p:sp>
+        <p:nvSpPr>
+          <p:cNvPr id="11" name="Text 9"/>
+          <p:cNvSpPr/>
+          <p:nvPr/>
+        </p:nvSpPr>
+        <p:spPr>
+          <a:xfrm>
+            <a:off x="658368" y="5715000"/>
+            <a:ext cx="10881360" cy="411480"/>
           </a:xfrm>
           <a:prstGeom prst="rect">
             <a:avLst/>
@@ -10592,7 +10763,7 @@
         </p:nvSpPr>
         <p:spPr>
           <a:xfrm>
-            <a:off x="658368" y="1746504"/>
+            <a:off x="658368" y="1700784"/>
             <a:ext cx="10874959" cy="9144"/>
           </a:xfrm>
           <a:prstGeom prst="rect">
@@ -10617,7 +10788,7 @@
         </p:nvSpPr>
         <p:spPr>
           <a:xfrm>
-            <a:off x="768096" y="1837944"/>
+            <a:off x="768096" y="1792224"/>
             <a:ext cx="384048" cy="256032"/>
           </a:xfrm>
           <a:prstGeom prst="rect">
@@ -10656,8 +10827,8 @@
         </p:nvSpPr>
         <p:spPr>
           <a:xfrm>
-            <a:off x="1225296" y="1819656"/>
-            <a:ext cx="4480560" cy="365760"/>
+            <a:off x="1225296" y="1810512"/>
+            <a:ext cx="3840480" cy="347472"/>
           </a:xfrm>
           <a:prstGeom prst="rect">
             <a:avLst/>
@@ -10698,8 +10869,8 @@
         </p:nvSpPr>
         <p:spPr>
           <a:xfrm>
-            <a:off x="5852160" y="1819656"/>
-            <a:ext cx="5623560" cy="402336"/>
+            <a:off x="5184648" y="1810512"/>
+            <a:ext cx="6263640" cy="347472"/>
           </a:xfrm>
           <a:prstGeom prst="rect">
             <a:avLst/>
@@ -10726,7 +10897,7 @@
                 <a:ea typeface="Arial" pitchFamily="34" charset="-122"/>
                 <a:cs typeface="Arial" pitchFamily="34" charset="-120"/>
               </a:rPr>
-              <a:t>Dá as etapas </a:t>
+              <a:t>As etapas </a:t>
             </a:r>
             <a:pPr indent="0" marL="0">
               <a:lnSpc>
@@ -10760,7 +10931,7 @@
                 <a:ea typeface="Arial" pitchFamily="34" charset="-122"/>
                 <a:cs typeface="Arial" pitchFamily="34" charset="-120"/>
               </a:rPr>
-              <a:t>. A versão do gestor é a oficial; esta é a que acontece.</a:t>
+              <a:t> — não a versão oficial do gestor.</a:t>
             </a:r>
             <a:endParaRPr lang="en-US" sz="1150" dirty="0"/>
           </a:p>
@@ -10774,12 +10945,12 @@
         </p:nvSpPr>
         <p:spPr>
           <a:xfrm>
-            <a:off x="658368" y="2258568"/>
-            <a:ext cx="10874959" cy="512064"/>
+            <a:off x="658368" y="2235708"/>
+            <a:ext cx="10874959" cy="534924"/>
           </a:xfrm>
           <a:prstGeom prst="roundRect">
             <a:avLst>
-              <a:gd name="adj" fmla="val 10714"/>
+              <a:gd name="adj" fmla="val 10256"/>
             </a:avLst>
           </a:prstGeom>
           <a:solidFill>
@@ -10801,7 +10972,7 @@
         </p:nvSpPr>
         <p:spPr>
           <a:xfrm>
-            <a:off x="768096" y="2350008"/>
+            <a:off x="768096" y="2327148"/>
             <a:ext cx="384048" cy="256032"/>
           </a:xfrm>
           <a:prstGeom prst="rect">
@@ -10840,8 +11011,8 @@
         </p:nvSpPr>
         <p:spPr>
           <a:xfrm>
-            <a:off x="1225296" y="2331720"/>
-            <a:ext cx="4480560" cy="365760"/>
+            <a:off x="1225296" y="2345436"/>
+            <a:ext cx="3840480" cy="347472"/>
           </a:xfrm>
           <a:prstGeom prst="rect">
             <a:avLst/>
@@ -10882,8 +11053,8 @@
         </p:nvSpPr>
         <p:spPr>
           <a:xfrm>
-            <a:off x="5852160" y="2331720"/>
-            <a:ext cx="5623560" cy="402336"/>
+            <a:off x="5184648" y="2345436"/>
+            <a:ext cx="6263640" cy="347472"/>
           </a:xfrm>
           <a:prstGeom prst="rect">
             <a:avLst/>
@@ -10944,7 +11115,7 @@
                 <a:ea typeface="Arial" pitchFamily="34" charset="-122"/>
                 <a:cs typeface="Arial" pitchFamily="34" charset="-120"/>
               </a:rPr>
-              <a:t> — uma decisão. E quase sempre vem com a regra junto.</a:t>
+              <a:t>. E vem com a regra junto.</a:t>
             </a:r>
             <a:endParaRPr lang="en-US" sz="1150" dirty="0"/>
           </a:p>
@@ -10959,11 +11130,11 @@
         <p:spPr>
           <a:xfrm>
             <a:off x="658368" y="2770632"/>
-            <a:ext cx="10874959" cy="512064"/>
+            <a:ext cx="10874959" cy="534924"/>
           </a:xfrm>
           <a:prstGeom prst="roundRect">
             <a:avLst>
-              <a:gd name="adj" fmla="val 10714"/>
+              <a:gd name="adj" fmla="val 10256"/>
             </a:avLst>
           </a:prstGeom>
           <a:solidFill>
@@ -11024,8 +11195,8 @@
         </p:nvSpPr>
         <p:spPr>
           <a:xfrm>
-            <a:off x="1225296" y="2843784"/>
-            <a:ext cx="4480560" cy="365760"/>
+            <a:off x="1225296" y="2880360"/>
+            <a:ext cx="3840480" cy="347472"/>
           </a:xfrm>
           <a:prstGeom prst="rect">
             <a:avLst/>
@@ -11066,8 +11237,8 @@
         </p:nvSpPr>
         <p:spPr>
           <a:xfrm>
-            <a:off x="5852160" y="2843784"/>
-            <a:ext cx="5623560" cy="402336"/>
+            <a:off x="5184648" y="2880360"/>
+            <a:ext cx="6263640" cy="347472"/>
           </a:xfrm>
           <a:prstGeom prst="rect">
             <a:avLst/>
@@ -11094,7 +11265,7 @@
                 <a:ea typeface="Arial" pitchFamily="34" charset="-122"/>
                 <a:cs typeface="Arial" pitchFamily="34" charset="-120"/>
               </a:rPr>
-              <a:t>Digitação pura. É a </a:t>
+              <a:t>Digitação pura. </a:t>
             </a:r>
             <a:pPr indent="0" marL="0">
               <a:lnSpc>
@@ -11111,24 +11282,7 @@
                 <a:ea typeface="Arial" pitchFamily="34" charset="-122"/>
                 <a:cs typeface="Arial" pitchFamily="34" charset="-120"/>
               </a:rPr>
-              <a:t>primeira caixa que vira script</a:t>
-            </a:r>
-            <a:pPr indent="0" marL="0">
-              <a:lnSpc>
-                <a:spcPts val="1500"/>
-              </a:lnSpc>
-              <a:buNone/>
-            </a:pPr>
-            <a:r>
-              <a:rPr lang="en-US" sz="1150" dirty="0">
-                <a:solidFill>
-                  <a:srgbClr val="4A5578"/>
-                </a:solidFill>
-                <a:latin typeface="Arial" pitchFamily="34" charset="0"/>
-                <a:ea typeface="Arial" pitchFamily="34" charset="-122"/>
-                <a:cs typeface="Arial" pitchFamily="34" charset="-120"/>
-              </a:rPr>
-              <a:t> — sem IA nenhuma.</a:t>
+              <a:t>A primeira caixa que vira script.</a:t>
             </a:r>
             <a:endParaRPr lang="en-US" sz="1150" dirty="0"/>
           </a:p>
@@ -11142,7 +11296,7 @@
         </p:nvSpPr>
         <p:spPr>
           <a:xfrm>
-            <a:off x="658368" y="3282696"/>
+            <a:off x="658368" y="3305556"/>
             <a:ext cx="10874959" cy="9144"/>
           </a:xfrm>
           <a:prstGeom prst="rect">
@@ -11167,7 +11321,7 @@
         </p:nvSpPr>
         <p:spPr>
           <a:xfrm>
-            <a:off x="768096" y="3374136"/>
+            <a:off x="768096" y="3396996"/>
             <a:ext cx="384048" cy="256032"/>
           </a:xfrm>
           <a:prstGeom prst="rect">
@@ -11206,8 +11360,8 @@
         </p:nvSpPr>
         <p:spPr>
           <a:xfrm>
-            <a:off x="1225296" y="3355848"/>
-            <a:ext cx="4480560" cy="365760"/>
+            <a:off x="1225296" y="3415284"/>
+            <a:ext cx="3840480" cy="347472"/>
           </a:xfrm>
           <a:prstGeom prst="rect">
             <a:avLst/>
@@ -11248,8 +11402,8 @@
         </p:nvSpPr>
         <p:spPr>
           <a:xfrm>
-            <a:off x="5852160" y="3355848"/>
-            <a:ext cx="5623560" cy="402336"/>
+            <a:off x="5184648" y="3415284"/>
+            <a:ext cx="6263640" cy="347472"/>
           </a:xfrm>
           <a:prstGeom prst="rect">
             <a:avLst/>
@@ -11276,7 +11430,7 @@
                 <a:ea typeface="Arial" pitchFamily="34" charset="-122"/>
                 <a:cs typeface="Arial" pitchFamily="34" charset="-120"/>
               </a:rPr>
-              <a:t>Se não houver resposta, </a:t>
+              <a:t>Sem resposta aqui, </a:t>
             </a:r>
             <a:pPr indent="0" marL="0">
               <a:lnSpc>
@@ -11310,7 +11464,7 @@
                 <a:ea typeface="Arial" pitchFamily="34" charset="-122"/>
                 <a:cs typeface="Arial" pitchFamily="34" charset="-120"/>
               </a:rPr>
-              <a:t>: você não teria como saber que quebrou.</a:t>
+              <a:t>.</a:t>
             </a:r>
             <a:endParaRPr lang="en-US" sz="1150" dirty="0"/>
           </a:p>
@@ -11324,7 +11478,7 @@
         </p:nvSpPr>
         <p:spPr>
           <a:xfrm>
-            <a:off x="658368" y="3794760"/>
+            <a:off x="658368" y="3840480"/>
             <a:ext cx="10874959" cy="9144"/>
           </a:xfrm>
           <a:prstGeom prst="rect">
@@ -11349,7 +11503,7 @@
         </p:nvSpPr>
         <p:spPr>
           <a:xfrm>
-            <a:off x="768096" y="3886200"/>
+            <a:off x="768096" y="3931920"/>
             <a:ext cx="384048" cy="256032"/>
           </a:xfrm>
           <a:prstGeom prst="rect">
@@ -11388,8 +11542,8 @@
         </p:nvSpPr>
         <p:spPr>
           <a:xfrm>
-            <a:off x="1225296" y="3867912"/>
-            <a:ext cx="4480560" cy="365760"/>
+            <a:off x="1225296" y="3950208"/>
+            <a:ext cx="3840480" cy="347472"/>
           </a:xfrm>
           <a:prstGeom prst="rect">
             <a:avLst/>
@@ -11430,8 +11584,8 @@
         </p:nvSpPr>
         <p:spPr>
           <a:xfrm>
-            <a:off x="5852160" y="3867912"/>
-            <a:ext cx="5623560" cy="402336"/>
+            <a:off x="5184648" y="3950208"/>
+            <a:ext cx="6263640" cy="347472"/>
           </a:xfrm>
           <a:prstGeom prst="rect">
             <a:avLst/>
@@ -11458,7 +11612,7 @@
                 <a:ea typeface="Arial" pitchFamily="34" charset="-122"/>
                 <a:cs typeface="Arial" pitchFamily="34" charset="-120"/>
               </a:rPr>
-              <a:t>As exceções. Anote as frases exatas — viram os </a:t>
+              <a:t>As exceções. Viram os </a:t>
             </a:r>
             <a:pPr indent="0" marL="0">
               <a:lnSpc>
@@ -11506,7 +11660,7 @@
         </p:nvSpPr>
         <p:spPr>
           <a:xfrm>
-            <a:off x="658368" y="4306824"/>
+            <a:off x="658368" y="4375404"/>
             <a:ext cx="10874959" cy="9144"/>
           </a:xfrm>
           <a:prstGeom prst="rect">
@@ -11531,7 +11685,7 @@
         </p:nvSpPr>
         <p:spPr>
           <a:xfrm>
-            <a:off x="768096" y="4398264"/>
+            <a:off x="768096" y="4466844"/>
             <a:ext cx="384048" cy="256032"/>
           </a:xfrm>
           <a:prstGeom prst="rect">
@@ -11570,8 +11724,8 @@
         </p:nvSpPr>
         <p:spPr>
           <a:xfrm>
-            <a:off x="1225296" y="4379976"/>
-            <a:ext cx="4480560" cy="365760"/>
+            <a:off x="1225296" y="4485132"/>
+            <a:ext cx="3840480" cy="347472"/>
           </a:xfrm>
           <a:prstGeom prst="rect">
             <a:avLst/>
@@ -11612,8 +11766,8 @@
         </p:nvSpPr>
         <p:spPr>
           <a:xfrm>
-            <a:off x="5852160" y="4379976"/>
-            <a:ext cx="5623560" cy="402336"/>
+            <a:off x="5184648" y="4485132"/>
+            <a:ext cx="6263640" cy="347472"/>
           </a:xfrm>
           <a:prstGeom prst="rect">
             <a:avLst/>
@@ -11640,7 +11794,7 @@
                 <a:ea typeface="Arial" pitchFamily="34" charset="-122"/>
                 <a:cs typeface="Arial" pitchFamily="34" charset="-120"/>
               </a:rPr>
-              <a:t>Volume. Sem ele não dá pra priorizar: </a:t>
+              <a:t>Frequência. </a:t>
             </a:r>
             <a:pPr indent="0" marL="0">
               <a:lnSpc>
@@ -11657,24 +11811,7 @@
                 <a:ea typeface="Arial" pitchFamily="34" charset="-122"/>
                 <a:cs typeface="Arial" pitchFamily="34" charset="-120"/>
               </a:rPr>
-              <a:t>etapa rara não paga automação</a:t>
-            </a:r>
-            <a:pPr indent="0" marL="0">
-              <a:lnSpc>
-                <a:spcPts val="1500"/>
-              </a:lnSpc>
-              <a:buNone/>
-            </a:pPr>
-            <a:r>
-              <a:rPr lang="en-US" sz="1150" dirty="0">
-                <a:solidFill>
-                  <a:srgbClr val="4A5578"/>
-                </a:solidFill>
-                <a:latin typeface="Arial" pitchFamily="34" charset="0"/>
-                <a:ea typeface="Arial" pitchFamily="34" charset="-122"/>
-                <a:cs typeface="Arial" pitchFamily="34" charset="-120"/>
-              </a:rPr>
-              <a:t>.</a:t>
+              <a:t>Etapa rara não paga automação.</a:t>
             </a:r>
             <a:endParaRPr lang="en-US" sz="1150" dirty="0"/>
           </a:p>
@@ -11688,7 +11825,7 @@
         </p:nvSpPr>
         <p:spPr>
           <a:xfrm>
-            <a:off x="658368" y="4818888"/>
+            <a:off x="658368" y="4910328"/>
             <a:ext cx="10874959" cy="9144"/>
           </a:xfrm>
           <a:prstGeom prst="rect">
@@ -11713,7 +11850,7 @@
         </p:nvSpPr>
         <p:spPr>
           <a:xfrm>
-            <a:off x="768096" y="4910328"/>
+            <a:off x="768096" y="5001768"/>
             <a:ext cx="384048" cy="256032"/>
           </a:xfrm>
           <a:prstGeom prst="rect">
@@ -11752,8 +11889,8 @@
         </p:nvSpPr>
         <p:spPr>
           <a:xfrm>
-            <a:off x="1225296" y="4892040"/>
-            <a:ext cx="4480560" cy="365760"/>
+            <a:off x="1225296" y="5020056"/>
+            <a:ext cx="3840480" cy="347472"/>
           </a:xfrm>
           <a:prstGeom prst="rect">
             <a:avLst/>
@@ -11794,8 +11931,8 @@
         </p:nvSpPr>
         <p:spPr>
           <a:xfrm>
-            <a:off x="5852160" y="4892040"/>
-            <a:ext cx="5623560" cy="402336"/>
+            <a:off x="5184648" y="5020056"/>
+            <a:ext cx="6263640" cy="347472"/>
           </a:xfrm>
           <a:prstGeom prst="rect">
             <a:avLst/>
@@ -11822,7 +11959,7 @@
                 <a:ea typeface="Arial" pitchFamily="34" charset="-122"/>
                 <a:cs typeface="Arial" pitchFamily="34" charset="-120"/>
               </a:rPr>
-              <a:t>Custo do erro. É o número que decide se a etapa </a:t>
+              <a:t>Custo do erro. Decide se a etapa </a:t>
             </a:r>
             <a:pPr indent="0" marL="0">
               <a:lnSpc>
@@ -11870,12 +12007,12 @@
         </p:nvSpPr>
         <p:spPr>
           <a:xfrm>
-            <a:off x="658368" y="5468112"/>
-            <a:ext cx="10874959" cy="822960"/>
+            <a:off x="658368" y="5559552"/>
+            <a:ext cx="10874959" cy="603504"/>
           </a:xfrm>
           <a:prstGeom prst="roundRect">
             <a:avLst>
-              <a:gd name="adj" fmla="val 11111"/>
+              <a:gd name="adj" fmla="val 15152"/>
             </a:avLst>
           </a:prstGeom>
           <a:solidFill>
@@ -11897,8 +12034,8 @@
         </p:nvSpPr>
         <p:spPr>
           <a:xfrm>
-            <a:off x="658368" y="5468112"/>
-            <a:ext cx="45720" cy="822960"/>
+            <a:off x="658368" y="5559552"/>
+            <a:ext cx="45720" cy="603504"/>
           </a:xfrm>
           <a:prstGeom prst="rect">
             <a:avLst/>
@@ -11922,7 +12059,7 @@
         </p:nvSpPr>
         <p:spPr>
           <a:xfrm>
-            <a:off x="914400" y="5559552"/>
+            <a:off x="914400" y="5650992"/>
             <a:ext cx="7315200" cy="201168"/>
           </a:xfrm>
           <a:prstGeom prst="rect">
@@ -11961,8 +12098,8 @@
         </p:nvSpPr>
         <p:spPr>
           <a:xfrm>
-            <a:off x="914400" y="5779008"/>
-            <a:ext cx="10362895" cy="438912"/>
+            <a:off x="914400" y="5870448"/>
+            <a:ext cx="10362895" cy="219456"/>
           </a:xfrm>
           <a:prstGeom prst="rect">
             <a:avLst/>
@@ -12023,7 +12160,7 @@
                 <a:ea typeface="Arial" pitchFamily="34" charset="-122"/>
                 <a:cs typeface="Arial" pitchFamily="34" charset="-120"/>
               </a:rPr>
-              <a:t> te entrega os losangos e a </a:t>
+              <a:t> te entrega os losangos; a </a:t>
             </a:r>
             <a:pPr indent="0" marL="0">
               <a:lnSpc>
@@ -12057,7 +12194,7 @@
                 <a:ea typeface="Arial" pitchFamily="34" charset="-122"/>
                 <a:cs typeface="Arial" pitchFamily="34" charset="-120"/>
               </a:rPr>
-              <a:t> te entrega as caixas que viram script. As outras cinco servem pra você saber se vale a pena mexer. Grave a conversa (com permissão) e desenhe em cima da transcrição — não da memória.</a:t>
+              <a:t>, as caixas que viram script. Grave a conversa e desenhe em cima da transcrição — não da memória.</a:t>
             </a:r>
             <a:endParaRPr lang="en-US" sz="1200" dirty="0"/>
           </a:p>
@@ -14305,12 +14442,12 @@
         </p:nvSpPr>
         <p:spPr>
           <a:xfrm>
-            <a:off x="7056120" y="1773936"/>
-            <a:ext cx="1402080" cy="304800"/>
+            <a:off x="7279767" y="1774393"/>
+            <a:ext cx="1419606" cy="308610"/>
           </a:xfrm>
           <a:prstGeom prst="roundRect">
             <a:avLst>
-              <a:gd name="adj" fmla="val 150000"/>
+              <a:gd name="adj" fmla="val 148148"/>
             </a:avLst>
           </a:prstGeom>
           <a:solidFill>
@@ -14328,12 +14465,12 @@
           <a:p>
             <a:pPr algn="ctr" indent="0" marL="0">
               <a:lnSpc>
-                <a:spcPts val="1080"/>
-              </a:lnSpc>
-              <a:buNone/>
-            </a:pPr>
-            <a:r>
-              <a:rPr lang="en-US" sz="864" b="1" dirty="0">
+                <a:spcPts val="1093"/>
+              </a:lnSpc>
+              <a:buNone/>
+            </a:pPr>
+            <a:r>
+              <a:rPr lang="en-US" sz="875" b="1" dirty="0">
                 <a:solidFill>
                   <a:srgbClr val="6D2077"/>
                 </a:solidFill>
@@ -14343,7 +14480,7 @@
               </a:rPr>
               <a:t>Chamado chega</a:t>
             </a:r>
-            <a:endParaRPr lang="en-US" sz="864" dirty="0"/>
+            <a:endParaRPr lang="en-US" sz="875" dirty="0"/>
           </a:p>
         </p:txBody>
       </p:sp>
@@ -14355,12 +14492,12 @@
         </p:nvSpPr>
         <p:spPr>
           <a:xfrm>
-            <a:off x="7056120" y="2273808"/>
-            <a:ext cx="1402080" cy="316992"/>
+            <a:off x="7279767" y="2280514"/>
+            <a:ext cx="1419606" cy="320954"/>
           </a:xfrm>
           <a:prstGeom prst="roundRect">
             <a:avLst>
-              <a:gd name="adj" fmla="val 25962"/>
+              <a:gd name="adj" fmla="val 25641"/>
             </a:avLst>
           </a:prstGeom>
           <a:solidFill>
@@ -14378,12 +14515,12 @@
           <a:p>
             <a:pPr algn="ctr" indent="0" marL="0">
               <a:lnSpc>
-                <a:spcPts val="1140"/>
-              </a:lnSpc>
-              <a:buNone/>
-            </a:pPr>
-            <a:r>
-              <a:rPr lang="en-US" sz="912" dirty="0">
+                <a:spcPts val="1154"/>
+              </a:lnSpc>
+              <a:buNone/>
+            </a:pPr>
+            <a:r>
+              <a:rPr lang="en-US" sz="923" dirty="0">
                 <a:solidFill>
                   <a:srgbClr val="16224E"/>
                 </a:solidFill>
@@ -14393,7 +14530,7 @@
               </a:rPr>
               <a:t>Registrar chamado</a:t>
             </a:r>
-            <a:endParaRPr lang="en-US" sz="912" dirty="0"/>
+            <a:endParaRPr lang="en-US" sz="923" dirty="0"/>
           </a:p>
         </p:txBody>
       </p:sp>
@@ -14405,12 +14542,12 @@
         </p:nvSpPr>
         <p:spPr>
           <a:xfrm>
-            <a:off x="7056120" y="2785872"/>
-            <a:ext cx="1402080" cy="316992"/>
+            <a:off x="7279767" y="2798978"/>
+            <a:ext cx="1419606" cy="320954"/>
           </a:xfrm>
           <a:prstGeom prst="roundRect">
             <a:avLst>
-              <a:gd name="adj" fmla="val 25962"/>
+              <a:gd name="adj" fmla="val 25641"/>
             </a:avLst>
           </a:prstGeom>
           <a:solidFill>
@@ -14428,12 +14565,12 @@
           <a:p>
             <a:pPr algn="ctr" indent="0" marL="0">
               <a:lnSpc>
-                <a:spcPts val="1140"/>
-              </a:lnSpc>
-              <a:buNone/>
-            </a:pPr>
-            <a:r>
-              <a:rPr lang="en-US" sz="912" dirty="0">
+                <a:spcPts val="1154"/>
+              </a:lnSpc>
+              <a:buNone/>
+            </a:pPr>
+            <a:r>
+              <a:rPr lang="en-US" sz="923" dirty="0">
                 <a:solidFill>
                   <a:srgbClr val="16224E"/>
                 </a:solidFill>
@@ -14443,7 +14580,7 @@
               </a:rPr>
               <a:t>Classificar assunto</a:t>
             </a:r>
-            <a:endParaRPr lang="en-US" sz="912" dirty="0"/>
+            <a:endParaRPr lang="en-US" sz="923" dirty="0"/>
           </a:p>
         </p:txBody>
       </p:sp>
@@ -14455,12 +14592,12 @@
         </p:nvSpPr>
         <p:spPr>
           <a:xfrm>
-            <a:off x="7056120" y="3297936"/>
-            <a:ext cx="1402080" cy="316992"/>
+            <a:off x="7279767" y="3317443"/>
+            <a:ext cx="1419606" cy="320954"/>
           </a:xfrm>
           <a:prstGeom prst="roundRect">
             <a:avLst>
-              <a:gd name="adj" fmla="val 25962"/>
+              <a:gd name="adj" fmla="val 25641"/>
             </a:avLst>
           </a:prstGeom>
           <a:solidFill>
@@ -14478,12 +14615,12 @@
           <a:p>
             <a:pPr algn="ctr" indent="0" marL="0">
               <a:lnSpc>
-                <a:spcPts val="1140"/>
-              </a:lnSpc>
-              <a:buNone/>
-            </a:pPr>
-            <a:r>
-              <a:rPr lang="en-US" sz="912" dirty="0">
+                <a:spcPts val="1154"/>
+              </a:lnSpc>
+              <a:buNone/>
+            </a:pPr>
+            <a:r>
+              <a:rPr lang="en-US" sz="923" dirty="0">
                 <a:solidFill>
                   <a:srgbClr val="16224E"/>
                 </a:solidFill>
@@ -14493,7 +14630,7 @@
               </a:rPr>
               <a:t>Redigir resposta</a:t>
             </a:r>
-            <a:endParaRPr lang="en-US" sz="912" dirty="0"/>
+            <a:endParaRPr lang="en-US" sz="923" dirty="0"/>
           </a:p>
         </p:txBody>
       </p:sp>
@@ -14505,8 +14642,8 @@
         </p:nvSpPr>
         <p:spPr>
           <a:xfrm>
-            <a:off x="7056120" y="3834384"/>
-            <a:ext cx="1402080" cy="585216"/>
+            <a:off x="7279767" y="3860597"/>
+            <a:ext cx="1419606" cy="592531"/>
           </a:xfrm>
           <a:prstGeom prst="diamond">
             <a:avLst/>
@@ -14526,12 +14663,12 @@
           <a:p>
             <a:pPr algn="ctr" indent="0" marL="0">
               <a:lnSpc>
-                <a:spcPts val="1020"/>
-              </a:lnSpc>
-              <a:buNone/>
-            </a:pPr>
-            <a:r>
-              <a:rPr lang="en-US" sz="816" dirty="0">
+                <a:spcPts val="1033"/>
+              </a:lnSpc>
+              <a:buNone/>
+            </a:pPr>
+            <a:r>
+              <a:rPr lang="en-US" sz="826" dirty="0">
                 <a:solidFill>
                   <a:srgbClr val="16224E"/>
                 </a:solidFill>
@@ -14541,17 +14678,17 @@
               </a:rPr>
               <a:t>Desconto</a:t>
             </a:r>
-            <a:endParaRPr lang="en-US" sz="816" dirty="0"/>
+            <a:endParaRPr lang="en-US" sz="826" dirty="0"/>
           </a:p>
           <a:p>
             <a:pPr algn="ctr" indent="0" marL="0">
               <a:lnSpc>
-                <a:spcPts val="1020"/>
-              </a:lnSpc>
-              <a:buNone/>
-            </a:pPr>
-            <a:r>
-              <a:rPr lang="en-US" sz="816" dirty="0">
+                <a:spcPts val="1033"/>
+              </a:lnSpc>
+              <a:buNone/>
+            </a:pPr>
+            <a:r>
+              <a:rPr lang="en-US" sz="826" dirty="0">
                 <a:solidFill>
                   <a:srgbClr val="16224E"/>
                 </a:solidFill>
@@ -14561,7 +14698,7 @@
               </a:rPr>
               <a:t>acima de 10%?</a:t>
             </a:r>
-            <a:endParaRPr lang="en-US" sz="816" dirty="0"/>
+            <a:endParaRPr lang="en-US" sz="826" dirty="0"/>
           </a:p>
         </p:txBody>
       </p:sp>
@@ -14573,12 +14710,12 @@
         </p:nvSpPr>
         <p:spPr>
           <a:xfrm>
-            <a:off x="8763000" y="3968496"/>
-            <a:ext cx="1280160" cy="316992"/>
+            <a:off x="9007983" y="3996385"/>
+            <a:ext cx="1296162" cy="320954"/>
           </a:xfrm>
           <a:prstGeom prst="roundRect">
             <a:avLst>
-              <a:gd name="adj" fmla="val 25962"/>
+              <a:gd name="adj" fmla="val 25641"/>
             </a:avLst>
           </a:prstGeom>
           <a:solidFill>
@@ -14596,12 +14733,12 @@
           <a:p>
             <a:pPr algn="ctr" indent="0" marL="0">
               <a:lnSpc>
-                <a:spcPts val="1140"/>
-              </a:lnSpc>
-              <a:buNone/>
-            </a:pPr>
-            <a:r>
-              <a:rPr lang="en-US" sz="912" dirty="0">
+                <a:spcPts val="1154"/>
+              </a:lnSpc>
+              <a:buNone/>
+            </a:pPr>
+            <a:r>
+              <a:rPr lang="en-US" sz="923" dirty="0">
                 <a:solidFill>
                   <a:srgbClr val="16224E"/>
                 </a:solidFill>
@@ -14611,7 +14748,7 @@
               </a:rPr>
               <a:t>Gestor aprova</a:t>
             </a:r>
-            <a:endParaRPr lang="en-US" sz="912" dirty="0"/>
+            <a:endParaRPr lang="en-US" sz="923" dirty="0"/>
           </a:p>
         </p:txBody>
       </p:sp>
@@ -14623,12 +14760,12 @@
         </p:nvSpPr>
         <p:spPr>
           <a:xfrm>
-            <a:off x="7056120" y="4626864"/>
-            <a:ext cx="1402080" cy="316992"/>
+            <a:off x="7279767" y="4662983"/>
+            <a:ext cx="1419606" cy="320954"/>
           </a:xfrm>
           <a:prstGeom prst="roundRect">
             <a:avLst>
-              <a:gd name="adj" fmla="val 25962"/>
+              <a:gd name="adj" fmla="val 25641"/>
             </a:avLst>
           </a:prstGeom>
           <a:solidFill>
@@ -14646,12 +14783,12 @@
           <a:p>
             <a:pPr algn="ctr" indent="0" marL="0">
               <a:lnSpc>
-                <a:spcPts val="1140"/>
-              </a:lnSpc>
-              <a:buNone/>
-            </a:pPr>
-            <a:r>
-              <a:rPr lang="en-US" sz="912" dirty="0">
+                <a:spcPts val="1154"/>
+              </a:lnSpc>
+              <a:buNone/>
+            </a:pPr>
+            <a:r>
+              <a:rPr lang="en-US" sz="923" dirty="0">
                 <a:solidFill>
                   <a:srgbClr val="16224E"/>
                 </a:solidFill>
@@ -14661,7 +14798,7 @@
               </a:rPr>
               <a:t>Enviar resposta</a:t>
             </a:r>
-            <a:endParaRPr lang="en-US" sz="912" dirty="0"/>
+            <a:endParaRPr lang="en-US" sz="923" dirty="0"/>
           </a:p>
         </p:txBody>
       </p:sp>
@@ -14673,12 +14810,12 @@
         </p:nvSpPr>
         <p:spPr>
           <a:xfrm>
-            <a:off x="9555480" y="4626864"/>
-            <a:ext cx="609600" cy="316992"/>
+            <a:off x="9810369" y="4662983"/>
+            <a:ext cx="617220" cy="320954"/>
           </a:xfrm>
           <a:prstGeom prst="roundRect">
             <a:avLst>
-              <a:gd name="adj" fmla="val 144231"/>
+              <a:gd name="adj" fmla="val 142450"/>
             </a:avLst>
           </a:prstGeom>
           <a:solidFill>
@@ -14696,12 +14833,12 @@
           <a:p>
             <a:pPr algn="ctr" indent="0" marL="0">
               <a:lnSpc>
-                <a:spcPts val="1080"/>
-              </a:lnSpc>
-              <a:buNone/>
-            </a:pPr>
-            <a:r>
-              <a:rPr lang="en-US" sz="864" b="1" dirty="0">
+                <a:spcPts val="1093"/>
+              </a:lnSpc>
+              <a:buNone/>
+            </a:pPr>
+            <a:r>
+              <a:rPr lang="en-US" sz="875" b="1" dirty="0">
                 <a:solidFill>
                   <a:srgbClr val="6D2077"/>
                 </a:solidFill>
@@ -14711,7 +14848,7 @@
               </a:rPr>
               <a:t>Fim</a:t>
             </a:r>
-            <a:endParaRPr lang="en-US" sz="864" dirty="0"/>
+            <a:endParaRPr lang="en-US" sz="875" dirty="0"/>
           </a:p>
         </p:txBody>
       </p:sp>
@@ -14723,8 +14860,8 @@
         </p:nvSpPr>
         <p:spPr>
           <a:xfrm>
-            <a:off x="7757160" y="2078736"/>
-            <a:ext cx="0" cy="158496"/>
+            <a:off x="7989570" y="2083003"/>
+            <a:ext cx="0" cy="160477"/>
           </a:xfrm>
           <a:prstGeom prst="line">
             <a:avLst/>
@@ -14747,8 +14884,8 @@
         </p:nvSpPr>
         <p:spPr>
           <a:xfrm>
-            <a:off x="7757160" y="2590800"/>
-            <a:ext cx="0" cy="158496"/>
+            <a:off x="7989570" y="2601468"/>
+            <a:ext cx="0" cy="160477"/>
           </a:xfrm>
           <a:prstGeom prst="line">
             <a:avLst/>
@@ -14771,8 +14908,8 @@
         </p:nvSpPr>
         <p:spPr>
           <a:xfrm>
-            <a:off x="7757160" y="3102864"/>
-            <a:ext cx="0" cy="158496"/>
+            <a:off x="7989570" y="3119933"/>
+            <a:ext cx="0" cy="160477"/>
           </a:xfrm>
           <a:prstGeom prst="line">
             <a:avLst/>
@@ -14795,8 +14932,8 @@
         </p:nvSpPr>
         <p:spPr>
           <a:xfrm>
-            <a:off x="7757160" y="3614928"/>
-            <a:ext cx="0" cy="182880"/>
+            <a:off x="7989570" y="3638398"/>
+            <a:ext cx="0" cy="185166"/>
           </a:xfrm>
           <a:prstGeom prst="line">
             <a:avLst/>
@@ -14819,8 +14956,8 @@
         </p:nvSpPr>
         <p:spPr>
           <a:xfrm>
-            <a:off x="8458200" y="4126992"/>
-            <a:ext cx="268224" cy="0"/>
+            <a:off x="8699373" y="4156862"/>
+            <a:ext cx="271577" cy="0"/>
           </a:xfrm>
           <a:prstGeom prst="line">
             <a:avLst/>
@@ -14843,8 +14980,8 @@
         </p:nvSpPr>
         <p:spPr>
           <a:xfrm>
-            <a:off x="7757160" y="4419600"/>
-            <a:ext cx="0" cy="170688"/>
+            <a:off x="7989570" y="4453128"/>
+            <a:ext cx="0" cy="172822"/>
           </a:xfrm>
           <a:prstGeom prst="line">
             <a:avLst/>
@@ -14867,8 +15004,8 @@
         </p:nvSpPr>
         <p:spPr>
           <a:xfrm>
-            <a:off x="9403080" y="4285488"/>
-            <a:ext cx="0" cy="195072"/>
+            <a:off x="9656064" y="4317340"/>
+            <a:ext cx="0" cy="197510"/>
           </a:xfrm>
           <a:prstGeom prst="line">
             <a:avLst/>
@@ -14890,8 +15027,8 @@
         </p:nvSpPr>
         <p:spPr>
           <a:xfrm flipH="1">
-            <a:off x="8153400" y="4480560"/>
-            <a:ext cx="1249680" cy="0"/>
+            <a:off x="8390763" y="4514850"/>
+            <a:ext cx="1265301" cy="0"/>
           </a:xfrm>
           <a:prstGeom prst="line">
             <a:avLst/>
@@ -14913,8 +15050,8 @@
         </p:nvSpPr>
         <p:spPr>
           <a:xfrm>
-            <a:off x="8153400" y="4480560"/>
-            <a:ext cx="0" cy="109728"/>
+            <a:off x="8390763" y="4514850"/>
+            <a:ext cx="0" cy="111100"/>
           </a:xfrm>
           <a:prstGeom prst="line">
             <a:avLst/>
@@ -14937,8 +15074,8 @@
         </p:nvSpPr>
         <p:spPr>
           <a:xfrm>
-            <a:off x="8458200" y="4785360"/>
-            <a:ext cx="1060704" cy="0"/>
+            <a:off x="8699373" y="4823460"/>
+            <a:ext cx="1073963" cy="0"/>
           </a:xfrm>
           <a:prstGeom prst="line">
             <a:avLst/>
@@ -14961,8 +15098,8 @@
         </p:nvSpPr>
         <p:spPr>
           <a:xfrm>
-            <a:off x="8506968" y="3962400"/>
-            <a:ext cx="243840" cy="134112"/>
+            <a:off x="8748751" y="3990213"/>
+            <a:ext cx="246888" cy="135788"/>
           </a:xfrm>
           <a:prstGeom prst="rect">
             <a:avLst/>
@@ -14976,12 +15113,12 @@
           <a:p>
             <a:pPr algn="l" indent="0" marL="0">
               <a:lnSpc>
-                <a:spcPts val="936"/>
-              </a:lnSpc>
-              <a:buNone/>
-            </a:pPr>
-            <a:r>
-              <a:rPr lang="en-US" sz="720" b="1" dirty="0">
+                <a:spcPts val="948"/>
+              </a:lnSpc>
+              <a:buNone/>
+            </a:pPr>
+            <a:r>
+              <a:rPr lang="en-US" sz="729" b="1" dirty="0">
                 <a:solidFill>
                   <a:srgbClr val="6E6684"/>
                 </a:solidFill>
@@ -14991,7 +15128,7 @@
               </a:rPr>
               <a:t>sim</a:t>
             </a:r>
-            <a:endParaRPr lang="en-US" sz="720" dirty="0"/>
+            <a:endParaRPr lang="en-US" sz="729" dirty="0"/>
           </a:p>
         </p:txBody>
       </p:sp>
@@ -15003,8 +15140,8 @@
         </p:nvSpPr>
         <p:spPr>
           <a:xfrm>
-            <a:off x="7824216" y="4437888"/>
-            <a:ext cx="243840" cy="134112"/>
+            <a:off x="8057464" y="4471645"/>
+            <a:ext cx="246888" cy="135788"/>
           </a:xfrm>
           <a:prstGeom prst="rect">
             <a:avLst/>
@@ -15018,12 +15155,12 @@
           <a:p>
             <a:pPr algn="l" indent="0" marL="0">
               <a:lnSpc>
-                <a:spcPts val="936"/>
-              </a:lnSpc>
-              <a:buNone/>
-            </a:pPr>
-            <a:r>
-              <a:rPr lang="en-US" sz="720" b="1" dirty="0">
+                <a:spcPts val="948"/>
+              </a:lnSpc>
+              <a:buNone/>
+            </a:pPr>
+            <a:r>
+              <a:rPr lang="en-US" sz="729" b="1" dirty="0">
                 <a:solidFill>
                   <a:srgbClr val="6E6684"/>
                 </a:solidFill>
@@ -15033,7 +15170,7 @@
               </a:rPr>
               <a:t>não</a:t>
             </a:r>
-            <a:endParaRPr lang="en-US" sz="720" dirty="0"/>
+            <a:endParaRPr lang="en-US" sz="729" dirty="0"/>
           </a:p>
         </p:txBody>
       </p:sp>
@@ -15045,8 +15182,8 @@
         </p:nvSpPr>
         <p:spPr>
           <a:xfrm>
-            <a:off x="7056120" y="5065776"/>
-            <a:ext cx="2011680" cy="134112"/>
+            <a:off x="7279767" y="5107381"/>
+            <a:ext cx="2036826" cy="135788"/>
           </a:xfrm>
           <a:prstGeom prst="rect">
             <a:avLst/>
@@ -15060,12 +15197,12 @@
           <a:p>
             <a:pPr algn="l" indent="0" marL="0">
               <a:lnSpc>
-                <a:spcPts val="998"/>
-              </a:lnSpc>
-              <a:buNone/>
-            </a:pPr>
-            <a:r>
-              <a:rPr lang="en-US" sz="768" b="1" dirty="0">
+                <a:spcPts val="1011"/>
+              </a:lnSpc>
+              <a:buNone/>
+            </a:pPr>
+            <a:r>
+              <a:rPr lang="en-US" sz="778" b="1" dirty="0">
                 <a:solidFill>
                   <a:srgbClr val="E80070"/>
                 </a:solidFill>
@@ -15075,7 +15212,7 @@
               </a:rPr>
               <a:t>A REGRA DO LOSANGO, ESCRITA:</a:t>
             </a:r>
-            <a:endParaRPr lang="en-US" sz="768" dirty="0"/>
+            <a:endParaRPr lang="en-US" sz="778" dirty="0"/>
           </a:p>
         </p:txBody>
       </p:sp>
@@ -15087,8 +15224,8 @@
         </p:nvSpPr>
         <p:spPr>
           <a:xfrm>
-            <a:off x="7056120" y="5212080"/>
-            <a:ext cx="2316480" cy="134112"/>
+            <a:off x="7279767" y="5255514"/>
+            <a:ext cx="2345436" cy="135788"/>
           </a:xfrm>
           <a:prstGeom prst="rect">
             <a:avLst/>
@@ -15102,12 +15239,12 @@
           <a:p>
             <a:pPr algn="l" indent="0" marL="0">
               <a:lnSpc>
-                <a:spcPts val="1061"/>
-              </a:lnSpc>
-              <a:buNone/>
-            </a:pPr>
-            <a:r>
-              <a:rPr lang="en-US" sz="816" dirty="0">
+                <a:spcPts val="1074"/>
+              </a:lnSpc>
+              <a:buNone/>
+            </a:pPr>
+            <a:r>
+              <a:rPr lang="en-US" sz="826" dirty="0">
                 <a:solidFill>
                   <a:srgbClr val="4A5578"/>
                 </a:solidFill>
@@ -15117,7 +15254,7 @@
               </a:rPr>
               <a:t>desconto &gt; 10% ou exceção contratual</a:t>
             </a:r>
-            <a:endParaRPr lang="en-US" sz="816" dirty="0"/>
+            <a:endParaRPr lang="en-US" sz="826" dirty="0"/>
           </a:p>
         </p:txBody>
       </p:sp>
@@ -15129,12 +15266,12 @@
         </p:nvSpPr>
         <p:spPr>
           <a:xfrm>
-            <a:off x="658368" y="5504688"/>
-            <a:ext cx="10874959" cy="768096"/>
+            <a:off x="658368" y="5614416"/>
+            <a:ext cx="10874959" cy="530352"/>
           </a:xfrm>
           <a:prstGeom prst="roundRect">
             <a:avLst>
-              <a:gd name="adj" fmla="val 11905"/>
+              <a:gd name="adj" fmla="val 17241"/>
             </a:avLst>
           </a:prstGeom>
           <a:solidFill>
@@ -15156,8 +15293,8 @@
         </p:nvSpPr>
         <p:spPr>
           <a:xfrm>
-            <a:off x="658368" y="5504688"/>
-            <a:ext cx="45720" cy="768096"/>
+            <a:off x="658368" y="5614416"/>
+            <a:ext cx="45720" cy="530352"/>
           </a:xfrm>
           <a:prstGeom prst="rect">
             <a:avLst/>
@@ -15181,8 +15318,8 @@
         </p:nvSpPr>
         <p:spPr>
           <a:xfrm>
-            <a:off x="914400" y="5596128"/>
-            <a:ext cx="7315200" cy="201168"/>
+            <a:off x="914400" y="5742432"/>
+            <a:ext cx="10362895" cy="274320"/>
           </a:xfrm>
           <a:prstGeom prst="rect">
             <a:avLst/>
@@ -15195,136 +15332,97 @@
           <a:lstStyle/>
           <a:p>
             <a:pPr indent="0" marL="0">
-              <a:buNone/>
-            </a:pPr>
-            <a:r>
-              <a:rPr lang="en-US" sz="950" b="1" spc="180" kern="0" dirty="0">
-                <a:solidFill>
-                  <a:srgbClr val="E80070"/>
-                </a:solidFill>
-                <a:latin typeface="Arial" pitchFamily="34" charset="0"/>
-                <a:ea typeface="Arial" pitchFamily="34" charset="-122"/>
-                <a:cs typeface="Arial" pitchFamily="34" charset="-120"/>
-              </a:rPr>
-              <a:t>O QUE ACABOU DE ACONTECER</a:t>
-            </a:r>
-            <a:endParaRPr lang="en-US" sz="950" dirty="0"/>
+              <a:lnSpc>
+                <a:spcPts val="1600"/>
+              </a:lnSpc>
+              <a:buNone/>
+            </a:pPr>
+            <a:r>
+              <a:rPr lang="en-US" sz="1200" dirty="0">
+                <a:solidFill>
+                  <a:srgbClr val="16224E"/>
+                </a:solidFill>
+                <a:latin typeface="Arial" pitchFamily="34" charset="0"/>
+                <a:ea typeface="Arial" pitchFamily="34" charset="-122"/>
+                <a:cs typeface="Arial" pitchFamily="34" charset="-120"/>
+              </a:rPr>
+              <a:t>A quinta frase entregou </a:t>
+            </a:r>
+            <a:pPr indent="0" marL="0">
+              <a:lnSpc>
+                <a:spcPts val="1600"/>
+              </a:lnSpc>
+              <a:buNone/>
+            </a:pPr>
+            <a:r>
+              <a:rPr lang="en-US" sz="1200" b="1" dirty="0">
+                <a:solidFill>
+                  <a:srgbClr val="16224E"/>
+                </a:solidFill>
+                <a:latin typeface="Arial" pitchFamily="34" charset="0"/>
+                <a:ea typeface="Arial" pitchFamily="34" charset="-122"/>
+                <a:cs typeface="Arial" pitchFamily="34" charset="-120"/>
+              </a:rPr>
+              <a:t>o losango e a regra na mesma respiração</a:t>
+            </a:r>
+            <a:pPr indent="0" marL="0">
+              <a:lnSpc>
+                <a:spcPts val="1600"/>
+              </a:lnSpc>
+              <a:buNone/>
+            </a:pPr>
+            <a:r>
+              <a:rPr lang="en-US" sz="1200" dirty="0">
+                <a:solidFill>
+                  <a:srgbClr val="16224E"/>
+                </a:solidFill>
+                <a:latin typeface="Arial" pitchFamily="34" charset="0"/>
+                <a:ea typeface="Arial" pitchFamily="34" charset="-122"/>
+                <a:cs typeface="Arial" pitchFamily="34" charset="-120"/>
+              </a:rPr>
+              <a:t>. E repare: até aqui </a:t>
+            </a:r>
+            <a:pPr indent="0" marL="0">
+              <a:lnSpc>
+                <a:spcPts val="1600"/>
+              </a:lnSpc>
+              <a:buNone/>
+            </a:pPr>
+            <a:r>
+              <a:rPr lang="en-US" sz="1200" b="1" dirty="0">
+                <a:solidFill>
+                  <a:srgbClr val="16224E"/>
+                </a:solidFill>
+                <a:latin typeface="Arial" pitchFamily="34" charset="0"/>
+                <a:ea typeface="Arial" pitchFamily="34" charset="-122"/>
+                <a:cs typeface="Arial" pitchFamily="34" charset="-120"/>
+              </a:rPr>
+              <a:t>nada foi dito sobre IA</a:t>
+            </a:r>
+            <a:pPr indent="0" marL="0">
+              <a:lnSpc>
+                <a:spcPts val="1600"/>
+              </a:lnSpc>
+              <a:buNone/>
+            </a:pPr>
+            <a:r>
+              <a:rPr lang="en-US" sz="1200" dirty="0">
+                <a:solidFill>
+                  <a:srgbClr val="16224E"/>
+                </a:solidFill>
+                <a:latin typeface="Arial" pitchFamily="34" charset="0"/>
+                <a:ea typeface="Arial" pitchFamily="34" charset="-122"/>
+                <a:cs typeface="Arial" pitchFamily="34" charset="-120"/>
+              </a:rPr>
+              <a:t>.</a:t>
+            </a:r>
+            <a:endParaRPr lang="en-US" sz="1200" dirty="0"/>
           </a:p>
         </p:txBody>
       </p:sp>
       <p:sp>
         <p:nvSpPr>
           <p:cNvPr id="50" name="Text 48"/>
-          <p:cNvSpPr/>
-          <p:nvPr/>
-        </p:nvSpPr>
-        <p:spPr>
-          <a:xfrm>
-            <a:off x="914400" y="5815584"/>
-            <a:ext cx="10362895" cy="384048"/>
-          </a:xfrm>
-          <a:prstGeom prst="rect">
-            <a:avLst/>
-          </a:prstGeom>
-          <a:noFill/>
-          <a:ln/>
-        </p:spPr>
-        <p:txBody>
-          <a:bodyPr wrap="square" lIns="0" tIns="0" rIns="0" bIns="0" rtlCol="0" anchor="t"/>
-          <a:lstStyle/>
-          <a:p>
-            <a:pPr indent="0" marL="0">
-              <a:lnSpc>
-                <a:spcPts val="1600"/>
-              </a:lnSpc>
-              <a:buNone/>
-            </a:pPr>
-            <a:r>
-              <a:rPr lang="en-US" sz="1200" dirty="0">
-                <a:solidFill>
-                  <a:srgbClr val="16224E"/>
-                </a:solidFill>
-                <a:latin typeface="Arial" pitchFamily="34" charset="0"/>
-                <a:ea typeface="Arial" pitchFamily="34" charset="-122"/>
-                <a:cs typeface="Arial" pitchFamily="34" charset="-120"/>
-              </a:rPr>
-              <a:t>A quinta frase entregou </a:t>
-            </a:r>
-            <a:pPr indent="0" marL="0">
-              <a:lnSpc>
-                <a:spcPts val="1600"/>
-              </a:lnSpc>
-              <a:buNone/>
-            </a:pPr>
-            <a:r>
-              <a:rPr lang="en-US" sz="1200" b="1" dirty="0">
-                <a:solidFill>
-                  <a:srgbClr val="16224E"/>
-                </a:solidFill>
-                <a:latin typeface="Arial" pitchFamily="34" charset="0"/>
-                <a:ea typeface="Arial" pitchFamily="34" charset="-122"/>
-                <a:cs typeface="Arial" pitchFamily="34" charset="-120"/>
-              </a:rPr>
-              <a:t>o losango e a regra na mesma respiração</a:t>
-            </a:r>
-            <a:pPr indent="0" marL="0">
-              <a:lnSpc>
-                <a:spcPts val="1600"/>
-              </a:lnSpc>
-              <a:buNone/>
-            </a:pPr>
-            <a:r>
-              <a:rPr lang="en-US" sz="1200" dirty="0">
-                <a:solidFill>
-                  <a:srgbClr val="16224E"/>
-                </a:solidFill>
-                <a:latin typeface="Arial" pitchFamily="34" charset="0"/>
-                <a:ea typeface="Arial" pitchFamily="34" charset="-122"/>
-                <a:cs typeface="Arial" pitchFamily="34" charset="-120"/>
-              </a:rPr>
-              <a:t> — é por isso que a pergunta 2 vale por três. E repare: até aqui </a:t>
-            </a:r>
-            <a:pPr indent="0" marL="0">
-              <a:lnSpc>
-                <a:spcPts val="1600"/>
-              </a:lnSpc>
-              <a:buNone/>
-            </a:pPr>
-            <a:r>
-              <a:rPr lang="en-US" sz="1200" b="1" dirty="0">
-                <a:solidFill>
-                  <a:srgbClr val="16224E"/>
-                </a:solidFill>
-                <a:latin typeface="Arial" pitchFamily="34" charset="0"/>
-                <a:ea typeface="Arial" pitchFamily="34" charset="-122"/>
-                <a:cs typeface="Arial" pitchFamily="34" charset="-120"/>
-              </a:rPr>
-              <a:t>nada foi dito sobre IA</a:t>
-            </a:r>
-            <a:pPr indent="0" marL="0">
-              <a:lnSpc>
-                <a:spcPts val="1600"/>
-              </a:lnSpc>
-              <a:buNone/>
-            </a:pPr>
-            <a:r>
-              <a:rPr lang="en-US" sz="1200" dirty="0">
-                <a:solidFill>
-                  <a:srgbClr val="16224E"/>
-                </a:solidFill>
-                <a:latin typeface="Arial" pitchFamily="34" charset="0"/>
-                <a:ea typeface="Arial" pitchFamily="34" charset="-122"/>
-                <a:cs typeface="Arial" pitchFamily="34" charset="-120"/>
-              </a:rPr>
-              <a:t>. Quem não consegue fechar as setas descobriu que tem dois processos, não um.</a:t>
-            </a:r>
-            <a:endParaRPr lang="en-US" sz="1200" dirty="0"/>
-          </a:p>
-        </p:txBody>
-      </p:sp>
-      <p:sp>
-        <p:nvSpPr>
-          <p:cNvPr id="51" name="Text 49"/>
           <p:cNvSpPr/>
           <p:nvPr/>
         </p:nvSpPr>
@@ -15363,7 +15461,7 @@
       </p:sp>
       <p:sp>
         <p:nvSpPr>
-          <p:cNvPr id="52" name="Text 50"/>
+          <p:cNvPr id="51" name="Text 49"/>
           <p:cNvSpPr/>
           <p:nvPr/>
         </p:nvSpPr>
@@ -15986,7 +16084,7 @@
                 <a:ea typeface="Courier New" pitchFamily="34" charset="-122"/>
                 <a:cs typeface="Courier New" pitchFamily="34" charset="-120"/>
               </a:rPr>
-              <a:t>Classificar 12 mil chamados/mês · extrair campo de documento · redigir a primeira versão da resposta</a:t>
+              <a:t>Classificar todo chamado que entra · extrair campo de documento · redigir a primeira versão da resposta</a:t>
             </a:r>
             <a:endParaRPr lang="en-US" sz="1050" dirty="0"/>
           </a:p>
@@ -18363,7 +18461,7 @@
         </p:nvSpPr>
         <p:spPr>
           <a:xfrm>
-            <a:off x="1199789" y="1917834"/>
+            <a:off x="1146850" y="1917834"/>
             <a:ext cx="1660358" cy="360947"/>
           </a:xfrm>
           <a:prstGeom prst="roundRect">
@@ -18413,7 +18511,7 @@
         </p:nvSpPr>
         <p:spPr>
           <a:xfrm>
-            <a:off x="1199789" y="2509787"/>
+            <a:off x="1146850" y="2509787"/>
             <a:ext cx="1660358" cy="375385"/>
           </a:xfrm>
           <a:prstGeom prst="roundRect">
@@ -18463,7 +18561,7 @@
         </p:nvSpPr>
         <p:spPr>
           <a:xfrm>
-            <a:off x="1199789" y="3116179"/>
+            <a:off x="1146850" y="3116179"/>
             <a:ext cx="1660358" cy="375385"/>
           </a:xfrm>
           <a:prstGeom prst="roundRect">
@@ -18513,7 +18611,7 @@
         </p:nvSpPr>
         <p:spPr>
           <a:xfrm>
-            <a:off x="1199789" y="3722571"/>
+            <a:off x="1146850" y="3722571"/>
             <a:ext cx="1660358" cy="375385"/>
           </a:xfrm>
           <a:prstGeom prst="roundRect">
@@ -18563,7 +18661,7 @@
         </p:nvSpPr>
         <p:spPr>
           <a:xfrm>
-            <a:off x="1199789" y="4357838"/>
+            <a:off x="1146850" y="4357838"/>
             <a:ext cx="1660358" cy="693019"/>
           </a:xfrm>
           <a:prstGeom prst="diamond">
@@ -18631,7 +18729,7 @@
         </p:nvSpPr>
         <p:spPr>
           <a:xfrm>
-            <a:off x="3221094" y="4516655"/>
+            <a:off x="3168155" y="4516655"/>
             <a:ext cx="1515979" cy="375385"/>
           </a:xfrm>
           <a:prstGeom prst="roundRect">
@@ -18681,7 +18779,7 @@
         </p:nvSpPr>
         <p:spPr>
           <a:xfrm>
-            <a:off x="1199789" y="5296301"/>
+            <a:off x="1146850" y="5296301"/>
             <a:ext cx="1660358" cy="375385"/>
           </a:xfrm>
           <a:prstGeom prst="roundRect">
@@ -18731,7 +18829,7 @@
         </p:nvSpPr>
         <p:spPr>
           <a:xfrm>
-            <a:off x="4159557" y="5296301"/>
+            <a:off x="4106619" y="5296301"/>
             <a:ext cx="721895" cy="375385"/>
           </a:xfrm>
           <a:prstGeom prst="roundRect">
@@ -18781,7 +18879,7 @@
         </p:nvSpPr>
         <p:spPr>
           <a:xfrm>
-            <a:off x="2029968" y="2278781"/>
+            <a:off x="1977029" y="2278781"/>
             <a:ext cx="0" cy="187693"/>
           </a:xfrm>
           <a:prstGeom prst="line">
@@ -18805,7 +18903,7 @@
         </p:nvSpPr>
         <p:spPr>
           <a:xfrm>
-            <a:off x="2029968" y="2885173"/>
+            <a:off x="1977029" y="2885173"/>
             <a:ext cx="0" cy="187693"/>
           </a:xfrm>
           <a:prstGeom prst="line">
@@ -18829,7 +18927,7 @@
         </p:nvSpPr>
         <p:spPr>
           <a:xfrm>
-            <a:off x="2029968" y="3491564"/>
+            <a:off x="1977029" y="3491564"/>
             <a:ext cx="0" cy="187693"/>
           </a:xfrm>
           <a:prstGeom prst="line">
@@ -18853,7 +18951,7 @@
         </p:nvSpPr>
         <p:spPr>
           <a:xfrm>
-            <a:off x="2029968" y="4097956"/>
+            <a:off x="1977029" y="4097956"/>
             <a:ext cx="0" cy="216568"/>
           </a:xfrm>
           <a:prstGeom prst="line">
@@ -18877,7 +18975,7 @@
         </p:nvSpPr>
         <p:spPr>
           <a:xfrm>
-            <a:off x="2860147" y="4704347"/>
+            <a:off x="2807208" y="4704347"/>
             <a:ext cx="317634" cy="0"/>
           </a:xfrm>
           <a:prstGeom prst="line">
@@ -18901,7 +18999,7 @@
         </p:nvSpPr>
         <p:spPr>
           <a:xfrm>
-            <a:off x="2029968" y="5050857"/>
+            <a:off x="1977029" y="5050857"/>
             <a:ext cx="0" cy="202131"/>
           </a:xfrm>
           <a:prstGeom prst="line">
@@ -18925,7 +19023,7 @@
         </p:nvSpPr>
         <p:spPr>
           <a:xfrm>
-            <a:off x="3979084" y="4892040"/>
+            <a:off x="3926145" y="4892040"/>
             <a:ext cx="0" cy="274320"/>
           </a:xfrm>
           <a:prstGeom prst="line">
@@ -18948,7 +19046,7 @@
         </p:nvSpPr>
         <p:spPr>
           <a:xfrm flipH="1">
-            <a:off x="2499200" y="5166360"/>
+            <a:off x="2446261" y="5166360"/>
             <a:ext cx="1479884" cy="0"/>
           </a:xfrm>
           <a:prstGeom prst="line">
@@ -18971,7 +19069,7 @@
         </p:nvSpPr>
         <p:spPr>
           <a:xfrm>
-            <a:off x="2499200" y="5166360"/>
+            <a:off x="2446261" y="5166360"/>
             <a:ext cx="0" cy="86627"/>
           </a:xfrm>
           <a:prstGeom prst="line">
@@ -18995,7 +19093,7 @@
         </p:nvSpPr>
         <p:spPr>
           <a:xfrm>
-            <a:off x="2860147" y="5483994"/>
+            <a:off x="2807208" y="5483994"/>
             <a:ext cx="1256097" cy="0"/>
           </a:xfrm>
           <a:prstGeom prst="line">
@@ -19019,7 +19117,7 @@
         </p:nvSpPr>
         <p:spPr>
           <a:xfrm>
-            <a:off x="2917899" y="4509436"/>
+            <a:off x="2864960" y="4509436"/>
             <a:ext cx="288758" cy="158817"/>
           </a:xfrm>
           <a:prstGeom prst="rect">
@@ -19061,7 +19159,7 @@
         </p:nvSpPr>
         <p:spPr>
           <a:xfrm>
-            <a:off x="2109376" y="5072514"/>
+            <a:off x="2056437" y="5072514"/>
             <a:ext cx="288758" cy="158817"/>
           </a:xfrm>
           <a:prstGeom prst="rect">
@@ -19103,8 +19201,8 @@
         </p:nvSpPr>
         <p:spPr>
           <a:xfrm>
-            <a:off x="2946774" y="2618072"/>
-            <a:ext cx="1371600" cy="158817"/>
+            <a:off x="2893835" y="2596415"/>
+            <a:ext cx="1371600" cy="202131"/>
           </a:xfrm>
           <a:prstGeom prst="rect">
             <a:avLst/>
@@ -19142,8 +19240,8 @@
         </p:nvSpPr>
         <p:spPr>
           <a:xfrm>
-            <a:off x="2946774" y="3224463"/>
-            <a:ext cx="1371600" cy="158817"/>
+            <a:off x="2893835" y="3202806"/>
+            <a:ext cx="1371600" cy="202131"/>
           </a:xfrm>
           <a:prstGeom prst="rect">
             <a:avLst/>
@@ -19167,7 +19265,7 @@
                 <a:ea typeface="Arial" pitchFamily="34" charset="-122"/>
                 <a:cs typeface="Arial" pitchFamily="34" charset="-120"/>
               </a:rPr>
-              <a:t>IA · 12.000/mês</a:t>
+              <a:t>IA · alto volume</a:t>
             </a:r>
             <a:endParaRPr lang="en-US" sz="796" dirty="0"/>
           </a:p>
@@ -19181,8 +19279,8 @@
         </p:nvSpPr>
         <p:spPr>
           <a:xfrm>
-            <a:off x="2946774" y="3830855"/>
-            <a:ext cx="1371600" cy="158817"/>
+            <a:off x="2893835" y="3809198"/>
+            <a:ext cx="1371600" cy="202131"/>
           </a:xfrm>
           <a:prstGeom prst="rect">
             <a:avLst/>
@@ -19206,7 +19304,7 @@
                 <a:ea typeface="Arial" pitchFamily="34" charset="-122"/>
                 <a:cs typeface="Arial" pitchFamily="34" charset="-120"/>
               </a:rPr>
-              <a:t>IA · 9.000/mês + revisão</a:t>
+              <a:t>IA · alto volume + revisão</a:t>
             </a:r>
             <a:endParaRPr lang="en-US" sz="796" dirty="0"/>
           </a:p>
@@ -19220,8 +19318,8 @@
         </p:nvSpPr>
         <p:spPr>
           <a:xfrm>
-            <a:off x="4794825" y="4624939"/>
-            <a:ext cx="1010653" cy="158817"/>
+            <a:off x="4741886" y="4603282"/>
+            <a:ext cx="1515979" cy="202131"/>
           </a:xfrm>
           <a:prstGeom prst="rect">
             <a:avLst/>
@@ -19245,7 +19343,7 @@
                 <a:ea typeface="Arial" pitchFamily="34" charset="-122"/>
                 <a:cs typeface="Arial" pitchFamily="34" charset="-120"/>
               </a:rPr>
-              <a:t>HUMANO · 300/mês</a:t>
+              <a:t>HUMANO · baixo volume</a:t>
             </a:r>
             <a:endParaRPr lang="en-US" sz="796" dirty="0"/>
           </a:p>
@@ -19259,8 +19357,8 @@
         </p:nvSpPr>
         <p:spPr>
           <a:xfrm>
-            <a:off x="1199789" y="5743876"/>
-            <a:ext cx="721895" cy="158817"/>
+            <a:off x="1146850" y="5722219"/>
+            <a:ext cx="721895" cy="202131"/>
           </a:xfrm>
           <a:prstGeom prst="rect">
             <a:avLst/>
@@ -19678,7 +19776,7 @@
                 <a:ea typeface="Arial" pitchFamily="34" charset="-122"/>
                 <a:cs typeface="Arial" pitchFamily="34" charset="-120"/>
               </a:rPr>
-              <a:t>21 mil decisões ambíguas por mês com erro tolerável</a:t>
+              <a:t>decisão ambígua em alto volume, com erro tolerável</a:t>
             </a:r>
             <a:pPr indent="0" marL="0">
               <a:lnSpc>
@@ -19754,7 +19852,7 @@
                 <a:ea typeface="Arial" pitchFamily="34" charset="-122"/>
                 <a:cs typeface="Arial" pitchFamily="34" charset="-120"/>
               </a:rPr>
-              <a:t>300 julgamentos irreversíveis</a:t>
+              <a:t>poucos julgamentos, todos irreversíveis</a:t>
             </a:r>
             <a:pPr indent="0" marL="0">
               <a:lnSpc>

--- a/talks/serasa-ia-automacao/deck.pptx
+++ b/talks/serasa-ia-automacao/deck.pptx
@@ -6861,7 +6861,7 @@
                 <a:ea typeface="Arial" pitchFamily="34" charset="-122"/>
                 <a:cs typeface="Arial" pitchFamily="34" charset="-120"/>
               </a:rPr>
-              <a:t>Qual era o processo, quem executava, quantas vezes por mês.</a:t>
+              <a:t>Qual era o processo, quem executava, com que frequência acontecia.</a:t>
             </a:r>
             <a:endParaRPr lang="en-US" sz="1150" dirty="0"/>
           </a:p>

--- a/talks/serasa-ia-automacao/deck.pptx
+++ b/talks/serasa-ia-automacao/deck.pptx
@@ -2175,12 +2175,12 @@
           <a:p>
             <a:pPr indent="0" marL="0">
               <a:lnSpc>
-                <a:spcPts val="4800"/>
-              </a:lnSpc>
-              <a:buNone/>
-            </a:pPr>
-            <a:r>
-              <a:rPr lang="en-US" sz="4200" b="1" dirty="0">
+                <a:spcPts val="4300"/>
+              </a:lnSpc>
+              <a:buNone/>
+            </a:pPr>
+            <a:r>
+              <a:rPr lang="en-US" sz="4200" b="1" spc="-126" kern="0" dirty="0">
                 <a:solidFill>
                   <a:srgbClr val="FFFFFF"/>
                 </a:solidFill>
@@ -2195,12 +2195,12 @@
           <a:p>
             <a:pPr indent="0" marL="0">
               <a:lnSpc>
-                <a:spcPts val="4800"/>
-              </a:lnSpc>
-              <a:buNone/>
-            </a:pPr>
-            <a:r>
-              <a:rPr lang="en-US" sz="4200" b="1" dirty="0">
+                <a:spcPts val="4300"/>
+              </a:lnSpc>
+              <a:buNone/>
+            </a:pPr>
+            <a:r>
+              <a:rPr lang="en-US" sz="4200" b="1" spc="-126" kern="0" dirty="0">
                 <a:solidFill>
                   <a:srgbClr val="FFFFFF"/>
                 </a:solidFill>
@@ -2215,12 +2215,12 @@
           <a:p>
             <a:pPr indent="0" marL="0">
               <a:lnSpc>
-                <a:spcPts val="4800"/>
-              </a:lnSpc>
-              <a:buNone/>
-            </a:pPr>
-            <a:r>
-              <a:rPr lang="en-US" sz="4200" b="1" dirty="0">
+                <a:spcPts val="4300"/>
+              </a:lnSpc>
+              <a:buNone/>
+            </a:pPr>
+            <a:r>
+              <a:rPr lang="en-US" sz="4200" b="1" spc="-126" kern="0" dirty="0">
                 <a:solidFill>
                   <a:srgbClr val="FF8FC0"/>
                 </a:solidFill>
@@ -2257,7 +2257,7 @@
           <a:p>
             <a:pPr indent="0" marL="0">
               <a:lnSpc>
-                <a:spcPts val="2200"/>
+                <a:spcPts val="2100"/>
               </a:lnSpc>
               <a:buNone/>
             </a:pPr>
@@ -2471,7 +2471,7 @@
               <a:buNone/>
             </a:pPr>
             <a:r>
-              <a:rPr lang="en-US" sz="2600" b="1" dirty="0">
+              <a:rPr lang="en-US" sz="2600" b="1" spc="-57" kern="0" dirty="0">
                 <a:solidFill>
                   <a:srgbClr val="16224E"/>
                 </a:solidFill>
@@ -2488,7 +2488,7 @@
               <a:buNone/>
             </a:pPr>
             <a:r>
-              <a:rPr lang="en-US" sz="2600" b="1" dirty="0">
+              <a:rPr lang="en-US" sz="2600" b="1" spc="-57" kern="0" dirty="0">
                 <a:solidFill>
                   <a:srgbClr val="E80070"/>
                 </a:solidFill>
@@ -2505,7 +2505,7 @@
               <a:buNone/>
             </a:pPr>
             <a:r>
-              <a:rPr lang="en-US" sz="2600" b="1" dirty="0">
+              <a:rPr lang="en-US" sz="2600" b="1" spc="-57" kern="0" dirty="0">
                 <a:solidFill>
                   <a:srgbClr val="16224E"/>
                 </a:solidFill>
@@ -3497,7 +3497,7 @@
               <a:buNone/>
             </a:pPr>
             <a:r>
-              <a:rPr lang="en-US" sz="1200" b="1" dirty="0">
+              <a:rPr lang="en-US" sz="1200" b="1" spc="-12" kern="0" dirty="0">
                 <a:solidFill>
                   <a:srgbClr val="E80070"/>
                 </a:solidFill>
@@ -3534,7 +3534,7 @@
           <a:p>
             <a:pPr indent="0" marL="0">
               <a:lnSpc>
-                <a:spcPts val="1350"/>
+                <a:spcPts val="1550"/>
               </a:lnSpc>
               <a:buNone/>
             </a:pPr>
@@ -3551,7 +3551,7 @@
             </a:r>
             <a:pPr indent="0" marL="0">
               <a:lnSpc>
-                <a:spcPts val="1350"/>
+                <a:spcPts val="1550"/>
               </a:lnSpc>
               <a:buNone/>
             </a:pPr>
@@ -3593,7 +3593,7 @@
           <a:p>
             <a:pPr indent="0" marL="0">
               <a:lnSpc>
-                <a:spcPts val="1350"/>
+                <a:spcPts val="1550"/>
               </a:lnSpc>
               <a:buNone/>
             </a:pPr>
@@ -3610,7 +3610,7 @@
             </a:r>
             <a:pPr indent="0" marL="0">
               <a:lnSpc>
-                <a:spcPts val="1350"/>
+                <a:spcPts val="1550"/>
               </a:lnSpc>
               <a:buNone/>
             </a:pPr>
@@ -3652,7 +3652,7 @@
           <a:p>
             <a:pPr indent="0" marL="0">
               <a:lnSpc>
-                <a:spcPts val="1350"/>
+                <a:spcPts val="1550"/>
               </a:lnSpc>
               <a:buNone/>
             </a:pPr>
@@ -3669,7 +3669,7 @@
             </a:r>
             <a:pPr indent="0" marL="0">
               <a:lnSpc>
-                <a:spcPts val="1350"/>
+                <a:spcPts val="1550"/>
               </a:lnSpc>
               <a:buNone/>
             </a:pPr>
@@ -3696,12 +3696,12 @@
         </p:nvSpPr>
         <p:spPr>
           <a:xfrm>
-            <a:off x="7635240" y="3950208"/>
-            <a:ext cx="3886200" cy="1234440"/>
+            <a:off x="7635240" y="3931920"/>
+            <a:ext cx="3886200" cy="1353312"/>
           </a:xfrm>
           <a:prstGeom prst="roundRect">
             <a:avLst>
-              <a:gd name="adj" fmla="val 7407"/>
+              <a:gd name="adj" fmla="val 6757"/>
             </a:avLst>
           </a:prstGeom>
           <a:solidFill>
@@ -3723,8 +3723,8 @@
         </p:nvSpPr>
         <p:spPr>
           <a:xfrm>
-            <a:off x="7863840" y="4114800"/>
-            <a:ext cx="3474720" cy="914400"/>
+            <a:off x="7863840" y="4069080"/>
+            <a:ext cx="3474720" cy="1078992"/>
           </a:xfrm>
           <a:prstGeom prst="rect">
             <a:avLst/>
@@ -3738,7 +3738,7 @@
           <a:p>
             <a:pPr indent="0" marL="0">
               <a:lnSpc>
-                <a:spcPts val="1350"/>
+                <a:spcPts val="1550"/>
               </a:lnSpc>
               <a:buNone/>
             </a:pPr>
@@ -3755,7 +3755,7 @@
             </a:r>
             <a:pPr indent="0" marL="0">
               <a:lnSpc>
-                <a:spcPts val="1350"/>
+                <a:spcPts val="1550"/>
               </a:lnSpc>
               <a:buNone/>
             </a:pPr>
@@ -3772,7 +3772,7 @@
             </a:r>
             <a:pPr indent="0" marL="0">
               <a:lnSpc>
-                <a:spcPts val="1350"/>
+                <a:spcPts val="1550"/>
               </a:lnSpc>
               <a:buNone/>
             </a:pPr>
@@ -3789,7 +3789,7 @@
             </a:r>
             <a:pPr indent="0" marL="0">
               <a:lnSpc>
-                <a:spcPts val="1350"/>
+                <a:spcPts val="1550"/>
               </a:lnSpc>
               <a:buNone/>
             </a:pPr>
@@ -3806,7 +3806,7 @@
             </a:r>
             <a:pPr indent="0" marL="0">
               <a:lnSpc>
-                <a:spcPts val="1350"/>
+                <a:spcPts val="1550"/>
               </a:lnSpc>
               <a:buNone/>
             </a:pPr>
@@ -3823,7 +3823,7 @@
             </a:r>
             <a:pPr indent="0" marL="0">
               <a:lnSpc>
-                <a:spcPts val="1350"/>
+                <a:spcPts val="1550"/>
               </a:lnSpc>
               <a:buNone/>
             </a:pPr>
@@ -3850,12 +3850,12 @@
         </p:nvSpPr>
         <p:spPr>
           <a:xfrm>
-            <a:off x="658368" y="5349240"/>
-            <a:ext cx="10874959" cy="777240"/>
+            <a:off x="658368" y="5367528"/>
+            <a:ext cx="10874959" cy="841248"/>
           </a:xfrm>
           <a:prstGeom prst="roundRect">
             <a:avLst>
-              <a:gd name="adj" fmla="val 11765"/>
+              <a:gd name="adj" fmla="val 10870"/>
             </a:avLst>
           </a:prstGeom>
           <a:solidFill>
@@ -3877,8 +3877,8 @@
         </p:nvSpPr>
         <p:spPr>
           <a:xfrm>
-            <a:off x="658368" y="5349240"/>
-            <a:ext cx="45720" cy="777240"/>
+            <a:off x="658368" y="5367528"/>
+            <a:ext cx="45720" cy="841248"/>
           </a:xfrm>
           <a:prstGeom prst="rect">
             <a:avLst/>
@@ -3902,7 +3902,7 @@
         </p:nvSpPr>
         <p:spPr>
           <a:xfrm>
-            <a:off x="914400" y="5440680"/>
+            <a:off x="914400" y="5458968"/>
             <a:ext cx="7315200" cy="201168"/>
           </a:xfrm>
           <a:prstGeom prst="rect">
@@ -3941,8 +3941,8 @@
         </p:nvSpPr>
         <p:spPr>
           <a:xfrm>
-            <a:off x="914400" y="5660136"/>
-            <a:ext cx="10362895" cy="393192"/>
+            <a:off x="914400" y="5678424"/>
+            <a:ext cx="10362895" cy="457200"/>
           </a:xfrm>
           <a:prstGeom prst="rect">
             <a:avLst/>
@@ -3956,7 +3956,7 @@
           <a:p>
             <a:pPr indent="0" marL="0">
               <a:lnSpc>
-                <a:spcPts val="1600"/>
+                <a:spcPts val="1800"/>
               </a:lnSpc>
               <a:buNone/>
             </a:pPr>
@@ -3973,7 +3973,7 @@
             </a:r>
             <a:pPr indent="0" marL="0">
               <a:lnSpc>
-                <a:spcPts val="1600"/>
+                <a:spcPts val="1800"/>
               </a:lnSpc>
               <a:buNone/>
             </a:pPr>
@@ -3990,7 +3990,7 @@
             </a:r>
             <a:pPr indent="0" marL="0">
               <a:lnSpc>
-                <a:spcPts val="1600"/>
+                <a:spcPts val="1800"/>
               </a:lnSpc>
               <a:buNone/>
             </a:pPr>
@@ -4007,7 +4007,7 @@
             </a:r>
             <a:pPr indent="0" marL="0">
               <a:lnSpc>
-                <a:spcPts val="1600"/>
+                <a:spcPts val="1800"/>
               </a:lnSpc>
               <a:buNone/>
             </a:pPr>
@@ -4221,7 +4221,7 @@
               <a:buNone/>
             </a:pPr>
             <a:r>
-              <a:rPr lang="en-US" sz="2700" b="1" dirty="0">
+              <a:rPr lang="en-US" sz="2700" b="1" spc="-59" kern="0" dirty="0">
                 <a:solidFill>
                   <a:srgbClr val="16224E"/>
                 </a:solidFill>
@@ -4238,7 +4238,7 @@
               <a:buNone/>
             </a:pPr>
             <a:r>
-              <a:rPr lang="en-US" sz="2700" b="1" dirty="0">
+              <a:rPr lang="en-US" sz="2700" b="1" spc="-59" kern="0" dirty="0">
                 <a:solidFill>
                   <a:srgbClr val="E80070"/>
                 </a:solidFill>
@@ -4255,7 +4255,7 @@
               <a:buNone/>
             </a:pPr>
             <a:r>
-              <a:rPr lang="en-US" sz="2700" b="1" dirty="0">
+              <a:rPr lang="en-US" sz="2700" b="1" spc="-59" kern="0" dirty="0">
                 <a:solidFill>
                   <a:srgbClr val="16224E"/>
                 </a:solidFill>
@@ -6429,7 +6429,7 @@
           <a:p>
             <a:pPr indent="0" marL="0">
               <a:lnSpc>
-                <a:spcPts val="1600"/>
+                <a:spcPts val="1800"/>
               </a:lnSpc>
               <a:buNone/>
             </a:pPr>
@@ -6446,7 +6446,7 @@
             </a:r>
             <a:pPr indent="0" marL="0">
               <a:lnSpc>
-                <a:spcPts val="1600"/>
+                <a:spcPts val="1800"/>
               </a:lnSpc>
               <a:buNone/>
             </a:pPr>
@@ -6463,7 +6463,7 @@
             </a:r>
             <a:pPr indent="0" marL="0">
               <a:lnSpc>
-                <a:spcPts val="1600"/>
+                <a:spcPts val="1800"/>
               </a:lnSpc>
               <a:buNone/>
             </a:pPr>
@@ -6480,7 +6480,7 @@
             </a:r>
             <a:pPr indent="0" marL="0">
               <a:lnSpc>
-                <a:spcPts val="1600"/>
+                <a:spcPts val="1800"/>
               </a:lnSpc>
               <a:buNone/>
             </a:pPr>
@@ -6497,7 +6497,7 @@
             </a:r>
             <a:pPr indent="0" marL="0">
               <a:lnSpc>
-                <a:spcPts val="1600"/>
+                <a:spcPts val="1800"/>
               </a:lnSpc>
               <a:buNone/>
             </a:pPr>
@@ -6514,7 +6514,7 @@
             </a:r>
             <a:pPr indent="0" marL="0">
               <a:lnSpc>
-                <a:spcPts val="1600"/>
+                <a:spcPts val="1800"/>
               </a:lnSpc>
               <a:buNone/>
             </a:pPr>
@@ -6723,12 +6723,12 @@
           <a:p>
             <a:pPr indent="0" marL="0">
               <a:lnSpc>
-                <a:spcPts val="3400"/>
-              </a:lnSpc>
-              <a:buNone/>
-            </a:pPr>
-            <a:r>
-              <a:rPr lang="en-US" sz="2800" b="1" dirty="0">
+                <a:spcPts val="3000"/>
+              </a:lnSpc>
+              <a:buNone/>
+            </a:pPr>
+            <a:r>
+              <a:rPr lang="en-US" sz="2800" b="1" spc="-62" kern="0" dirty="0">
                 <a:solidFill>
                   <a:srgbClr val="16224E"/>
                 </a:solidFill>
@@ -6740,12 +6740,12 @@
             </a:r>
             <a:pPr indent="0" marL="0">
               <a:lnSpc>
-                <a:spcPts val="3400"/>
-              </a:lnSpc>
-              <a:buNone/>
-            </a:pPr>
-            <a:r>
-              <a:rPr lang="en-US" sz="2800" b="1" dirty="0">
+                <a:spcPts val="3000"/>
+              </a:lnSpc>
+              <a:buNone/>
+            </a:pPr>
+            <a:r>
+              <a:rPr lang="en-US" sz="2800" b="1" spc="-62" kern="0" dirty="0">
                 <a:solidFill>
                   <a:srgbClr val="E80070"/>
                 </a:solidFill>
@@ -6848,7 +6848,7 @@
           <a:p>
             <a:pPr indent="0" marL="0">
               <a:lnSpc>
-                <a:spcPts val="1500"/>
+                <a:spcPts val="1700"/>
               </a:lnSpc>
               <a:buNone/>
             </a:pPr>
@@ -6890,7 +6890,7 @@
           <a:p>
             <a:pPr indent="0" marL="0">
               <a:lnSpc>
-                <a:spcPts val="1350"/>
+                <a:spcPts val="1450"/>
               </a:lnSpc>
               <a:buNone/>
             </a:pPr>
@@ -6998,7 +6998,7 @@
           <a:p>
             <a:pPr indent="0" marL="0">
               <a:lnSpc>
-                <a:spcPts val="1500"/>
+                <a:spcPts val="1700"/>
               </a:lnSpc>
               <a:buNone/>
             </a:pPr>
@@ -7040,7 +7040,7 @@
           <a:p>
             <a:pPr indent="0" marL="0">
               <a:lnSpc>
-                <a:spcPts val="1350"/>
+                <a:spcPts val="1450"/>
               </a:lnSpc>
               <a:buNone/>
             </a:pPr>
@@ -7148,7 +7148,7 @@
           <a:p>
             <a:pPr indent="0" marL="0">
               <a:lnSpc>
-                <a:spcPts val="1500"/>
+                <a:spcPts val="1700"/>
               </a:lnSpc>
               <a:buNone/>
             </a:pPr>
@@ -7190,7 +7190,7 @@
           <a:p>
             <a:pPr indent="0" marL="0">
               <a:lnSpc>
-                <a:spcPts val="1350"/>
+                <a:spcPts val="1450"/>
               </a:lnSpc>
               <a:buNone/>
             </a:pPr>
@@ -7218,11 +7218,11 @@
         <p:spPr>
           <a:xfrm>
             <a:off x="658368" y="4846320"/>
-            <a:ext cx="10874959" cy="804672"/>
+            <a:ext cx="10874959" cy="859536"/>
           </a:xfrm>
           <a:prstGeom prst="roundRect">
             <a:avLst>
-              <a:gd name="adj" fmla="val 11364"/>
+              <a:gd name="adj" fmla="val 10638"/>
             </a:avLst>
           </a:prstGeom>
           <a:solidFill>
@@ -7245,7 +7245,7 @@
         <p:spPr>
           <a:xfrm>
             <a:off x="658368" y="4846320"/>
-            <a:ext cx="45720" cy="804672"/>
+            <a:ext cx="45720" cy="859536"/>
           </a:xfrm>
           <a:prstGeom prst="rect">
             <a:avLst/>
@@ -7309,7 +7309,7 @@
         <p:spPr>
           <a:xfrm>
             <a:off x="914400" y="5157216"/>
-            <a:ext cx="10362895" cy="420624"/>
+            <a:ext cx="10362895" cy="475488"/>
           </a:xfrm>
           <a:prstGeom prst="rect">
             <a:avLst/>
@@ -7323,7 +7323,7 @@
           <a:p>
             <a:pPr indent="0" marL="0">
               <a:lnSpc>
-                <a:spcPts val="1600"/>
+                <a:spcPts val="1800"/>
               </a:lnSpc>
               <a:buNone/>
             </a:pPr>
@@ -7340,7 +7340,7 @@
             </a:r>
             <a:pPr indent="0" marL="0">
               <a:lnSpc>
-                <a:spcPts val="1600"/>
+                <a:spcPts val="1800"/>
               </a:lnSpc>
               <a:buNone/>
             </a:pPr>
@@ -7357,7 +7357,7 @@
             </a:r>
             <a:pPr indent="0" marL="0">
               <a:lnSpc>
-                <a:spcPts val="1600"/>
+                <a:spcPts val="1800"/>
               </a:lnSpc>
               <a:buNone/>
             </a:pPr>
@@ -7566,12 +7566,12 @@
           <a:p>
             <a:pPr indent="0" marL="0">
               <a:lnSpc>
-                <a:spcPts val="3400"/>
-              </a:lnSpc>
-              <a:buNone/>
-            </a:pPr>
-            <a:r>
-              <a:rPr lang="en-US" sz="2800" b="1" dirty="0">
+                <a:spcPts val="3000"/>
+              </a:lnSpc>
+              <a:buNone/>
+            </a:pPr>
+            <a:r>
+              <a:rPr lang="en-US" sz="2800" b="1" spc="-62" kern="0" dirty="0">
                 <a:solidFill>
                   <a:srgbClr val="16224E"/>
                 </a:solidFill>
@@ -7583,12 +7583,12 @@
             </a:r>
             <a:pPr indent="0" marL="0">
               <a:lnSpc>
-                <a:spcPts val="3400"/>
-              </a:lnSpc>
-              <a:buNone/>
-            </a:pPr>
-            <a:r>
-              <a:rPr lang="en-US" sz="2800" b="1" dirty="0">
+                <a:spcPts val="3000"/>
+              </a:lnSpc>
+              <a:buNone/>
+            </a:pPr>
+            <a:r>
+              <a:rPr lang="en-US" sz="2800" b="1" spc="-62" kern="0" dirty="0">
                 <a:solidFill>
                   <a:srgbClr val="E80070"/>
                 </a:solidFill>
@@ -7677,7 +7677,7 @@
         <p:spPr>
           <a:xfrm>
             <a:off x="3447288" y="1856232"/>
-            <a:ext cx="7811719" cy="365760"/>
+            <a:ext cx="7811719" cy="420624"/>
           </a:xfrm>
           <a:prstGeom prst="rect">
             <a:avLst/>
@@ -7691,7 +7691,7 @@
           <a:p>
             <a:pPr indent="0" marL="0">
               <a:lnSpc>
-                <a:spcPts val="1350"/>
+                <a:spcPts val="1550"/>
               </a:lnSpc>
               <a:buNone/>
             </a:pPr>
@@ -7708,7 +7708,7 @@
             </a:r>
             <a:pPr indent="0" marL="0">
               <a:lnSpc>
-                <a:spcPts val="1350"/>
+                <a:spcPts val="1550"/>
               </a:lnSpc>
               <a:buNone/>
             </a:pPr>
@@ -7802,7 +7802,7 @@
         <p:spPr>
           <a:xfrm>
             <a:off x="3447288" y="2386584"/>
-            <a:ext cx="7811719" cy="365760"/>
+            <a:ext cx="7811719" cy="420624"/>
           </a:xfrm>
           <a:prstGeom prst="rect">
             <a:avLst/>
@@ -7816,7 +7816,7 @@
           <a:p>
             <a:pPr indent="0" marL="0">
               <a:lnSpc>
-                <a:spcPts val="1350"/>
+                <a:spcPts val="1550"/>
               </a:lnSpc>
               <a:buNone/>
             </a:pPr>
@@ -7833,7 +7833,7 @@
             </a:r>
             <a:pPr indent="0" marL="0">
               <a:lnSpc>
-                <a:spcPts val="1350"/>
+                <a:spcPts val="1550"/>
               </a:lnSpc>
               <a:buNone/>
             </a:pPr>
@@ -7927,7 +7927,7 @@
         <p:spPr>
           <a:xfrm>
             <a:off x="3447288" y="2916936"/>
-            <a:ext cx="7811719" cy="365760"/>
+            <a:ext cx="7811719" cy="420624"/>
           </a:xfrm>
           <a:prstGeom prst="rect">
             <a:avLst/>
@@ -7941,7 +7941,7 @@
           <a:p>
             <a:pPr indent="0" marL="0">
               <a:lnSpc>
-                <a:spcPts val="1350"/>
+                <a:spcPts val="1550"/>
               </a:lnSpc>
               <a:buNone/>
             </a:pPr>
@@ -7958,7 +7958,7 @@
             </a:r>
             <a:pPr indent="0" marL="0">
               <a:lnSpc>
-                <a:spcPts val="1350"/>
+                <a:spcPts val="1550"/>
               </a:lnSpc>
               <a:buNone/>
             </a:pPr>
@@ -8052,7 +8052,7 @@
         <p:spPr>
           <a:xfrm>
             <a:off x="3447288" y="3447288"/>
-            <a:ext cx="7811719" cy="365760"/>
+            <a:ext cx="7811719" cy="420624"/>
           </a:xfrm>
           <a:prstGeom prst="rect">
             <a:avLst/>
@@ -8066,7 +8066,7 @@
           <a:p>
             <a:pPr indent="0" marL="0">
               <a:lnSpc>
-                <a:spcPts val="1350"/>
+                <a:spcPts val="1550"/>
               </a:lnSpc>
               <a:buNone/>
             </a:pPr>
@@ -8083,7 +8083,7 @@
             </a:r>
             <a:pPr indent="0" marL="0">
               <a:lnSpc>
-                <a:spcPts val="1350"/>
+                <a:spcPts val="1550"/>
               </a:lnSpc>
               <a:buNone/>
             </a:pPr>
@@ -8177,7 +8177,7 @@
         <p:spPr>
           <a:xfrm>
             <a:off x="3447288" y="3977640"/>
-            <a:ext cx="7811719" cy="365760"/>
+            <a:ext cx="7811719" cy="420624"/>
           </a:xfrm>
           <a:prstGeom prst="rect">
             <a:avLst/>
@@ -8191,7 +8191,7 @@
           <a:p>
             <a:pPr indent="0" marL="0">
               <a:lnSpc>
-                <a:spcPts val="1350"/>
+                <a:spcPts val="1550"/>
               </a:lnSpc>
               <a:buNone/>
             </a:pPr>
@@ -8208,7 +8208,7 @@
             </a:r>
             <a:pPr indent="0" marL="0">
               <a:lnSpc>
-                <a:spcPts val="1350"/>
+                <a:spcPts val="1550"/>
               </a:lnSpc>
               <a:buNone/>
             </a:pPr>
@@ -8302,7 +8302,7 @@
         <p:spPr>
           <a:xfrm>
             <a:off x="3447288" y="4507992"/>
-            <a:ext cx="7811719" cy="365760"/>
+            <a:ext cx="7811719" cy="420624"/>
           </a:xfrm>
           <a:prstGeom prst="rect">
             <a:avLst/>
@@ -8316,7 +8316,7 @@
           <a:p>
             <a:pPr indent="0" marL="0">
               <a:lnSpc>
-                <a:spcPts val="1350"/>
+                <a:spcPts val="1550"/>
               </a:lnSpc>
               <a:buNone/>
             </a:pPr>
@@ -8333,7 +8333,7 @@
             </a:r>
             <a:pPr indent="0" marL="0">
               <a:lnSpc>
-                <a:spcPts val="1350"/>
+                <a:spcPts val="1550"/>
               </a:lnSpc>
               <a:buNone/>
             </a:pPr>
@@ -8427,7 +8427,7 @@
         <p:spPr>
           <a:xfrm>
             <a:off x="3447288" y="5038344"/>
-            <a:ext cx="7811719" cy="365760"/>
+            <a:ext cx="7811719" cy="420624"/>
           </a:xfrm>
           <a:prstGeom prst="rect">
             <a:avLst/>
@@ -8441,7 +8441,7 @@
           <a:p>
             <a:pPr indent="0" marL="0">
               <a:lnSpc>
-                <a:spcPts val="1350"/>
+                <a:spcPts val="1550"/>
               </a:lnSpc>
               <a:buNone/>
             </a:pPr>
@@ -8458,7 +8458,7 @@
             </a:r>
             <a:pPr indent="0" marL="0">
               <a:lnSpc>
-                <a:spcPts val="1350"/>
+                <a:spcPts val="1550"/>
               </a:lnSpc>
               <a:buNone/>
             </a:pPr>
@@ -8566,7 +8566,7 @@
           <a:p>
             <a:pPr indent="0" marL="0">
               <a:lnSpc>
-                <a:spcPts val="1300"/>
+                <a:spcPts val="1450"/>
               </a:lnSpc>
               <a:buNone/>
             </a:pPr>
@@ -8759,7 +8759,7 @@
               <a:buNone/>
             </a:pPr>
             <a:r>
-              <a:rPr lang="en-US" sz="2600" b="1" dirty="0">
+              <a:rPr lang="en-US" sz="2600" b="1" spc="-57" kern="0" dirty="0">
                 <a:solidFill>
                   <a:srgbClr val="FFFFFF"/>
                 </a:solidFill>
@@ -8773,7 +8773,7 @@
               <a:buNone/>
             </a:pPr>
             <a:r>
-              <a:rPr lang="en-US" sz="2600" b="1" dirty="0">
+              <a:rPr lang="en-US" sz="2600" b="1" spc="-57" kern="0" dirty="0">
                 <a:solidFill>
                   <a:srgbClr val="FF8FC0"/>
                 </a:solidFill>
@@ -8854,7 +8854,7 @@
               <a:buNone/>
             </a:pPr>
             <a:r>
-              <a:rPr lang="en-US" sz="1800" dirty="0">
+              <a:rPr lang="en-US" sz="1800" spc="-18" kern="0" dirty="0">
                 <a:solidFill>
                   <a:srgbClr val="FFFFFF"/>
                 </a:solidFill>
@@ -8871,7 +8871,7 @@
               <a:buNone/>
             </a:pPr>
             <a:r>
-              <a:rPr lang="en-US" sz="1800" b="1" dirty="0">
+              <a:rPr lang="en-US" sz="1800" b="1" spc="-18" kern="0" dirty="0">
                 <a:solidFill>
                   <a:srgbClr val="FFFFFF"/>
                 </a:solidFill>
@@ -8888,7 +8888,7 @@
               <a:buNone/>
             </a:pPr>
             <a:r>
-              <a:rPr lang="en-US" sz="1800" dirty="0">
+              <a:rPr lang="en-US" sz="1800" spc="-18" kern="0" dirty="0">
                 <a:solidFill>
                   <a:srgbClr val="FFFFFF"/>
                 </a:solidFill>
@@ -8969,7 +8969,7 @@
               <a:buNone/>
             </a:pPr>
             <a:r>
-              <a:rPr lang="en-US" sz="1800" dirty="0">
+              <a:rPr lang="en-US" sz="1800" spc="-18" kern="0" dirty="0">
                 <a:solidFill>
                   <a:srgbClr val="FFFFFF"/>
                 </a:solidFill>
@@ -8986,7 +8986,7 @@
               <a:buNone/>
             </a:pPr>
             <a:r>
-              <a:rPr lang="en-US" sz="1800" b="1" dirty="0">
+              <a:rPr lang="en-US" sz="1800" b="1" spc="-18" kern="0" dirty="0">
                 <a:solidFill>
                   <a:srgbClr val="FFFFFF"/>
                 </a:solidFill>
@@ -9003,7 +9003,7 @@
               <a:buNone/>
             </a:pPr>
             <a:r>
-              <a:rPr lang="en-US" sz="1800" dirty="0">
+              <a:rPr lang="en-US" sz="1800" spc="-18" kern="0" dirty="0">
                 <a:solidFill>
                   <a:srgbClr val="FFFFFF"/>
                 </a:solidFill>
@@ -9084,7 +9084,7 @@
               <a:buNone/>
             </a:pPr>
             <a:r>
-              <a:rPr lang="en-US" sz="1800" dirty="0">
+              <a:rPr lang="en-US" sz="1800" spc="-18" kern="0" dirty="0">
                 <a:solidFill>
                   <a:srgbClr val="FFFFFF"/>
                 </a:solidFill>
@@ -9101,7 +9101,7 @@
               <a:buNone/>
             </a:pPr>
             <a:r>
-              <a:rPr lang="en-US" sz="1800" b="1" dirty="0">
+              <a:rPr lang="en-US" sz="1800" b="1" spc="-18" kern="0" dirty="0">
                 <a:solidFill>
                   <a:srgbClr val="FFFFFF"/>
                 </a:solidFill>
@@ -9118,7 +9118,7 @@
               <a:buNone/>
             </a:pPr>
             <a:r>
-              <a:rPr lang="en-US" sz="1800" dirty="0">
+              <a:rPr lang="en-US" sz="1800" spc="-18" kern="0" dirty="0">
                 <a:solidFill>
                   <a:srgbClr val="FFFFFF"/>
                 </a:solidFill>
@@ -9248,7 +9248,7 @@
           <a:p>
             <a:pPr indent="0" marL="0">
               <a:lnSpc>
-                <a:spcPts val="1800"/>
+                <a:spcPts val="1850"/>
               </a:lnSpc>
               <a:buNone/>
             </a:pPr>
@@ -9265,7 +9265,7 @@
             </a:r>
             <a:pPr indent="0" marL="0">
               <a:lnSpc>
-                <a:spcPts val="1800"/>
+                <a:spcPts val="1850"/>
               </a:lnSpc>
               <a:buNone/>
             </a:pPr>
@@ -9282,7 +9282,7 @@
             </a:r>
             <a:pPr indent="0" marL="0">
               <a:lnSpc>
-                <a:spcPts val="1800"/>
+                <a:spcPts val="1850"/>
               </a:lnSpc>
               <a:buNone/>
             </a:pPr>
@@ -9299,7 +9299,7 @@
             </a:r>
             <a:pPr indent="0" marL="0">
               <a:lnSpc>
-                <a:spcPts val="1800"/>
+                <a:spcPts val="1850"/>
               </a:lnSpc>
               <a:buNone/>
             </a:pPr>
@@ -9316,7 +9316,7 @@
             </a:r>
             <a:pPr indent="0" marL="0">
               <a:lnSpc>
-                <a:spcPts val="1800"/>
+                <a:spcPts val="1850"/>
               </a:lnSpc>
               <a:buNone/>
             </a:pPr>
@@ -9449,7 +9449,7 @@
               <a:buNone/>
             </a:pPr>
             <a:r>
-              <a:rPr lang="en-US" sz="4000" b="1" dirty="0">
+              <a:rPr lang="en-US" sz="4000" b="1" spc="-120" kern="0" dirty="0">
                 <a:solidFill>
                   <a:srgbClr val="16224E"/>
                 </a:solidFill>
@@ -9488,7 +9488,7 @@
               <a:buNone/>
             </a:pPr>
             <a:r>
-              <a:rPr lang="en-US" sz="1700" dirty="0">
+              <a:rPr lang="en-US" sz="1700" spc="-17" kern="0" dirty="0">
                 <a:solidFill>
                   <a:srgbClr val="4A5578"/>
                 </a:solidFill>
@@ -9502,7 +9502,7 @@
               <a:buNone/>
             </a:pPr>
             <a:r>
-              <a:rPr lang="en-US" sz="1700" b="1" dirty="0">
+              <a:rPr lang="en-US" sz="1700" b="1" spc="-17" kern="0" dirty="0">
                 <a:solidFill>
                   <a:srgbClr val="16224E"/>
                 </a:solidFill>
@@ -9816,7 +9816,7 @@
           <a:p>
             <a:pPr indent="0" marL="0">
               <a:lnSpc>
-                <a:spcPts val="1900"/>
+                <a:spcPts val="1850"/>
               </a:lnSpc>
               <a:buNone/>
             </a:pPr>
@@ -9833,7 +9833,7 @@
             </a:r>
             <a:pPr indent="0" marL="0">
               <a:lnSpc>
-                <a:spcPts val="1900"/>
+                <a:spcPts val="1850"/>
               </a:lnSpc>
               <a:buNone/>
             </a:pPr>
@@ -9850,7 +9850,7 @@
             </a:r>
             <a:pPr indent="0" marL="0">
               <a:lnSpc>
-                <a:spcPts val="1900"/>
+                <a:spcPts val="1850"/>
               </a:lnSpc>
               <a:buNone/>
             </a:pPr>
@@ -9983,7 +9983,7 @@
           <a:p>
             <a:pPr indent="0" marL="0">
               <a:lnSpc>
-                <a:spcPts val="1600"/>
+                <a:spcPts val="1800"/>
               </a:lnSpc>
               <a:buNone/>
             </a:pPr>
@@ -10000,7 +10000,7 @@
             </a:r>
             <a:pPr indent="0" marL="0">
               <a:lnSpc>
-                <a:spcPts val="1600"/>
+                <a:spcPts val="1800"/>
               </a:lnSpc>
               <a:buNone/>
             </a:pPr>
@@ -10017,7 +10017,7 @@
             </a:r>
             <a:pPr indent="0" marL="0">
               <a:lnSpc>
-                <a:spcPts val="1600"/>
+                <a:spcPts val="1800"/>
               </a:lnSpc>
               <a:buNone/>
             </a:pPr>
@@ -10210,7 +10210,7 @@
               <a:buNone/>
             </a:pPr>
             <a:r>
-              <a:rPr lang="en-US" sz="3200" b="1" dirty="0">
+              <a:rPr lang="en-US" sz="3200" b="1" spc="-96" kern="0" dirty="0">
                 <a:solidFill>
                   <a:srgbClr val="FFFFFF"/>
                 </a:solidFill>
@@ -10224,7 +10224,7 @@
               <a:buNone/>
             </a:pPr>
             <a:r>
-              <a:rPr lang="en-US" sz="3200" b="1" dirty="0">
+              <a:rPr lang="en-US" sz="3200" b="1" spc="-96" kern="0" dirty="0">
                 <a:solidFill>
                   <a:srgbClr val="FF8FC0"/>
                 </a:solidFill>
@@ -10302,7 +10302,7 @@
               <a:buNone/>
             </a:pPr>
             <a:r>
-              <a:rPr lang="en-US" sz="1900" dirty="0">
+              <a:rPr lang="en-US" sz="1900" spc="-19" kern="0" dirty="0">
                 <a:solidFill>
                   <a:srgbClr val="FFFFFF"/>
                 </a:solidFill>
@@ -10380,7 +10380,7 @@
               <a:buNone/>
             </a:pPr>
             <a:r>
-              <a:rPr lang="en-US" sz="1900" dirty="0">
+              <a:rPr lang="en-US" sz="1900" spc="-19" kern="0" dirty="0">
                 <a:solidFill>
                   <a:srgbClr val="FFFFFF"/>
                 </a:solidFill>
@@ -10500,7 +10500,7 @@
               <a:buNone/>
             </a:pPr>
             <a:r>
-              <a:rPr lang="en-US" sz="1900" b="1" dirty="0">
+              <a:rPr lang="en-US" sz="1900" b="1" spc="-19" kern="0" dirty="0">
                 <a:solidFill>
                   <a:srgbClr val="FFFFFF"/>
                 </a:solidFill>
@@ -10537,7 +10537,7 @@
           <a:p>
             <a:pPr indent="0" marL="0">
               <a:lnSpc>
-                <a:spcPts val="1700"/>
+                <a:spcPts val="1800"/>
               </a:lnSpc>
               <a:buNone/>
             </a:pPr>
@@ -10554,7 +10554,7 @@
             </a:r>
             <a:pPr indent="0" marL="0">
               <a:lnSpc>
-                <a:spcPts val="1700"/>
+                <a:spcPts val="1800"/>
               </a:lnSpc>
               <a:buNone/>
             </a:pPr>
@@ -10571,7 +10571,7 @@
             </a:r>
             <a:pPr indent="0" marL="0">
               <a:lnSpc>
-                <a:spcPts val="1700"/>
+                <a:spcPts val="1800"/>
               </a:lnSpc>
               <a:buNone/>
             </a:pPr>
@@ -10707,7 +10707,7 @@
               <a:buNone/>
             </a:pPr>
             <a:r>
-              <a:rPr lang="en-US" sz="2700" b="1" dirty="0">
+              <a:rPr lang="en-US" sz="2700" b="1" spc="-59" kern="0" dirty="0">
                 <a:solidFill>
                   <a:srgbClr val="16224E"/>
                 </a:solidFill>
@@ -10724,7 +10724,7 @@
               <a:buNone/>
             </a:pPr>
             <a:r>
-              <a:rPr lang="en-US" sz="2700" b="1" dirty="0">
+              <a:rPr lang="en-US" sz="2700" b="1" spc="-59" kern="0" dirty="0">
                 <a:solidFill>
                   <a:srgbClr val="E80070"/>
                 </a:solidFill>
@@ -10741,7 +10741,7 @@
               <a:buNone/>
             </a:pPr>
             <a:r>
-              <a:rPr lang="en-US" sz="2700" b="1" dirty="0">
+              <a:rPr lang="en-US" sz="2700" b="1" spc="-59" kern="0" dirty="0">
                 <a:solidFill>
                   <a:srgbClr val="16224E"/>
                 </a:solidFill>
@@ -10842,7 +10842,7 @@
           <a:p>
             <a:pPr indent="0" marL="0">
               <a:lnSpc>
-                <a:spcPts val="1600"/>
+                <a:spcPts val="1900"/>
               </a:lnSpc>
               <a:buNone/>
             </a:pPr>
@@ -10884,7 +10884,7 @@
           <a:p>
             <a:pPr indent="0" marL="0">
               <a:lnSpc>
-                <a:spcPts val="1500"/>
+                <a:spcPts val="1700"/>
               </a:lnSpc>
               <a:buNone/>
             </a:pPr>
@@ -10901,7 +10901,7 @@
             </a:r>
             <a:pPr indent="0" marL="0">
               <a:lnSpc>
-                <a:spcPts val="1500"/>
+                <a:spcPts val="1700"/>
               </a:lnSpc>
               <a:buNone/>
             </a:pPr>
@@ -10918,7 +10918,7 @@
             </a:r>
             <a:pPr indent="0" marL="0">
               <a:lnSpc>
-                <a:spcPts val="1500"/>
+                <a:spcPts val="1700"/>
               </a:lnSpc>
               <a:buNone/>
             </a:pPr>
@@ -11026,7 +11026,7 @@
           <a:p>
             <a:pPr indent="0" marL="0">
               <a:lnSpc>
-                <a:spcPts val="1600"/>
+                <a:spcPts val="1900"/>
               </a:lnSpc>
               <a:buNone/>
             </a:pPr>
@@ -11068,7 +11068,7 @@
           <a:p>
             <a:pPr indent="0" marL="0">
               <a:lnSpc>
-                <a:spcPts val="1500"/>
+                <a:spcPts val="1700"/>
               </a:lnSpc>
               <a:buNone/>
             </a:pPr>
@@ -11085,7 +11085,7 @@
             </a:r>
             <a:pPr indent="0" marL="0">
               <a:lnSpc>
-                <a:spcPts val="1500"/>
+                <a:spcPts val="1700"/>
               </a:lnSpc>
               <a:buNone/>
             </a:pPr>
@@ -11102,7 +11102,7 @@
             </a:r>
             <a:pPr indent="0" marL="0">
               <a:lnSpc>
-                <a:spcPts val="1500"/>
+                <a:spcPts val="1700"/>
               </a:lnSpc>
               <a:buNone/>
             </a:pPr>
@@ -11210,7 +11210,7 @@
           <a:p>
             <a:pPr indent="0" marL="0">
               <a:lnSpc>
-                <a:spcPts val="1600"/>
+                <a:spcPts val="1900"/>
               </a:lnSpc>
               <a:buNone/>
             </a:pPr>
@@ -11252,7 +11252,7 @@
           <a:p>
             <a:pPr indent="0" marL="0">
               <a:lnSpc>
-                <a:spcPts val="1500"/>
+                <a:spcPts val="1700"/>
               </a:lnSpc>
               <a:buNone/>
             </a:pPr>
@@ -11269,7 +11269,7 @@
             </a:r>
             <a:pPr indent="0" marL="0">
               <a:lnSpc>
-                <a:spcPts val="1500"/>
+                <a:spcPts val="1700"/>
               </a:lnSpc>
               <a:buNone/>
             </a:pPr>
@@ -11375,7 +11375,7 @@
           <a:p>
             <a:pPr indent="0" marL="0">
               <a:lnSpc>
-                <a:spcPts val="1600"/>
+                <a:spcPts val="1900"/>
               </a:lnSpc>
               <a:buNone/>
             </a:pPr>
@@ -11417,7 +11417,7 @@
           <a:p>
             <a:pPr indent="0" marL="0">
               <a:lnSpc>
-                <a:spcPts val="1500"/>
+                <a:spcPts val="1700"/>
               </a:lnSpc>
               <a:buNone/>
             </a:pPr>
@@ -11434,7 +11434,7 @@
             </a:r>
             <a:pPr indent="0" marL="0">
               <a:lnSpc>
-                <a:spcPts val="1500"/>
+                <a:spcPts val="1700"/>
               </a:lnSpc>
               <a:buNone/>
             </a:pPr>
@@ -11451,7 +11451,7 @@
             </a:r>
             <a:pPr indent="0" marL="0">
               <a:lnSpc>
-                <a:spcPts val="1500"/>
+                <a:spcPts val="1700"/>
               </a:lnSpc>
               <a:buNone/>
             </a:pPr>
@@ -11557,7 +11557,7 @@
           <a:p>
             <a:pPr indent="0" marL="0">
               <a:lnSpc>
-                <a:spcPts val="1600"/>
+                <a:spcPts val="1900"/>
               </a:lnSpc>
               <a:buNone/>
             </a:pPr>
@@ -11599,7 +11599,7 @@
           <a:p>
             <a:pPr indent="0" marL="0">
               <a:lnSpc>
-                <a:spcPts val="1500"/>
+                <a:spcPts val="1700"/>
               </a:lnSpc>
               <a:buNone/>
             </a:pPr>
@@ -11616,7 +11616,7 @@
             </a:r>
             <a:pPr indent="0" marL="0">
               <a:lnSpc>
-                <a:spcPts val="1500"/>
+                <a:spcPts val="1700"/>
               </a:lnSpc>
               <a:buNone/>
             </a:pPr>
@@ -11633,7 +11633,7 @@
             </a:r>
             <a:pPr indent="0" marL="0">
               <a:lnSpc>
-                <a:spcPts val="1500"/>
+                <a:spcPts val="1700"/>
               </a:lnSpc>
               <a:buNone/>
             </a:pPr>
@@ -11739,7 +11739,7 @@
           <a:p>
             <a:pPr indent="0" marL="0">
               <a:lnSpc>
-                <a:spcPts val="1600"/>
+                <a:spcPts val="1900"/>
               </a:lnSpc>
               <a:buNone/>
             </a:pPr>
@@ -11781,7 +11781,7 @@
           <a:p>
             <a:pPr indent="0" marL="0">
               <a:lnSpc>
-                <a:spcPts val="1500"/>
+                <a:spcPts val="1700"/>
               </a:lnSpc>
               <a:buNone/>
             </a:pPr>
@@ -11798,7 +11798,7 @@
             </a:r>
             <a:pPr indent="0" marL="0">
               <a:lnSpc>
-                <a:spcPts val="1500"/>
+                <a:spcPts val="1700"/>
               </a:lnSpc>
               <a:buNone/>
             </a:pPr>
@@ -11904,7 +11904,7 @@
           <a:p>
             <a:pPr indent="0" marL="0">
               <a:lnSpc>
-                <a:spcPts val="1600"/>
+                <a:spcPts val="1900"/>
               </a:lnSpc>
               <a:buNone/>
             </a:pPr>
@@ -11946,7 +11946,7 @@
           <a:p>
             <a:pPr indent="0" marL="0">
               <a:lnSpc>
-                <a:spcPts val="1500"/>
+                <a:spcPts val="1700"/>
               </a:lnSpc>
               <a:buNone/>
             </a:pPr>
@@ -11963,7 +11963,7 @@
             </a:r>
             <a:pPr indent="0" marL="0">
               <a:lnSpc>
-                <a:spcPts val="1500"/>
+                <a:spcPts val="1700"/>
               </a:lnSpc>
               <a:buNone/>
             </a:pPr>
@@ -11980,7 +11980,7 @@
             </a:r>
             <a:pPr indent="0" marL="0">
               <a:lnSpc>
-                <a:spcPts val="1500"/>
+                <a:spcPts val="1700"/>
               </a:lnSpc>
               <a:buNone/>
             </a:pPr>
@@ -12113,7 +12113,7 @@
           <a:p>
             <a:pPr indent="0" marL="0">
               <a:lnSpc>
-                <a:spcPts val="1600"/>
+                <a:spcPts val="1800"/>
               </a:lnSpc>
               <a:buNone/>
             </a:pPr>
@@ -12130,7 +12130,7 @@
             </a:r>
             <a:pPr indent="0" marL="0">
               <a:lnSpc>
-                <a:spcPts val="1600"/>
+                <a:spcPts val="1800"/>
               </a:lnSpc>
               <a:buNone/>
             </a:pPr>
@@ -12147,7 +12147,7 @@
             </a:r>
             <a:pPr indent="0" marL="0">
               <a:lnSpc>
-                <a:spcPts val="1600"/>
+                <a:spcPts val="1800"/>
               </a:lnSpc>
               <a:buNone/>
             </a:pPr>
@@ -12164,7 +12164,7 @@
             </a:r>
             <a:pPr indent="0" marL="0">
               <a:lnSpc>
-                <a:spcPts val="1600"/>
+                <a:spcPts val="1800"/>
               </a:lnSpc>
               <a:buNone/>
             </a:pPr>
@@ -12181,7 +12181,7 @@
             </a:r>
             <a:pPr indent="0" marL="0">
               <a:lnSpc>
-                <a:spcPts val="1600"/>
+                <a:spcPts val="1800"/>
               </a:lnSpc>
               <a:buNone/>
             </a:pPr>
@@ -12390,12 +12390,12 @@
           <a:p>
             <a:pPr indent="0" marL="0">
               <a:lnSpc>
-                <a:spcPts val="3400"/>
-              </a:lnSpc>
-              <a:buNone/>
-            </a:pPr>
-            <a:r>
-              <a:rPr lang="en-US" sz="2900" b="1" dirty="0">
+                <a:spcPts val="3100"/>
+              </a:lnSpc>
+              <a:buNone/>
+            </a:pPr>
+            <a:r>
+              <a:rPr lang="en-US" sz="2900" b="1" spc="-64" kern="0" dirty="0">
                 <a:solidFill>
                   <a:srgbClr val="16224E"/>
                 </a:solidFill>
@@ -12407,12 +12407,12 @@
             </a:r>
             <a:pPr indent="0" marL="0">
               <a:lnSpc>
-                <a:spcPts val="3400"/>
-              </a:lnSpc>
-              <a:buNone/>
-            </a:pPr>
-            <a:r>
-              <a:rPr lang="en-US" sz="2900" b="1" dirty="0">
+                <a:spcPts val="3100"/>
+              </a:lnSpc>
+              <a:buNone/>
+            </a:pPr>
+            <a:r>
+              <a:rPr lang="en-US" sz="2900" b="1" spc="-64" kern="0" dirty="0">
                 <a:solidFill>
                   <a:srgbClr val="E80070"/>
                 </a:solidFill>
@@ -12499,7 +12499,7 @@
         <p:spPr>
           <a:xfrm>
             <a:off x="1097280" y="1847088"/>
-            <a:ext cx="5029200" cy="685800"/>
+            <a:ext cx="5029200" cy="768096"/>
           </a:xfrm>
           <a:prstGeom prst="rect">
             <a:avLst/>
@@ -12513,7 +12513,7 @@
           <a:p>
             <a:pPr indent="0" marL="0">
               <a:lnSpc>
-                <a:spcPts val="1700"/>
+                <a:spcPts val="1900"/>
               </a:lnSpc>
               <a:buNone/>
             </a:pPr>
@@ -12530,7 +12530,7 @@
             </a:r>
             <a:pPr indent="0" marL="0">
               <a:lnSpc>
-                <a:spcPts val="1700"/>
+                <a:spcPts val="1900"/>
               </a:lnSpc>
               <a:buNone/>
             </a:pPr>
@@ -12557,7 +12557,7 @@
         </p:nvSpPr>
         <p:spPr>
           <a:xfrm>
-            <a:off x="658368" y="2679192"/>
+            <a:off x="658368" y="2752344"/>
             <a:ext cx="292608" cy="292608"/>
           </a:xfrm>
           <a:prstGeom prst="ellipse">
@@ -12582,7 +12582,7 @@
         </p:nvSpPr>
         <p:spPr>
           <a:xfrm>
-            <a:off x="658368" y="2679192"/>
+            <a:off x="658368" y="2752344"/>
             <a:ext cx="292608" cy="292608"/>
           </a:xfrm>
           <a:prstGeom prst="rect">
@@ -12621,8 +12621,8 @@
         </p:nvSpPr>
         <p:spPr>
           <a:xfrm>
-            <a:off x="1097280" y="2651760"/>
-            <a:ext cx="5029200" cy="685800"/>
+            <a:off x="1097280" y="2724912"/>
+            <a:ext cx="5029200" cy="768096"/>
           </a:xfrm>
           <a:prstGeom prst="rect">
             <a:avLst/>
@@ -12636,7 +12636,7 @@
           <a:p>
             <a:pPr indent="0" marL="0">
               <a:lnSpc>
-                <a:spcPts val="1700"/>
+                <a:spcPts val="1900"/>
               </a:lnSpc>
               <a:buNone/>
             </a:pPr>
@@ -12653,7 +12653,7 @@
             </a:r>
             <a:pPr indent="0" marL="0">
               <a:lnSpc>
-                <a:spcPts val="1700"/>
+                <a:spcPts val="1900"/>
               </a:lnSpc>
               <a:buNone/>
             </a:pPr>
@@ -12680,7 +12680,7 @@
         </p:nvSpPr>
         <p:spPr>
           <a:xfrm>
-            <a:off x="658368" y="3483864"/>
+            <a:off x="658368" y="3630168"/>
             <a:ext cx="292608" cy="292608"/>
           </a:xfrm>
           <a:prstGeom prst="ellipse">
@@ -12705,7 +12705,7 @@
         </p:nvSpPr>
         <p:spPr>
           <a:xfrm>
-            <a:off x="658368" y="3483864"/>
+            <a:off x="658368" y="3630168"/>
             <a:ext cx="292608" cy="292608"/>
           </a:xfrm>
           <a:prstGeom prst="rect">
@@ -12744,8 +12744,8 @@
         </p:nvSpPr>
         <p:spPr>
           <a:xfrm>
-            <a:off x="1097280" y="3456432"/>
-            <a:ext cx="5029200" cy="685800"/>
+            <a:off x="1097280" y="3602736"/>
+            <a:ext cx="5029200" cy="768096"/>
           </a:xfrm>
           <a:prstGeom prst="rect">
             <a:avLst/>
@@ -12759,7 +12759,7 @@
           <a:p>
             <a:pPr indent="0" marL="0">
               <a:lnSpc>
-                <a:spcPts val="1700"/>
+                <a:spcPts val="1900"/>
               </a:lnSpc>
               <a:buNone/>
             </a:pPr>
@@ -12776,7 +12776,7 @@
             </a:r>
             <a:pPr indent="0" marL="0">
               <a:lnSpc>
-                <a:spcPts val="1700"/>
+                <a:spcPts val="1900"/>
               </a:lnSpc>
               <a:buNone/>
             </a:pPr>
@@ -12803,12 +12803,12 @@
         </p:nvSpPr>
         <p:spPr>
           <a:xfrm>
-            <a:off x="658368" y="4370832"/>
-            <a:ext cx="5486400" cy="914400"/>
+            <a:off x="658368" y="4617720"/>
+            <a:ext cx="5486400" cy="1024128"/>
           </a:xfrm>
           <a:prstGeom prst="roundRect">
             <a:avLst>
-              <a:gd name="adj" fmla="val 9000"/>
+              <a:gd name="adj" fmla="val 8036"/>
             </a:avLst>
           </a:prstGeom>
           <a:solidFill>
@@ -12830,8 +12830,8 @@
         </p:nvSpPr>
         <p:spPr>
           <a:xfrm>
-            <a:off x="658368" y="4370832"/>
-            <a:ext cx="45720" cy="914400"/>
+            <a:off x="658368" y="4617720"/>
+            <a:ext cx="45720" cy="1024128"/>
           </a:xfrm>
           <a:prstGeom prst="rect">
             <a:avLst/>
@@ -12855,7 +12855,7 @@
         </p:nvSpPr>
         <p:spPr>
           <a:xfrm>
-            <a:off x="877824" y="4462272"/>
+            <a:off x="877824" y="4709160"/>
             <a:ext cx="4572000" cy="201168"/>
           </a:xfrm>
           <a:prstGeom prst="rect">
@@ -12894,8 +12894,8 @@
         </p:nvSpPr>
         <p:spPr>
           <a:xfrm>
-            <a:off x="877824" y="4663440"/>
-            <a:ext cx="5029200" cy="566928"/>
+            <a:off x="877824" y="4937760"/>
+            <a:ext cx="5029200" cy="658368"/>
           </a:xfrm>
           <a:prstGeom prst="rect">
             <a:avLst/>
@@ -12909,7 +12909,7 @@
           <a:p>
             <a:pPr indent="0" marL="0">
               <a:lnSpc>
-                <a:spcPts val="1500"/>
+                <a:spcPts val="1700"/>
               </a:lnSpc>
               <a:buNone/>
             </a:pPr>
@@ -12926,7 +12926,7 @@
             </a:r>
             <a:pPr indent="0" marL="0">
               <a:lnSpc>
-                <a:spcPts val="1500"/>
+                <a:spcPts val="1700"/>
               </a:lnSpc>
               <a:buNone/>
             </a:pPr>
@@ -12943,7 +12943,7 @@
             </a:r>
             <a:pPr indent="0" marL="0">
               <a:lnSpc>
-                <a:spcPts val="1500"/>
+                <a:spcPts val="1700"/>
               </a:lnSpc>
               <a:buNone/>
             </a:pPr>
@@ -12960,7 +12960,7 @@
             </a:r>
             <a:pPr indent="0" marL="0">
               <a:lnSpc>
-                <a:spcPts val="1500"/>
+                <a:spcPts val="1700"/>
               </a:lnSpc>
               <a:buNone/>
             </a:pPr>
@@ -12977,7 +12977,7 @@
             </a:r>
             <a:pPr indent="0" marL="0">
               <a:lnSpc>
-                <a:spcPts val="1500"/>
+                <a:spcPts val="1700"/>
               </a:lnSpc>
               <a:buNone/>
             </a:pPr>
@@ -13733,12 +13733,12 @@
           <a:p>
             <a:pPr indent="0" marL="0">
               <a:lnSpc>
-                <a:spcPts val="3400"/>
-              </a:lnSpc>
-              <a:buNone/>
-            </a:pPr>
-            <a:r>
-              <a:rPr lang="en-US" sz="2800" b="1" dirty="0">
+                <a:spcPts val="3000"/>
+              </a:lnSpc>
+              <a:buNone/>
+            </a:pPr>
+            <a:r>
+              <a:rPr lang="en-US" sz="2800" b="1" spc="-62" kern="0" dirty="0">
                 <a:solidFill>
                   <a:srgbClr val="16224E"/>
                 </a:solidFill>
@@ -13750,12 +13750,12 @@
             </a:r>
             <a:pPr indent="0" marL="0">
               <a:lnSpc>
-                <a:spcPts val="3400"/>
-              </a:lnSpc>
-              <a:buNone/>
-            </a:pPr>
-            <a:r>
-              <a:rPr lang="en-US" sz="2800" b="1" dirty="0">
+                <a:spcPts val="3000"/>
+              </a:lnSpc>
+              <a:buNone/>
+            </a:pPr>
+            <a:r>
+              <a:rPr lang="en-US" sz="2800" b="1" spc="-62" kern="0" dirty="0">
                 <a:solidFill>
                   <a:srgbClr val="E80070"/>
                 </a:solidFill>
@@ -13844,7 +13844,7 @@
           <a:p>
             <a:pPr indent="0" marL="0">
               <a:lnSpc>
-                <a:spcPts val="1400"/>
+                <a:spcPts val="1600"/>
               </a:lnSpc>
               <a:buNone/>
             </a:pPr>
@@ -13977,7 +13977,7 @@
           <a:p>
             <a:pPr indent="0" marL="0">
               <a:lnSpc>
-                <a:spcPts val="1400"/>
+                <a:spcPts val="1600"/>
               </a:lnSpc>
               <a:buNone/>
             </a:pPr>
@@ -14110,7 +14110,7 @@
           <a:p>
             <a:pPr indent="0" marL="0">
               <a:lnSpc>
-                <a:spcPts val="1400"/>
+                <a:spcPts val="1600"/>
               </a:lnSpc>
               <a:buNone/>
             </a:pPr>
@@ -14243,7 +14243,7 @@
           <a:p>
             <a:pPr indent="0" marL="0">
               <a:lnSpc>
-                <a:spcPts val="1400"/>
+                <a:spcPts val="1600"/>
               </a:lnSpc>
               <a:buNone/>
             </a:pPr>
@@ -14376,7 +14376,7 @@
           <a:p>
             <a:pPr indent="0" marL="0">
               <a:lnSpc>
-                <a:spcPts val="1400"/>
+                <a:spcPts val="1600"/>
               </a:lnSpc>
               <a:buNone/>
             </a:pPr>
@@ -15333,7 +15333,7 @@
           <a:p>
             <a:pPr indent="0" marL="0">
               <a:lnSpc>
-                <a:spcPts val="1600"/>
+                <a:spcPts val="1800"/>
               </a:lnSpc>
               <a:buNone/>
             </a:pPr>
@@ -15350,7 +15350,7 @@
             </a:r>
             <a:pPr indent="0" marL="0">
               <a:lnSpc>
-                <a:spcPts val="1600"/>
+                <a:spcPts val="1800"/>
               </a:lnSpc>
               <a:buNone/>
             </a:pPr>
@@ -15367,7 +15367,7 @@
             </a:r>
             <a:pPr indent="0" marL="0">
               <a:lnSpc>
-                <a:spcPts val="1600"/>
+                <a:spcPts val="1800"/>
               </a:lnSpc>
               <a:buNone/>
             </a:pPr>
@@ -15384,7 +15384,7 @@
             </a:r>
             <a:pPr indent="0" marL="0">
               <a:lnSpc>
-                <a:spcPts val="1600"/>
+                <a:spcPts val="1800"/>
               </a:lnSpc>
               <a:buNone/>
             </a:pPr>
@@ -15401,7 +15401,7 @@
             </a:r>
             <a:pPr indent="0" marL="0">
               <a:lnSpc>
-                <a:spcPts val="1600"/>
+                <a:spcPts val="1800"/>
               </a:lnSpc>
               <a:buNone/>
             </a:pPr>
@@ -15615,7 +15615,7 @@
               <a:buNone/>
             </a:pPr>
             <a:r>
-              <a:rPr lang="en-US" sz="2600" b="1" dirty="0">
+              <a:rPr lang="en-US" sz="2600" b="1" spc="-57" kern="0" dirty="0">
                 <a:solidFill>
                   <a:srgbClr val="16224E"/>
                 </a:solidFill>
@@ -15632,7 +15632,7 @@
               <a:buNone/>
             </a:pPr>
             <a:r>
-              <a:rPr lang="en-US" sz="2600" b="1" dirty="0">
+              <a:rPr lang="en-US" sz="2600" b="1" spc="-57" kern="0" dirty="0">
                 <a:solidFill>
                   <a:srgbClr val="E80070"/>
                 </a:solidFill>
@@ -15649,7 +15649,7 @@
               <a:buNone/>
             </a:pPr>
             <a:r>
-              <a:rPr lang="en-US" sz="2600" b="1" dirty="0">
+              <a:rPr lang="en-US" sz="2600" b="1" spc="-57" kern="0" dirty="0">
                 <a:solidFill>
                   <a:srgbClr val="16224E"/>
                 </a:solidFill>
@@ -15666,7 +15666,7 @@
               <a:buNone/>
             </a:pPr>
             <a:r>
-              <a:rPr lang="en-US" sz="2600" b="1" dirty="0">
+              <a:rPr lang="en-US" sz="2600" b="1" spc="-57" kern="0" dirty="0">
                 <a:solidFill>
                   <a:srgbClr val="6D2077"/>
                 </a:solidFill>
@@ -15683,7 +15683,7 @@
               <a:buNone/>
             </a:pPr>
             <a:r>
-              <a:rPr lang="en-US" sz="2600" b="1" dirty="0">
+              <a:rPr lang="en-US" sz="2600" b="1" spc="-57" kern="0" dirty="0">
                 <a:solidFill>
                   <a:srgbClr val="16224E"/>
                 </a:solidFill>
@@ -15749,7 +15749,7 @@
               <a:buNone/>
             </a:pPr>
             <a:r>
-              <a:rPr lang="en-US" sz="1500" b="1" dirty="0">
+              <a:rPr lang="en-US" sz="1500" b="1" spc="-15" kern="0" dirty="0">
                 <a:solidFill>
                   <a:srgbClr val="E80070"/>
                 </a:solidFill>
@@ -15786,7 +15786,7 @@
           <a:p>
             <a:pPr indent="0" marL="0">
               <a:lnSpc>
-                <a:spcPts val="1600"/>
+                <a:spcPts val="1800"/>
               </a:lnSpc>
               <a:buNone/>
             </a:pPr>
@@ -15803,7 +15803,7 @@
             </a:r>
             <a:pPr indent="0" marL="0">
               <a:lnSpc>
-                <a:spcPts val="1600"/>
+                <a:spcPts val="1800"/>
               </a:lnSpc>
               <a:buNone/>
             </a:pPr>
@@ -15845,7 +15845,7 @@
           <a:p>
             <a:pPr indent="0" marL="0">
               <a:lnSpc>
-                <a:spcPts val="1500"/>
+                <a:spcPts val="1550"/>
               </a:lnSpc>
               <a:buNone/>
             </a:pPr>
@@ -15887,7 +15887,7 @@
           <a:p>
             <a:pPr indent="0" marL="0">
               <a:lnSpc>
-                <a:spcPts val="1600"/>
+                <a:spcPts val="1800"/>
               </a:lnSpc>
               <a:buNone/>
             </a:pPr>
@@ -15904,7 +15904,7 @@
             </a:r>
             <a:pPr indent="0" marL="0">
               <a:lnSpc>
-                <a:spcPts val="1600"/>
+                <a:spcPts val="1800"/>
               </a:lnSpc>
               <a:buNone/>
             </a:pPr>
@@ -15975,7 +15975,7 @@
               <a:buNone/>
             </a:pPr>
             <a:r>
-              <a:rPr lang="en-US" sz="1500" b="1" dirty="0">
+              <a:rPr lang="en-US" sz="1500" b="1" spc="-15" kern="0" dirty="0">
                 <a:solidFill>
                   <a:srgbClr val="6D2077"/>
                 </a:solidFill>
@@ -16012,7 +16012,7 @@
           <a:p>
             <a:pPr indent="0" marL="0">
               <a:lnSpc>
-                <a:spcPts val="1600"/>
+                <a:spcPts val="1800"/>
               </a:lnSpc>
               <a:buNone/>
             </a:pPr>
@@ -16029,7 +16029,7 @@
             </a:r>
             <a:pPr indent="0" marL="0">
               <a:lnSpc>
-                <a:spcPts val="1600"/>
+                <a:spcPts val="1800"/>
               </a:lnSpc>
               <a:buNone/>
             </a:pPr>
@@ -16071,7 +16071,7 @@
           <a:p>
             <a:pPr indent="0" marL="0">
               <a:lnSpc>
-                <a:spcPts val="1500"/>
+                <a:spcPts val="1550"/>
               </a:lnSpc>
               <a:buNone/>
             </a:pPr>
@@ -16113,7 +16113,7 @@
           <a:p>
             <a:pPr indent="0" marL="0">
               <a:lnSpc>
-                <a:spcPts val="1600"/>
+                <a:spcPts val="1800"/>
               </a:lnSpc>
               <a:buNone/>
             </a:pPr>
@@ -16130,7 +16130,7 @@
             </a:r>
             <a:pPr indent="0" marL="0">
               <a:lnSpc>
-                <a:spcPts val="1600"/>
+                <a:spcPts val="1800"/>
               </a:lnSpc>
               <a:buNone/>
             </a:pPr>
@@ -16158,11 +16158,11 @@
         <p:spPr>
           <a:xfrm>
             <a:off x="658368" y="5285232"/>
-            <a:ext cx="10874959" cy="804672"/>
+            <a:ext cx="10874959" cy="859536"/>
           </a:xfrm>
           <a:prstGeom prst="roundRect">
             <a:avLst>
-              <a:gd name="adj" fmla="val 11364"/>
+              <a:gd name="adj" fmla="val 10638"/>
             </a:avLst>
           </a:prstGeom>
           <a:solidFill>
@@ -16185,7 +16185,7 @@
         <p:spPr>
           <a:xfrm>
             <a:off x="658368" y="5285232"/>
-            <a:ext cx="45720" cy="804672"/>
+            <a:ext cx="45720" cy="859536"/>
           </a:xfrm>
           <a:prstGeom prst="rect">
             <a:avLst/>
@@ -16249,7 +16249,7 @@
         <p:spPr>
           <a:xfrm>
             <a:off x="914400" y="5596128"/>
-            <a:ext cx="10362895" cy="420624"/>
+            <a:ext cx="10362895" cy="475488"/>
           </a:xfrm>
           <a:prstGeom prst="rect">
             <a:avLst/>
@@ -16263,7 +16263,7 @@
           <a:p>
             <a:pPr indent="0" marL="0">
               <a:lnSpc>
-                <a:spcPts val="1600"/>
+                <a:spcPts val="1800"/>
               </a:lnSpc>
               <a:buNone/>
             </a:pPr>
@@ -16280,7 +16280,7 @@
             </a:r>
             <a:pPr indent="0" marL="0">
               <a:lnSpc>
-                <a:spcPts val="1600"/>
+                <a:spcPts val="1800"/>
               </a:lnSpc>
               <a:buNone/>
             </a:pPr>
@@ -16297,7 +16297,7 @@
             </a:r>
             <a:pPr indent="0" marL="0">
               <a:lnSpc>
-                <a:spcPts val="1600"/>
+                <a:spcPts val="1800"/>
               </a:lnSpc>
               <a:buNone/>
             </a:pPr>
@@ -16314,7 +16314,7 @@
             </a:r>
             <a:pPr indent="0" marL="0">
               <a:lnSpc>
-                <a:spcPts val="1600"/>
+                <a:spcPts val="1800"/>
               </a:lnSpc>
               <a:buNone/>
             </a:pPr>
@@ -16523,12 +16523,12 @@
           <a:p>
             <a:pPr indent="0" marL="0">
               <a:lnSpc>
-                <a:spcPts val="3400"/>
-              </a:lnSpc>
-              <a:buNone/>
-            </a:pPr>
-            <a:r>
-              <a:rPr lang="en-US" sz="2800" b="1" dirty="0">
+                <a:spcPts val="3000"/>
+              </a:lnSpc>
+              <a:buNone/>
+            </a:pPr>
+            <a:r>
+              <a:rPr lang="en-US" sz="2800" b="1" spc="-62" kern="0" dirty="0">
                 <a:solidFill>
                   <a:srgbClr val="16224E"/>
                 </a:solidFill>
@@ -16540,12 +16540,12 @@
             </a:r>
             <a:pPr indent="0" marL="0">
               <a:lnSpc>
-                <a:spcPts val="3400"/>
-              </a:lnSpc>
-              <a:buNone/>
-            </a:pPr>
-            <a:r>
-              <a:rPr lang="en-US" sz="2800" b="1" dirty="0">
+                <a:spcPts val="3000"/>
+              </a:lnSpc>
+              <a:buNone/>
+            </a:pPr>
+            <a:r>
+              <a:rPr lang="en-US" sz="2800" b="1" spc="-62" kern="0" dirty="0">
                 <a:solidFill>
                   <a:srgbClr val="E80070"/>
                 </a:solidFill>
@@ -16611,7 +16611,7 @@
               <a:buNone/>
             </a:pPr>
             <a:r>
-              <a:rPr lang="en-US" sz="1450" b="1" dirty="0">
+              <a:rPr lang="en-US" sz="1450" b="1" spc="-14" kern="0" dirty="0">
                 <a:solidFill>
                   <a:srgbClr val="1D4F91"/>
                 </a:solidFill>
@@ -16902,7 +16902,7 @@
           <a:p>
             <a:pPr indent="0" marL="0">
               <a:lnSpc>
-                <a:spcPts val="1400"/>
+                <a:spcPts val="1600"/>
               </a:lnSpc>
               <a:buNone/>
             </a:pPr>
@@ -16983,7 +16983,7 @@
           <a:p>
             <a:pPr indent="0" marL="0">
               <a:lnSpc>
-                <a:spcPts val="1400"/>
+                <a:spcPts val="1550"/>
               </a:lnSpc>
               <a:buNone/>
             </a:pPr>
@@ -17064,7 +17064,7 @@
           <a:p>
             <a:pPr indent="0" marL="0">
               <a:lnSpc>
-                <a:spcPts val="1400"/>
+                <a:spcPts val="1600"/>
               </a:lnSpc>
               <a:buNone/>
             </a:pPr>
@@ -17081,7 +17081,7 @@
             </a:r>
             <a:pPr indent="0" marL="0">
               <a:lnSpc>
-                <a:spcPts val="1400"/>
+                <a:spcPts val="1600"/>
               </a:lnSpc>
               <a:buNone/>
             </a:pPr>
@@ -17152,7 +17152,7 @@
               <a:buNone/>
             </a:pPr>
             <a:r>
-              <a:rPr lang="en-US" sz="1450" b="1" dirty="0">
+              <a:rPr lang="en-US" sz="1450" b="1" spc="-14" kern="0" dirty="0">
                 <a:solidFill>
                   <a:srgbClr val="E80070"/>
                 </a:solidFill>
@@ -17357,7 +17357,7 @@
           <a:p>
             <a:pPr indent="0" marL="0">
               <a:lnSpc>
-                <a:spcPts val="1400"/>
+                <a:spcPts val="1600"/>
               </a:lnSpc>
               <a:buNone/>
             </a:pPr>
@@ -17438,7 +17438,7 @@
           <a:p>
             <a:pPr indent="0" marL="0">
               <a:lnSpc>
-                <a:spcPts val="1400"/>
+                <a:spcPts val="1550"/>
               </a:lnSpc>
               <a:buNone/>
             </a:pPr>
@@ -17519,7 +17519,7 @@
           <a:p>
             <a:pPr indent="0" marL="0">
               <a:lnSpc>
-                <a:spcPts val="1400"/>
+                <a:spcPts val="1600"/>
               </a:lnSpc>
               <a:buNone/>
             </a:pPr>
@@ -17590,7 +17590,7 @@
               <a:buNone/>
             </a:pPr>
             <a:r>
-              <a:rPr lang="en-US" sz="1450" b="1" dirty="0">
+              <a:rPr lang="en-US" sz="1450" b="1" spc="-14" kern="0" dirty="0">
                 <a:solidFill>
                   <a:srgbClr val="6D2077"/>
                 </a:solidFill>
@@ -17709,7 +17709,7 @@
           <a:p>
             <a:pPr indent="0" marL="0">
               <a:lnSpc>
-                <a:spcPts val="1400"/>
+                <a:spcPts val="1600"/>
               </a:lnSpc>
               <a:buNone/>
             </a:pPr>
@@ -17790,7 +17790,7 @@
           <a:p>
             <a:pPr indent="0" marL="0">
               <a:lnSpc>
-                <a:spcPts val="1400"/>
+                <a:spcPts val="1550"/>
               </a:lnSpc>
               <a:buNone/>
             </a:pPr>
@@ -17871,7 +17871,7 @@
           <a:p>
             <a:pPr indent="0" marL="0">
               <a:lnSpc>
-                <a:spcPts val="1400"/>
+                <a:spcPts val="1600"/>
               </a:lnSpc>
               <a:buNone/>
             </a:pPr>
@@ -17888,7 +17888,7 @@
             </a:r>
             <a:pPr indent="0" marL="0">
               <a:lnSpc>
-                <a:spcPts val="1400"/>
+                <a:spcPts val="1600"/>
               </a:lnSpc>
               <a:buNone/>
             </a:pPr>
@@ -17905,7 +17905,7 @@
             </a:r>
             <a:pPr indent="0" marL="0">
               <a:lnSpc>
-                <a:spcPts val="1400"/>
+                <a:spcPts val="1600"/>
               </a:lnSpc>
               <a:buNone/>
             </a:pPr>
@@ -18038,7 +18038,7 @@
           <a:p>
             <a:pPr indent="0" marL="0">
               <a:lnSpc>
-                <a:spcPts val="1600"/>
+                <a:spcPts val="1800"/>
               </a:lnSpc>
               <a:buNone/>
             </a:pPr>
@@ -18055,7 +18055,7 @@
             </a:r>
             <a:pPr indent="0" marL="0">
               <a:lnSpc>
-                <a:spcPts val="1600"/>
+                <a:spcPts val="1800"/>
               </a:lnSpc>
               <a:buNone/>
             </a:pPr>
@@ -18072,7 +18072,7 @@
             </a:r>
             <a:pPr indent="0" marL="0">
               <a:lnSpc>
-                <a:spcPts val="1600"/>
+                <a:spcPts val="1800"/>
               </a:lnSpc>
               <a:buNone/>
             </a:pPr>
@@ -18089,7 +18089,7 @@
             </a:r>
             <a:pPr indent="0" marL="0">
               <a:lnSpc>
-                <a:spcPts val="1600"/>
+                <a:spcPts val="1800"/>
               </a:lnSpc>
               <a:buNone/>
             </a:pPr>
@@ -18106,7 +18106,7 @@
             </a:r>
             <a:pPr indent="0" marL="0">
               <a:lnSpc>
-                <a:spcPts val="1600"/>
+                <a:spcPts val="1800"/>
               </a:lnSpc>
               <a:buNone/>
             </a:pPr>
@@ -18123,7 +18123,7 @@
             </a:r>
             <a:pPr indent="0" marL="0">
               <a:lnSpc>
-                <a:spcPts val="1600"/>
+                <a:spcPts val="1800"/>
               </a:lnSpc>
               <a:buNone/>
             </a:pPr>
@@ -18140,7 +18140,7 @@
             </a:r>
             <a:pPr indent="0" marL="0">
               <a:lnSpc>
-                <a:spcPts val="1600"/>
+                <a:spcPts val="1800"/>
               </a:lnSpc>
               <a:buNone/>
             </a:pPr>
@@ -18157,7 +18157,7 @@
             </a:r>
             <a:pPr indent="0" marL="0">
               <a:lnSpc>
-                <a:spcPts val="1600"/>
+                <a:spcPts val="1800"/>
               </a:lnSpc>
               <a:buNone/>
             </a:pPr>
@@ -18174,7 +18174,7 @@
             </a:r>
             <a:pPr indent="0" marL="0">
               <a:lnSpc>
-                <a:spcPts val="1600"/>
+                <a:spcPts val="1800"/>
               </a:lnSpc>
               <a:buNone/>
             </a:pPr>
@@ -18191,7 +18191,7 @@
             </a:r>
             <a:pPr indent="0" marL="0">
               <a:lnSpc>
-                <a:spcPts val="1600"/>
+                <a:spcPts val="1800"/>
               </a:lnSpc>
               <a:buNone/>
             </a:pPr>
@@ -18208,7 +18208,7 @@
             </a:r>
             <a:pPr indent="0" marL="0">
               <a:lnSpc>
-                <a:spcPts val="1600"/>
+                <a:spcPts val="1800"/>
               </a:lnSpc>
               <a:buNone/>
             </a:pPr>
@@ -18422,7 +18422,7 @@
               <a:buNone/>
             </a:pPr>
             <a:r>
-              <a:rPr lang="en-US" sz="2600" b="1" dirty="0">
+              <a:rPr lang="en-US" sz="2600" b="1" spc="-57" kern="0" dirty="0">
                 <a:solidFill>
                   <a:srgbClr val="16224E"/>
                 </a:solidFill>
@@ -18439,7 +18439,7 @@
               <a:buNone/>
             </a:pPr>
             <a:r>
-              <a:rPr lang="en-US" sz="2600" b="1" dirty="0">
+              <a:rPr lang="en-US" sz="2600" b="1" spc="-57" kern="0" dirty="0">
                 <a:solidFill>
                   <a:srgbClr val="E80070"/>
                 </a:solidFill>
@@ -19397,11 +19397,11 @@
         <p:spPr>
           <a:xfrm>
             <a:off x="6675120" y="1965960"/>
-            <a:ext cx="4846320" cy="1298448"/>
+            <a:ext cx="4846320" cy="1463040"/>
           </a:xfrm>
           <a:prstGeom prst="roundRect">
             <a:avLst>
-              <a:gd name="adj" fmla="val 7042"/>
+              <a:gd name="adj" fmla="val 6250"/>
             </a:avLst>
           </a:prstGeom>
           <a:solidFill>
@@ -19440,7 +19440,7 @@
               <a:buNone/>
             </a:pPr>
             <a:r>
-              <a:rPr lang="en-US" sz="1400" b="1" dirty="0">
+              <a:rPr lang="en-US" sz="1400" b="1" spc="-14" kern="0" dirty="0">
                 <a:solidFill>
                   <a:srgbClr val="E80070"/>
                 </a:solidFill>
@@ -19462,8 +19462,8 @@
         </p:nvSpPr>
         <p:spPr>
           <a:xfrm>
-            <a:off x="6931152" y="2432304"/>
-            <a:ext cx="4389120" cy="384048"/>
+            <a:off x="6931152" y="2450592"/>
+            <a:ext cx="4389120" cy="512064"/>
           </a:xfrm>
           <a:prstGeom prst="rect">
             <a:avLst/>
@@ -19477,29 +19477,173 @@
           <a:p>
             <a:pPr indent="0" marL="0">
               <a:lnSpc>
+                <a:spcPts val="1900"/>
+              </a:lnSpc>
+              <a:buNone/>
+            </a:pPr>
+            <a:r>
+              <a:rPr lang="en-US" sz="1250" b="1" dirty="0">
+                <a:solidFill>
+                  <a:srgbClr val="16224E"/>
+                </a:solidFill>
+                <a:latin typeface="Arial" pitchFamily="34" charset="0"/>
+                <a:ea typeface="Arial" pitchFamily="34" charset="-122"/>
+                <a:cs typeface="Arial" pitchFamily="34" charset="-120"/>
+              </a:rPr>
+              <a:t>5 ações + 1 decisão</a:t>
+            </a:r>
+            <a:pPr indent="0" marL="0">
+              <a:lnSpc>
+                <a:spcPts val="1900"/>
+              </a:lnSpc>
+              <a:buNone/>
+            </a:pPr>
+            <a:r>
+              <a:rPr lang="en-US" sz="1250" dirty="0">
+                <a:solidFill>
+                  <a:srgbClr val="4A5578"/>
+                </a:solidFill>
+                <a:latin typeface="Arial" pitchFamily="34" charset="0"/>
+                <a:ea typeface="Arial" pitchFamily="34" charset="-122"/>
+                <a:cs typeface="Arial" pitchFamily="34" charset="-120"/>
+              </a:rPr>
+              <a:t> → 3 viram </a:t>
+            </a:r>
+            <a:pPr indent="0" marL="0">
+              <a:lnSpc>
+                <a:spcPts val="1900"/>
+              </a:lnSpc>
+              <a:buNone/>
+            </a:pPr>
+            <a:r>
+              <a:rPr lang="en-US" sz="1250" b="1" dirty="0">
+                <a:solidFill>
+                  <a:srgbClr val="1D4F91"/>
+                </a:solidFill>
+                <a:latin typeface="Arial" pitchFamily="34" charset="0"/>
+                <a:ea typeface="Arial" pitchFamily="34" charset="-122"/>
+                <a:cs typeface="Arial" pitchFamily="34" charset="-120"/>
+              </a:rPr>
+              <a:t>Python</a:t>
+            </a:r>
+            <a:pPr indent="0" marL="0">
+              <a:lnSpc>
+                <a:spcPts val="1900"/>
+              </a:lnSpc>
+              <a:buNone/>
+            </a:pPr>
+            <a:r>
+              <a:rPr lang="en-US" sz="1250" dirty="0">
+                <a:solidFill>
+                  <a:srgbClr val="4A5578"/>
+                </a:solidFill>
+                <a:latin typeface="Arial" pitchFamily="34" charset="0"/>
+                <a:ea typeface="Arial" pitchFamily="34" charset="-122"/>
+                <a:cs typeface="Arial" pitchFamily="34" charset="-120"/>
+              </a:rPr>
+              <a:t>, 2 viram </a:t>
+            </a:r>
+            <a:pPr indent="0" marL="0">
+              <a:lnSpc>
+                <a:spcPts val="1900"/>
+              </a:lnSpc>
+              <a:buNone/>
+            </a:pPr>
+            <a:r>
+              <a:rPr lang="en-US" sz="1250" b="1" dirty="0">
+                <a:solidFill>
+                  <a:srgbClr val="E80070"/>
+                </a:solidFill>
+                <a:latin typeface="Arial" pitchFamily="34" charset="0"/>
+                <a:ea typeface="Arial" pitchFamily="34" charset="-122"/>
+                <a:cs typeface="Arial" pitchFamily="34" charset="-120"/>
+              </a:rPr>
+              <a:t>IA</a:t>
+            </a:r>
+            <a:pPr indent="0" marL="0">
+              <a:lnSpc>
+                <a:spcPts val="1900"/>
+              </a:lnSpc>
+              <a:buNone/>
+            </a:pPr>
+            <a:r>
+              <a:rPr lang="en-US" sz="1250" dirty="0">
+                <a:solidFill>
+                  <a:srgbClr val="4A5578"/>
+                </a:solidFill>
+                <a:latin typeface="Arial" pitchFamily="34" charset="0"/>
+                <a:ea typeface="Arial" pitchFamily="34" charset="-122"/>
+                <a:cs typeface="Arial" pitchFamily="34" charset="-120"/>
+              </a:rPr>
+              <a:t>, 1 continua </a:t>
+            </a:r>
+            <a:pPr indent="0" marL="0">
+              <a:lnSpc>
+                <a:spcPts val="1900"/>
+              </a:lnSpc>
+              <a:buNone/>
+            </a:pPr>
+            <a:r>
+              <a:rPr lang="en-US" sz="1250" b="1" dirty="0">
+                <a:solidFill>
+                  <a:srgbClr val="6D2077"/>
+                </a:solidFill>
+                <a:latin typeface="Arial" pitchFamily="34" charset="0"/>
+                <a:ea typeface="Arial" pitchFamily="34" charset="-122"/>
+                <a:cs typeface="Arial" pitchFamily="34" charset="-120"/>
+              </a:rPr>
+              <a:t>humana</a:t>
+            </a:r>
+            <a:pPr indent="0" marL="0">
+              <a:lnSpc>
+                <a:spcPts val="1900"/>
+              </a:lnSpc>
+              <a:buNone/>
+            </a:pPr>
+            <a:r>
+              <a:rPr lang="en-US" sz="1250" dirty="0">
+                <a:solidFill>
+                  <a:srgbClr val="4A5578"/>
+                </a:solidFill>
+                <a:latin typeface="Arial" pitchFamily="34" charset="0"/>
+                <a:ea typeface="Arial" pitchFamily="34" charset="-122"/>
+                <a:cs typeface="Arial" pitchFamily="34" charset="-120"/>
+              </a:rPr>
+              <a:t>.</a:t>
+            </a:r>
+            <a:endParaRPr lang="en-US" sz="1250" dirty="0"/>
+          </a:p>
+        </p:txBody>
+      </p:sp>
+      <p:sp>
+        <p:nvSpPr>
+          <p:cNvPr id="33" name="Text 31"/>
+          <p:cNvSpPr/>
+          <p:nvPr/>
+        </p:nvSpPr>
+        <p:spPr>
+          <a:xfrm>
+            <a:off x="6931152" y="2962656"/>
+            <a:ext cx="4389120" cy="420624"/>
+          </a:xfrm>
+          <a:prstGeom prst="rect">
+            <a:avLst/>
+          </a:prstGeom>
+          <a:noFill/>
+          <a:ln/>
+        </p:spPr>
+        <p:txBody>
+          <a:bodyPr wrap="square" lIns="0" tIns="0" rIns="0" bIns="0" rtlCol="0" anchor="t"/>
+          <a:lstStyle/>
+          <a:p>
+            <a:pPr indent="0" marL="0">
+              <a:lnSpc>
                 <a:spcPts val="1600"/>
               </a:lnSpc>
               <a:buNone/>
             </a:pPr>
             <a:r>
-              <a:rPr lang="en-US" sz="1250" b="1" dirty="0">
-                <a:solidFill>
-                  <a:srgbClr val="16224E"/>
-                </a:solidFill>
-                <a:latin typeface="Arial" pitchFamily="34" charset="0"/>
-                <a:ea typeface="Arial" pitchFamily="34" charset="-122"/>
-                <a:cs typeface="Arial" pitchFamily="34" charset="-120"/>
-              </a:rPr>
-              <a:t>5 ações + 1 decisão</a:t>
-            </a:r>
-            <a:pPr indent="0" marL="0">
-              <a:lnSpc>
-                <a:spcPts val="1600"/>
-              </a:lnSpc>
-              <a:buNone/>
-            </a:pPr>
-            <a:r>
-              <a:rPr lang="en-US" sz="1250" dirty="0">
+              <a:rPr lang="en-US" sz="1100" dirty="0">
                 <a:solidFill>
                   <a:srgbClr val="4A5578"/>
                 </a:solidFill>
@@ -19507,150 +19651,6 @@
                 <a:ea typeface="Arial" pitchFamily="34" charset="-122"/>
                 <a:cs typeface="Arial" pitchFamily="34" charset="-120"/>
               </a:rPr>
-              <a:t> → 3 viram </a:t>
-            </a:r>
-            <a:pPr indent="0" marL="0">
-              <a:lnSpc>
-                <a:spcPts val="1600"/>
-              </a:lnSpc>
-              <a:buNone/>
-            </a:pPr>
-            <a:r>
-              <a:rPr lang="en-US" sz="1250" b="1" dirty="0">
-                <a:solidFill>
-                  <a:srgbClr val="1D4F91"/>
-                </a:solidFill>
-                <a:latin typeface="Arial" pitchFamily="34" charset="0"/>
-                <a:ea typeface="Arial" pitchFamily="34" charset="-122"/>
-                <a:cs typeface="Arial" pitchFamily="34" charset="-120"/>
-              </a:rPr>
-              <a:t>Python</a:t>
-            </a:r>
-            <a:pPr indent="0" marL="0">
-              <a:lnSpc>
-                <a:spcPts val="1600"/>
-              </a:lnSpc>
-              <a:buNone/>
-            </a:pPr>
-            <a:r>
-              <a:rPr lang="en-US" sz="1250" dirty="0">
-                <a:solidFill>
-                  <a:srgbClr val="4A5578"/>
-                </a:solidFill>
-                <a:latin typeface="Arial" pitchFamily="34" charset="0"/>
-                <a:ea typeface="Arial" pitchFamily="34" charset="-122"/>
-                <a:cs typeface="Arial" pitchFamily="34" charset="-120"/>
-              </a:rPr>
-              <a:t>, 2 viram </a:t>
-            </a:r>
-            <a:pPr indent="0" marL="0">
-              <a:lnSpc>
-                <a:spcPts val="1600"/>
-              </a:lnSpc>
-              <a:buNone/>
-            </a:pPr>
-            <a:r>
-              <a:rPr lang="en-US" sz="1250" b="1" dirty="0">
-                <a:solidFill>
-                  <a:srgbClr val="E80070"/>
-                </a:solidFill>
-                <a:latin typeface="Arial" pitchFamily="34" charset="0"/>
-                <a:ea typeface="Arial" pitchFamily="34" charset="-122"/>
-                <a:cs typeface="Arial" pitchFamily="34" charset="-120"/>
-              </a:rPr>
-              <a:t>IA</a:t>
-            </a:r>
-            <a:pPr indent="0" marL="0">
-              <a:lnSpc>
-                <a:spcPts val="1600"/>
-              </a:lnSpc>
-              <a:buNone/>
-            </a:pPr>
-            <a:r>
-              <a:rPr lang="en-US" sz="1250" dirty="0">
-                <a:solidFill>
-                  <a:srgbClr val="4A5578"/>
-                </a:solidFill>
-                <a:latin typeface="Arial" pitchFamily="34" charset="0"/>
-                <a:ea typeface="Arial" pitchFamily="34" charset="-122"/>
-                <a:cs typeface="Arial" pitchFamily="34" charset="-120"/>
-              </a:rPr>
-              <a:t>, 1 continua </a:t>
-            </a:r>
-            <a:pPr indent="0" marL="0">
-              <a:lnSpc>
-                <a:spcPts val="1600"/>
-              </a:lnSpc>
-              <a:buNone/>
-            </a:pPr>
-            <a:r>
-              <a:rPr lang="en-US" sz="1250" b="1" dirty="0">
-                <a:solidFill>
-                  <a:srgbClr val="6D2077"/>
-                </a:solidFill>
-                <a:latin typeface="Arial" pitchFamily="34" charset="0"/>
-                <a:ea typeface="Arial" pitchFamily="34" charset="-122"/>
-                <a:cs typeface="Arial" pitchFamily="34" charset="-120"/>
-              </a:rPr>
-              <a:t>humana</a:t>
-            </a:r>
-            <a:pPr indent="0" marL="0">
-              <a:lnSpc>
-                <a:spcPts val="1600"/>
-              </a:lnSpc>
-              <a:buNone/>
-            </a:pPr>
-            <a:r>
-              <a:rPr lang="en-US" sz="1250" dirty="0">
-                <a:solidFill>
-                  <a:srgbClr val="4A5578"/>
-                </a:solidFill>
-                <a:latin typeface="Arial" pitchFamily="34" charset="0"/>
-                <a:ea typeface="Arial" pitchFamily="34" charset="-122"/>
-                <a:cs typeface="Arial" pitchFamily="34" charset="-120"/>
-              </a:rPr>
-              <a:t>.</a:t>
-            </a:r>
-            <a:endParaRPr lang="en-US" sz="1250" dirty="0"/>
-          </a:p>
-        </p:txBody>
-      </p:sp>
-      <p:sp>
-        <p:nvSpPr>
-          <p:cNvPr id="33" name="Text 31"/>
-          <p:cNvSpPr/>
-          <p:nvPr/>
-        </p:nvSpPr>
-        <p:spPr>
-          <a:xfrm>
-            <a:off x="6931152" y="2816352"/>
-            <a:ext cx="4389120" cy="365760"/>
-          </a:xfrm>
-          <a:prstGeom prst="rect">
-            <a:avLst/>
-          </a:prstGeom>
-          <a:noFill/>
-          <a:ln/>
-        </p:spPr>
-        <p:txBody>
-          <a:bodyPr wrap="square" lIns="0" tIns="0" rIns="0" bIns="0" rtlCol="0" anchor="t"/>
-          <a:lstStyle/>
-          <a:p>
-            <a:pPr indent="0" marL="0">
-              <a:lnSpc>
-                <a:spcPts val="1400"/>
-              </a:lnSpc>
-              <a:buNone/>
-            </a:pPr>
-            <a:r>
-              <a:rPr lang="en-US" sz="1100" dirty="0">
-                <a:solidFill>
-                  <a:srgbClr val="4A5578"/>
-                </a:solidFill>
-                <a:latin typeface="Arial" pitchFamily="34" charset="0"/>
-                <a:ea typeface="Arial" pitchFamily="34" charset="-122"/>
-                <a:cs typeface="Arial" pitchFamily="34" charset="-120"/>
-              </a:rPr>
               <a:t>Metade do processo foi resolvida sem IA nenhuma. Isso é bom sinal, não fracasso.</a:t>
             </a:r>
             <a:endParaRPr lang="en-US" sz="1100" dirty="0"/>
@@ -19665,7 +19665,7 @@
         </p:nvSpPr>
         <p:spPr>
           <a:xfrm>
-            <a:off x="6675120" y="3429000"/>
+            <a:off x="6675120" y="3547872"/>
             <a:ext cx="4846320" cy="1874520"/>
           </a:xfrm>
           <a:prstGeom prst="roundRect">
@@ -19692,7 +19692,7 @@
         </p:nvSpPr>
         <p:spPr>
           <a:xfrm>
-            <a:off x="6931152" y="3602736"/>
+            <a:off x="6931152" y="3703320"/>
             <a:ext cx="4389120" cy="274320"/>
           </a:xfrm>
           <a:prstGeom prst="rect">
@@ -19709,7 +19709,7 @@
               <a:buNone/>
             </a:pPr>
             <a:r>
-              <a:rPr lang="en-US" sz="1300" b="1" dirty="0">
+              <a:rPr lang="en-US" sz="1300" b="1" spc="-13" kern="0" dirty="0">
                 <a:solidFill>
                   <a:srgbClr val="6D2077"/>
                 </a:solidFill>
@@ -19731,7 +19731,7 @@
         </p:nvSpPr>
         <p:spPr>
           <a:xfrm>
-            <a:off x="6931152" y="3895344"/>
+            <a:off x="6931152" y="4023360"/>
             <a:ext cx="4389120" cy="438912"/>
           </a:xfrm>
           <a:prstGeom prst="rect">
@@ -19746,7 +19746,7 @@
           <a:p>
             <a:pPr indent="0" marL="0">
               <a:lnSpc>
-                <a:spcPts val="1400"/>
+                <a:spcPts val="1600"/>
               </a:lnSpc>
               <a:buNone/>
             </a:pPr>
@@ -19763,7 +19763,7 @@
             </a:r>
             <a:pPr indent="0" marL="0">
               <a:lnSpc>
-                <a:spcPts val="1400"/>
+                <a:spcPts val="1600"/>
               </a:lnSpc>
               <a:buNone/>
             </a:pPr>
@@ -19780,7 +19780,7 @@
             </a:r>
             <a:pPr indent="0" marL="0">
               <a:lnSpc>
-                <a:spcPts val="1400"/>
+                <a:spcPts val="1600"/>
               </a:lnSpc>
               <a:buNone/>
             </a:pPr>
@@ -19807,7 +19807,7 @@
         </p:nvSpPr>
         <p:spPr>
           <a:xfrm>
-            <a:off x="6931152" y="4352544"/>
+            <a:off x="6931152" y="4498848"/>
             <a:ext cx="4389120" cy="438912"/>
           </a:xfrm>
           <a:prstGeom prst="rect">
@@ -19822,7 +19822,7 @@
           <a:p>
             <a:pPr indent="0" marL="0">
               <a:lnSpc>
-                <a:spcPts val="1400"/>
+                <a:spcPts val="1600"/>
               </a:lnSpc>
               <a:buNone/>
             </a:pPr>
@@ -19839,7 +19839,7 @@
             </a:r>
             <a:pPr indent="0" marL="0">
               <a:lnSpc>
-                <a:spcPts val="1400"/>
+                <a:spcPts val="1600"/>
               </a:lnSpc>
               <a:buNone/>
             </a:pPr>
@@ -19856,7 +19856,7 @@
             </a:r>
             <a:pPr indent="0" marL="0">
               <a:lnSpc>
-                <a:spcPts val="1400"/>
+                <a:spcPts val="1600"/>
               </a:lnSpc>
               <a:buNone/>
             </a:pPr>
@@ -19883,7 +19883,7 @@
         </p:nvSpPr>
         <p:spPr>
           <a:xfrm>
-            <a:off x="6931152" y="4809744"/>
+            <a:off x="6931152" y="4974336"/>
             <a:ext cx="4389120" cy="402336"/>
           </a:xfrm>
           <a:prstGeom prst="rect">
@@ -19898,7 +19898,7 @@
           <a:p>
             <a:pPr indent="0" marL="0">
               <a:lnSpc>
-                <a:spcPts val="1400"/>
+                <a:spcPts val="1600"/>
               </a:lnSpc>
               <a:buNone/>
             </a:pPr>
@@ -19915,7 +19915,7 @@
             </a:r>
             <a:pPr indent="0" marL="0">
               <a:lnSpc>
-                <a:spcPts val="1400"/>
+                <a:spcPts val="1600"/>
               </a:lnSpc>
               <a:buNone/>
             </a:pPr>
@@ -19932,7 +19932,7 @@
             </a:r>
             <a:pPr indent="0" marL="0">
               <a:lnSpc>
-                <a:spcPts val="1400"/>
+                <a:spcPts val="1600"/>
               </a:lnSpc>
               <a:buNone/>
             </a:pPr>
@@ -19949,7 +19949,7 @@
             </a:r>
             <a:pPr indent="0" marL="0">
               <a:lnSpc>
-                <a:spcPts val="1400"/>
+                <a:spcPts val="1600"/>
               </a:lnSpc>
               <a:buNone/>
             </a:pPr>
@@ -19966,7 +19966,7 @@
             </a:r>
             <a:pPr indent="0" marL="0">
               <a:lnSpc>
-                <a:spcPts val="1400"/>
+                <a:spcPts val="1600"/>
               </a:lnSpc>
               <a:buNone/>
             </a:pPr>

--- a/talks/serasa-ia-automacao/deck.pptx
+++ b/talks/serasa-ia-automacao/deck.pptx
@@ -603,7 +603,7 @@
           <a:p>
             <a:r>
               <a:rPr lang="en-US" dirty="0"/>
-              <a:t>Passe o código linha a linha, devagar. O campo faltou_contexto é o detalhe que ninguém espera — sem ele o modelo nunca diz 'não sei'. O limiar sai do eval, não do chute. ~3 min.</a:t>
+              <a:t>Título é a frase inteira: a IA decide quando tem certeza e passa adiante quando não tem. Passe o código devagar. O campo faltou_contexto é o detalhe que ninguém espera. ~3 min.</a:t>
             </a:r>
             <a:endParaRPr lang="en-US" dirty="0"/>
           </a:p>
@@ -1131,7 +1131,7 @@
           <a:p>
             <a:r>
               <a:rPr lang="en-US" dirty="0"/>
-              <a:t>Slide de pontuação. Encene o diálogo: faça a pergunta errada em voz alta e dê a resposta que sempre vem. A linha de baixo é o roteiro — aponte pra ela. ~1,5 min.</a:t>
+              <a:t>Não é 'vocês perguntam errado'. É que a primeira pergunta pede um julgamento e a segunda pede uma memória — e memória sai mais fiel. Leia as duas respostas em voz alta. ~1,5 min.</a:t>
             </a:r>
             <a:endParaRPr lang="en-US" dirty="0"/>
           </a:p>
@@ -1219,7 +1219,7 @@
           <a:p>
             <a:r>
               <a:rPr lang="en-US" dirty="0"/>
-              <a:t>O artefato do slide. Leia as sete em voz alta, rápido, e pare na 2 e na 3 — são as duas destacadas. Diga que este slide está no kit. ~3 min.</a:t>
+              <a:t>O artefato do slide. Leia as sete rápido e pare na 2 e na 3 — são as duas em rosa. Diga que este slide está no kit, então ninguém precisa anotar. ~3 min.</a:t>
             </a:r>
             <a:endParaRPr lang="en-US" dirty="0"/>
           </a:p>
@@ -2437,7 +2437,7 @@
                 <a:ea typeface="Arial" pitchFamily="34" charset="-122"/>
                 <a:cs typeface="Arial" pitchFamily="34" charset="-120"/>
               </a:rPr>
-              <a:t>O PONTO ONDE A IA VIRA SOLUÇÃO DE VERDADE</a:t>
+              <a:t>PASSO 3 · COMO IA E PESSOA DIVIDEM O TRABALHO</a:t>
             </a:r>
             <a:endParaRPr lang="en-US" sz="1100" dirty="0"/>
           </a:p>
@@ -2452,7 +2452,7 @@
         <p:spPr>
           <a:xfrm>
             <a:off x="658368" y="777240"/>
-            <a:ext cx="10874959" cy="822960"/>
+            <a:ext cx="10874959" cy="594360"/>
           </a:xfrm>
           <a:prstGeom prst="rect">
             <a:avLst/>
@@ -2466,12 +2466,12 @@
           <a:p>
             <a:pPr indent="0" marL="0">
               <a:lnSpc>
-                <a:spcPts val="3000"/>
-              </a:lnSpc>
-              <a:buNone/>
-            </a:pPr>
-            <a:r>
-              <a:rPr lang="en-US" sz="2600" b="1" spc="-57" kern="0" dirty="0">
+                <a:spcPts val="3100"/>
+              </a:lnSpc>
+              <a:buNone/>
+            </a:pPr>
+            <a:r>
+              <a:rPr lang="en-US" sz="2900" b="1" spc="-64" kern="0" dirty="0">
                 <a:solidFill>
                   <a:srgbClr val="16224E"/>
                 </a:solidFill>
@@ -2479,16 +2479,16 @@
                 <a:ea typeface="Arial" pitchFamily="34" charset="-122"/>
                 <a:cs typeface="Arial" pitchFamily="34" charset="-120"/>
               </a:rPr>
-              <a:t>O humano na alça são </a:t>
-            </a:r>
-            <a:pPr indent="0" marL="0">
-              <a:lnSpc>
-                <a:spcPts val="3000"/>
-              </a:lnSpc>
-              <a:buNone/>
-            </a:pPr>
-            <a:r>
-              <a:rPr lang="en-US" sz="2600" b="1" spc="-57" kern="0" dirty="0">
+              <a:t>Quando a IA não tem certeza, </a:t>
+            </a:r>
+            <a:pPr indent="0" marL="0">
+              <a:lnSpc>
+                <a:spcPts val="3100"/>
+              </a:lnSpc>
+              <a:buNone/>
+            </a:pPr>
+            <a:r>
+              <a:rPr lang="en-US" sz="2900" b="1" spc="-64" kern="0" dirty="0">
                 <a:solidFill>
                   <a:srgbClr val="E80070"/>
                 </a:solidFill>
@@ -2496,26 +2496,9 @@
                 <a:ea typeface="Arial" pitchFamily="34" charset="-122"/>
                 <a:cs typeface="Arial" pitchFamily="34" charset="-120"/>
               </a:rPr>
-              <a:t>doze linhas</a:t>
-            </a:r>
-            <a:pPr indent="0" marL="0">
-              <a:lnSpc>
-                <a:spcPts val="3000"/>
-              </a:lnSpc>
-              <a:buNone/>
-            </a:pPr>
-            <a:r>
-              <a:rPr lang="en-US" sz="2600" b="1" spc="-57" kern="0" dirty="0">
-                <a:solidFill>
-                  <a:srgbClr val="16224E"/>
-                </a:solidFill>
-                <a:latin typeface="Arial" pitchFamily="34" charset="0"/>
-                <a:ea typeface="Arial" pitchFamily="34" charset="-122"/>
-                <a:cs typeface="Arial" pitchFamily="34" charset="-120"/>
-              </a:rPr>
-              <a:t> — e um teste pra ver se ele é real</a:t>
-            </a:r>
-            <a:endParaRPr lang="en-US" sz="2600" dirty="0"/>
+              <a:t>ela passa pra uma pessoa</a:t>
+            </a:r>
+            <a:endParaRPr lang="en-US" sz="2900" dirty="0"/>
           </a:p>
         </p:txBody>
       </p:sp>
@@ -2528,7 +2511,7 @@
         <p:spPr>
           <a:xfrm>
             <a:off x="658368" y="1883664"/>
-            <a:ext cx="2743200" cy="219456"/>
+            <a:ext cx="5029200" cy="219456"/>
           </a:xfrm>
           <a:prstGeom prst="rect">
             <a:avLst/>
@@ -2552,7 +2535,7 @@
                 <a:ea typeface="Courier New" pitchFamily="34" charset="-122"/>
                 <a:cs typeface="Courier New" pitchFamily="34" charset="-120"/>
               </a:rPr>
-              <a:t>TRIAGEM.PY</a:t>
+              <a:t>TRIAGEM.PY · A REGRA DO REPASSE, EM DOZE LINHAS</a:t>
             </a:r>
             <a:endParaRPr lang="en-US" sz="850" dirty="0"/>
           </a:p>
@@ -3505,7 +3488,7 @@
                 <a:ea typeface="Arial" pitchFamily="34" charset="-122"/>
                 <a:cs typeface="Arial" pitchFamily="34" charset="-120"/>
               </a:rPr>
-              <a:t>O checkpoint é real? Três perguntas</a:t>
+              <a:t>E a pessoa revisa mesmo? Três perguntas</a:t>
             </a:r>
             <a:endParaRPr lang="en-US" sz="1200" dirty="0"/>
           </a:p>
@@ -3927,7 +3910,7 @@
                 <a:ea typeface="Arial" pitchFamily="34" charset="-122"/>
                 <a:cs typeface="Arial" pitchFamily="34" charset="-120"/>
               </a:rPr>
-              <a:t>O DETALHE QUE QUASE TODO MUNDO ESQUECE</a:t>
+              <a:t>OS DOIS DETALHES QUE DECIDEM SE ISSO FUNCIONA</a:t>
             </a:r>
             <a:endParaRPr lang="en-US" sz="950" dirty="0"/>
           </a:p>
@@ -3969,7 +3952,7 @@
                 <a:ea typeface="Arial" pitchFamily="34" charset="-122"/>
                 <a:cs typeface="Arial" pitchFamily="34" charset="-120"/>
               </a:rPr>
-              <a:t>Sem faltou_contexto, o modelo nunca diz “não sei” — ele chuta com confiança alta.</a:t>
+              <a:t>1.</a:t>
             </a:r>
             <a:pPr indent="0" marL="0">
               <a:lnSpc>
@@ -3986,7 +3969,7 @@
                 <a:ea typeface="Arial" pitchFamily="34" charset="-122"/>
                 <a:cs typeface="Arial" pitchFamily="34" charset="-120"/>
               </a:rPr>
-              <a:t> “Não sei” precisa ser saída válida e explicitamente permitida no prompt. E escalone </a:t>
+              <a:t> Sem o campo faltou_contexto, o modelo </a:t>
             </a:r>
             <a:pPr indent="0" marL="0">
               <a:lnSpc>
@@ -4003,7 +3986,7 @@
                 <a:ea typeface="Arial" pitchFamily="34" charset="-122"/>
                 <a:cs typeface="Arial" pitchFamily="34" charset="-120"/>
               </a:rPr>
-              <a:t>com a sugestão junto</a:t>
+              <a:t>nunca diz “não sei”</a:t>
             </a:r>
             <a:pPr indent="0" marL="0">
               <a:lnSpc>
@@ -4020,7 +4003,75 @@
                 <a:ea typeface="Arial" pitchFamily="34" charset="-122"/>
                 <a:cs typeface="Arial" pitchFamily="34" charset="-120"/>
               </a:rPr>
-              <a:t>: fila que chega em branco custa o mesmo que não ter automação.</a:t>
+              <a:t> — ele chuta com confiança alta. “Não sei” precisa ser uma saída permitida no prompt.   </a:t>
+            </a:r>
+            <a:pPr indent="0" marL="0">
+              <a:lnSpc>
+                <a:spcPts val="1800"/>
+              </a:lnSpc>
+              <a:buNone/>
+            </a:pPr>
+            <a:r>
+              <a:rPr lang="en-US" sz="1200" b="1" dirty="0">
+                <a:solidFill>
+                  <a:srgbClr val="16224E"/>
+                </a:solidFill>
+                <a:latin typeface="Arial" pitchFamily="34" charset="0"/>
+                <a:ea typeface="Arial" pitchFamily="34" charset="-122"/>
+                <a:cs typeface="Arial" pitchFamily="34" charset="-120"/>
+              </a:rPr>
+              <a:t>2.</a:t>
+            </a:r>
+            <a:pPr indent="0" marL="0">
+              <a:lnSpc>
+                <a:spcPts val="1800"/>
+              </a:lnSpc>
+              <a:buNone/>
+            </a:pPr>
+            <a:r>
+              <a:rPr lang="en-US" sz="1200" dirty="0">
+                <a:solidFill>
+                  <a:srgbClr val="16224E"/>
+                </a:solidFill>
+                <a:latin typeface="Arial" pitchFamily="34" charset="0"/>
+                <a:ea typeface="Arial" pitchFamily="34" charset="-122"/>
+                <a:cs typeface="Arial" pitchFamily="34" charset="-120"/>
+              </a:rPr>
+              <a:t> Mande a sugestão junto com o caso: </a:t>
+            </a:r>
+            <a:pPr indent="0" marL="0">
+              <a:lnSpc>
+                <a:spcPts val="1800"/>
+              </a:lnSpc>
+              <a:buNone/>
+            </a:pPr>
+            <a:r>
+              <a:rPr lang="en-US" sz="1200" b="1" dirty="0">
+                <a:solidFill>
+                  <a:srgbClr val="16224E"/>
+                </a:solidFill>
+                <a:latin typeface="Arial" pitchFamily="34" charset="0"/>
+                <a:ea typeface="Arial" pitchFamily="34" charset="-122"/>
+                <a:cs typeface="Arial" pitchFamily="34" charset="-120"/>
+              </a:rPr>
+              <a:t>fila que chega em branco custa o mesmo que não ter automação</a:t>
+            </a:r>
+            <a:pPr indent="0" marL="0">
+              <a:lnSpc>
+                <a:spcPts val="1800"/>
+              </a:lnSpc>
+              <a:buNone/>
+            </a:pPr>
+            <a:r>
+              <a:rPr lang="en-US" sz="1200" dirty="0">
+                <a:solidFill>
+                  <a:srgbClr val="16224E"/>
+                </a:solidFill>
+                <a:latin typeface="Arial" pitchFamily="34" charset="0"/>
+                <a:ea typeface="Arial" pitchFamily="34" charset="-122"/>
+                <a:cs typeface="Arial" pitchFamily="34" charset="-120"/>
+              </a:rPr>
+              <a:t>.</a:t>
             </a:r>
             <a:endParaRPr lang="en-US" sz="1200" dirty="0"/>
           </a:p>
@@ -7787,7 +7838,7 @@
                 <a:ea typeface="Courier New" pitchFamily="34" charset="-122"/>
                 <a:cs typeface="Courier New" pitchFamily="34" charset="-120"/>
               </a:rPr>
-              <a:t>notacao.mmd</a:t>
+              <a:t>quadro-notacao</a:t>
             </a:r>
             <a:endParaRPr lang="en-US" sz="1000" dirty="0"/>
           </a:p>
@@ -7829,7 +7880,7 @@
                 <a:ea typeface="Arial" pitchFamily="34" charset="-122"/>
                 <a:cs typeface="Arial" pitchFamily="34" charset="-120"/>
               </a:rPr>
-              <a:t>O fluxograma em Mermaid</a:t>
+              <a:t>O quadro de notação no Miro</a:t>
             </a:r>
             <a:pPr indent="0" marL="0">
               <a:lnSpc>
@@ -7846,7 +7897,7 @@
                 <a:ea typeface="Arial" pitchFamily="34" charset="-122"/>
                 <a:cs typeface="Arial" pitchFamily="34" charset="-120"/>
               </a:rPr>
-              <a:t> — copia, troca os nomes das caixas, versiona no repo.</a:t>
+              <a:t> — duplica, troca os nomes das caixas, e já sai pronto pra editar junto.</a:t>
             </a:r>
             <a:endParaRPr lang="en-US" sz="1050" dirty="0"/>
           </a:p>
@@ -9871,174 +9922,7 @@
       </p:sp>
       <p:sp>
         <p:nvSpPr>
-          <p:cNvPr id="14" name="Shape 12"/>
-          <p:cNvSpPr/>
-          <p:nvPr/>
-        </p:nvSpPr>
-        <p:spPr>
-          <a:xfrm>
-            <a:off x="658368" y="4160520"/>
-            <a:ext cx="10874959" cy="914400"/>
-          </a:xfrm>
-          <a:prstGeom prst="roundRect">
-            <a:avLst>
-              <a:gd name="adj" fmla="val 10000"/>
-            </a:avLst>
-          </a:prstGeom>
-          <a:solidFill>
-            <a:srgbClr val="F4F0F9"/>
-          </a:solidFill>
-          <a:ln w="12700">
-            <a:solidFill>
-              <a:srgbClr val="333333"/>
-            </a:solidFill>
-            <a:prstDash val="solid"/>
-          </a:ln>
-        </p:spPr>
-      </p:sp>
-      <p:sp>
-        <p:nvSpPr>
-          <p:cNvPr id="15" name="Shape 13"/>
-          <p:cNvSpPr/>
-          <p:nvPr/>
-        </p:nvSpPr>
-        <p:spPr>
-          <a:xfrm>
-            <a:off x="658368" y="4160520"/>
-            <a:ext cx="45720" cy="914400"/>
-          </a:xfrm>
-          <a:prstGeom prst="rect">
-            <a:avLst/>
-          </a:prstGeom>
-          <a:solidFill>
-            <a:srgbClr val="E80070"/>
-          </a:solidFill>
-          <a:ln w="12700">
-            <a:solidFill>
-              <a:srgbClr val="333333"/>
-            </a:solidFill>
-            <a:prstDash val="solid"/>
-          </a:ln>
-        </p:spPr>
-      </p:sp>
-      <p:sp>
-        <p:nvSpPr>
-          <p:cNvPr id="16" name="Text 14"/>
-          <p:cNvSpPr/>
-          <p:nvPr/>
-        </p:nvSpPr>
-        <p:spPr>
-          <a:xfrm>
-            <a:off x="914400" y="4251960"/>
-            <a:ext cx="7315200" cy="201168"/>
-          </a:xfrm>
-          <a:prstGeom prst="rect">
-            <a:avLst/>
-          </a:prstGeom>
-          <a:noFill/>
-          <a:ln/>
-        </p:spPr>
-        <p:txBody>
-          <a:bodyPr wrap="square" lIns="0" tIns="0" rIns="0" bIns="0" rtlCol="0" anchor="ctr"/>
-          <a:lstStyle/>
-          <a:p>
-            <a:pPr indent="0" marL="0">
-              <a:buNone/>
-            </a:pPr>
-            <a:r>
-              <a:rPr lang="en-US" sz="950" b="1" spc="180" kern="0" dirty="0">
-                <a:solidFill>
-                  <a:srgbClr val="E80070"/>
-                </a:solidFill>
-                <a:latin typeface="Arial" pitchFamily="34" charset="0"/>
-                <a:ea typeface="Arial" pitchFamily="34" charset="-122"/>
-                <a:cs typeface="Arial" pitchFamily="34" charset="-120"/>
-              </a:rPr>
-              <a:t>O COMBINADO DESTA PALESTRA</a:t>
-            </a:r>
-            <a:endParaRPr lang="en-US" sz="950" dirty="0"/>
-          </a:p>
-        </p:txBody>
-      </p:sp>
-      <p:sp>
-        <p:nvSpPr>
-          <p:cNvPr id="17" name="Text 15"/>
-          <p:cNvSpPr/>
-          <p:nvPr/>
-        </p:nvSpPr>
-        <p:spPr>
-          <a:xfrm>
-            <a:off x="914400" y="4471416"/>
-            <a:ext cx="10362895" cy="530352"/>
-          </a:xfrm>
-          <a:prstGeom prst="rect">
-            <a:avLst/>
-          </a:prstGeom>
-          <a:noFill/>
-          <a:ln/>
-        </p:spPr>
-        <p:txBody>
-          <a:bodyPr wrap="square" lIns="0" tIns="0" rIns="0" bIns="0" rtlCol="0" anchor="t"/>
-          <a:lstStyle/>
-          <a:p>
-            <a:pPr indent="0" marL="0">
-              <a:lnSpc>
-                <a:spcPts val="1800"/>
-              </a:lnSpc>
-              <a:buNone/>
-            </a:pPr>
-            <a:r>
-              <a:rPr lang="en-US" sz="1200" dirty="0">
-                <a:solidFill>
-                  <a:srgbClr val="16224E"/>
-                </a:solidFill>
-                <a:latin typeface="Arial" pitchFamily="34" charset="0"/>
-                <a:ea typeface="Arial" pitchFamily="34" charset="-122"/>
-                <a:cs typeface="Arial" pitchFamily="34" charset="-120"/>
-              </a:rPr>
-              <a:t>Não é demo de ferramenta. Em 25 minutos você sai com </a:t>
-            </a:r>
-            <a:pPr indent="0" marL="0">
-              <a:lnSpc>
-                <a:spcPts val="1800"/>
-              </a:lnSpc>
-              <a:buNone/>
-            </a:pPr>
-            <a:r>
-              <a:rPr lang="en-US" sz="1200" b="1" dirty="0">
-                <a:solidFill>
-                  <a:srgbClr val="16224E"/>
-                </a:solidFill>
-                <a:latin typeface="Arial" pitchFamily="34" charset="0"/>
-                <a:ea typeface="Arial" pitchFamily="34" charset="-122"/>
-                <a:cs typeface="Arial" pitchFamily="34" charset="-120"/>
-              </a:rPr>
-              <a:t>um roteiro de entrevista, uma notação de fluxograma e uma regra de decisão</a:t>
-            </a:r>
-            <a:pPr indent="0" marL="0">
-              <a:lnSpc>
-                <a:spcPts val="1800"/>
-              </a:lnSpc>
-              <a:buNone/>
-            </a:pPr>
-            <a:r>
-              <a:rPr lang="en-US" sz="1200" dirty="0">
-                <a:solidFill>
-                  <a:srgbClr val="16224E"/>
-                </a:solidFill>
-                <a:latin typeface="Arial" pitchFamily="34" charset="0"/>
-                <a:ea typeface="Arial" pitchFamily="34" charset="-122"/>
-                <a:cs typeface="Arial" pitchFamily="34" charset="-120"/>
-              </a:rPr>
-              <a:t> que dá pra aplicar no seu processo amanhã de manhã — mais um kit de arquivos pra baixar no fim.</a:t>
-            </a:r>
-            <a:endParaRPr lang="en-US" sz="1200" dirty="0"/>
-          </a:p>
-        </p:txBody>
-      </p:sp>
-      <p:sp>
-        <p:nvSpPr>
-          <p:cNvPr id="18" name="Text 16"/>
+          <p:cNvPr id="14" name="Text 12"/>
           <p:cNvSpPr/>
           <p:nvPr/>
         </p:nvSpPr>
@@ -10077,7 +9961,7 @@
       </p:sp>
       <p:sp>
         <p:nvSpPr>
-          <p:cNvPr id="19" name="Text 17"/>
+          <p:cNvPr id="15" name="Text 13"/>
           <p:cNvSpPr/>
           <p:nvPr/>
         </p:nvSpPr>
@@ -10179,7 +10063,7 @@
                 <a:ea typeface="Arial" pitchFamily="34" charset="-122"/>
                 <a:cs typeface="Arial" pitchFamily="34" charset="-120"/>
               </a:rPr>
-              <a:t>COMO ISSO COMEÇA ERRADO</a:t>
+              <a:t>POR ONDE A CONVERSA COMEÇA</a:t>
             </a:r>
             <a:endParaRPr lang="en-US" sz="1100" dirty="0"/>
           </a:p>
@@ -10194,7 +10078,7 @@
         <p:spPr>
           <a:xfrm>
             <a:off x="658368" y="1234440"/>
-            <a:ext cx="10058400" cy="640080"/>
+            <a:ext cx="10424160" cy="1005840"/>
           </a:xfrm>
           <a:prstGeom prst="rect">
             <a:avLst/>
@@ -10207,10 +10091,13 @@
           <a:lstStyle/>
           <a:p>
             <a:pPr indent="0" marL="0">
-              <a:buNone/>
-            </a:pPr>
-            <a:r>
-              <a:rPr lang="en-US" sz="3200" b="1" spc="-96" kern="0" dirty="0">
+              <a:lnSpc>
+                <a:spcPts val="3000"/>
+              </a:lnSpc>
+              <a:buNone/>
+            </a:pPr>
+            <a:r>
+              <a:rPr lang="en-US" sz="2800" b="1" spc="-62" kern="0" dirty="0">
                 <a:solidFill>
                   <a:srgbClr val="FFFFFF"/>
                 </a:solidFill>
@@ -10218,13 +10105,16 @@
                 <a:ea typeface="Arial" pitchFamily="34" charset="-122"/>
                 <a:cs typeface="Arial" pitchFamily="34" charset="-120"/>
               </a:rPr>
-              <a:t>A primeira pergunta é sempre </a:t>
-            </a:r>
-            <a:pPr indent="0" marL="0">
-              <a:buNone/>
-            </a:pPr>
-            <a:r>
-              <a:rPr lang="en-US" sz="3200" b="1" spc="-96" kern="0" dirty="0">
+              <a:t>A mesma conversa, duas perguntas — </a:t>
+            </a:r>
+            <a:pPr indent="0" marL="0">
+              <a:lnSpc>
+                <a:spcPts val="3000"/>
+              </a:lnSpc>
+              <a:buNone/>
+            </a:pPr>
+            <a:r>
+              <a:rPr lang="en-US" sz="2800" b="1" spc="-62" kern="0" dirty="0">
                 <a:solidFill>
                   <a:srgbClr val="FF8FC0"/>
                 </a:solidFill>
@@ -10232,9 +10122,9 @@
                 <a:ea typeface="Arial" pitchFamily="34" charset="-122"/>
                 <a:cs typeface="Arial" pitchFamily="34" charset="-120"/>
               </a:rPr>
-              <a:t>a errada</a:t>
-            </a:r>
-            <a:endParaRPr lang="en-US" sz="3200" dirty="0"/>
+              <a:t>e respostas muito diferentes</a:t>
+            </a:r>
+            <a:endParaRPr lang="en-US" sz="2800" dirty="0"/>
           </a:p>
         </p:txBody>
       </p:sp>
@@ -10246,8 +10136,8 @@
         </p:nvSpPr>
         <p:spPr>
           <a:xfrm>
-            <a:off x="658368" y="2340864"/>
-            <a:ext cx="1920240" cy="237744"/>
+            <a:off x="658368" y="2487168"/>
+            <a:ext cx="4937760" cy="219456"/>
           </a:xfrm>
           <a:prstGeom prst="rect">
             <a:avLst/>
@@ -10263,17 +10153,17 @@
               <a:buNone/>
             </a:pPr>
             <a:r>
-              <a:rPr lang="en-US" sz="900" spc="120" kern="0" dirty="0">
-                <a:solidFill>
-                  <a:srgbClr val="C9B6D4"/>
+              <a:rPr lang="en-US" sz="850" spc="120" kern="0" dirty="0">
+                <a:solidFill>
+                  <a:srgbClr val="B79ACB"/>
                 </a:solidFill>
                 <a:latin typeface="Courier New" pitchFamily="34" charset="0"/>
                 <a:ea typeface="Courier New" pitchFamily="34" charset="-122"/>
                 <a:cs typeface="Courier New" pitchFamily="34" charset="-120"/>
               </a:rPr>
-              <a:t>VOCÊ PERGUNTA</a:t>
-            </a:r>
-            <a:endParaRPr lang="en-US" sz="900" dirty="0"/>
+              <a:t>SE A PERGUNTA É</a:t>
+            </a:r>
+            <a:endParaRPr lang="en-US" sz="850" dirty="0"/>
           </a:p>
         </p:txBody>
       </p:sp>
@@ -10285,8 +10175,8 @@
         </p:nvSpPr>
         <p:spPr>
           <a:xfrm>
-            <a:off x="2807208" y="2286000"/>
-            <a:ext cx="8229600" cy="384048"/>
+            <a:off x="658368" y="2743200"/>
+            <a:ext cx="4937760" cy="713232"/>
           </a:xfrm>
           <a:prstGeom prst="rect">
             <a:avLst/>
@@ -10299,6 +10189,9 @@
           <a:lstStyle/>
           <a:p>
             <a:pPr indent="0" marL="0">
+              <a:lnSpc>
+                <a:spcPts val="2500"/>
+              </a:lnSpc>
               <a:buNone/>
             </a:pPr>
             <a:r>
@@ -10318,14 +10211,157 @@
       </p:sp>
       <p:sp>
         <p:nvSpPr>
-          <p:cNvPr id="6" name="Text 4"/>
-          <p:cNvSpPr/>
-          <p:nvPr/>
-        </p:nvSpPr>
-        <p:spPr>
-          <a:xfrm>
-            <a:off x="658368" y="2999232"/>
-            <a:ext cx="1920240" cy="237744"/>
+          <p:cNvPr id="6" name="Shape 4"/>
+          <p:cNvSpPr/>
+          <p:nvPr/>
+        </p:nvSpPr>
+        <p:spPr>
+          <a:xfrm>
+            <a:off x="658368" y="3584448"/>
+            <a:ext cx="32004" cy="475488"/>
+          </a:xfrm>
+          <a:prstGeom prst="rect">
+            <a:avLst/>
+          </a:prstGeom>
+          <a:solidFill>
+            <a:srgbClr val="8E7FA0"/>
+          </a:solidFill>
+          <a:ln w="12700">
+            <a:solidFill>
+              <a:srgbClr val="333333"/>
+            </a:solidFill>
+            <a:prstDash val="solid"/>
+          </a:ln>
+        </p:spPr>
+      </p:sp>
+      <p:sp>
+        <p:nvSpPr>
+          <p:cNvPr id="7" name="Text 5"/>
+          <p:cNvSpPr/>
+          <p:nvPr/>
+        </p:nvSpPr>
+        <p:spPr>
+          <a:xfrm>
+            <a:off x="841248" y="3566160"/>
+            <a:ext cx="4754880" cy="512064"/>
+          </a:xfrm>
+          <a:prstGeom prst="rect">
+            <a:avLst/>
+          </a:prstGeom>
+          <a:noFill/>
+          <a:ln/>
+        </p:spPr>
+        <p:txBody>
+          <a:bodyPr wrap="square" lIns="0" tIns="0" rIns="0" bIns="0" rtlCol="0" anchor="t"/>
+          <a:lstStyle/>
+          <a:p>
+            <a:pPr indent="0" marL="0">
+              <a:lnSpc>
+                <a:spcPts val="1850"/>
+              </a:lnSpc>
+              <a:buNone/>
+            </a:pPr>
+            <a:r>
+              <a:rPr lang="en-US" sz="1300" i="1" dirty="0">
+                <a:solidFill>
+                  <a:srgbClr val="D9C8E4"/>
+                </a:solidFill>
+                <a:latin typeface="Arial" pitchFamily="34" charset="0"/>
+                <a:ea typeface="Arial" pitchFamily="34" charset="-122"/>
+                <a:cs typeface="Arial" pitchFamily="34" charset="-120"/>
+              </a:rPr>
+              <a:t>“Queria um bot que respondesse os chamados.”</a:t>
+            </a:r>
+            <a:endParaRPr lang="en-US" sz="1300" dirty="0"/>
+          </a:p>
+        </p:txBody>
+      </p:sp>
+      <p:sp>
+        <p:nvSpPr>
+          <p:cNvPr id="8" name="Text 6"/>
+          <p:cNvSpPr/>
+          <p:nvPr/>
+        </p:nvSpPr>
+        <p:spPr>
+          <a:xfrm>
+            <a:off x="658368" y="4206240"/>
+            <a:ext cx="4937760" cy="512064"/>
+          </a:xfrm>
+          <a:prstGeom prst="rect">
+            <a:avLst/>
+          </a:prstGeom>
+          <a:noFill/>
+          <a:ln/>
+        </p:spPr>
+        <p:txBody>
+          <a:bodyPr wrap="square" lIns="0" tIns="0" rIns="0" bIns="0" rtlCol="0" anchor="t"/>
+          <a:lstStyle/>
+          <a:p>
+            <a:pPr indent="0" marL="0">
+              <a:lnSpc>
+                <a:spcPts val="1900"/>
+              </a:lnSpc>
+              <a:buNone/>
+            </a:pPr>
+            <a:r>
+              <a:rPr lang="en-US" sz="1250" dirty="0">
+                <a:solidFill>
+                  <a:srgbClr val="EDE4F3"/>
+                </a:solidFill>
+                <a:latin typeface="Arial" pitchFamily="34" charset="0"/>
+                <a:ea typeface="Arial" pitchFamily="34" charset="-122"/>
+                <a:cs typeface="Arial" pitchFamily="34" charset="-120"/>
+              </a:rPr>
+              <a:t>Vem </a:t>
+            </a:r>
+            <a:pPr indent="0" marL="0">
+              <a:lnSpc>
+                <a:spcPts val="1900"/>
+              </a:lnSpc>
+              <a:buNone/>
+            </a:pPr>
+            <a:r>
+              <a:rPr lang="en-US" sz="1250" b="1" dirty="0">
+                <a:solidFill>
+                  <a:srgbClr val="FFFFFF"/>
+                </a:solidFill>
+                <a:latin typeface="Arial" pitchFamily="34" charset="0"/>
+                <a:ea typeface="Arial" pitchFamily="34" charset="-122"/>
+                <a:cs typeface="Arial" pitchFamily="34" charset="-120"/>
+              </a:rPr>
+              <a:t>uma solução pronta</a:t>
+            </a:r>
+            <a:pPr indent="0" marL="0">
+              <a:lnSpc>
+                <a:spcPts val="1900"/>
+              </a:lnSpc>
+              <a:buNone/>
+            </a:pPr>
+            <a:r>
+              <a:rPr lang="en-US" sz="1250" dirty="0">
+                <a:solidFill>
+                  <a:srgbClr val="EDE4F3"/>
+                </a:solidFill>
+                <a:latin typeface="Arial" pitchFamily="34" charset="0"/>
+                <a:ea typeface="Arial" pitchFamily="34" charset="-122"/>
+                <a:cs typeface="Arial" pitchFamily="34" charset="-120"/>
+              </a:rPr>
+              <a:t> — sem o processo que ela deveria resolver.</a:t>
+            </a:r>
+            <a:endParaRPr lang="en-US" sz="1250" dirty="0"/>
+          </a:p>
+        </p:txBody>
+      </p:sp>
+      <p:sp>
+        <p:nvSpPr>
+          <p:cNvPr id="9" name="Text 7"/>
+          <p:cNvSpPr/>
+          <p:nvPr/>
+        </p:nvSpPr>
+        <p:spPr>
+          <a:xfrm>
+            <a:off x="6400800" y="2487168"/>
+            <a:ext cx="4937760" cy="219456"/>
           </a:xfrm>
           <a:prstGeom prst="rect">
             <a:avLst/>
@@ -10341,30 +10377,30 @@
               <a:buNone/>
             </a:pPr>
             <a:r>
-              <a:rPr lang="en-US" sz="900" spc="120" kern="0" dirty="0">
-                <a:solidFill>
-                  <a:srgbClr val="C9B6D4"/>
+              <a:rPr lang="en-US" sz="850" b="1" spc="120" kern="0" dirty="0">
+                <a:solidFill>
+                  <a:srgbClr val="FF8FC0"/>
                 </a:solidFill>
                 <a:latin typeface="Courier New" pitchFamily="34" charset="0"/>
                 <a:ea typeface="Courier New" pitchFamily="34" charset="-122"/>
                 <a:cs typeface="Courier New" pitchFamily="34" charset="-120"/>
               </a:rPr>
-              <a:t>A PESSOA RESPONDE</a:t>
-            </a:r>
-            <a:endParaRPr lang="en-US" sz="900" dirty="0"/>
-          </a:p>
-        </p:txBody>
-      </p:sp>
-      <p:sp>
-        <p:nvSpPr>
-          <p:cNvPr id="7" name="Text 5"/>
-          <p:cNvSpPr/>
-          <p:nvPr/>
-        </p:nvSpPr>
-        <p:spPr>
-          <a:xfrm>
-            <a:off x="2807208" y="2944368"/>
-            <a:ext cx="8229600" cy="384048"/>
+              <a:t>SE A PERGUNTA É</a:t>
+            </a:r>
+            <a:endParaRPr lang="en-US" sz="850" dirty="0"/>
+          </a:p>
+        </p:txBody>
+      </p:sp>
+      <p:sp>
+        <p:nvSpPr>
+          <p:cNvPr id="10" name="Text 8"/>
+          <p:cNvSpPr/>
+          <p:nvPr/>
+        </p:nvSpPr>
+        <p:spPr>
+          <a:xfrm>
+            <a:off x="6400800" y="2743200"/>
+            <a:ext cx="4937760" cy="713232"/>
           </a:xfrm>
           <a:prstGeom prst="rect">
             <a:avLst/>
@@ -10377,6 +10413,9 @@
           <a:lstStyle/>
           <a:p>
             <a:pPr indent="0" marL="0">
+              <a:lnSpc>
+                <a:spcPts val="2500"/>
+              </a:lnSpc>
               <a:buNone/>
             </a:pPr>
             <a:r>
@@ -10388,7 +10427,7 @@
                 <a:ea typeface="Arial" pitchFamily="34" charset="-122"/>
                 <a:cs typeface="Arial" pitchFamily="34" charset="-120"/>
               </a:rPr>
-              <a:t>“Queria um bot que respondesse os chamados.”</a:t>
+              <a:t>“Me conta o que você fez ontem, na ordem.”</a:t>
             </a:r>
             <a:endParaRPr lang="en-US" sz="1900" dirty="0"/>
           </a:p>
@@ -10396,14 +10435,39 @@
       </p:sp>
       <p:sp>
         <p:nvSpPr>
-          <p:cNvPr id="8" name="Text 6"/>
-          <p:cNvSpPr/>
-          <p:nvPr/>
-        </p:nvSpPr>
-        <p:spPr>
-          <a:xfrm>
-            <a:off x="2807208" y="3621024"/>
-            <a:ext cx="7863840" cy="566928"/>
+          <p:cNvPr id="11" name="Shape 9"/>
+          <p:cNvSpPr/>
+          <p:nvPr/>
+        </p:nvSpPr>
+        <p:spPr>
+          <a:xfrm>
+            <a:off x="6400800" y="3584448"/>
+            <a:ext cx="32004" cy="475488"/>
+          </a:xfrm>
+          <a:prstGeom prst="rect">
+            <a:avLst/>
+          </a:prstGeom>
+          <a:solidFill>
+            <a:srgbClr val="E80070"/>
+          </a:solidFill>
+          <a:ln w="12700">
+            <a:solidFill>
+              <a:srgbClr val="333333"/>
+            </a:solidFill>
+            <a:prstDash val="solid"/>
+          </a:ln>
+        </p:spPr>
+      </p:sp>
+      <p:sp>
+        <p:nvSpPr>
+          <p:cNvPr id="12" name="Text 10"/>
+          <p:cNvSpPr/>
+          <p:nvPr/>
+        </p:nvSpPr>
+        <p:spPr>
+          <a:xfrm>
+            <a:off x="6583680" y="3566160"/>
+            <a:ext cx="4754880" cy="512064"/>
           </a:xfrm>
           <a:prstGeom prst="rect">
             <a:avLst/>
@@ -10417,20 +10481,199 @@
           <a:p>
             <a:pPr indent="0" marL="0">
               <a:lnSpc>
+                <a:spcPts val="1850"/>
+              </a:lnSpc>
+              <a:buNone/>
+            </a:pPr>
+            <a:r>
+              <a:rPr lang="en-US" sz="1300" i="1" dirty="0">
+                <a:solidFill>
+                  <a:srgbClr val="D9C8E4"/>
+                </a:solidFill>
+                <a:latin typeface="Arial" pitchFamily="34" charset="0"/>
+                <a:ea typeface="Arial" pitchFamily="34" charset="-122"/>
+                <a:cs typeface="Arial" pitchFamily="34" charset="-120"/>
+              </a:rPr>
+              <a:t>“Chega um e-mail, aí eu jogo no sistema, copio nome e CPF…”</a:t>
+            </a:r>
+            <a:endParaRPr lang="en-US" sz="1300" dirty="0"/>
+          </a:p>
+        </p:txBody>
+      </p:sp>
+      <p:sp>
+        <p:nvSpPr>
+          <p:cNvPr id="13" name="Text 11"/>
+          <p:cNvSpPr/>
+          <p:nvPr/>
+        </p:nvSpPr>
+        <p:spPr>
+          <a:xfrm>
+            <a:off x="6400800" y="4206240"/>
+            <a:ext cx="4937760" cy="512064"/>
+          </a:xfrm>
+          <a:prstGeom prst="rect">
+            <a:avLst/>
+          </a:prstGeom>
+          <a:noFill/>
+          <a:ln/>
+        </p:spPr>
+        <p:txBody>
+          <a:bodyPr wrap="square" lIns="0" tIns="0" rIns="0" bIns="0" rtlCol="0" anchor="t"/>
+          <a:lstStyle/>
+          <a:p>
+            <a:pPr indent="0" marL="0">
+              <a:lnSpc>
                 <a:spcPts val="1900"/>
               </a:lnSpc>
               <a:buNone/>
             </a:pPr>
             <a:r>
+              <a:rPr lang="en-US" sz="1250" dirty="0">
+                <a:solidFill>
+                  <a:srgbClr val="EDE4F3"/>
+                </a:solidFill>
+                <a:latin typeface="Arial" pitchFamily="34" charset="0"/>
+                <a:ea typeface="Arial" pitchFamily="34" charset="-122"/>
+                <a:cs typeface="Arial" pitchFamily="34" charset="-120"/>
+              </a:rPr>
+              <a:t>Vêm </a:t>
+            </a:r>
+            <a:pPr indent="0" marL="0">
+              <a:lnSpc>
+                <a:spcPts val="1900"/>
+              </a:lnSpc>
+              <a:buNone/>
+            </a:pPr>
+            <a:r>
+              <a:rPr lang="en-US" sz="1250" b="1" dirty="0">
+                <a:solidFill>
+                  <a:srgbClr val="FFFFFF"/>
+                </a:solidFill>
+                <a:latin typeface="Arial" pitchFamily="34" charset="0"/>
+                <a:ea typeface="Arial" pitchFamily="34" charset="-122"/>
+                <a:cs typeface="Arial" pitchFamily="34" charset="-120"/>
+              </a:rPr>
+              <a:t>as etapas reais</a:t>
+            </a:r>
+            <a:pPr indent="0" marL="0">
+              <a:lnSpc>
+                <a:spcPts val="1900"/>
+              </a:lnSpc>
+              <a:buNone/>
+            </a:pPr>
+            <a:r>
+              <a:rPr lang="en-US" sz="1250" dirty="0">
+                <a:solidFill>
+                  <a:srgbClr val="EDE4F3"/>
+                </a:solidFill>
+                <a:latin typeface="Arial" pitchFamily="34" charset="0"/>
+                <a:ea typeface="Arial" pitchFamily="34" charset="-122"/>
+                <a:cs typeface="Arial" pitchFamily="34" charset="-120"/>
+              </a:rPr>
+              <a:t>, na ordem em que acontecem.</a:t>
+            </a:r>
+            <a:endParaRPr lang="en-US" sz="1250" dirty="0"/>
+          </a:p>
+        </p:txBody>
+      </p:sp>
+      <p:sp>
+        <p:nvSpPr>
+          <p:cNvPr id="14" name="Shape 12"/>
+          <p:cNvSpPr/>
+          <p:nvPr/>
+        </p:nvSpPr>
+        <p:spPr>
+          <a:xfrm>
+            <a:off x="658368" y="4919472"/>
+            <a:ext cx="10874959" cy="10973"/>
+          </a:xfrm>
+          <a:prstGeom prst="rect">
+            <a:avLst/>
+          </a:prstGeom>
+          <a:solidFill>
+            <a:srgbClr val="FFFFFF">
+              <a:alpha val="16000"/>
+            </a:srgbClr>
+          </a:solidFill>
+          <a:ln w="12700">
+            <a:solidFill>
+              <a:srgbClr val="333333"/>
+            </a:solidFill>
+            <a:prstDash val="solid"/>
+          </a:ln>
+        </p:spPr>
+      </p:sp>
+      <p:sp>
+        <p:nvSpPr>
+          <p:cNvPr id="15" name="Text 13"/>
+          <p:cNvSpPr/>
+          <p:nvPr/>
+        </p:nvSpPr>
+        <p:spPr>
+          <a:xfrm>
+            <a:off x="658368" y="5120640"/>
+            <a:ext cx="10874959" cy="566928"/>
+          </a:xfrm>
+          <a:prstGeom prst="rect">
+            <a:avLst/>
+          </a:prstGeom>
+          <a:noFill/>
+          <a:ln/>
+        </p:spPr>
+        <p:txBody>
+          <a:bodyPr wrap="square" lIns="0" tIns="0" rIns="0" bIns="0" rtlCol="0" anchor="t"/>
+          <a:lstStyle/>
+          <a:p>
+            <a:pPr indent="0" marL="0">
+              <a:lnSpc>
+                <a:spcPts val="1900"/>
+              </a:lnSpc>
+              <a:buNone/>
+            </a:pPr>
+            <a:r>
               <a:rPr lang="en-US" sz="1350" dirty="0">
                 <a:solidFill>
-                  <a:srgbClr val="E7DCEF"/>
-                </a:solidFill>
-                <a:latin typeface="Arial" pitchFamily="34" charset="0"/>
-                <a:ea typeface="Arial" pitchFamily="34" charset="-122"/>
-                <a:cs typeface="Arial" pitchFamily="34" charset="-120"/>
-              </a:rPr>
-              <a:t>Isso não é o processo. É um palpite de solução — e quem constrói em cima dele automatiza o que alguém imaginou, não o trabalho que existe.</a:t>
+                  <a:srgbClr val="C9B6D4"/>
+                </a:solidFill>
+                <a:latin typeface="Arial" pitchFamily="34" charset="0"/>
+                <a:ea typeface="Arial" pitchFamily="34" charset="-122"/>
+                <a:cs typeface="Arial" pitchFamily="34" charset="-120"/>
+              </a:rPr>
+              <a:t>A segunda não é uma pergunta mais esperta: é uma pergunta mais </a:t>
+            </a:r>
+            <a:pPr indent="0" marL="0">
+              <a:lnSpc>
+                <a:spcPts val="1900"/>
+              </a:lnSpc>
+              <a:buNone/>
+            </a:pPr>
+            <a:r>
+              <a:rPr lang="en-US" sz="1350" b="1" dirty="0">
+                <a:solidFill>
+                  <a:srgbClr val="FFFFFF"/>
+                </a:solidFill>
+                <a:latin typeface="Arial" pitchFamily="34" charset="0"/>
+                <a:ea typeface="Arial" pitchFamily="34" charset="-122"/>
+                <a:cs typeface="Arial" pitchFamily="34" charset="-120"/>
+              </a:rPr>
+              <a:t>fácil de responder</a:t>
+            </a:r>
+            <a:pPr indent="0" marL="0">
+              <a:lnSpc>
+                <a:spcPts val="1900"/>
+              </a:lnSpc>
+              <a:buNone/>
+            </a:pPr>
+            <a:r>
+              <a:rPr lang="en-US" sz="1350" dirty="0">
+                <a:solidFill>
+                  <a:srgbClr val="C9B6D4"/>
+                </a:solidFill>
+                <a:latin typeface="Arial" pitchFamily="34" charset="0"/>
+                <a:ea typeface="Arial" pitchFamily="34" charset="-122"/>
+                <a:cs typeface="Arial" pitchFamily="34" charset="-120"/>
+              </a:rPr>
+              <a:t>. A primeira pede um julgamento sobre o próprio trabalho; a segunda pede só uma memória — e memória sai mais fiel.</a:t>
             </a:r>
             <a:endParaRPr lang="en-US" sz="1350" dirty="0"/>
           </a:p>
@@ -10438,114 +10681,36 @@
       </p:sp>
       <p:sp>
         <p:nvSpPr>
-          <p:cNvPr id="9" name="Text 7"/>
-          <p:cNvSpPr/>
-          <p:nvPr/>
-        </p:nvSpPr>
-        <p:spPr>
-          <a:xfrm>
-            <a:off x="658368" y="4526280"/>
-            <a:ext cx="1920240" cy="237744"/>
-          </a:xfrm>
-          <a:prstGeom prst="rect">
-            <a:avLst/>
-          </a:prstGeom>
-          <a:noFill/>
-          <a:ln/>
-        </p:spPr>
-        <p:txBody>
-          <a:bodyPr wrap="square" lIns="0" tIns="0" rIns="0" bIns="0" rtlCol="0" anchor="ctr"/>
-          <a:lstStyle/>
-          <a:p>
-            <a:pPr indent="0" marL="0">
-              <a:buNone/>
-            </a:pPr>
-            <a:r>
-              <a:rPr lang="en-US" sz="900" b="1" spc="120" kern="0" dirty="0">
+          <p:cNvPr id="16" name="Text 14"/>
+          <p:cNvSpPr/>
+          <p:nvPr/>
+        </p:nvSpPr>
+        <p:spPr>
+          <a:xfrm>
+            <a:off x="658368" y="5870448"/>
+            <a:ext cx="10881360" cy="411480"/>
+          </a:xfrm>
+          <a:prstGeom prst="rect">
+            <a:avLst/>
+          </a:prstGeom>
+          <a:noFill/>
+          <a:ln/>
+        </p:spPr>
+        <p:txBody>
+          <a:bodyPr wrap="square" lIns="0" tIns="0" rIns="0" bIns="0" rtlCol="0" anchor="t"/>
+          <a:lstStyle/>
+          <a:p>
+            <a:pPr indent="0" marL="0">
+              <a:lnSpc>
+                <a:spcPts val="1700"/>
+              </a:lnSpc>
+              <a:buNone/>
+            </a:pPr>
+            <a:r>
+              <a:rPr lang="en-US" sz="1200" b="1" dirty="0">
                 <a:solidFill>
                   <a:srgbClr val="FF8FC0"/>
                 </a:solidFill>
-                <a:latin typeface="Courier New" pitchFamily="34" charset="0"/>
-                <a:ea typeface="Courier New" pitchFamily="34" charset="-122"/>
-                <a:cs typeface="Courier New" pitchFamily="34" charset="-120"/>
-              </a:rPr>
-              <a:t>PERGUNTE ASSIM</a:t>
-            </a:r>
-            <a:endParaRPr lang="en-US" sz="900" dirty="0"/>
-          </a:p>
-        </p:txBody>
-      </p:sp>
-      <p:sp>
-        <p:nvSpPr>
-          <p:cNvPr id="10" name="Text 8"/>
-          <p:cNvSpPr/>
-          <p:nvPr/>
-        </p:nvSpPr>
-        <p:spPr>
-          <a:xfrm>
-            <a:off x="2807208" y="4471416"/>
-            <a:ext cx="8229600" cy="411480"/>
-          </a:xfrm>
-          <a:prstGeom prst="rect">
-            <a:avLst/>
-          </a:prstGeom>
-          <a:noFill/>
-          <a:ln/>
-        </p:spPr>
-        <p:txBody>
-          <a:bodyPr wrap="square" lIns="0" tIns="0" rIns="0" bIns="0" rtlCol="0" anchor="t"/>
-          <a:lstStyle/>
-          <a:p>
-            <a:pPr indent="0" marL="0">
-              <a:buNone/>
-            </a:pPr>
-            <a:r>
-              <a:rPr lang="en-US" sz="1900" b="1" spc="-19" kern="0" dirty="0">
-                <a:solidFill>
-                  <a:srgbClr val="FFFFFF"/>
-                </a:solidFill>
-                <a:latin typeface="Arial" pitchFamily="34" charset="0"/>
-                <a:ea typeface="Arial" pitchFamily="34" charset="-122"/>
-                <a:cs typeface="Arial" pitchFamily="34" charset="-120"/>
-              </a:rPr>
-              <a:t>“Me conta o que você fez ontem, na ordem.”</a:t>
-            </a:r>
-            <a:endParaRPr lang="en-US" sz="1900" dirty="0"/>
-          </a:p>
-        </p:txBody>
-      </p:sp>
-      <p:sp>
-        <p:nvSpPr>
-          <p:cNvPr id="11" name="Text 9"/>
-          <p:cNvSpPr/>
-          <p:nvPr/>
-        </p:nvSpPr>
-        <p:spPr>
-          <a:xfrm>
-            <a:off x="658368" y="5715000"/>
-            <a:ext cx="10881360" cy="411480"/>
-          </a:xfrm>
-          <a:prstGeom prst="rect">
-            <a:avLst/>
-          </a:prstGeom>
-          <a:noFill/>
-          <a:ln/>
-        </p:spPr>
-        <p:txBody>
-          <a:bodyPr wrap="square" lIns="0" tIns="0" rIns="0" bIns="0" rtlCol="0" anchor="t"/>
-          <a:lstStyle/>
-          <a:p>
-            <a:pPr indent="0" marL="0">
-              <a:lnSpc>
-                <a:spcPts val="1800"/>
-              </a:lnSpc>
-              <a:buNone/>
-            </a:pPr>
-            <a:r>
-              <a:rPr lang="en-US" sz="1200" b="1" dirty="0">
-                <a:solidFill>
-                  <a:srgbClr val="FF8FC0"/>
-                </a:solidFill>
                 <a:latin typeface="Arial" pitchFamily="34" charset="0"/>
                 <a:ea typeface="Arial" pitchFamily="34" charset="-122"/>
                 <a:cs typeface="Arial" pitchFamily="34" charset="-120"/>
@@ -10554,7 +10719,7 @@
             </a:r>
             <a:pPr indent="0" marL="0">
               <a:lnSpc>
-                <a:spcPts val="1800"/>
+                <a:spcPts val="1700"/>
               </a:lnSpc>
               <a:buNone/>
             </a:pPr>
@@ -10571,7 +10736,7 @@
             </a:r>
             <a:pPr indent="0" marL="0">
               <a:lnSpc>
-                <a:spcPts val="1800"/>
+                <a:spcPts val="1700"/>
               </a:lnSpc>
               <a:buNone/>
             </a:pPr>
@@ -10688,7 +10853,7 @@
         <p:spPr>
           <a:xfrm>
             <a:off x="658368" y="777240"/>
-            <a:ext cx="10874959" cy="777240"/>
+            <a:ext cx="10874959" cy="594360"/>
           </a:xfrm>
           <a:prstGeom prst="rect">
             <a:avLst/>
@@ -10707,7 +10872,7 @@
               <a:buNone/>
             </a:pPr>
             <a:r>
-              <a:rPr lang="en-US" sz="2700" b="1" spc="-59" kern="0" dirty="0">
+              <a:rPr lang="en-US" sz="2900" b="1" spc="-64" kern="0" dirty="0">
                 <a:solidFill>
                   <a:srgbClr val="16224E"/>
                 </a:solidFill>
@@ -10724,7 +10889,7 @@
               <a:buNone/>
             </a:pPr>
             <a:r>
-              <a:rPr lang="en-US" sz="2700" b="1" spc="-59" kern="0" dirty="0">
+              <a:rPr lang="en-US" sz="2900" b="1" spc="-64" kern="0" dirty="0">
                 <a:solidFill>
                   <a:srgbClr val="E80070"/>
                 </a:solidFill>
@@ -10734,14 +10899,105 @@
               </a:rPr>
               <a:t>inteiro</a:t>
             </a:r>
-            <a:pPr indent="0" marL="0">
-              <a:lnSpc>
-                <a:spcPts val="3100"/>
-              </a:lnSpc>
-              <a:buNone/>
-            </a:pPr>
-            <a:r>
-              <a:rPr lang="en-US" sz="2700" b="1" spc="-59" kern="0" dirty="0">
+            <a:endParaRPr lang="en-US" sz="2900" dirty="0"/>
+          </a:p>
+        </p:txBody>
+      </p:sp>
+      <p:sp>
+        <p:nvSpPr>
+          <p:cNvPr id="5" name="Shape 3"/>
+          <p:cNvSpPr/>
+          <p:nvPr/>
+        </p:nvSpPr>
+        <p:spPr>
+          <a:xfrm>
+            <a:off x="658368" y="1874520"/>
+            <a:ext cx="2581580" cy="1938528"/>
+          </a:xfrm>
+          <a:prstGeom prst="roundRect">
+            <a:avLst>
+              <a:gd name="adj" fmla="val 4717"/>
+            </a:avLst>
+          </a:prstGeom>
+          <a:solidFill>
+            <a:srgbClr val="FFFFFF"/>
+          </a:solidFill>
+          <a:ln w="12700">
+            <a:solidFill>
+              <a:srgbClr val="E3DCEC"/>
+            </a:solidFill>
+            <a:prstDash val="solid"/>
+          </a:ln>
+        </p:spPr>
+      </p:sp>
+      <p:sp>
+        <p:nvSpPr>
+          <p:cNvPr id="6" name="Text 4"/>
+          <p:cNvSpPr/>
+          <p:nvPr/>
+        </p:nvSpPr>
+        <p:spPr>
+          <a:xfrm>
+            <a:off x="859536" y="2020824"/>
+            <a:ext cx="548640" cy="201168"/>
+          </a:xfrm>
+          <a:prstGeom prst="rect">
+            <a:avLst/>
+          </a:prstGeom>
+          <a:noFill/>
+          <a:ln/>
+        </p:spPr>
+        <p:txBody>
+          <a:bodyPr wrap="square" lIns="0" tIns="0" rIns="0" bIns="0" rtlCol="0" anchor="ctr"/>
+          <a:lstStyle/>
+          <a:p>
+            <a:pPr indent="0" marL="0">
+              <a:buNone/>
+            </a:pPr>
+            <a:r>
+              <a:rPr lang="en-US" sz="950" b="1" spc="60" kern="0" dirty="0">
+                <a:solidFill>
+                  <a:srgbClr val="B9AFC9"/>
+                </a:solidFill>
+                <a:latin typeface="Courier New" pitchFamily="34" charset="0"/>
+                <a:ea typeface="Courier New" pitchFamily="34" charset="-122"/>
+                <a:cs typeface="Courier New" pitchFamily="34" charset="-120"/>
+              </a:rPr>
+              <a:t>01</a:t>
+            </a:r>
+            <a:endParaRPr lang="en-US" sz="950" dirty="0"/>
+          </a:p>
+        </p:txBody>
+      </p:sp>
+      <p:sp>
+        <p:nvSpPr>
+          <p:cNvPr id="7" name="Text 5"/>
+          <p:cNvSpPr/>
+          <p:nvPr/>
+        </p:nvSpPr>
+        <p:spPr>
+          <a:xfrm>
+            <a:off x="859536" y="2276856"/>
+            <a:ext cx="2179244" cy="713232"/>
+          </a:xfrm>
+          <a:prstGeom prst="rect">
+            <a:avLst/>
+          </a:prstGeom>
+          <a:noFill/>
+          <a:ln/>
+        </p:spPr>
+        <p:txBody>
+          <a:bodyPr wrap="square" lIns="0" tIns="0" rIns="0" bIns="0" rtlCol="0" anchor="t"/>
+          <a:lstStyle/>
+          <a:p>
+            <a:pPr indent="0" marL="0">
+              <a:lnSpc>
+                <a:spcPts val="1700"/>
+              </a:lnSpc>
+              <a:buNone/>
+            </a:pPr>
+            <a:r>
+              <a:rPr lang="en-US" sz="1150" dirty="0">
                 <a:solidFill>
                   <a:srgbClr val="16224E"/>
                 </a:solidFill>
@@ -10749,22 +11005,22 @@
                 <a:ea typeface="Arial" pitchFamily="34" charset="-122"/>
                 <a:cs typeface="Arial" pitchFamily="34" charset="-120"/>
               </a:rPr>
-              <a:t> em meia hora</a:t>
-            </a:r>
-            <a:endParaRPr lang="en-US" sz="2700" dirty="0"/>
-          </a:p>
-        </p:txBody>
-      </p:sp>
-      <p:sp>
-        <p:nvSpPr>
-          <p:cNvPr id="5" name="Shape 3"/>
-          <p:cNvSpPr/>
-          <p:nvPr/>
-        </p:nvSpPr>
-        <p:spPr>
-          <a:xfrm>
-            <a:off x="658368" y="1700784"/>
-            <a:ext cx="10874959" cy="9144"/>
+              <a:t>“Me conta o que você fez ontem, na ordem.”</a:t>
+            </a:r>
+            <a:endParaRPr lang="en-US" sz="1150" dirty="0"/>
+          </a:p>
+        </p:txBody>
+      </p:sp>
+      <p:sp>
+        <p:nvSpPr>
+          <p:cNvPr id="8" name="Shape 6"/>
+          <p:cNvSpPr/>
+          <p:nvPr/>
+        </p:nvSpPr>
+        <p:spPr>
+          <a:xfrm>
+            <a:off x="859536" y="3081528"/>
+            <a:ext cx="2179244" cy="10973"/>
           </a:xfrm>
           <a:prstGeom prst="rect">
             <a:avLst/>
@@ -10782,14 +11038,117 @@
       </p:sp>
       <p:sp>
         <p:nvSpPr>
-          <p:cNvPr id="6" name="Text 4"/>
-          <p:cNvSpPr/>
-          <p:nvPr/>
-        </p:nvSpPr>
-        <p:spPr>
-          <a:xfrm>
-            <a:off x="768096" y="1792224"/>
-            <a:ext cx="384048" cy="256032"/>
+          <p:cNvPr id="9" name="Text 7"/>
+          <p:cNvSpPr/>
+          <p:nvPr/>
+        </p:nvSpPr>
+        <p:spPr>
+          <a:xfrm>
+            <a:off x="859536" y="3191256"/>
+            <a:ext cx="2179244" cy="457200"/>
+          </a:xfrm>
+          <a:prstGeom prst="rect">
+            <a:avLst/>
+          </a:prstGeom>
+          <a:noFill/>
+          <a:ln/>
+        </p:spPr>
+        <p:txBody>
+          <a:bodyPr wrap="square" lIns="0" tIns="0" rIns="0" bIns="0" rtlCol="0" anchor="t"/>
+          <a:lstStyle/>
+          <a:p>
+            <a:pPr indent="0" marL="0">
+              <a:lnSpc>
+                <a:spcPts val="1450"/>
+              </a:lnSpc>
+              <a:buNone/>
+            </a:pPr>
+            <a:r>
+              <a:rPr lang="en-US" sz="1000" dirty="0">
+                <a:solidFill>
+                  <a:srgbClr val="4A5578"/>
+                </a:solidFill>
+                <a:latin typeface="Arial" pitchFamily="34" charset="0"/>
+                <a:ea typeface="Arial" pitchFamily="34" charset="-122"/>
+                <a:cs typeface="Arial" pitchFamily="34" charset="-120"/>
+              </a:rPr>
+              <a:t>As etapas </a:t>
+            </a:r>
+            <a:pPr indent="0" marL="0">
+              <a:lnSpc>
+                <a:spcPts val="1450"/>
+              </a:lnSpc>
+              <a:buNone/>
+            </a:pPr>
+            <a:r>
+              <a:rPr lang="en-US" sz="1000" b="1" dirty="0">
+                <a:solidFill>
+                  <a:srgbClr val="16224E"/>
+                </a:solidFill>
+                <a:latin typeface="Arial" pitchFamily="34" charset="0"/>
+                <a:ea typeface="Arial" pitchFamily="34" charset="-122"/>
+                <a:cs typeface="Arial" pitchFamily="34" charset="-120"/>
+              </a:rPr>
+              <a:t>reais</a:t>
+            </a:r>
+            <a:pPr indent="0" marL="0">
+              <a:lnSpc>
+                <a:spcPts val="1450"/>
+              </a:lnSpc>
+              <a:buNone/>
+            </a:pPr>
+            <a:r>
+              <a:rPr lang="en-US" sz="1000" dirty="0">
+                <a:solidFill>
+                  <a:srgbClr val="4A5578"/>
+                </a:solidFill>
+                <a:latin typeface="Arial" pitchFamily="34" charset="0"/>
+                <a:ea typeface="Arial" pitchFamily="34" charset="-122"/>
+                <a:cs typeface="Arial" pitchFamily="34" charset="-120"/>
+              </a:rPr>
+              <a:t> — não a versão oficial do gestor.</a:t>
+            </a:r>
+            <a:endParaRPr lang="en-US" sz="1000" dirty="0"/>
+          </a:p>
+        </p:txBody>
+      </p:sp>
+      <p:sp>
+        <p:nvSpPr>
+          <p:cNvPr id="10" name="Shape 8"/>
+          <p:cNvSpPr/>
+          <p:nvPr/>
+        </p:nvSpPr>
+        <p:spPr>
+          <a:xfrm>
+            <a:off x="3422828" y="1874520"/>
+            <a:ext cx="2581580" cy="1938528"/>
+          </a:xfrm>
+          <a:prstGeom prst="roundRect">
+            <a:avLst>
+              <a:gd name="adj" fmla="val 4717"/>
+            </a:avLst>
+          </a:prstGeom>
+          <a:solidFill>
+            <a:srgbClr val="FEF6FA"/>
+          </a:solidFill>
+          <a:ln w="12700">
+            <a:solidFill>
+              <a:srgbClr val="E80070"/>
+            </a:solidFill>
+            <a:prstDash val="solid"/>
+          </a:ln>
+        </p:spPr>
+      </p:sp>
+      <p:sp>
+        <p:nvSpPr>
+          <p:cNvPr id="11" name="Text 9"/>
+          <p:cNvSpPr/>
+          <p:nvPr/>
+        </p:nvSpPr>
+        <p:spPr>
+          <a:xfrm>
+            <a:off x="3623996" y="2020824"/>
+            <a:ext cx="548640" cy="201168"/>
           </a:xfrm>
           <a:prstGeom prst="rect">
             <a:avLst/>
@@ -10805,30 +11164,30 @@
               <a:buNone/>
             </a:pPr>
             <a:r>
-              <a:rPr lang="en-US" sz="1000" b="1" dirty="0">
-                <a:solidFill>
-                  <a:srgbClr val="B9AFC9"/>
+              <a:rPr lang="en-US" sz="950" b="1" spc="60" kern="0" dirty="0">
+                <a:solidFill>
+                  <a:srgbClr val="E80070"/>
                 </a:solidFill>
                 <a:latin typeface="Courier New" pitchFamily="34" charset="0"/>
                 <a:ea typeface="Courier New" pitchFamily="34" charset="-122"/>
                 <a:cs typeface="Courier New" pitchFamily="34" charset="-120"/>
               </a:rPr>
-              <a:t>01</a:t>
-            </a:r>
-            <a:endParaRPr lang="en-US" sz="1000" dirty="0"/>
-          </a:p>
-        </p:txBody>
-      </p:sp>
-      <p:sp>
-        <p:nvSpPr>
-          <p:cNvPr id="7" name="Text 5"/>
-          <p:cNvSpPr/>
-          <p:nvPr/>
-        </p:nvSpPr>
-        <p:spPr>
-          <a:xfrm>
-            <a:off x="1225296" y="1810512"/>
-            <a:ext cx="3840480" cy="347472"/>
+              <a:t>02</a:t>
+            </a:r>
+            <a:endParaRPr lang="en-US" sz="950" dirty="0"/>
+          </a:p>
+        </p:txBody>
+      </p:sp>
+      <p:sp>
+        <p:nvSpPr>
+          <p:cNvPr id="12" name="Text 10"/>
+          <p:cNvSpPr/>
+          <p:nvPr/>
+        </p:nvSpPr>
+        <p:spPr>
+          <a:xfrm>
+            <a:off x="3623996" y="2276856"/>
+            <a:ext cx="2179244" cy="713232"/>
           </a:xfrm>
           <a:prstGeom prst="rect">
             <a:avLst/>
@@ -10842,12 +11201,12 @@
           <a:p>
             <a:pPr indent="0" marL="0">
               <a:lnSpc>
-                <a:spcPts val="1900"/>
-              </a:lnSpc>
-              <a:buNone/>
-            </a:pPr>
-            <a:r>
-              <a:rPr lang="en-US" sz="1250" dirty="0">
+                <a:spcPts val="1700"/>
+              </a:lnSpc>
+              <a:buNone/>
+            </a:pPr>
+            <a:r>
+              <a:rPr lang="en-US" sz="1150" dirty="0">
                 <a:solidFill>
                   <a:srgbClr val="16224E"/>
                 </a:solidFill>
@@ -10855,83 +11214,7 @@
                 <a:ea typeface="Arial" pitchFamily="34" charset="-122"/>
                 <a:cs typeface="Arial" pitchFamily="34" charset="-120"/>
               </a:rPr>
-              <a:t>“Me conta o que você fez ontem, na ordem.”</a:t>
-            </a:r>
-            <a:endParaRPr lang="en-US" sz="1250" dirty="0"/>
-          </a:p>
-        </p:txBody>
-      </p:sp>
-      <p:sp>
-        <p:nvSpPr>
-          <p:cNvPr id="8" name="Text 6"/>
-          <p:cNvSpPr/>
-          <p:nvPr/>
-        </p:nvSpPr>
-        <p:spPr>
-          <a:xfrm>
-            <a:off x="5184648" y="1810512"/>
-            <a:ext cx="6263640" cy="347472"/>
-          </a:xfrm>
-          <a:prstGeom prst="rect">
-            <a:avLst/>
-          </a:prstGeom>
-          <a:noFill/>
-          <a:ln/>
-        </p:spPr>
-        <p:txBody>
-          <a:bodyPr wrap="square" lIns="0" tIns="0" rIns="0" bIns="0" rtlCol="0" anchor="t"/>
-          <a:lstStyle/>
-          <a:p>
-            <a:pPr indent="0" marL="0">
-              <a:lnSpc>
-                <a:spcPts val="1700"/>
-              </a:lnSpc>
-              <a:buNone/>
-            </a:pPr>
-            <a:r>
-              <a:rPr lang="en-US" sz="1150" dirty="0">
-                <a:solidFill>
-                  <a:srgbClr val="4A5578"/>
-                </a:solidFill>
-                <a:latin typeface="Arial" pitchFamily="34" charset="0"/>
-                <a:ea typeface="Arial" pitchFamily="34" charset="-122"/>
-                <a:cs typeface="Arial" pitchFamily="34" charset="-120"/>
-              </a:rPr>
-              <a:t>As etapas </a:t>
-            </a:r>
-            <a:pPr indent="0" marL="0">
-              <a:lnSpc>
-                <a:spcPts val="1700"/>
-              </a:lnSpc>
-              <a:buNone/>
-            </a:pPr>
-            <a:r>
-              <a:rPr lang="en-US" sz="1150" b="1" dirty="0">
-                <a:solidFill>
-                  <a:srgbClr val="4A5578"/>
-                </a:solidFill>
-                <a:latin typeface="Arial" pitchFamily="34" charset="0"/>
-                <a:ea typeface="Arial" pitchFamily="34" charset="-122"/>
-                <a:cs typeface="Arial" pitchFamily="34" charset="-120"/>
-              </a:rPr>
-              <a:t>reais</a:t>
-            </a:r>
-            <a:pPr indent="0" marL="0">
-              <a:lnSpc>
-                <a:spcPts val="1700"/>
-              </a:lnSpc>
-              <a:buNone/>
-            </a:pPr>
-            <a:r>
-              <a:rPr lang="en-US" sz="1150" dirty="0">
-                <a:solidFill>
-                  <a:srgbClr val="4A5578"/>
-                </a:solidFill>
-                <a:latin typeface="Arial" pitchFamily="34" charset="0"/>
-                <a:ea typeface="Arial" pitchFamily="34" charset="-122"/>
-                <a:cs typeface="Arial" pitchFamily="34" charset="-120"/>
-              </a:rPr>
-              <a:t> — não a versão oficial do gestor.</a:t>
+              <a:t>“O que te faz parar e perguntar pra alguém?”</a:t>
             </a:r>
             <a:endParaRPr lang="en-US" sz="1150" dirty="0"/>
           </a:p>
@@ -10939,22 +11222,20 @@
       </p:sp>
       <p:sp>
         <p:nvSpPr>
-          <p:cNvPr id="9" name="Shape 7"/>
-          <p:cNvSpPr/>
-          <p:nvPr/>
-        </p:nvSpPr>
-        <p:spPr>
-          <a:xfrm>
-            <a:off x="658368" y="2235708"/>
-            <a:ext cx="10874959" cy="534924"/>
-          </a:xfrm>
-          <a:prstGeom prst="roundRect">
-            <a:avLst>
-              <a:gd name="adj" fmla="val 10256"/>
-            </a:avLst>
+          <p:cNvPr id="13" name="Shape 11"/>
+          <p:cNvSpPr/>
+          <p:nvPr/>
+        </p:nvSpPr>
+        <p:spPr>
+          <a:xfrm>
+            <a:off x="3623996" y="3081528"/>
+            <a:ext cx="2179244" cy="10973"/>
+          </a:xfrm>
+          <a:prstGeom prst="rect">
+            <a:avLst/>
           </a:prstGeom>
           <a:solidFill>
-            <a:srgbClr val="FEF6FA"/>
+            <a:srgbClr val="F5C7DD"/>
           </a:solidFill>
           <a:ln w="12700">
             <a:solidFill>
@@ -10966,14 +11247,117 @@
       </p:sp>
       <p:sp>
         <p:nvSpPr>
-          <p:cNvPr id="10" name="Text 8"/>
-          <p:cNvSpPr/>
-          <p:nvPr/>
-        </p:nvSpPr>
-        <p:spPr>
-          <a:xfrm>
-            <a:off x="768096" y="2327148"/>
-            <a:ext cx="384048" cy="256032"/>
+          <p:cNvPr id="14" name="Text 12"/>
+          <p:cNvSpPr/>
+          <p:nvPr/>
+        </p:nvSpPr>
+        <p:spPr>
+          <a:xfrm>
+            <a:off x="3623996" y="3191256"/>
+            <a:ext cx="2179244" cy="457200"/>
+          </a:xfrm>
+          <a:prstGeom prst="rect">
+            <a:avLst/>
+          </a:prstGeom>
+          <a:noFill/>
+          <a:ln/>
+        </p:spPr>
+        <p:txBody>
+          <a:bodyPr wrap="square" lIns="0" tIns="0" rIns="0" bIns="0" rtlCol="0" anchor="t"/>
+          <a:lstStyle/>
+          <a:p>
+            <a:pPr indent="0" marL="0">
+              <a:lnSpc>
+                <a:spcPts val="1450"/>
+              </a:lnSpc>
+              <a:buNone/>
+            </a:pPr>
+            <a:r>
+              <a:rPr lang="en-US" sz="1000" dirty="0">
+                <a:solidFill>
+                  <a:srgbClr val="4A5578"/>
+                </a:solidFill>
+                <a:latin typeface="Arial" pitchFamily="34" charset="0"/>
+                <a:ea typeface="Arial" pitchFamily="34" charset="-122"/>
+                <a:cs typeface="Arial" pitchFamily="34" charset="-120"/>
+              </a:rPr>
+              <a:t>Cada resposta é um </a:t>
+            </a:r>
+            <a:pPr indent="0" marL="0">
+              <a:lnSpc>
+                <a:spcPts val="1450"/>
+              </a:lnSpc>
+              <a:buNone/>
+            </a:pPr>
+            <a:r>
+              <a:rPr lang="en-US" sz="1000" b="1" dirty="0">
+                <a:solidFill>
+                  <a:srgbClr val="E80070"/>
+                </a:solidFill>
+                <a:latin typeface="Arial" pitchFamily="34" charset="0"/>
+                <a:ea typeface="Arial" pitchFamily="34" charset="-122"/>
+                <a:cs typeface="Arial" pitchFamily="34" charset="-120"/>
+              </a:rPr>
+              <a:t>losango</a:t>
+            </a:r>
+            <a:pPr indent="0" marL="0">
+              <a:lnSpc>
+                <a:spcPts val="1450"/>
+              </a:lnSpc>
+              <a:buNone/>
+            </a:pPr>
+            <a:r>
+              <a:rPr lang="en-US" sz="1000" dirty="0">
+                <a:solidFill>
+                  <a:srgbClr val="4A5578"/>
+                </a:solidFill>
+                <a:latin typeface="Arial" pitchFamily="34" charset="0"/>
+                <a:ea typeface="Arial" pitchFamily="34" charset="-122"/>
+                <a:cs typeface="Arial" pitchFamily="34" charset="-120"/>
+              </a:rPr>
+              <a:t>. E vem com a regra junto.</a:t>
+            </a:r>
+            <a:endParaRPr lang="en-US" sz="1000" dirty="0"/>
+          </a:p>
+        </p:txBody>
+      </p:sp>
+      <p:sp>
+        <p:nvSpPr>
+          <p:cNvPr id="15" name="Shape 13"/>
+          <p:cNvSpPr/>
+          <p:nvPr/>
+        </p:nvSpPr>
+        <p:spPr>
+          <a:xfrm>
+            <a:off x="6187288" y="1874520"/>
+            <a:ext cx="2581580" cy="1938528"/>
+          </a:xfrm>
+          <a:prstGeom prst="roundRect">
+            <a:avLst>
+              <a:gd name="adj" fmla="val 4717"/>
+            </a:avLst>
+          </a:prstGeom>
+          <a:solidFill>
+            <a:srgbClr val="FEF6FA"/>
+          </a:solidFill>
+          <a:ln w="12700">
+            <a:solidFill>
+              <a:srgbClr val="E80070"/>
+            </a:solidFill>
+            <a:prstDash val="solid"/>
+          </a:ln>
+        </p:spPr>
+      </p:sp>
+      <p:sp>
+        <p:nvSpPr>
+          <p:cNvPr id="16" name="Text 14"/>
+          <p:cNvSpPr/>
+          <p:nvPr/>
+        </p:nvSpPr>
+        <p:spPr>
+          <a:xfrm>
+            <a:off x="6388456" y="2020824"/>
+            <a:ext cx="548640" cy="201168"/>
           </a:xfrm>
           <a:prstGeom prst="rect">
             <a:avLst/>
@@ -10989,7 +11373,7 @@
               <a:buNone/>
             </a:pPr>
             <a:r>
-              <a:rPr lang="en-US" sz="1000" b="1" dirty="0">
+              <a:rPr lang="en-US" sz="950" b="1" spc="60" kern="0" dirty="0">
                 <a:solidFill>
                   <a:srgbClr val="E80070"/>
                 </a:solidFill>
@@ -10997,22 +11381,22 @@
                 <a:ea typeface="Courier New" pitchFamily="34" charset="-122"/>
                 <a:cs typeface="Courier New" pitchFamily="34" charset="-120"/>
               </a:rPr>
-              <a:t>02</a:t>
-            </a:r>
-            <a:endParaRPr lang="en-US" sz="1000" dirty="0"/>
-          </a:p>
-        </p:txBody>
-      </p:sp>
-      <p:sp>
-        <p:nvSpPr>
-          <p:cNvPr id="11" name="Text 9"/>
-          <p:cNvSpPr/>
-          <p:nvPr/>
-        </p:nvSpPr>
-        <p:spPr>
-          <a:xfrm>
-            <a:off x="1225296" y="2345436"/>
-            <a:ext cx="3840480" cy="347472"/>
+              <a:t>03</a:t>
+            </a:r>
+            <a:endParaRPr lang="en-US" sz="950" dirty="0"/>
+          </a:p>
+        </p:txBody>
+      </p:sp>
+      <p:sp>
+        <p:nvSpPr>
+          <p:cNvPr id="17" name="Text 15"/>
+          <p:cNvSpPr/>
+          <p:nvPr/>
+        </p:nvSpPr>
+        <p:spPr>
+          <a:xfrm>
+            <a:off x="6388456" y="2276856"/>
+            <a:ext cx="2179244" cy="713232"/>
           </a:xfrm>
           <a:prstGeom prst="rect">
             <a:avLst/>
@@ -11026,12 +11410,12 @@
           <a:p>
             <a:pPr indent="0" marL="0">
               <a:lnSpc>
-                <a:spcPts val="1900"/>
-              </a:lnSpc>
-              <a:buNone/>
-            </a:pPr>
-            <a:r>
-              <a:rPr lang="en-US" sz="1250" dirty="0">
+                <a:spcPts val="1700"/>
+              </a:lnSpc>
+              <a:buNone/>
+            </a:pPr>
+            <a:r>
+              <a:rPr lang="en-US" sz="1150" dirty="0">
                 <a:solidFill>
                   <a:srgbClr val="16224E"/>
                 </a:solidFill>
@@ -11039,83 +11423,7 @@
                 <a:ea typeface="Arial" pitchFamily="34" charset="-122"/>
                 <a:cs typeface="Arial" pitchFamily="34" charset="-120"/>
               </a:rPr>
-              <a:t>“O que te faz parar e perguntar pra alguém?”</a:t>
-            </a:r>
-            <a:endParaRPr lang="en-US" sz="1250" dirty="0"/>
-          </a:p>
-        </p:txBody>
-      </p:sp>
-      <p:sp>
-        <p:nvSpPr>
-          <p:cNvPr id="12" name="Text 10"/>
-          <p:cNvSpPr/>
-          <p:nvPr/>
-        </p:nvSpPr>
-        <p:spPr>
-          <a:xfrm>
-            <a:off x="5184648" y="2345436"/>
-            <a:ext cx="6263640" cy="347472"/>
-          </a:xfrm>
-          <a:prstGeom prst="rect">
-            <a:avLst/>
-          </a:prstGeom>
-          <a:noFill/>
-          <a:ln/>
-        </p:spPr>
-        <p:txBody>
-          <a:bodyPr wrap="square" lIns="0" tIns="0" rIns="0" bIns="0" rtlCol="0" anchor="t"/>
-          <a:lstStyle/>
-          <a:p>
-            <a:pPr indent="0" marL="0">
-              <a:lnSpc>
-                <a:spcPts val="1700"/>
-              </a:lnSpc>
-              <a:buNone/>
-            </a:pPr>
-            <a:r>
-              <a:rPr lang="en-US" sz="1150" dirty="0">
-                <a:solidFill>
-                  <a:srgbClr val="4A5578"/>
-                </a:solidFill>
-                <a:latin typeface="Arial" pitchFamily="34" charset="0"/>
-                <a:ea typeface="Arial" pitchFamily="34" charset="-122"/>
-                <a:cs typeface="Arial" pitchFamily="34" charset="-120"/>
-              </a:rPr>
-              <a:t>Cada resposta é um </a:t>
-            </a:r>
-            <a:pPr indent="0" marL="0">
-              <a:lnSpc>
-                <a:spcPts val="1700"/>
-              </a:lnSpc>
-              <a:buNone/>
-            </a:pPr>
-            <a:r>
-              <a:rPr lang="en-US" sz="1150" b="1" dirty="0">
-                <a:solidFill>
-                  <a:srgbClr val="E80070"/>
-                </a:solidFill>
-                <a:latin typeface="Arial" pitchFamily="34" charset="0"/>
-                <a:ea typeface="Arial" pitchFamily="34" charset="-122"/>
-                <a:cs typeface="Arial" pitchFamily="34" charset="-120"/>
-              </a:rPr>
-              <a:t>losango</a:t>
-            </a:r>
-            <a:pPr indent="0" marL="0">
-              <a:lnSpc>
-                <a:spcPts val="1700"/>
-              </a:lnSpc>
-              <a:buNone/>
-            </a:pPr>
-            <a:r>
-              <a:rPr lang="en-US" sz="1150" dirty="0">
-                <a:solidFill>
-                  <a:srgbClr val="4A5578"/>
-                </a:solidFill>
-                <a:latin typeface="Arial" pitchFamily="34" charset="0"/>
-                <a:ea typeface="Arial" pitchFamily="34" charset="-122"/>
-                <a:cs typeface="Arial" pitchFamily="34" charset="-120"/>
-              </a:rPr>
-              <a:t>. E vem com a regra junto.</a:t>
+              <a:t>“O que você copia de um lugar pro outro?”</a:t>
             </a:r>
             <a:endParaRPr lang="en-US" sz="1150" dirty="0"/>
           </a:p>
@@ -11123,22 +11431,20 @@
       </p:sp>
       <p:sp>
         <p:nvSpPr>
-          <p:cNvPr id="13" name="Shape 11"/>
-          <p:cNvSpPr/>
-          <p:nvPr/>
-        </p:nvSpPr>
-        <p:spPr>
-          <a:xfrm>
-            <a:off x="658368" y="2770632"/>
-            <a:ext cx="10874959" cy="534924"/>
-          </a:xfrm>
-          <a:prstGeom prst="roundRect">
-            <a:avLst>
-              <a:gd name="adj" fmla="val 10256"/>
-            </a:avLst>
+          <p:cNvPr id="18" name="Shape 16"/>
+          <p:cNvSpPr/>
+          <p:nvPr/>
+        </p:nvSpPr>
+        <p:spPr>
+          <a:xfrm>
+            <a:off x="6388456" y="3081528"/>
+            <a:ext cx="2179244" cy="10973"/>
+          </a:xfrm>
+          <a:prstGeom prst="rect">
+            <a:avLst/>
           </a:prstGeom>
           <a:solidFill>
-            <a:srgbClr val="FEF6FA"/>
+            <a:srgbClr val="F5C7DD"/>
           </a:solidFill>
           <a:ln w="12700">
             <a:solidFill>
@@ -11150,14 +11456,100 @@
       </p:sp>
       <p:sp>
         <p:nvSpPr>
-          <p:cNvPr id="14" name="Text 12"/>
-          <p:cNvSpPr/>
-          <p:nvPr/>
-        </p:nvSpPr>
-        <p:spPr>
-          <a:xfrm>
-            <a:off x="768096" y="2862072"/>
-            <a:ext cx="384048" cy="256032"/>
+          <p:cNvPr id="19" name="Text 17"/>
+          <p:cNvSpPr/>
+          <p:nvPr/>
+        </p:nvSpPr>
+        <p:spPr>
+          <a:xfrm>
+            <a:off x="6388456" y="3191256"/>
+            <a:ext cx="2179244" cy="457200"/>
+          </a:xfrm>
+          <a:prstGeom prst="rect">
+            <a:avLst/>
+          </a:prstGeom>
+          <a:noFill/>
+          <a:ln/>
+        </p:spPr>
+        <p:txBody>
+          <a:bodyPr wrap="square" lIns="0" tIns="0" rIns="0" bIns="0" rtlCol="0" anchor="t"/>
+          <a:lstStyle/>
+          <a:p>
+            <a:pPr indent="0" marL="0">
+              <a:lnSpc>
+                <a:spcPts val="1450"/>
+              </a:lnSpc>
+              <a:buNone/>
+            </a:pPr>
+            <a:r>
+              <a:rPr lang="en-US" sz="1000" dirty="0">
+                <a:solidFill>
+                  <a:srgbClr val="4A5578"/>
+                </a:solidFill>
+                <a:latin typeface="Arial" pitchFamily="34" charset="0"/>
+                <a:ea typeface="Arial" pitchFamily="34" charset="-122"/>
+                <a:cs typeface="Arial" pitchFamily="34" charset="-120"/>
+              </a:rPr>
+              <a:t>Digitação pura. </a:t>
+            </a:r>
+            <a:pPr indent="0" marL="0">
+              <a:lnSpc>
+                <a:spcPts val="1450"/>
+              </a:lnSpc>
+              <a:buNone/>
+            </a:pPr>
+            <a:r>
+              <a:rPr lang="en-US" sz="1000" b="1" dirty="0">
+                <a:solidFill>
+                  <a:srgbClr val="E80070"/>
+                </a:solidFill>
+                <a:latin typeface="Arial" pitchFamily="34" charset="0"/>
+                <a:ea typeface="Arial" pitchFamily="34" charset="-122"/>
+                <a:cs typeface="Arial" pitchFamily="34" charset="-120"/>
+              </a:rPr>
+              <a:t>A primeira caixa que vira script.</a:t>
+            </a:r>
+            <a:endParaRPr lang="en-US" sz="1000" dirty="0"/>
+          </a:p>
+        </p:txBody>
+      </p:sp>
+      <p:sp>
+        <p:nvSpPr>
+          <p:cNvPr id="20" name="Shape 18"/>
+          <p:cNvSpPr/>
+          <p:nvPr/>
+        </p:nvSpPr>
+        <p:spPr>
+          <a:xfrm>
+            <a:off x="8951747" y="1874520"/>
+            <a:ext cx="2581580" cy="1938528"/>
+          </a:xfrm>
+          <a:prstGeom prst="roundRect">
+            <a:avLst>
+              <a:gd name="adj" fmla="val 4717"/>
+            </a:avLst>
+          </a:prstGeom>
+          <a:solidFill>
+            <a:srgbClr val="FFFFFF"/>
+          </a:solidFill>
+          <a:ln w="12700">
+            <a:solidFill>
+              <a:srgbClr val="E3DCEC"/>
+            </a:solidFill>
+            <a:prstDash val="solid"/>
+          </a:ln>
+        </p:spPr>
+      </p:sp>
+      <p:sp>
+        <p:nvSpPr>
+          <p:cNvPr id="21" name="Text 19"/>
+          <p:cNvSpPr/>
+          <p:nvPr/>
+        </p:nvSpPr>
+        <p:spPr>
+          <a:xfrm>
+            <a:off x="9152915" y="2020824"/>
+            <a:ext cx="548640" cy="201168"/>
           </a:xfrm>
           <a:prstGeom prst="rect">
             <a:avLst/>
@@ -11173,30 +11565,30 @@
               <a:buNone/>
             </a:pPr>
             <a:r>
-              <a:rPr lang="en-US" sz="1000" b="1" dirty="0">
-                <a:solidFill>
-                  <a:srgbClr val="E80070"/>
+              <a:rPr lang="en-US" sz="950" b="1" spc="60" kern="0" dirty="0">
+                <a:solidFill>
+                  <a:srgbClr val="B9AFC9"/>
                 </a:solidFill>
                 <a:latin typeface="Courier New" pitchFamily="34" charset="0"/>
                 <a:ea typeface="Courier New" pitchFamily="34" charset="-122"/>
                 <a:cs typeface="Courier New" pitchFamily="34" charset="-120"/>
               </a:rPr>
-              <a:t>03</a:t>
-            </a:r>
-            <a:endParaRPr lang="en-US" sz="1000" dirty="0"/>
-          </a:p>
-        </p:txBody>
-      </p:sp>
-      <p:sp>
-        <p:nvSpPr>
-          <p:cNvPr id="15" name="Text 13"/>
-          <p:cNvSpPr/>
-          <p:nvPr/>
-        </p:nvSpPr>
-        <p:spPr>
-          <a:xfrm>
-            <a:off x="1225296" y="2880360"/>
-            <a:ext cx="3840480" cy="347472"/>
+              <a:t>04</a:t>
+            </a:r>
+            <a:endParaRPr lang="en-US" sz="950" dirty="0"/>
+          </a:p>
+        </p:txBody>
+      </p:sp>
+      <p:sp>
+        <p:nvSpPr>
+          <p:cNvPr id="22" name="Text 20"/>
+          <p:cNvSpPr/>
+          <p:nvPr/>
+        </p:nvSpPr>
+        <p:spPr>
+          <a:xfrm>
+            <a:off x="9152915" y="2276856"/>
+            <a:ext cx="2179244" cy="713232"/>
           </a:xfrm>
           <a:prstGeom prst="rect">
             <a:avLst/>
@@ -11210,12 +11602,12 @@
           <a:p>
             <a:pPr indent="0" marL="0">
               <a:lnSpc>
-                <a:spcPts val="1900"/>
-              </a:lnSpc>
-              <a:buNone/>
-            </a:pPr>
-            <a:r>
-              <a:rPr lang="en-US" sz="1250" dirty="0">
+                <a:spcPts val="1700"/>
+              </a:lnSpc>
+              <a:buNone/>
+            </a:pPr>
+            <a:r>
+              <a:rPr lang="en-US" sz="1150" dirty="0">
                 <a:solidFill>
                   <a:srgbClr val="16224E"/>
                 </a:solidFill>
@@ -11223,66 +11615,7 @@
                 <a:ea typeface="Arial" pitchFamily="34" charset="-122"/>
                 <a:cs typeface="Arial" pitchFamily="34" charset="-120"/>
               </a:rPr>
-              <a:t>“O que você copia de um lugar pro outro?”</a:t>
-            </a:r>
-            <a:endParaRPr lang="en-US" sz="1250" dirty="0"/>
-          </a:p>
-        </p:txBody>
-      </p:sp>
-      <p:sp>
-        <p:nvSpPr>
-          <p:cNvPr id="16" name="Text 14"/>
-          <p:cNvSpPr/>
-          <p:nvPr/>
-        </p:nvSpPr>
-        <p:spPr>
-          <a:xfrm>
-            <a:off x="5184648" y="2880360"/>
-            <a:ext cx="6263640" cy="347472"/>
-          </a:xfrm>
-          <a:prstGeom prst="rect">
-            <a:avLst/>
-          </a:prstGeom>
-          <a:noFill/>
-          <a:ln/>
-        </p:spPr>
-        <p:txBody>
-          <a:bodyPr wrap="square" lIns="0" tIns="0" rIns="0" bIns="0" rtlCol="0" anchor="t"/>
-          <a:lstStyle/>
-          <a:p>
-            <a:pPr indent="0" marL="0">
-              <a:lnSpc>
-                <a:spcPts val="1700"/>
-              </a:lnSpc>
-              <a:buNone/>
-            </a:pPr>
-            <a:r>
-              <a:rPr lang="en-US" sz="1150" dirty="0">
-                <a:solidFill>
-                  <a:srgbClr val="4A5578"/>
-                </a:solidFill>
-                <a:latin typeface="Arial" pitchFamily="34" charset="0"/>
-                <a:ea typeface="Arial" pitchFamily="34" charset="-122"/>
-                <a:cs typeface="Arial" pitchFamily="34" charset="-120"/>
-              </a:rPr>
-              <a:t>Digitação pura. </a:t>
-            </a:r>
-            <a:pPr indent="0" marL="0">
-              <a:lnSpc>
-                <a:spcPts val="1700"/>
-              </a:lnSpc>
-              <a:buNone/>
-            </a:pPr>
-            <a:r>
-              <a:rPr lang="en-US" sz="1150" b="1" dirty="0">
-                <a:solidFill>
-                  <a:srgbClr val="E80070"/>
-                </a:solidFill>
-                <a:latin typeface="Arial" pitchFamily="34" charset="0"/>
-                <a:ea typeface="Arial" pitchFamily="34" charset="-122"/>
-                <a:cs typeface="Arial" pitchFamily="34" charset="-120"/>
-              </a:rPr>
-              <a:t>A primeira caixa que vira script.</a:t>
+              <a:t>“Quando isso dá errado, como você descobre?”</a:t>
             </a:r>
             <a:endParaRPr lang="en-US" sz="1150" dirty="0"/>
           </a:p>
@@ -11290,14 +11623,14 @@
       </p:sp>
       <p:sp>
         <p:nvSpPr>
-          <p:cNvPr id="17" name="Shape 15"/>
-          <p:cNvSpPr/>
-          <p:nvPr/>
-        </p:nvSpPr>
-        <p:spPr>
-          <a:xfrm>
-            <a:off x="658368" y="3305556"/>
-            <a:ext cx="10874959" cy="9144"/>
+          <p:cNvPr id="23" name="Shape 21"/>
+          <p:cNvSpPr/>
+          <p:nvPr/>
+        </p:nvSpPr>
+        <p:spPr>
+          <a:xfrm>
+            <a:off x="9152915" y="3081528"/>
+            <a:ext cx="2179244" cy="10973"/>
           </a:xfrm>
           <a:prstGeom prst="rect">
             <a:avLst/>
@@ -11315,14 +11648,117 @@
       </p:sp>
       <p:sp>
         <p:nvSpPr>
-          <p:cNvPr id="18" name="Text 16"/>
-          <p:cNvSpPr/>
-          <p:nvPr/>
-        </p:nvSpPr>
-        <p:spPr>
-          <a:xfrm>
-            <a:off x="768096" y="3396996"/>
-            <a:ext cx="384048" cy="256032"/>
+          <p:cNvPr id="24" name="Text 22"/>
+          <p:cNvSpPr/>
+          <p:nvPr/>
+        </p:nvSpPr>
+        <p:spPr>
+          <a:xfrm>
+            <a:off x="9152915" y="3191256"/>
+            <a:ext cx="2179244" cy="457200"/>
+          </a:xfrm>
+          <a:prstGeom prst="rect">
+            <a:avLst/>
+          </a:prstGeom>
+          <a:noFill/>
+          <a:ln/>
+        </p:spPr>
+        <p:txBody>
+          <a:bodyPr wrap="square" lIns="0" tIns="0" rIns="0" bIns="0" rtlCol="0" anchor="t"/>
+          <a:lstStyle/>
+          <a:p>
+            <a:pPr indent="0" marL="0">
+              <a:lnSpc>
+                <a:spcPts val="1450"/>
+              </a:lnSpc>
+              <a:buNone/>
+            </a:pPr>
+            <a:r>
+              <a:rPr lang="en-US" sz="1000" dirty="0">
+                <a:solidFill>
+                  <a:srgbClr val="4A5578"/>
+                </a:solidFill>
+                <a:latin typeface="Arial" pitchFamily="34" charset="0"/>
+                <a:ea typeface="Arial" pitchFamily="34" charset="-122"/>
+                <a:cs typeface="Arial" pitchFamily="34" charset="-120"/>
+              </a:rPr>
+              <a:t>Sem resposta aqui, </a:t>
+            </a:r>
+            <a:pPr indent="0" marL="0">
+              <a:lnSpc>
+                <a:spcPts val="1450"/>
+              </a:lnSpc>
+              <a:buNone/>
+            </a:pPr>
+            <a:r>
+              <a:rPr lang="en-US" sz="1000" b="1" dirty="0">
+                <a:solidFill>
+                  <a:srgbClr val="16224E"/>
+                </a:solidFill>
+                <a:latin typeface="Arial" pitchFamily="34" charset="0"/>
+                <a:ea typeface="Arial" pitchFamily="34" charset="-122"/>
+                <a:cs typeface="Arial" pitchFamily="34" charset="-120"/>
+              </a:rPr>
+              <a:t>não automatize ainda</a:t>
+            </a:r>
+            <a:pPr indent="0" marL="0">
+              <a:lnSpc>
+                <a:spcPts val="1450"/>
+              </a:lnSpc>
+              <a:buNone/>
+            </a:pPr>
+            <a:r>
+              <a:rPr lang="en-US" sz="1000" dirty="0">
+                <a:solidFill>
+                  <a:srgbClr val="4A5578"/>
+                </a:solidFill>
+                <a:latin typeface="Arial" pitchFamily="34" charset="0"/>
+                <a:ea typeface="Arial" pitchFamily="34" charset="-122"/>
+                <a:cs typeface="Arial" pitchFamily="34" charset="-120"/>
+              </a:rPr>
+              <a:t>.</a:t>
+            </a:r>
+            <a:endParaRPr lang="en-US" sz="1000" dirty="0"/>
+          </a:p>
+        </p:txBody>
+      </p:sp>
+      <p:sp>
+        <p:nvSpPr>
+          <p:cNvPr id="25" name="Shape 23"/>
+          <p:cNvSpPr/>
+          <p:nvPr/>
+        </p:nvSpPr>
+        <p:spPr>
+          <a:xfrm>
+            <a:off x="658368" y="3995928"/>
+            <a:ext cx="2581580" cy="1938528"/>
+          </a:xfrm>
+          <a:prstGeom prst="roundRect">
+            <a:avLst>
+              <a:gd name="adj" fmla="val 4717"/>
+            </a:avLst>
+          </a:prstGeom>
+          <a:solidFill>
+            <a:srgbClr val="FFFFFF"/>
+          </a:solidFill>
+          <a:ln w="12700">
+            <a:solidFill>
+              <a:srgbClr val="E3DCEC"/>
+            </a:solidFill>
+            <a:prstDash val="solid"/>
+          </a:ln>
+        </p:spPr>
+      </p:sp>
+      <p:sp>
+        <p:nvSpPr>
+          <p:cNvPr id="26" name="Text 24"/>
+          <p:cNvSpPr/>
+          <p:nvPr/>
+        </p:nvSpPr>
+        <p:spPr>
+          <a:xfrm>
+            <a:off x="859536" y="4142232"/>
+            <a:ext cx="548640" cy="201168"/>
           </a:xfrm>
           <a:prstGeom prst="rect">
             <a:avLst/>
@@ -11338,7 +11774,7 @@
               <a:buNone/>
             </a:pPr>
             <a:r>
-              <a:rPr lang="en-US" sz="1000" b="1" dirty="0">
+              <a:rPr lang="en-US" sz="950" b="1" spc="60" kern="0" dirty="0">
                 <a:solidFill>
                   <a:srgbClr val="B9AFC9"/>
                 </a:solidFill>
@@ -11346,22 +11782,22 @@
                 <a:ea typeface="Courier New" pitchFamily="34" charset="-122"/>
                 <a:cs typeface="Courier New" pitchFamily="34" charset="-120"/>
               </a:rPr>
-              <a:t>04</a:t>
-            </a:r>
-            <a:endParaRPr lang="en-US" sz="1000" dirty="0"/>
-          </a:p>
-        </p:txBody>
-      </p:sp>
-      <p:sp>
-        <p:nvSpPr>
-          <p:cNvPr id="19" name="Text 17"/>
-          <p:cNvSpPr/>
-          <p:nvPr/>
-        </p:nvSpPr>
-        <p:spPr>
-          <a:xfrm>
-            <a:off x="1225296" y="3415284"/>
-            <a:ext cx="3840480" cy="347472"/>
+              <a:t>05</a:t>
+            </a:r>
+            <a:endParaRPr lang="en-US" sz="950" dirty="0"/>
+          </a:p>
+        </p:txBody>
+      </p:sp>
+      <p:sp>
+        <p:nvSpPr>
+          <p:cNvPr id="27" name="Text 25"/>
+          <p:cNvSpPr/>
+          <p:nvPr/>
+        </p:nvSpPr>
+        <p:spPr>
+          <a:xfrm>
+            <a:off x="859536" y="4398264"/>
+            <a:ext cx="2179244" cy="713232"/>
           </a:xfrm>
           <a:prstGeom prst="rect">
             <a:avLst/>
@@ -11375,12 +11811,12 @@
           <a:p>
             <a:pPr indent="0" marL="0">
               <a:lnSpc>
-                <a:spcPts val="1900"/>
-              </a:lnSpc>
-              <a:buNone/>
-            </a:pPr>
-            <a:r>
-              <a:rPr lang="en-US" sz="1250" dirty="0">
+                <a:spcPts val="1700"/>
+              </a:lnSpc>
+              <a:buNone/>
+            </a:pPr>
+            <a:r>
+              <a:rPr lang="en-US" sz="1150" dirty="0">
                 <a:solidFill>
                   <a:srgbClr val="16224E"/>
                 </a:solidFill>
@@ -11388,83 +11824,7 @@
                 <a:ea typeface="Arial" pitchFamily="34" charset="-122"/>
                 <a:cs typeface="Arial" pitchFamily="34" charset="-120"/>
               </a:rPr>
-              <a:t>“Quando isso dá errado, como você descobre?”</a:t>
-            </a:r>
-            <a:endParaRPr lang="en-US" sz="1250" dirty="0"/>
-          </a:p>
-        </p:txBody>
-      </p:sp>
-      <p:sp>
-        <p:nvSpPr>
-          <p:cNvPr id="20" name="Text 18"/>
-          <p:cNvSpPr/>
-          <p:nvPr/>
-        </p:nvSpPr>
-        <p:spPr>
-          <a:xfrm>
-            <a:off x="5184648" y="3415284"/>
-            <a:ext cx="6263640" cy="347472"/>
-          </a:xfrm>
-          <a:prstGeom prst="rect">
-            <a:avLst/>
-          </a:prstGeom>
-          <a:noFill/>
-          <a:ln/>
-        </p:spPr>
-        <p:txBody>
-          <a:bodyPr wrap="square" lIns="0" tIns="0" rIns="0" bIns="0" rtlCol="0" anchor="t"/>
-          <a:lstStyle/>
-          <a:p>
-            <a:pPr indent="0" marL="0">
-              <a:lnSpc>
-                <a:spcPts val="1700"/>
-              </a:lnSpc>
-              <a:buNone/>
-            </a:pPr>
-            <a:r>
-              <a:rPr lang="en-US" sz="1150" dirty="0">
-                <a:solidFill>
-                  <a:srgbClr val="4A5578"/>
-                </a:solidFill>
-                <a:latin typeface="Arial" pitchFamily="34" charset="0"/>
-                <a:ea typeface="Arial" pitchFamily="34" charset="-122"/>
-                <a:cs typeface="Arial" pitchFamily="34" charset="-120"/>
-              </a:rPr>
-              <a:t>Sem resposta aqui, </a:t>
-            </a:r>
-            <a:pPr indent="0" marL="0">
-              <a:lnSpc>
-                <a:spcPts val="1700"/>
-              </a:lnSpc>
-              <a:buNone/>
-            </a:pPr>
-            <a:r>
-              <a:rPr lang="en-US" sz="1150" b="1" dirty="0">
-                <a:solidFill>
-                  <a:srgbClr val="4A5578"/>
-                </a:solidFill>
-                <a:latin typeface="Arial" pitchFamily="34" charset="0"/>
-                <a:ea typeface="Arial" pitchFamily="34" charset="-122"/>
-                <a:cs typeface="Arial" pitchFamily="34" charset="-120"/>
-              </a:rPr>
-              <a:t>não automatize ainda</a:t>
-            </a:r>
-            <a:pPr indent="0" marL="0">
-              <a:lnSpc>
-                <a:spcPts val="1700"/>
-              </a:lnSpc>
-              <a:buNone/>
-            </a:pPr>
-            <a:r>
-              <a:rPr lang="en-US" sz="1150" dirty="0">
-                <a:solidFill>
-                  <a:srgbClr val="4A5578"/>
-                </a:solidFill>
-                <a:latin typeface="Arial" pitchFamily="34" charset="0"/>
-                <a:ea typeface="Arial" pitchFamily="34" charset="-122"/>
-                <a:cs typeface="Arial" pitchFamily="34" charset="-120"/>
-              </a:rPr>
-              <a:t>.</a:t>
+              <a:t>“Qual é o caso chato que sempre aparece?”</a:t>
             </a:r>
             <a:endParaRPr lang="en-US" sz="1150" dirty="0"/>
           </a:p>
@@ -11472,14 +11832,14 @@
       </p:sp>
       <p:sp>
         <p:nvSpPr>
-          <p:cNvPr id="21" name="Shape 19"/>
-          <p:cNvSpPr/>
-          <p:nvPr/>
-        </p:nvSpPr>
-        <p:spPr>
-          <a:xfrm>
-            <a:off x="658368" y="3840480"/>
-            <a:ext cx="10874959" cy="9144"/>
+          <p:cNvPr id="28" name="Shape 26"/>
+          <p:cNvSpPr/>
+          <p:nvPr/>
+        </p:nvSpPr>
+        <p:spPr>
+          <a:xfrm>
+            <a:off x="859536" y="5202936"/>
+            <a:ext cx="2179244" cy="10973"/>
           </a:xfrm>
           <a:prstGeom prst="rect">
             <a:avLst/>
@@ -11497,14 +11857,117 @@
       </p:sp>
       <p:sp>
         <p:nvSpPr>
-          <p:cNvPr id="22" name="Text 20"/>
-          <p:cNvSpPr/>
-          <p:nvPr/>
-        </p:nvSpPr>
-        <p:spPr>
-          <a:xfrm>
-            <a:off x="768096" y="3931920"/>
-            <a:ext cx="384048" cy="256032"/>
+          <p:cNvPr id="29" name="Text 27"/>
+          <p:cNvSpPr/>
+          <p:nvPr/>
+        </p:nvSpPr>
+        <p:spPr>
+          <a:xfrm>
+            <a:off x="859536" y="5312664"/>
+            <a:ext cx="2179244" cy="457200"/>
+          </a:xfrm>
+          <a:prstGeom prst="rect">
+            <a:avLst/>
+          </a:prstGeom>
+          <a:noFill/>
+          <a:ln/>
+        </p:spPr>
+        <p:txBody>
+          <a:bodyPr wrap="square" lIns="0" tIns="0" rIns="0" bIns="0" rtlCol="0" anchor="t"/>
+          <a:lstStyle/>
+          <a:p>
+            <a:pPr indent="0" marL="0">
+              <a:lnSpc>
+                <a:spcPts val="1450"/>
+              </a:lnSpc>
+              <a:buNone/>
+            </a:pPr>
+            <a:r>
+              <a:rPr lang="en-US" sz="1000" dirty="0">
+                <a:solidFill>
+                  <a:srgbClr val="4A5578"/>
+                </a:solidFill>
+                <a:latin typeface="Arial" pitchFamily="34" charset="0"/>
+                <a:ea typeface="Arial" pitchFamily="34" charset="-122"/>
+                <a:cs typeface="Arial" pitchFamily="34" charset="-120"/>
+              </a:rPr>
+              <a:t>As exceções. Viram os </a:t>
+            </a:r>
+            <a:pPr indent="0" marL="0">
+              <a:lnSpc>
+                <a:spcPts val="1450"/>
+              </a:lnSpc>
+              <a:buNone/>
+            </a:pPr>
+            <a:r>
+              <a:rPr lang="en-US" sz="1000" b="1" dirty="0">
+                <a:solidFill>
+                  <a:srgbClr val="16224E"/>
+                </a:solidFill>
+                <a:latin typeface="Arial" pitchFamily="34" charset="0"/>
+                <a:ea typeface="Arial" pitchFamily="34" charset="-122"/>
+                <a:cs typeface="Arial" pitchFamily="34" charset="-120"/>
+              </a:rPr>
+              <a:t>casos de teste</a:t>
+            </a:r>
+            <a:pPr indent="0" marL="0">
+              <a:lnSpc>
+                <a:spcPts val="1450"/>
+              </a:lnSpc>
+              <a:buNone/>
+            </a:pPr>
+            <a:r>
+              <a:rPr lang="en-US" sz="1000" dirty="0">
+                <a:solidFill>
+                  <a:srgbClr val="4A5578"/>
+                </a:solidFill>
+                <a:latin typeface="Arial" pitchFamily="34" charset="0"/>
+                <a:ea typeface="Arial" pitchFamily="34" charset="-122"/>
+                <a:cs typeface="Arial" pitchFamily="34" charset="-120"/>
+              </a:rPr>
+              <a:t> depois.</a:t>
+            </a:r>
+            <a:endParaRPr lang="en-US" sz="1000" dirty="0"/>
+          </a:p>
+        </p:txBody>
+      </p:sp>
+      <p:sp>
+        <p:nvSpPr>
+          <p:cNvPr id="30" name="Shape 28"/>
+          <p:cNvSpPr/>
+          <p:nvPr/>
+        </p:nvSpPr>
+        <p:spPr>
+          <a:xfrm>
+            <a:off x="3422828" y="3995928"/>
+            <a:ext cx="2581580" cy="1938528"/>
+          </a:xfrm>
+          <a:prstGeom prst="roundRect">
+            <a:avLst>
+              <a:gd name="adj" fmla="val 4717"/>
+            </a:avLst>
+          </a:prstGeom>
+          <a:solidFill>
+            <a:srgbClr val="FFFFFF"/>
+          </a:solidFill>
+          <a:ln w="12700">
+            <a:solidFill>
+              <a:srgbClr val="E3DCEC"/>
+            </a:solidFill>
+            <a:prstDash val="solid"/>
+          </a:ln>
+        </p:spPr>
+      </p:sp>
+      <p:sp>
+        <p:nvSpPr>
+          <p:cNvPr id="31" name="Text 29"/>
+          <p:cNvSpPr/>
+          <p:nvPr/>
+        </p:nvSpPr>
+        <p:spPr>
+          <a:xfrm>
+            <a:off x="3623996" y="4142232"/>
+            <a:ext cx="548640" cy="201168"/>
           </a:xfrm>
           <a:prstGeom prst="rect">
             <a:avLst/>
@@ -11520,7 +11983,7 @@
               <a:buNone/>
             </a:pPr>
             <a:r>
-              <a:rPr lang="en-US" sz="1000" b="1" dirty="0">
+              <a:rPr lang="en-US" sz="950" b="1" spc="60" kern="0" dirty="0">
                 <a:solidFill>
                   <a:srgbClr val="B9AFC9"/>
                 </a:solidFill>
@@ -11528,22 +11991,22 @@
                 <a:ea typeface="Courier New" pitchFamily="34" charset="-122"/>
                 <a:cs typeface="Courier New" pitchFamily="34" charset="-120"/>
               </a:rPr>
-              <a:t>05</a:t>
-            </a:r>
-            <a:endParaRPr lang="en-US" sz="1000" dirty="0"/>
-          </a:p>
-        </p:txBody>
-      </p:sp>
-      <p:sp>
-        <p:nvSpPr>
-          <p:cNvPr id="23" name="Text 21"/>
-          <p:cNvSpPr/>
-          <p:nvPr/>
-        </p:nvSpPr>
-        <p:spPr>
-          <a:xfrm>
-            <a:off x="1225296" y="3950208"/>
-            <a:ext cx="3840480" cy="347472"/>
+              <a:t>06</a:t>
+            </a:r>
+            <a:endParaRPr lang="en-US" sz="950" dirty="0"/>
+          </a:p>
+        </p:txBody>
+      </p:sp>
+      <p:sp>
+        <p:nvSpPr>
+          <p:cNvPr id="32" name="Text 30"/>
+          <p:cNvSpPr/>
+          <p:nvPr/>
+        </p:nvSpPr>
+        <p:spPr>
+          <a:xfrm>
+            <a:off x="3623996" y="4398264"/>
+            <a:ext cx="2179244" cy="713232"/>
           </a:xfrm>
           <a:prstGeom prst="rect">
             <a:avLst/>
@@ -11557,12 +12020,12 @@
           <a:p>
             <a:pPr indent="0" marL="0">
               <a:lnSpc>
-                <a:spcPts val="1900"/>
-              </a:lnSpc>
-              <a:buNone/>
-            </a:pPr>
-            <a:r>
-              <a:rPr lang="en-US" sz="1250" dirty="0">
+                <a:spcPts val="1700"/>
+              </a:lnSpc>
+              <a:buNone/>
+            </a:pPr>
+            <a:r>
+              <a:rPr lang="en-US" sz="1150" dirty="0">
                 <a:solidFill>
                   <a:srgbClr val="16224E"/>
                 </a:solidFill>
@@ -11570,83 +12033,7 @@
                 <a:ea typeface="Arial" pitchFamily="34" charset="-122"/>
                 <a:cs typeface="Arial" pitchFamily="34" charset="-120"/>
               </a:rPr>
-              <a:t>“Qual é o caso chato que sempre aparece?”</a:t>
-            </a:r>
-            <a:endParaRPr lang="en-US" sz="1250" dirty="0"/>
-          </a:p>
-        </p:txBody>
-      </p:sp>
-      <p:sp>
-        <p:nvSpPr>
-          <p:cNvPr id="24" name="Text 22"/>
-          <p:cNvSpPr/>
-          <p:nvPr/>
-        </p:nvSpPr>
-        <p:spPr>
-          <a:xfrm>
-            <a:off x="5184648" y="3950208"/>
-            <a:ext cx="6263640" cy="347472"/>
-          </a:xfrm>
-          <a:prstGeom prst="rect">
-            <a:avLst/>
-          </a:prstGeom>
-          <a:noFill/>
-          <a:ln/>
-        </p:spPr>
-        <p:txBody>
-          <a:bodyPr wrap="square" lIns="0" tIns="0" rIns="0" bIns="0" rtlCol="0" anchor="t"/>
-          <a:lstStyle/>
-          <a:p>
-            <a:pPr indent="0" marL="0">
-              <a:lnSpc>
-                <a:spcPts val="1700"/>
-              </a:lnSpc>
-              <a:buNone/>
-            </a:pPr>
-            <a:r>
-              <a:rPr lang="en-US" sz="1150" dirty="0">
-                <a:solidFill>
-                  <a:srgbClr val="4A5578"/>
-                </a:solidFill>
-                <a:latin typeface="Arial" pitchFamily="34" charset="0"/>
-                <a:ea typeface="Arial" pitchFamily="34" charset="-122"/>
-                <a:cs typeface="Arial" pitchFamily="34" charset="-120"/>
-              </a:rPr>
-              <a:t>As exceções. Viram os </a:t>
-            </a:r>
-            <a:pPr indent="0" marL="0">
-              <a:lnSpc>
-                <a:spcPts val="1700"/>
-              </a:lnSpc>
-              <a:buNone/>
-            </a:pPr>
-            <a:r>
-              <a:rPr lang="en-US" sz="1150" b="1" dirty="0">
-                <a:solidFill>
-                  <a:srgbClr val="4A5578"/>
-                </a:solidFill>
-                <a:latin typeface="Arial" pitchFamily="34" charset="0"/>
-                <a:ea typeface="Arial" pitchFamily="34" charset="-122"/>
-                <a:cs typeface="Arial" pitchFamily="34" charset="-120"/>
-              </a:rPr>
-              <a:t>casos de teste</a:t>
-            </a:r>
-            <a:pPr indent="0" marL="0">
-              <a:lnSpc>
-                <a:spcPts val="1700"/>
-              </a:lnSpc>
-              <a:buNone/>
-            </a:pPr>
-            <a:r>
-              <a:rPr lang="en-US" sz="1150" dirty="0">
-                <a:solidFill>
-                  <a:srgbClr val="4A5578"/>
-                </a:solidFill>
-                <a:latin typeface="Arial" pitchFamily="34" charset="0"/>
-                <a:ea typeface="Arial" pitchFamily="34" charset="-122"/>
-                <a:cs typeface="Arial" pitchFamily="34" charset="-120"/>
-              </a:rPr>
-              <a:t> depois.</a:t>
+              <a:t>“Quantas vezes você faz isso por dia?”</a:t>
             </a:r>
             <a:endParaRPr lang="en-US" sz="1150" dirty="0"/>
           </a:p>
@@ -11654,14 +12041,14 @@
       </p:sp>
       <p:sp>
         <p:nvSpPr>
-          <p:cNvPr id="25" name="Shape 23"/>
-          <p:cNvSpPr/>
-          <p:nvPr/>
-        </p:nvSpPr>
-        <p:spPr>
-          <a:xfrm>
-            <a:off x="658368" y="4375404"/>
-            <a:ext cx="10874959" cy="9144"/>
+          <p:cNvPr id="33" name="Shape 31"/>
+          <p:cNvSpPr/>
+          <p:nvPr/>
+        </p:nvSpPr>
+        <p:spPr>
+          <a:xfrm>
+            <a:off x="3623996" y="5202936"/>
+            <a:ext cx="2179244" cy="10973"/>
           </a:xfrm>
           <a:prstGeom prst="rect">
             <a:avLst/>
@@ -11679,14 +12066,100 @@
       </p:sp>
       <p:sp>
         <p:nvSpPr>
-          <p:cNvPr id="26" name="Text 24"/>
-          <p:cNvSpPr/>
-          <p:nvPr/>
-        </p:nvSpPr>
-        <p:spPr>
-          <a:xfrm>
-            <a:off x="768096" y="4466844"/>
-            <a:ext cx="384048" cy="256032"/>
+          <p:cNvPr id="34" name="Text 32"/>
+          <p:cNvSpPr/>
+          <p:nvPr/>
+        </p:nvSpPr>
+        <p:spPr>
+          <a:xfrm>
+            <a:off x="3623996" y="5312664"/>
+            <a:ext cx="2179244" cy="457200"/>
+          </a:xfrm>
+          <a:prstGeom prst="rect">
+            <a:avLst/>
+          </a:prstGeom>
+          <a:noFill/>
+          <a:ln/>
+        </p:spPr>
+        <p:txBody>
+          <a:bodyPr wrap="square" lIns="0" tIns="0" rIns="0" bIns="0" rtlCol="0" anchor="t"/>
+          <a:lstStyle/>
+          <a:p>
+            <a:pPr indent="0" marL="0">
+              <a:lnSpc>
+                <a:spcPts val="1450"/>
+              </a:lnSpc>
+              <a:buNone/>
+            </a:pPr>
+            <a:r>
+              <a:rPr lang="en-US" sz="1000" dirty="0">
+                <a:solidFill>
+                  <a:srgbClr val="4A5578"/>
+                </a:solidFill>
+                <a:latin typeface="Arial" pitchFamily="34" charset="0"/>
+                <a:ea typeface="Arial" pitchFamily="34" charset="-122"/>
+                <a:cs typeface="Arial" pitchFamily="34" charset="-120"/>
+              </a:rPr>
+              <a:t>Frequência. </a:t>
+            </a:r>
+            <a:pPr indent="0" marL="0">
+              <a:lnSpc>
+                <a:spcPts val="1450"/>
+              </a:lnSpc>
+              <a:buNone/>
+            </a:pPr>
+            <a:r>
+              <a:rPr lang="en-US" sz="1000" b="1" dirty="0">
+                <a:solidFill>
+                  <a:srgbClr val="16224E"/>
+                </a:solidFill>
+                <a:latin typeface="Arial" pitchFamily="34" charset="0"/>
+                <a:ea typeface="Arial" pitchFamily="34" charset="-122"/>
+                <a:cs typeface="Arial" pitchFamily="34" charset="-120"/>
+              </a:rPr>
+              <a:t>Etapa rara não paga automação.</a:t>
+            </a:r>
+            <a:endParaRPr lang="en-US" sz="1000" dirty="0"/>
+          </a:p>
+        </p:txBody>
+      </p:sp>
+      <p:sp>
+        <p:nvSpPr>
+          <p:cNvPr id="35" name="Shape 33"/>
+          <p:cNvSpPr/>
+          <p:nvPr/>
+        </p:nvSpPr>
+        <p:spPr>
+          <a:xfrm>
+            <a:off x="6187288" y="3995928"/>
+            <a:ext cx="2581580" cy="1938528"/>
+          </a:xfrm>
+          <a:prstGeom prst="roundRect">
+            <a:avLst>
+              <a:gd name="adj" fmla="val 4717"/>
+            </a:avLst>
+          </a:prstGeom>
+          <a:solidFill>
+            <a:srgbClr val="FFFFFF"/>
+          </a:solidFill>
+          <a:ln w="12700">
+            <a:solidFill>
+              <a:srgbClr val="E3DCEC"/>
+            </a:solidFill>
+            <a:prstDash val="solid"/>
+          </a:ln>
+        </p:spPr>
+      </p:sp>
+      <p:sp>
+        <p:nvSpPr>
+          <p:cNvPr id="36" name="Text 34"/>
+          <p:cNvSpPr/>
+          <p:nvPr/>
+        </p:nvSpPr>
+        <p:spPr>
+          <a:xfrm>
+            <a:off x="6388456" y="4142232"/>
+            <a:ext cx="548640" cy="201168"/>
           </a:xfrm>
           <a:prstGeom prst="rect">
             <a:avLst/>
@@ -11702,7 +12175,7 @@
               <a:buNone/>
             </a:pPr>
             <a:r>
-              <a:rPr lang="en-US" sz="1000" b="1" dirty="0">
+              <a:rPr lang="en-US" sz="950" b="1" spc="60" kern="0" dirty="0">
                 <a:solidFill>
                   <a:srgbClr val="B9AFC9"/>
                 </a:solidFill>
@@ -11710,22 +12183,22 @@
                 <a:ea typeface="Courier New" pitchFamily="34" charset="-122"/>
                 <a:cs typeface="Courier New" pitchFamily="34" charset="-120"/>
               </a:rPr>
-              <a:t>06</a:t>
-            </a:r>
-            <a:endParaRPr lang="en-US" sz="1000" dirty="0"/>
-          </a:p>
-        </p:txBody>
-      </p:sp>
-      <p:sp>
-        <p:nvSpPr>
-          <p:cNvPr id="27" name="Text 25"/>
-          <p:cNvSpPr/>
-          <p:nvPr/>
-        </p:nvSpPr>
-        <p:spPr>
-          <a:xfrm>
-            <a:off x="1225296" y="4485132"/>
-            <a:ext cx="3840480" cy="347472"/>
+              <a:t>07</a:t>
+            </a:r>
+            <a:endParaRPr lang="en-US" sz="950" dirty="0"/>
+          </a:p>
+        </p:txBody>
+      </p:sp>
+      <p:sp>
+        <p:nvSpPr>
+          <p:cNvPr id="37" name="Text 35"/>
+          <p:cNvSpPr/>
+          <p:nvPr/>
+        </p:nvSpPr>
+        <p:spPr>
+          <a:xfrm>
+            <a:off x="6388456" y="4398264"/>
+            <a:ext cx="2179244" cy="713232"/>
           </a:xfrm>
           <a:prstGeom prst="rect">
             <a:avLst/>
@@ -11739,12 +12212,12 @@
           <a:p>
             <a:pPr indent="0" marL="0">
               <a:lnSpc>
-                <a:spcPts val="1900"/>
-              </a:lnSpc>
-              <a:buNone/>
-            </a:pPr>
-            <a:r>
-              <a:rPr lang="en-US" sz="1250" dirty="0">
+                <a:spcPts val="1700"/>
+              </a:lnSpc>
+              <a:buNone/>
+            </a:pPr>
+            <a:r>
+              <a:rPr lang="en-US" sz="1150" dirty="0">
                 <a:solidFill>
                   <a:srgbClr val="16224E"/>
                 </a:solidFill>
@@ -11752,66 +12225,7 @@
                 <a:ea typeface="Arial" pitchFamily="34" charset="-122"/>
                 <a:cs typeface="Arial" pitchFamily="34" charset="-120"/>
               </a:rPr>
-              <a:t>“Quantas vezes você faz isso por dia?”</a:t>
-            </a:r>
-            <a:endParaRPr lang="en-US" sz="1250" dirty="0"/>
-          </a:p>
-        </p:txBody>
-      </p:sp>
-      <p:sp>
-        <p:nvSpPr>
-          <p:cNvPr id="28" name="Text 26"/>
-          <p:cNvSpPr/>
-          <p:nvPr/>
-        </p:nvSpPr>
-        <p:spPr>
-          <a:xfrm>
-            <a:off x="5184648" y="4485132"/>
-            <a:ext cx="6263640" cy="347472"/>
-          </a:xfrm>
-          <a:prstGeom prst="rect">
-            <a:avLst/>
-          </a:prstGeom>
-          <a:noFill/>
-          <a:ln/>
-        </p:spPr>
-        <p:txBody>
-          <a:bodyPr wrap="square" lIns="0" tIns="0" rIns="0" bIns="0" rtlCol="0" anchor="t"/>
-          <a:lstStyle/>
-          <a:p>
-            <a:pPr indent="0" marL="0">
-              <a:lnSpc>
-                <a:spcPts val="1700"/>
-              </a:lnSpc>
-              <a:buNone/>
-            </a:pPr>
-            <a:r>
-              <a:rPr lang="en-US" sz="1150" dirty="0">
-                <a:solidFill>
-                  <a:srgbClr val="4A5578"/>
-                </a:solidFill>
-                <a:latin typeface="Arial" pitchFamily="34" charset="0"/>
-                <a:ea typeface="Arial" pitchFamily="34" charset="-122"/>
-                <a:cs typeface="Arial" pitchFamily="34" charset="-120"/>
-              </a:rPr>
-              <a:t>Frequência. </a:t>
-            </a:r>
-            <a:pPr indent="0" marL="0">
-              <a:lnSpc>
-                <a:spcPts val="1700"/>
-              </a:lnSpc>
-              <a:buNone/>
-            </a:pPr>
-            <a:r>
-              <a:rPr lang="en-US" sz="1150" b="1" dirty="0">
-                <a:solidFill>
-                  <a:srgbClr val="4A5578"/>
-                </a:solidFill>
-                <a:latin typeface="Arial" pitchFamily="34" charset="0"/>
-                <a:ea typeface="Arial" pitchFamily="34" charset="-122"/>
-                <a:cs typeface="Arial" pitchFamily="34" charset="-120"/>
-              </a:rPr>
-              <a:t>Etapa rara não paga automação.</a:t>
+              <a:t>“Se você errar aqui, o que acontece?”</a:t>
             </a:r>
             <a:endParaRPr lang="en-US" sz="1150" dirty="0"/>
           </a:p>
@@ -11819,14 +12233,14 @@
       </p:sp>
       <p:sp>
         <p:nvSpPr>
-          <p:cNvPr id="29" name="Shape 27"/>
-          <p:cNvSpPr/>
-          <p:nvPr/>
-        </p:nvSpPr>
-        <p:spPr>
-          <a:xfrm>
-            <a:off x="658368" y="4910328"/>
-            <a:ext cx="10874959" cy="9144"/>
+          <p:cNvPr id="38" name="Shape 36"/>
+          <p:cNvSpPr/>
+          <p:nvPr/>
+        </p:nvSpPr>
+        <p:spPr>
+          <a:xfrm>
+            <a:off x="6388456" y="5202936"/>
+            <a:ext cx="2179244" cy="10973"/>
           </a:xfrm>
           <a:prstGeom prst="rect">
             <a:avLst/>
@@ -11844,38 +12258,75 @@
       </p:sp>
       <p:sp>
         <p:nvSpPr>
-          <p:cNvPr id="30" name="Text 28"/>
-          <p:cNvSpPr/>
-          <p:nvPr/>
-        </p:nvSpPr>
-        <p:spPr>
-          <a:xfrm>
-            <a:off x="768096" y="5001768"/>
-            <a:ext cx="384048" cy="256032"/>
-          </a:xfrm>
-          <a:prstGeom prst="rect">
-            <a:avLst/>
-          </a:prstGeom>
-          <a:noFill/>
-          <a:ln/>
-        </p:spPr>
-        <p:txBody>
-          <a:bodyPr wrap="square" lIns="0" tIns="0" rIns="0" bIns="0" rtlCol="0" anchor="ctr"/>
-          <a:lstStyle/>
-          <a:p>
-            <a:pPr indent="0" marL="0">
+          <p:cNvPr id="39" name="Text 37"/>
+          <p:cNvSpPr/>
+          <p:nvPr/>
+        </p:nvSpPr>
+        <p:spPr>
+          <a:xfrm>
+            <a:off x="6388456" y="5312664"/>
+            <a:ext cx="2179244" cy="457200"/>
+          </a:xfrm>
+          <a:prstGeom prst="rect">
+            <a:avLst/>
+          </a:prstGeom>
+          <a:noFill/>
+          <a:ln/>
+        </p:spPr>
+        <p:txBody>
+          <a:bodyPr wrap="square" lIns="0" tIns="0" rIns="0" bIns="0" rtlCol="0" anchor="t"/>
+          <a:lstStyle/>
+          <a:p>
+            <a:pPr indent="0" marL="0">
+              <a:lnSpc>
+                <a:spcPts val="1450"/>
+              </a:lnSpc>
+              <a:buNone/>
+            </a:pPr>
+            <a:r>
+              <a:rPr lang="en-US" sz="1000" dirty="0">
+                <a:solidFill>
+                  <a:srgbClr val="4A5578"/>
+                </a:solidFill>
+                <a:latin typeface="Arial" pitchFamily="34" charset="0"/>
+                <a:ea typeface="Arial" pitchFamily="34" charset="-122"/>
+                <a:cs typeface="Arial" pitchFamily="34" charset="-120"/>
+              </a:rPr>
+              <a:t>Custo do erro. Decide se a etapa </a:t>
+            </a:r>
+            <a:pPr indent="0" marL="0">
+              <a:lnSpc>
+                <a:spcPts val="1450"/>
+              </a:lnSpc>
               <a:buNone/>
             </a:pPr>
             <a:r>
               <a:rPr lang="en-US" sz="1000" b="1" dirty="0">
                 <a:solidFill>
-                  <a:srgbClr val="B9AFC9"/>
-                </a:solidFill>
-                <a:latin typeface="Courier New" pitchFamily="34" charset="0"/>
-                <a:ea typeface="Courier New" pitchFamily="34" charset="-122"/>
-                <a:cs typeface="Courier New" pitchFamily="34" charset="-120"/>
-              </a:rPr>
-              <a:t>07</a:t>
+                  <a:srgbClr val="16224E"/>
+                </a:solidFill>
+                <a:latin typeface="Arial" pitchFamily="34" charset="0"/>
+                <a:ea typeface="Arial" pitchFamily="34" charset="-122"/>
+                <a:cs typeface="Arial" pitchFamily="34" charset="-120"/>
+              </a:rPr>
+              <a:t>pode</a:t>
+            </a:r>
+            <a:pPr indent="0" marL="0">
+              <a:lnSpc>
+                <a:spcPts val="1450"/>
+              </a:lnSpc>
+              <a:buNone/>
+            </a:pPr>
+            <a:r>
+              <a:rPr lang="en-US" sz="1000" dirty="0">
+                <a:solidFill>
+                  <a:srgbClr val="4A5578"/>
+                </a:solidFill>
+                <a:latin typeface="Arial" pitchFamily="34" charset="0"/>
+                <a:ea typeface="Arial" pitchFamily="34" charset="-122"/>
+                <a:cs typeface="Arial" pitchFamily="34" charset="-120"/>
+              </a:rPr>
+              <a:t> rodar sozinha.</a:t>
             </a:r>
             <a:endParaRPr lang="en-US" sz="1000" dirty="0"/>
           </a:p>
@@ -11883,136 +12334,18 @@
       </p:sp>
       <p:sp>
         <p:nvSpPr>
-          <p:cNvPr id="31" name="Text 29"/>
-          <p:cNvSpPr/>
-          <p:nvPr/>
-        </p:nvSpPr>
-        <p:spPr>
-          <a:xfrm>
-            <a:off x="1225296" y="5020056"/>
-            <a:ext cx="3840480" cy="347472"/>
-          </a:xfrm>
-          <a:prstGeom prst="rect">
-            <a:avLst/>
-          </a:prstGeom>
-          <a:noFill/>
-          <a:ln/>
-        </p:spPr>
-        <p:txBody>
-          <a:bodyPr wrap="square" lIns="0" tIns="0" rIns="0" bIns="0" rtlCol="0" anchor="t"/>
-          <a:lstStyle/>
-          <a:p>
-            <a:pPr indent="0" marL="0">
-              <a:lnSpc>
-                <a:spcPts val="1900"/>
-              </a:lnSpc>
-              <a:buNone/>
-            </a:pPr>
-            <a:r>
-              <a:rPr lang="en-US" sz="1250" dirty="0">
-                <a:solidFill>
-                  <a:srgbClr val="16224E"/>
-                </a:solidFill>
-                <a:latin typeface="Arial" pitchFamily="34" charset="0"/>
-                <a:ea typeface="Arial" pitchFamily="34" charset="-122"/>
-                <a:cs typeface="Arial" pitchFamily="34" charset="-120"/>
-              </a:rPr>
-              <a:t>“Se você errar aqui, o que acontece?”</a:t>
-            </a:r>
-            <a:endParaRPr lang="en-US" sz="1250" dirty="0"/>
-          </a:p>
-        </p:txBody>
-      </p:sp>
-      <p:sp>
-        <p:nvSpPr>
-          <p:cNvPr id="32" name="Text 30"/>
-          <p:cNvSpPr/>
-          <p:nvPr/>
-        </p:nvSpPr>
-        <p:spPr>
-          <a:xfrm>
-            <a:off x="5184648" y="5020056"/>
-            <a:ext cx="6263640" cy="347472"/>
-          </a:xfrm>
-          <a:prstGeom prst="rect">
-            <a:avLst/>
-          </a:prstGeom>
-          <a:noFill/>
-          <a:ln/>
-        </p:spPr>
-        <p:txBody>
-          <a:bodyPr wrap="square" lIns="0" tIns="0" rIns="0" bIns="0" rtlCol="0" anchor="t"/>
-          <a:lstStyle/>
-          <a:p>
-            <a:pPr indent="0" marL="0">
-              <a:lnSpc>
-                <a:spcPts val="1700"/>
-              </a:lnSpc>
-              <a:buNone/>
-            </a:pPr>
-            <a:r>
-              <a:rPr lang="en-US" sz="1150" dirty="0">
-                <a:solidFill>
-                  <a:srgbClr val="4A5578"/>
-                </a:solidFill>
-                <a:latin typeface="Arial" pitchFamily="34" charset="0"/>
-                <a:ea typeface="Arial" pitchFamily="34" charset="-122"/>
-                <a:cs typeface="Arial" pitchFamily="34" charset="-120"/>
-              </a:rPr>
-              <a:t>Custo do erro. Decide se a etapa </a:t>
-            </a:r>
-            <a:pPr indent="0" marL="0">
-              <a:lnSpc>
-                <a:spcPts val="1700"/>
-              </a:lnSpc>
-              <a:buNone/>
-            </a:pPr>
-            <a:r>
-              <a:rPr lang="en-US" sz="1150" b="1" dirty="0">
-                <a:solidFill>
-                  <a:srgbClr val="4A5578"/>
-                </a:solidFill>
-                <a:latin typeface="Arial" pitchFamily="34" charset="0"/>
-                <a:ea typeface="Arial" pitchFamily="34" charset="-122"/>
-                <a:cs typeface="Arial" pitchFamily="34" charset="-120"/>
-              </a:rPr>
-              <a:t>pode</a:t>
-            </a:r>
-            <a:pPr indent="0" marL="0">
-              <a:lnSpc>
-                <a:spcPts val="1700"/>
-              </a:lnSpc>
-              <a:buNone/>
-            </a:pPr>
-            <a:r>
-              <a:rPr lang="en-US" sz="1150" dirty="0">
-                <a:solidFill>
-                  <a:srgbClr val="4A5578"/>
-                </a:solidFill>
-                <a:latin typeface="Arial" pitchFamily="34" charset="0"/>
-                <a:ea typeface="Arial" pitchFamily="34" charset="-122"/>
-                <a:cs typeface="Arial" pitchFamily="34" charset="-120"/>
-              </a:rPr>
-              <a:t> rodar sozinha.</a:t>
-            </a:r>
-            <a:endParaRPr lang="en-US" sz="1150" dirty="0"/>
-          </a:p>
-        </p:txBody>
-      </p:sp>
-      <p:sp>
-        <p:nvSpPr>
-          <p:cNvPr id="33" name="Shape 31"/>
-          <p:cNvSpPr/>
-          <p:nvPr/>
-        </p:nvSpPr>
-        <p:spPr>
-          <a:xfrm>
-            <a:off x="658368" y="5559552"/>
-            <a:ext cx="10874959" cy="603504"/>
+          <p:cNvPr id="40" name="Shape 38"/>
+          <p:cNvSpPr/>
+          <p:nvPr/>
+        </p:nvSpPr>
+        <p:spPr>
+          <a:xfrm>
+            <a:off x="8951747" y="3995928"/>
+            <a:ext cx="2581580" cy="1938528"/>
           </a:xfrm>
           <a:prstGeom prst="roundRect">
             <a:avLst>
-              <a:gd name="adj" fmla="val 15152"/>
+              <a:gd name="adj" fmla="val 4717"/>
             </a:avLst>
           </a:prstGeom>
           <a:solidFill>
@@ -12020,7 +12353,7 @@
           </a:solidFill>
           <a:ln w="12700">
             <a:solidFill>
-              <a:srgbClr val="333333"/>
+              <a:srgbClr val="EAE3F3"/>
             </a:solidFill>
             <a:prstDash val="solid"/>
           </a:ln>
@@ -12028,39 +12361,14 @@
       </p:sp>
       <p:sp>
         <p:nvSpPr>
-          <p:cNvPr id="34" name="Shape 32"/>
-          <p:cNvSpPr/>
-          <p:nvPr/>
-        </p:nvSpPr>
-        <p:spPr>
-          <a:xfrm>
-            <a:off x="658368" y="5559552"/>
-            <a:ext cx="45720" cy="603504"/>
-          </a:xfrm>
-          <a:prstGeom prst="rect">
-            <a:avLst/>
-          </a:prstGeom>
-          <a:solidFill>
-            <a:srgbClr val="E80070"/>
-          </a:solidFill>
-          <a:ln w="12700">
-            <a:solidFill>
-              <a:srgbClr val="333333"/>
-            </a:solidFill>
-            <a:prstDash val="solid"/>
-          </a:ln>
-        </p:spPr>
-      </p:sp>
-      <p:sp>
-        <p:nvSpPr>
-          <p:cNvPr id="35" name="Text 33"/>
-          <p:cNvSpPr/>
-          <p:nvPr/>
-        </p:nvSpPr>
-        <p:spPr>
-          <a:xfrm>
-            <a:off x="914400" y="5650992"/>
-            <a:ext cx="7315200" cy="201168"/>
+          <p:cNvPr id="41" name="Text 39"/>
+          <p:cNvSpPr/>
+          <p:nvPr/>
+        </p:nvSpPr>
+        <p:spPr>
+          <a:xfrm>
+            <a:off x="9152915" y="4379976"/>
+            <a:ext cx="2179244" cy="219456"/>
           </a:xfrm>
           <a:prstGeom prst="rect">
             <a:avLst/>
@@ -12076,30 +12384,30 @@
               <a:buNone/>
             </a:pPr>
             <a:r>
-              <a:rPr lang="en-US" sz="950" b="1" spc="180" kern="0" dirty="0">
+              <a:rPr lang="en-US" sz="850" b="1" spc="90" kern="0" dirty="0">
                 <a:solidFill>
                   <a:srgbClr val="E80070"/>
                 </a:solidFill>
-                <a:latin typeface="Arial" pitchFamily="34" charset="0"/>
-                <a:ea typeface="Arial" pitchFamily="34" charset="-122"/>
-                <a:cs typeface="Arial" pitchFamily="34" charset="-120"/>
-              </a:rPr>
-              <a:t>DUAS DELAS FAZEM 70% DO TRABALHO</a:t>
-            </a:r>
-            <a:endParaRPr lang="en-US" sz="950" dirty="0"/>
-          </a:p>
-        </p:txBody>
-      </p:sp>
-      <p:sp>
-        <p:nvSpPr>
-          <p:cNvPr id="36" name="Text 34"/>
-          <p:cNvSpPr/>
-          <p:nvPr/>
-        </p:nvSpPr>
-        <p:spPr>
-          <a:xfrm>
-            <a:off x="914400" y="5870448"/>
-            <a:ext cx="10362895" cy="219456"/>
+                <a:latin typeface="Courier New" pitchFamily="34" charset="0"/>
+                <a:ea typeface="Courier New" pitchFamily="34" charset="-122"/>
+                <a:cs typeface="Courier New" pitchFamily="34" charset="-120"/>
+              </a:rPr>
+              <a:t>DUAS FAZEM 70% DO TRABALHO</a:t>
+            </a:r>
+            <a:endParaRPr lang="en-US" sz="850" dirty="0"/>
+          </a:p>
+        </p:txBody>
+      </p:sp>
+      <p:sp>
+        <p:nvSpPr>
+          <p:cNvPr id="42" name="Text 40"/>
+          <p:cNvSpPr/>
+          <p:nvPr/>
+        </p:nvSpPr>
+        <p:spPr>
+          <a:xfrm>
+            <a:off x="9152915" y="4654296"/>
+            <a:ext cx="2179244" cy="1097280"/>
           </a:xfrm>
           <a:prstGeom prst="rect">
             <a:avLst/>
@@ -12113,12 +12421,12 @@
           <a:p>
             <a:pPr indent="0" marL="0">
               <a:lnSpc>
-                <a:spcPts val="1800"/>
-              </a:lnSpc>
-              <a:buNone/>
-            </a:pPr>
-            <a:r>
-              <a:rPr lang="en-US" sz="1200" dirty="0">
+                <a:spcPts val="1450"/>
+              </a:lnSpc>
+              <a:buNone/>
+            </a:pPr>
+            <a:r>
+              <a:rPr lang="en-US" sz="1000" dirty="0">
                 <a:solidFill>
                   <a:srgbClr val="16224E"/>
                 </a:solidFill>
@@ -12130,12 +12438,29 @@
             </a:r>
             <a:pPr indent="0" marL="0">
               <a:lnSpc>
-                <a:spcPts val="1800"/>
-              </a:lnSpc>
-              <a:buNone/>
-            </a:pPr>
-            <a:r>
-              <a:rPr lang="en-US" sz="1200" b="1" dirty="0">
+                <a:spcPts val="1450"/>
+              </a:lnSpc>
+              <a:buNone/>
+            </a:pPr>
+            <a:r>
+              <a:rPr lang="en-US" sz="1000" b="1" dirty="0">
+                <a:solidFill>
+                  <a:srgbClr val="E80070"/>
+                </a:solidFill>
+                <a:latin typeface="Arial" pitchFamily="34" charset="0"/>
+                <a:ea typeface="Arial" pitchFamily="34" charset="-122"/>
+                <a:cs typeface="Arial" pitchFamily="34" charset="-120"/>
+              </a:rPr>
+              <a:t>2</a:t>
+            </a:r>
+            <a:pPr indent="0" marL="0">
+              <a:lnSpc>
+                <a:spcPts val="1450"/>
+              </a:lnSpc>
+              <a:buNone/>
+            </a:pPr>
+            <a:r>
+              <a:rPr lang="en-US" sz="1000" dirty="0">
                 <a:solidFill>
                   <a:srgbClr val="16224E"/>
                 </a:solidFill>
@@ -12143,16 +12468,33 @@
                 <a:ea typeface="Arial" pitchFamily="34" charset="-122"/>
                 <a:cs typeface="Arial" pitchFamily="34" charset="-120"/>
               </a:rPr>
-              <a:t>2</a:t>
-            </a:r>
-            <a:pPr indent="0" marL="0">
-              <a:lnSpc>
-                <a:spcPts val="1800"/>
-              </a:lnSpc>
-              <a:buNone/>
-            </a:pPr>
-            <a:r>
-              <a:rPr lang="en-US" sz="1200" dirty="0">
+              <a:t> te entrega os losangos; a </a:t>
+            </a:r>
+            <a:pPr indent="0" marL="0">
+              <a:lnSpc>
+                <a:spcPts val="1450"/>
+              </a:lnSpc>
+              <a:buNone/>
+            </a:pPr>
+            <a:r>
+              <a:rPr lang="en-US" sz="1000" b="1" dirty="0">
+                <a:solidFill>
+                  <a:srgbClr val="E80070"/>
+                </a:solidFill>
+                <a:latin typeface="Arial" pitchFamily="34" charset="0"/>
+                <a:ea typeface="Arial" pitchFamily="34" charset="-122"/>
+                <a:cs typeface="Arial" pitchFamily="34" charset="-120"/>
+              </a:rPr>
+              <a:t>3</a:t>
+            </a:r>
+            <a:pPr indent="0" marL="0">
+              <a:lnSpc>
+                <a:spcPts val="1450"/>
+              </a:lnSpc>
+              <a:buNone/>
+            </a:pPr>
+            <a:r>
+              <a:rPr lang="en-US" sz="1000" dirty="0">
                 <a:solidFill>
                   <a:srgbClr val="16224E"/>
                 </a:solidFill>
@@ -12160,49 +12502,15 @@
                 <a:ea typeface="Arial" pitchFamily="34" charset="-122"/>
                 <a:cs typeface="Arial" pitchFamily="34" charset="-120"/>
               </a:rPr>
-              <a:t> te entrega os losangos; a </a:t>
-            </a:r>
-            <a:pPr indent="0" marL="0">
-              <a:lnSpc>
-                <a:spcPts val="1800"/>
-              </a:lnSpc>
-              <a:buNone/>
-            </a:pPr>
-            <a:r>
-              <a:rPr lang="en-US" sz="1200" b="1" dirty="0">
-                <a:solidFill>
-                  <a:srgbClr val="16224E"/>
-                </a:solidFill>
-                <a:latin typeface="Arial" pitchFamily="34" charset="0"/>
-                <a:ea typeface="Arial" pitchFamily="34" charset="-122"/>
-                <a:cs typeface="Arial" pitchFamily="34" charset="-120"/>
-              </a:rPr>
-              <a:t>3</a:t>
-            </a:r>
-            <a:pPr indent="0" marL="0">
-              <a:lnSpc>
-                <a:spcPts val="1800"/>
-              </a:lnSpc>
-              <a:buNone/>
-            </a:pPr>
-            <a:r>
-              <a:rPr lang="en-US" sz="1200" dirty="0">
-                <a:solidFill>
-                  <a:srgbClr val="16224E"/>
-                </a:solidFill>
-                <a:latin typeface="Arial" pitchFamily="34" charset="0"/>
-                <a:ea typeface="Arial" pitchFamily="34" charset="-122"/>
-                <a:cs typeface="Arial" pitchFamily="34" charset="-120"/>
-              </a:rPr>
               <a:t>, as caixas que viram script. Grave a conversa e desenhe em cima da transcrição — não da memória.</a:t>
             </a:r>
-            <a:endParaRPr lang="en-US" sz="1200" dirty="0"/>
-          </a:p>
-        </p:txBody>
-      </p:sp>
-      <p:sp>
-        <p:nvSpPr>
-          <p:cNvPr id="37" name="Text 35"/>
+            <a:endParaRPr lang="en-US" sz="1000" dirty="0"/>
+          </a:p>
+        </p:txBody>
+      </p:sp>
+      <p:sp>
+        <p:nvSpPr>
+          <p:cNvPr id="43" name="Text 41"/>
           <p:cNvSpPr/>
           <p:nvPr/>
         </p:nvSpPr>
@@ -12241,7 +12549,7 @@
       </p:sp>
       <p:sp>
         <p:nvSpPr>
-          <p:cNvPr id="38" name="Text 36"/>
+          <p:cNvPr id="44" name="Text 42"/>
           <p:cNvSpPr/>
           <p:nvPr/>
         </p:nvSpPr>
@@ -12922,7 +13230,7 @@
                 <a:ea typeface="Arial" pitchFamily="34" charset="-122"/>
                 <a:cs typeface="Arial" pitchFamily="34" charset="-120"/>
               </a:rPr>
-              <a:t>Papel, na frente da pessoa, na hora. Depois passe pra </a:t>
+              <a:t>Papel, na frente da pessoa, na hora. Depois passe pro </a:t>
             </a:r>
             <a:pPr indent="0" marL="0">
               <a:lnSpc>
@@ -12931,66 +13239,32 @@
               <a:buNone/>
             </a:pPr>
             <a:r>
+              <a:rPr lang="en-US" sz="1150" b="1" dirty="0">
+                <a:solidFill>
+                  <a:srgbClr val="16224E"/>
+                </a:solidFill>
+                <a:latin typeface="Arial" pitchFamily="34" charset="0"/>
+                <a:ea typeface="Arial" pitchFamily="34" charset="-122"/>
+                <a:cs typeface="Arial" pitchFamily="34" charset="-120"/>
+              </a:rPr>
+              <a:t>Miro</a:t>
+            </a:r>
+            <a:pPr indent="0" marL="0">
+              <a:lnSpc>
+                <a:spcPts val="1700"/>
+              </a:lnSpc>
+              <a:buNone/>
+            </a:pPr>
+            <a:r>
               <a:rPr lang="en-US" sz="1150" dirty="0">
                 <a:solidFill>
                   <a:srgbClr val="16224E"/>
                 </a:solidFill>
-                <a:latin typeface="Courier New" pitchFamily="34" charset="0"/>
-                <a:ea typeface="Courier New" pitchFamily="34" charset="-122"/>
-                <a:cs typeface="Courier New" pitchFamily="34" charset="-120"/>
-              </a:rPr>
-              <a:t>Mermaid</a:t>
-            </a:r>
-            <a:pPr indent="0" marL="0">
-              <a:lnSpc>
-                <a:spcPts val="1700"/>
-              </a:lnSpc>
-              <a:buNone/>
-            </a:pPr>
-            <a:r>
-              <a:rPr lang="en-US" sz="1150" dirty="0">
-                <a:solidFill>
-                  <a:srgbClr val="16224E"/>
-                </a:solidFill>
-                <a:latin typeface="Arial" pitchFamily="34" charset="0"/>
-                <a:ea typeface="Arial" pitchFamily="34" charset="-122"/>
-                <a:cs typeface="Arial" pitchFamily="34" charset="-120"/>
-              </a:rPr>
-              <a:t> ou </a:t>
-            </a:r>
-            <a:pPr indent="0" marL="0">
-              <a:lnSpc>
-                <a:spcPts val="1700"/>
-              </a:lnSpc>
-              <a:buNone/>
-            </a:pPr>
-            <a:r>
-              <a:rPr lang="en-US" sz="1150" dirty="0">
-                <a:solidFill>
-                  <a:srgbClr val="16224E"/>
-                </a:solidFill>
-                <a:latin typeface="Courier New" pitchFamily="34" charset="0"/>
-                <a:ea typeface="Courier New" pitchFamily="34" charset="-122"/>
-                <a:cs typeface="Courier New" pitchFamily="34" charset="-120"/>
-              </a:rPr>
-              <a:t>draw.io</a:t>
-            </a:r>
-            <a:pPr indent="0" marL="0">
-              <a:lnSpc>
-                <a:spcPts val="1700"/>
-              </a:lnSpc>
-              <a:buNone/>
-            </a:pPr>
-            <a:r>
-              <a:rPr lang="en-US" sz="1150" dirty="0">
-                <a:solidFill>
-                  <a:srgbClr val="16224E"/>
-                </a:solidFill>
-                <a:latin typeface="Arial" pitchFamily="34" charset="0"/>
-                <a:ea typeface="Arial" pitchFamily="34" charset="-122"/>
-                <a:cs typeface="Arial" pitchFamily="34" charset="-120"/>
-              </a:rPr>
-              <a:t> — Mermaid é texto, então versiona no repo e o diff mostra quando o processo mudou.</a:t>
+                <a:latin typeface="Arial" pitchFamily="34" charset="0"/>
+                <a:ea typeface="Arial" pitchFamily="34" charset="-122"/>
+                <a:cs typeface="Arial" pitchFamily="34" charset="-120"/>
+              </a:rPr>
+              <a:t> — todo mundo já tem, dá pra editar junto na chamada, e o quadro vira o documento do processo em vez de virar mais um anexo.</a:t>
             </a:r>
             <a:endParaRPr lang="en-US" sz="1150" dirty="0"/>
           </a:p>
@@ -17932,12 +18206,12 @@
         </p:nvSpPr>
         <p:spPr>
           <a:xfrm>
-            <a:off x="658368" y="5257800"/>
-            <a:ext cx="10874959" cy="822960"/>
+            <a:off x="658368" y="5321808"/>
+            <a:ext cx="10874959" cy="868680"/>
           </a:xfrm>
           <a:prstGeom prst="roundRect">
             <a:avLst>
-              <a:gd name="adj" fmla="val 11111"/>
+              <a:gd name="adj" fmla="val 10526"/>
             </a:avLst>
           </a:prstGeom>
           <a:solidFill>
@@ -17959,8 +18233,8 @@
         </p:nvSpPr>
         <p:spPr>
           <a:xfrm>
-            <a:off x="658368" y="5257800"/>
-            <a:ext cx="45720" cy="822960"/>
+            <a:off x="658368" y="5321808"/>
+            <a:ext cx="45720" cy="868680"/>
           </a:xfrm>
           <a:prstGeom prst="rect">
             <a:avLst/>
@@ -17984,8 +18258,8 @@
         </p:nvSpPr>
         <p:spPr>
           <a:xfrm>
-            <a:off x="914400" y="5349240"/>
-            <a:ext cx="7315200" cy="201168"/>
+            <a:off x="914400" y="5504688"/>
+            <a:ext cx="1188720" cy="512064"/>
           </a:xfrm>
           <a:prstGeom prst="rect">
             <a:avLst/>
@@ -17998,137 +18272,139 @@
           <a:lstStyle/>
           <a:p>
             <a:pPr indent="0" marL="0">
-              <a:buNone/>
-            </a:pPr>
-            <a:r>
-              <a:rPr lang="en-US" sz="950" b="1" spc="180" kern="0" dirty="0">
+              <a:lnSpc>
+                <a:spcPts val="1300"/>
+              </a:lnSpc>
+              <a:buNone/>
+            </a:pPr>
+            <a:r>
+              <a:rPr lang="en-US" sz="850" b="1" spc="90" kern="0" dirty="0">
                 <a:solidFill>
                   <a:srgbClr val="E80070"/>
-                </a:solidFill>
-                <a:latin typeface="Arial" pitchFamily="34" charset="0"/>
-                <a:ea typeface="Arial" pitchFamily="34" charset="-122"/>
-                <a:cs typeface="Arial" pitchFamily="34" charset="-120"/>
-              </a:rPr>
-              <a:t>A ORDEM DE PERGUNTAR — UMA VEZ POR CAIXA</a:t>
-            </a:r>
-            <a:endParaRPr lang="en-US" sz="950" dirty="0"/>
-          </a:p>
-        </p:txBody>
-      </p:sp>
-      <p:sp>
-        <p:nvSpPr>
-          <p:cNvPr id="41" name="Text 39"/>
-          <p:cNvSpPr/>
-          <p:nvPr/>
-        </p:nvSpPr>
-        <p:spPr>
-          <a:xfrm>
-            <a:off x="914400" y="5568696"/>
-            <a:ext cx="10362895" cy="438912"/>
-          </a:xfrm>
-          <a:prstGeom prst="rect">
-            <a:avLst/>
-          </a:prstGeom>
-          <a:noFill/>
-          <a:ln/>
-        </p:spPr>
-        <p:txBody>
-          <a:bodyPr wrap="square" lIns="0" tIns="0" rIns="0" bIns="0" rtlCol="0" anchor="t"/>
-          <a:lstStyle/>
-          <a:p>
-            <a:pPr indent="0" marL="0">
-              <a:lnSpc>
-                <a:spcPts val="1800"/>
-              </a:lnSpc>
-              <a:buNone/>
-            </a:pPr>
-            <a:r>
-              <a:rPr lang="en-US" sz="1200" b="1" dirty="0">
-                <a:solidFill>
-                  <a:srgbClr val="16224E"/>
-                </a:solidFill>
-                <a:latin typeface="Arial" pitchFamily="34" charset="0"/>
-                <a:ea typeface="Arial" pitchFamily="34" charset="-122"/>
-                <a:cs typeface="Arial" pitchFamily="34" charset="-120"/>
-              </a:rPr>
-              <a:t>1.</a:t>
-            </a:r>
-            <a:pPr indent="0" marL="0">
-              <a:lnSpc>
-                <a:spcPts val="1800"/>
-              </a:lnSpc>
-              <a:buNone/>
-            </a:pPr>
-            <a:r>
-              <a:rPr lang="en-US" sz="1200" dirty="0">
-                <a:solidFill>
-                  <a:srgbClr val="16224E"/>
-                </a:solidFill>
-                <a:latin typeface="Arial" pitchFamily="34" charset="0"/>
-                <a:ea typeface="Arial" pitchFamily="34" charset="-122"/>
-                <a:cs typeface="Arial" pitchFamily="34" charset="-120"/>
-              </a:rPr>
-              <a:t> Dá pra fazer com um </a:t>
-            </a:r>
-            <a:pPr indent="0" marL="0">
-              <a:lnSpc>
-                <a:spcPts val="1800"/>
-              </a:lnSpc>
-              <a:buNone/>
-            </a:pPr>
-            <a:r>
-              <a:rPr lang="en-US" sz="1200" dirty="0">
-                <a:solidFill>
-                  <a:srgbClr val="16224E"/>
                 </a:solidFill>
                 <a:latin typeface="Courier New" pitchFamily="34" charset="0"/>
                 <a:ea typeface="Courier New" pitchFamily="34" charset="-122"/>
                 <a:cs typeface="Courier New" pitchFamily="34" charset="-120"/>
               </a:rPr>
-              <a:t>if</a:t>
-            </a:r>
-            <a:pPr indent="0" marL="0">
-              <a:lnSpc>
-                <a:spcPts val="1800"/>
-              </a:lnSpc>
-              <a:buNone/>
-            </a:pPr>
-            <a:r>
-              <a:rPr lang="en-US" sz="1200" dirty="0">
-                <a:solidFill>
-                  <a:srgbClr val="16224E"/>
-                </a:solidFill>
-                <a:latin typeface="Arial" pitchFamily="34" charset="0"/>
-                <a:ea typeface="Arial" pitchFamily="34" charset="-122"/>
-                <a:cs typeface="Arial" pitchFamily="34" charset="-120"/>
-              </a:rPr>
-              <a:t>? Se dá, faça com </a:t>
-            </a:r>
-            <a:pPr indent="0" marL="0">
-              <a:lnSpc>
-                <a:spcPts val="1800"/>
-              </a:lnSpc>
-              <a:buNone/>
-            </a:pPr>
-            <a:r>
-              <a:rPr lang="en-US" sz="1200" dirty="0">
-                <a:solidFill>
-                  <a:srgbClr val="16224E"/>
+              <a:t>A ORDEM DE</a:t>
+            </a:r>
+            <a:endParaRPr lang="en-US" sz="850" dirty="0"/>
+          </a:p>
+          <a:p>
+            <a:pPr indent="0" marL="0">
+              <a:lnSpc>
+                <a:spcPts val="1300"/>
+              </a:lnSpc>
+              <a:buNone/>
+            </a:pPr>
+            <a:r>
+              <a:rPr lang="en-US" sz="850" b="1" spc="90" kern="0" dirty="0">
+                <a:solidFill>
+                  <a:srgbClr val="E80070"/>
                 </a:solidFill>
                 <a:latin typeface="Courier New" pitchFamily="34" charset="0"/>
                 <a:ea typeface="Courier New" pitchFamily="34" charset="-122"/>
                 <a:cs typeface="Courier New" pitchFamily="34" charset="-120"/>
               </a:rPr>
-              <a:t>if</a:t>
-            </a:r>
-            <a:pPr indent="0" marL="0">
-              <a:lnSpc>
-                <a:spcPts val="1800"/>
-              </a:lnSpc>
-              <a:buNone/>
-            </a:pPr>
-            <a:r>
-              <a:rPr lang="en-US" sz="1200" dirty="0">
+              <a:t>PERGUNTAR</a:t>
+            </a:r>
+            <a:endParaRPr lang="en-US" sz="850" dirty="0"/>
+          </a:p>
+        </p:txBody>
+      </p:sp>
+      <p:sp>
+        <p:nvSpPr>
+          <p:cNvPr id="41" name="Shape 39"/>
+          <p:cNvSpPr/>
+          <p:nvPr/>
+        </p:nvSpPr>
+        <p:spPr>
+          <a:xfrm>
+            <a:off x="2194560" y="5559552"/>
+            <a:ext cx="237744" cy="237744"/>
+          </a:xfrm>
+          <a:prstGeom prst="ellipse">
+            <a:avLst/>
+          </a:prstGeom>
+          <a:solidFill>
+            <a:srgbClr val="E80070"/>
+          </a:solidFill>
+          <a:ln w="12700">
+            <a:solidFill>
+              <a:srgbClr val="333333"/>
+            </a:solidFill>
+            <a:prstDash val="solid"/>
+          </a:ln>
+        </p:spPr>
+      </p:sp>
+      <p:sp>
+        <p:nvSpPr>
+          <p:cNvPr id="42" name="Text 40"/>
+          <p:cNvSpPr/>
+          <p:nvPr/>
+        </p:nvSpPr>
+        <p:spPr>
+          <a:xfrm>
+            <a:off x="2194560" y="5559552"/>
+            <a:ext cx="237744" cy="237744"/>
+          </a:xfrm>
+          <a:prstGeom prst="rect">
+            <a:avLst/>
+          </a:prstGeom>
+          <a:noFill/>
+          <a:ln/>
+        </p:spPr>
+        <p:txBody>
+          <a:bodyPr wrap="square" lIns="0" tIns="0" rIns="0" bIns="0" rtlCol="0" anchor="ctr"/>
+          <a:lstStyle/>
+          <a:p>
+            <a:pPr algn="ctr" indent="0" marL="0">
+              <a:buNone/>
+            </a:pPr>
+            <a:r>
+              <a:rPr lang="en-US" sz="900" b="1" dirty="0">
+                <a:solidFill>
+                  <a:srgbClr val="FFFFFF"/>
+                </a:solidFill>
+                <a:latin typeface="Courier New" pitchFamily="34" charset="0"/>
+                <a:ea typeface="Courier New" pitchFamily="34" charset="-122"/>
+                <a:cs typeface="Courier New" pitchFamily="34" charset="-120"/>
+              </a:rPr>
+              <a:t>1</a:t>
+            </a:r>
+            <a:endParaRPr lang="en-US" sz="900" dirty="0"/>
+          </a:p>
+        </p:txBody>
+      </p:sp>
+      <p:sp>
+        <p:nvSpPr>
+          <p:cNvPr id="43" name="Text 41"/>
+          <p:cNvSpPr/>
+          <p:nvPr/>
+        </p:nvSpPr>
+        <p:spPr>
+          <a:xfrm>
+            <a:off x="2523744" y="5522976"/>
+            <a:ext cx="2103120" cy="512064"/>
+          </a:xfrm>
+          <a:prstGeom prst="rect">
+            <a:avLst/>
+          </a:prstGeom>
+          <a:noFill/>
+          <a:ln/>
+        </p:spPr>
+        <p:txBody>
+          <a:bodyPr wrap="square" lIns="0" tIns="0" rIns="0" bIns="0" rtlCol="0" anchor="t"/>
+          <a:lstStyle/>
+          <a:p>
+            <a:pPr indent="0" marL="0">
+              <a:lnSpc>
+                <a:spcPts val="1550"/>
+              </a:lnSpc>
+              <a:buNone/>
+            </a:pPr>
+            <a:r>
+              <a:rPr lang="en-US" sz="1050" b="1" dirty="0">
                 <a:solidFill>
                   <a:srgbClr val="16224E"/>
                 </a:solidFill>
@@ -18136,16 +18412,123 @@
                 <a:ea typeface="Arial" pitchFamily="34" charset="-122"/>
                 <a:cs typeface="Arial" pitchFamily="34" charset="-120"/>
               </a:rPr>
-              <a:t>.   </a:t>
-            </a:r>
-            <a:pPr indent="0" marL="0">
-              <a:lnSpc>
-                <a:spcPts val="1800"/>
-              </a:lnSpc>
-              <a:buNone/>
-            </a:pPr>
-            <a:r>
-              <a:rPr lang="en-US" sz="1200" b="1" dirty="0">
+              <a:t>Dá pra fazer com um if?
+</a:t>
+            </a:r>
+            <a:pPr indent="0" marL="0">
+              <a:lnSpc>
+                <a:spcPts val="1550"/>
+              </a:lnSpc>
+              <a:buNone/>
+            </a:pPr>
+            <a:r>
+              <a:rPr lang="en-US" sz="1050" dirty="0">
+                <a:solidFill>
+                  <a:srgbClr val="4A5578"/>
+                </a:solidFill>
+                <a:latin typeface="Arial" pitchFamily="34" charset="0"/>
+                <a:ea typeface="Arial" pitchFamily="34" charset="-122"/>
+                <a:cs typeface="Arial" pitchFamily="34" charset="-120"/>
+              </a:rPr>
+              <a:t>Se dá, faça com if.</a:t>
+            </a:r>
+            <a:endParaRPr lang="en-US" sz="1050" dirty="0"/>
+          </a:p>
+        </p:txBody>
+      </p:sp>
+      <p:sp>
+        <p:nvSpPr>
+          <p:cNvPr id="44" name="Shape 42"/>
+          <p:cNvSpPr/>
+          <p:nvPr/>
+        </p:nvSpPr>
+        <p:spPr>
+          <a:xfrm>
+            <a:off x="4709160" y="5559552"/>
+            <a:ext cx="237744" cy="237744"/>
+          </a:xfrm>
+          <a:prstGeom prst="ellipse">
+            <a:avLst/>
+          </a:prstGeom>
+          <a:solidFill>
+            <a:srgbClr val="E80070"/>
+          </a:solidFill>
+          <a:ln w="12700">
+            <a:solidFill>
+              <a:srgbClr val="333333"/>
+            </a:solidFill>
+            <a:prstDash val="solid"/>
+          </a:ln>
+        </p:spPr>
+      </p:sp>
+      <p:sp>
+        <p:nvSpPr>
+          <p:cNvPr id="45" name="Text 43"/>
+          <p:cNvSpPr/>
+          <p:nvPr/>
+        </p:nvSpPr>
+        <p:spPr>
+          <a:xfrm>
+            <a:off x="4709160" y="5559552"/>
+            <a:ext cx="237744" cy="237744"/>
+          </a:xfrm>
+          <a:prstGeom prst="rect">
+            <a:avLst/>
+          </a:prstGeom>
+          <a:noFill/>
+          <a:ln/>
+        </p:spPr>
+        <p:txBody>
+          <a:bodyPr wrap="square" lIns="0" tIns="0" rIns="0" bIns="0" rtlCol="0" anchor="ctr"/>
+          <a:lstStyle/>
+          <a:p>
+            <a:pPr algn="ctr" indent="0" marL="0">
+              <a:buNone/>
+            </a:pPr>
+            <a:r>
+              <a:rPr lang="en-US" sz="900" b="1" dirty="0">
+                <a:solidFill>
+                  <a:srgbClr val="FFFFFF"/>
+                </a:solidFill>
+                <a:latin typeface="Courier New" pitchFamily="34" charset="0"/>
+                <a:ea typeface="Courier New" pitchFamily="34" charset="-122"/>
+                <a:cs typeface="Courier New" pitchFamily="34" charset="-120"/>
+              </a:rPr>
+              <a:t>2</a:t>
+            </a:r>
+            <a:endParaRPr lang="en-US" sz="900" dirty="0"/>
+          </a:p>
+        </p:txBody>
+      </p:sp>
+      <p:sp>
+        <p:nvSpPr>
+          <p:cNvPr id="46" name="Text 44"/>
+          <p:cNvSpPr/>
+          <p:nvPr/>
+        </p:nvSpPr>
+        <p:spPr>
+          <a:xfrm>
+            <a:off x="5038344" y="5522976"/>
+            <a:ext cx="2103120" cy="512064"/>
+          </a:xfrm>
+          <a:prstGeom prst="rect">
+            <a:avLst/>
+          </a:prstGeom>
+          <a:noFill/>
+          <a:ln/>
+        </p:spPr>
+        <p:txBody>
+          <a:bodyPr wrap="square" lIns="0" tIns="0" rIns="0" bIns="0" rtlCol="0" anchor="t"/>
+          <a:lstStyle/>
+          <a:p>
+            <a:pPr indent="0" marL="0">
+              <a:lnSpc>
+                <a:spcPts val="1550"/>
+              </a:lnSpc>
+              <a:buNone/>
+            </a:pPr>
+            <a:r>
+              <a:rPr lang="en-US" sz="1050" b="1" dirty="0">
                 <a:solidFill>
                   <a:srgbClr val="16224E"/>
                 </a:solidFill>
@@ -18153,16 +18536,123 @@
                 <a:ea typeface="Arial" pitchFamily="34" charset="-122"/>
                 <a:cs typeface="Arial" pitchFamily="34" charset="-120"/>
               </a:rPr>
-              <a:t>2.</a:t>
-            </a:r>
-            <a:pPr indent="0" marL="0">
-              <a:lnSpc>
-                <a:spcPts val="1800"/>
-              </a:lnSpc>
-              <a:buNone/>
-            </a:pPr>
-            <a:r>
-              <a:rPr lang="en-US" sz="1200" dirty="0">
+              <a:t>O erro é caro e irreversível?
+</a:t>
+            </a:r>
+            <a:pPr indent="0" marL="0">
+              <a:lnSpc>
+                <a:spcPts val="1550"/>
+              </a:lnSpc>
+              <a:buNone/>
+            </a:pPr>
+            <a:r>
+              <a:rPr lang="en-US" sz="1050" dirty="0">
+                <a:solidFill>
+                  <a:srgbClr val="4A5578"/>
+                </a:solidFill>
+                <a:latin typeface="Arial" pitchFamily="34" charset="0"/>
+                <a:ea typeface="Arial" pitchFamily="34" charset="-122"/>
+                <a:cs typeface="Arial" pitchFamily="34" charset="-120"/>
+              </a:rPr>
+              <a:t>Se é, a pessoa decide.</a:t>
+            </a:r>
+            <a:endParaRPr lang="en-US" sz="1050" dirty="0"/>
+          </a:p>
+        </p:txBody>
+      </p:sp>
+      <p:sp>
+        <p:nvSpPr>
+          <p:cNvPr id="47" name="Shape 45"/>
+          <p:cNvSpPr/>
+          <p:nvPr/>
+        </p:nvSpPr>
+        <p:spPr>
+          <a:xfrm>
+            <a:off x="7223760" y="5559552"/>
+            <a:ext cx="237744" cy="237744"/>
+          </a:xfrm>
+          <a:prstGeom prst="ellipse">
+            <a:avLst/>
+          </a:prstGeom>
+          <a:solidFill>
+            <a:srgbClr val="E80070"/>
+          </a:solidFill>
+          <a:ln w="12700">
+            <a:solidFill>
+              <a:srgbClr val="333333"/>
+            </a:solidFill>
+            <a:prstDash val="solid"/>
+          </a:ln>
+        </p:spPr>
+      </p:sp>
+      <p:sp>
+        <p:nvSpPr>
+          <p:cNvPr id="48" name="Text 46"/>
+          <p:cNvSpPr/>
+          <p:nvPr/>
+        </p:nvSpPr>
+        <p:spPr>
+          <a:xfrm>
+            <a:off x="7223760" y="5559552"/>
+            <a:ext cx="237744" cy="237744"/>
+          </a:xfrm>
+          <a:prstGeom prst="rect">
+            <a:avLst/>
+          </a:prstGeom>
+          <a:noFill/>
+          <a:ln/>
+        </p:spPr>
+        <p:txBody>
+          <a:bodyPr wrap="square" lIns="0" tIns="0" rIns="0" bIns="0" rtlCol="0" anchor="ctr"/>
+          <a:lstStyle/>
+          <a:p>
+            <a:pPr algn="ctr" indent="0" marL="0">
+              <a:buNone/>
+            </a:pPr>
+            <a:r>
+              <a:rPr lang="en-US" sz="900" b="1" dirty="0">
+                <a:solidFill>
+                  <a:srgbClr val="FFFFFF"/>
+                </a:solidFill>
+                <a:latin typeface="Courier New" pitchFamily="34" charset="0"/>
+                <a:ea typeface="Courier New" pitchFamily="34" charset="-122"/>
+                <a:cs typeface="Courier New" pitchFamily="34" charset="-120"/>
+              </a:rPr>
+              <a:t>3</a:t>
+            </a:r>
+            <a:endParaRPr lang="en-US" sz="900" dirty="0"/>
+          </a:p>
+        </p:txBody>
+      </p:sp>
+      <p:sp>
+        <p:nvSpPr>
+          <p:cNvPr id="49" name="Text 47"/>
+          <p:cNvSpPr/>
+          <p:nvPr/>
+        </p:nvSpPr>
+        <p:spPr>
+          <a:xfrm>
+            <a:off x="7552944" y="5522976"/>
+            <a:ext cx="2103120" cy="512064"/>
+          </a:xfrm>
+          <a:prstGeom prst="rect">
+            <a:avLst/>
+          </a:prstGeom>
+          <a:noFill/>
+          <a:ln/>
+        </p:spPr>
+        <p:txBody>
+          <a:bodyPr wrap="square" lIns="0" tIns="0" rIns="0" bIns="0" rtlCol="0" anchor="t"/>
+          <a:lstStyle/>
+          <a:p>
+            <a:pPr indent="0" marL="0">
+              <a:lnSpc>
+                <a:spcPts val="1550"/>
+              </a:lnSpc>
+              <a:buNone/>
+            </a:pPr>
+            <a:r>
+              <a:rPr lang="en-US" sz="1050" b="1" dirty="0">
                 <a:solidFill>
                   <a:srgbClr val="16224E"/>
                 </a:solidFill>
@@ -18170,50 +18660,84 @@
                 <a:ea typeface="Arial" pitchFamily="34" charset="-122"/>
                 <a:cs typeface="Arial" pitchFamily="34" charset="-120"/>
               </a:rPr>
-              <a:t> Se não dá, o erro é caro e irreversível? Se é, humano decide (ou a IA propõe e o humano aprova).   </a:t>
-            </a:r>
-            <a:pPr indent="0" marL="0">
-              <a:lnSpc>
-                <a:spcPts val="1800"/>
-              </a:lnSpc>
-              <a:buNone/>
-            </a:pPr>
-            <a:r>
-              <a:rPr lang="en-US" sz="1200" b="1" dirty="0">
-                <a:solidFill>
-                  <a:srgbClr val="16224E"/>
-                </a:solidFill>
-                <a:latin typeface="Arial" pitchFamily="34" charset="0"/>
-                <a:ea typeface="Arial" pitchFamily="34" charset="-122"/>
-                <a:cs typeface="Arial" pitchFamily="34" charset="-120"/>
-              </a:rPr>
-              <a:t>3.</a:t>
-            </a:r>
-            <a:pPr indent="0" marL="0">
-              <a:lnSpc>
-                <a:spcPts val="1800"/>
-              </a:lnSpc>
-              <a:buNone/>
-            </a:pPr>
-            <a:r>
-              <a:rPr lang="en-US" sz="1200" dirty="0">
-                <a:solidFill>
-                  <a:srgbClr val="16224E"/>
-                </a:solidFill>
-                <a:latin typeface="Arial" pitchFamily="34" charset="0"/>
-                <a:ea typeface="Arial" pitchFamily="34" charset="-122"/>
-                <a:cs typeface="Arial" pitchFamily="34" charset="-120"/>
-              </a:rPr>
-              <a:t> Se não é, IA com revisão por amostragem.   </a:t>
-            </a:r>
-            <a:pPr indent="0" marL="0">
-              <a:lnSpc>
-                <a:spcPts val="1800"/>
-              </a:lnSpc>
-              <a:buNone/>
-            </a:pPr>
-            <a:r>
-              <a:rPr lang="en-US" sz="1200" dirty="0">
+              <a:t>Nenhum dos dois?
+</a:t>
+            </a:r>
+            <a:pPr indent="0" marL="0">
+              <a:lnSpc>
+                <a:spcPts val="1550"/>
+              </a:lnSpc>
+              <a:buNone/>
+            </a:pPr>
+            <a:r>
+              <a:rPr lang="en-US" sz="1050" dirty="0">
+                <a:solidFill>
+                  <a:srgbClr val="4A5578"/>
+                </a:solidFill>
+                <a:latin typeface="Arial" pitchFamily="34" charset="0"/>
+                <a:ea typeface="Arial" pitchFamily="34" charset="-122"/>
+                <a:cs typeface="Arial" pitchFamily="34" charset="-120"/>
+              </a:rPr>
+              <a:t>IA com revisão por amostragem.</a:t>
+            </a:r>
+            <a:endParaRPr lang="en-US" sz="1050" dirty="0"/>
+          </a:p>
+        </p:txBody>
+      </p:sp>
+      <p:sp>
+        <p:nvSpPr>
+          <p:cNvPr id="50" name="Shape 48"/>
+          <p:cNvSpPr/>
+          <p:nvPr/>
+        </p:nvSpPr>
+        <p:spPr>
+          <a:xfrm>
+            <a:off x="9601200" y="5486400"/>
+            <a:ext cx="10973" cy="548640"/>
+          </a:xfrm>
+          <a:prstGeom prst="rect">
+            <a:avLst/>
+          </a:prstGeom>
+          <a:solidFill>
+            <a:srgbClr val="E7C9DA"/>
+          </a:solidFill>
+          <a:ln w="12700">
+            <a:solidFill>
+              <a:srgbClr val="333333"/>
+            </a:solidFill>
+            <a:prstDash val="solid"/>
+          </a:ln>
+        </p:spPr>
+      </p:sp>
+      <p:sp>
+        <p:nvSpPr>
+          <p:cNvPr id="51" name="Text 49"/>
+          <p:cNvSpPr/>
+          <p:nvPr/>
+        </p:nvSpPr>
+        <p:spPr>
+          <a:xfrm>
+            <a:off x="9802368" y="5522976"/>
+            <a:ext cx="1737360" cy="512064"/>
+          </a:xfrm>
+          <a:prstGeom prst="rect">
+            <a:avLst/>
+          </a:prstGeom>
+          <a:noFill/>
+          <a:ln/>
+        </p:spPr>
+        <p:txBody>
+          <a:bodyPr wrap="square" lIns="0" tIns="0" rIns="0" bIns="0" rtlCol="0" anchor="t"/>
+          <a:lstStyle/>
+          <a:p>
+            <a:pPr indent="0" marL="0">
+              <a:lnSpc>
+                <a:spcPts val="1550"/>
+              </a:lnSpc>
+              <a:buNone/>
+            </a:pPr>
+            <a:r>
+              <a:rPr lang="en-US" sz="1050" dirty="0">
                 <a:solidFill>
                   <a:srgbClr val="E80070"/>
                 </a:solidFill>
@@ -18221,15 +18745,69 @@
                 <a:ea typeface="Arial" pitchFamily="34" charset="-122"/>
                 <a:cs typeface="Arial" pitchFamily="34" charset="-120"/>
               </a:rPr>
-              <a:t>A IA é a terceira pergunta, nunca a primeira.</a:t>
-            </a:r>
-            <a:endParaRPr lang="en-US" sz="1200" dirty="0"/>
-          </a:p>
-        </p:txBody>
-      </p:sp>
-      <p:sp>
-        <p:nvSpPr>
-          <p:cNvPr id="42" name="Text 40"/>
+              <a:t>A IA é a </a:t>
+            </a:r>
+            <a:pPr indent="0" marL="0">
+              <a:lnSpc>
+                <a:spcPts val="1550"/>
+              </a:lnSpc>
+              <a:buNone/>
+            </a:pPr>
+            <a:r>
+              <a:rPr lang="en-US" sz="1050" b="1" dirty="0">
+                <a:solidFill>
+                  <a:srgbClr val="E80070"/>
+                </a:solidFill>
+                <a:latin typeface="Arial" pitchFamily="34" charset="0"/>
+                <a:ea typeface="Arial" pitchFamily="34" charset="-122"/>
+                <a:cs typeface="Arial" pitchFamily="34" charset="-120"/>
+              </a:rPr>
+              <a:t>terceira</a:t>
+            </a:r>
+            <a:pPr indent="0" marL="0">
+              <a:lnSpc>
+                <a:spcPts val="1550"/>
+              </a:lnSpc>
+              <a:buNone/>
+            </a:pPr>
+            <a:r>
+              <a:rPr lang="en-US" sz="1050" dirty="0">
+                <a:solidFill>
+                  <a:srgbClr val="E80070"/>
+                </a:solidFill>
+                <a:latin typeface="Arial" pitchFamily="34" charset="0"/>
+                <a:ea typeface="Arial" pitchFamily="34" charset="-122"/>
+                <a:cs typeface="Arial" pitchFamily="34" charset="-120"/>
+              </a:rPr>
+              <a:t> pergunta,</a:t>
+            </a:r>
+            <a:endParaRPr lang="en-US" sz="1050" dirty="0"/>
+          </a:p>
+          <a:p>
+            <a:pPr indent="0" marL="0">
+              <a:lnSpc>
+                <a:spcPts val="1550"/>
+              </a:lnSpc>
+              <a:buNone/>
+            </a:pPr>
+            <a:r>
+              <a:rPr lang="en-US" sz="1050" dirty="0">
+                <a:solidFill>
+                  <a:srgbClr val="E80070"/>
+                </a:solidFill>
+                <a:latin typeface="Arial" pitchFamily="34" charset="0"/>
+                <a:ea typeface="Arial" pitchFamily="34" charset="-122"/>
+                <a:cs typeface="Arial" pitchFamily="34" charset="-120"/>
+              </a:rPr>
+              <a:t>nunca a primeira.</a:t>
+            </a:r>
+            <a:endParaRPr lang="en-US" sz="1050" dirty="0"/>
+          </a:p>
+        </p:txBody>
+      </p:sp>
+      <p:sp>
+        <p:nvSpPr>
+          <p:cNvPr id="52" name="Text 50"/>
           <p:cNvSpPr/>
           <p:nvPr/>
         </p:nvSpPr>
@@ -18268,7 +18846,7 @@
       </p:sp>
       <p:sp>
         <p:nvSpPr>
-          <p:cNvPr id="43" name="Text 41"/>
+          <p:cNvPr id="53" name="Text 51"/>
           <p:cNvSpPr/>
           <p:nvPr/>
         </p:nvSpPr>

--- a/talks/serasa-ia-automacao/deck.pptx
+++ b/talks/serasa-ia-automacao/deck.pptx
@@ -1043,7 +1043,8 @@
           <a:p>
             <a:r>
               <a:rPr lang="en-US" dirty="0"/>
-              <a:t>Credencial em 30 segundos, não currículo. A frase do painel escuro é a tese da palestra inteira: script / IA / pessoa. Ela volta no slide 8. ~1 min.</a:t>
+              <a:t>Credencial em 30 segundos, não currículo. A frase do painel escuro é a tese da palestra inteira: script / IA / pessoa. Ela volta no slide 8. ~1 min.
+PENDENTE: salvar a foto em assets/bruno.jpg e rodar node make_pptx.js de novo.</a:t>
             </a:r>
             <a:endParaRPr lang="en-US" dirty="0"/>
           </a:p>
@@ -9483,8 +9484,79 @@
         </p:nvSpPr>
         <p:spPr>
           <a:xfrm>
-            <a:off x="658368" y="1371600"/>
-            <a:ext cx="5943600" cy="777240"/>
+            <a:off x="658368" y="1600200"/>
+            <a:ext cx="2651760" cy="2651760"/>
+          </a:xfrm>
+          <a:prstGeom prst="roundRect">
+            <a:avLst>
+              <a:gd name="adj" fmla="val 4138"/>
+            </a:avLst>
+          </a:prstGeom>
+          <a:solidFill>
+            <a:srgbClr val="FEF6FA"/>
+          </a:solidFill>
+          <a:ln w="15875">
+            <a:solidFill>
+              <a:srgbClr val="E80070"/>
+            </a:solidFill>
+            <a:prstDash val="dash"/>
+          </a:ln>
+        </p:spPr>
+        <p:txBody>
+          <a:bodyPr wrap="square" lIns="0" tIns="0" rIns="0" bIns="0" rtlCol="0" anchor="ctr"/>
+          <a:lstStyle/>
+          <a:p>
+            <a:pPr algn="ctr" indent="0" marL="0">
+              <a:lnSpc>
+                <a:spcPts val="1400"/>
+              </a:lnSpc>
+              <a:buNone/>
+            </a:pPr>
+            <a:r>
+              <a:rPr lang="en-US" sz="950" i="1" dirty="0">
+                <a:solidFill>
+                  <a:srgbClr val="A08BAA"/>
+                </a:solidFill>
+                <a:latin typeface="Courier New" pitchFamily="34" charset="0"/>
+                <a:ea typeface="Courier New" pitchFamily="34" charset="-122"/>
+                <a:cs typeface="Courier New" pitchFamily="34" charset="-120"/>
+              </a:rPr>
+              <a:t>foto: salve em</a:t>
+            </a:r>
+            <a:endParaRPr lang="en-US" sz="950" dirty="0"/>
+          </a:p>
+          <a:p>
+            <a:pPr algn="ctr" indent="0" marL="0">
+              <a:lnSpc>
+                <a:spcPts val="1400"/>
+              </a:lnSpc>
+              <a:buNone/>
+            </a:pPr>
+            <a:r>
+              <a:rPr lang="en-US" sz="950" i="1" dirty="0">
+                <a:solidFill>
+                  <a:srgbClr val="A08BAA"/>
+                </a:solidFill>
+                <a:latin typeface="Courier New" pitchFamily="34" charset="0"/>
+                <a:ea typeface="Courier New" pitchFamily="34" charset="-122"/>
+                <a:cs typeface="Courier New" pitchFamily="34" charset="-120"/>
+              </a:rPr>
+              <a:t>assets/bruno.jpg</a:t>
+            </a:r>
+            <a:endParaRPr lang="en-US" sz="950" dirty="0"/>
+          </a:p>
+        </p:txBody>
+      </p:sp>
+      <p:sp>
+        <p:nvSpPr>
+          <p:cNvPr id="5" name="Text 3"/>
+          <p:cNvSpPr/>
+          <p:nvPr/>
+        </p:nvSpPr>
+        <p:spPr>
+          <a:xfrm>
+            <a:off x="3813048" y="1536192"/>
+            <a:ext cx="5029200" cy="777240"/>
           </a:xfrm>
           <a:prstGeom prst="rect">
             <a:avLst/>
@@ -9516,14 +9588,14 @@
       </p:sp>
       <p:sp>
         <p:nvSpPr>
-          <p:cNvPr id="5" name="Text 3"/>
-          <p:cNvSpPr/>
-          <p:nvPr/>
-        </p:nvSpPr>
-        <p:spPr>
-          <a:xfrm>
-            <a:off x="658368" y="2194560"/>
-            <a:ext cx="5943600" cy="365760"/>
+          <p:cNvPr id="6" name="Text 4"/>
+          <p:cNvSpPr/>
+          <p:nvPr/>
+        </p:nvSpPr>
+        <p:spPr>
+          <a:xfrm>
+            <a:off x="3813048" y="2286000"/>
+            <a:ext cx="5486400" cy="365760"/>
           </a:xfrm>
           <a:prstGeom prst="rect">
             <a:avLst/>
@@ -9569,13 +9641,13 @@
       </p:sp>
       <p:sp>
         <p:nvSpPr>
-          <p:cNvPr id="6" name="Text 4"/>
-          <p:cNvSpPr/>
-          <p:nvPr/>
-        </p:nvSpPr>
-        <p:spPr>
-          <a:xfrm>
-            <a:off x="658368" y="2834640"/>
+          <p:cNvPr id="7" name="Text 5"/>
+          <p:cNvSpPr/>
+          <p:nvPr/>
+        </p:nvSpPr>
+        <p:spPr>
+          <a:xfrm>
+            <a:off x="3813048" y="2871216"/>
             <a:ext cx="1691640" cy="329184"/>
           </a:xfrm>
           <a:prstGeom prst="roundRect">
@@ -9612,13 +9684,13 @@
       </p:sp>
       <p:sp>
         <p:nvSpPr>
-          <p:cNvPr id="7" name="Text 5"/>
-          <p:cNvSpPr/>
-          <p:nvPr/>
-        </p:nvSpPr>
-        <p:spPr>
-          <a:xfrm>
-            <a:off x="2478024" y="2834640"/>
+          <p:cNvPr id="8" name="Text 6"/>
+          <p:cNvSpPr/>
+          <p:nvPr/>
+        </p:nvSpPr>
+        <p:spPr>
+          <a:xfrm>
+            <a:off x="5632704" y="2871216"/>
             <a:ext cx="868680" cy="329184"/>
           </a:xfrm>
           <a:prstGeom prst="roundRect">
@@ -9655,13 +9727,13 @@
       </p:sp>
       <p:sp>
         <p:nvSpPr>
-          <p:cNvPr id="8" name="Text 6"/>
-          <p:cNvSpPr/>
-          <p:nvPr/>
-        </p:nvSpPr>
-        <p:spPr>
-          <a:xfrm>
-            <a:off x="3474720" y="2834640"/>
+          <p:cNvPr id="9" name="Text 7"/>
+          <p:cNvSpPr/>
+          <p:nvPr/>
+        </p:nvSpPr>
+        <p:spPr>
+          <a:xfrm>
+            <a:off x="6629400" y="2871216"/>
             <a:ext cx="1005840" cy="329184"/>
           </a:xfrm>
           <a:prstGeom prst="roundRect">
@@ -9698,13 +9770,13 @@
       </p:sp>
       <p:sp>
         <p:nvSpPr>
-          <p:cNvPr id="9" name="Text 7"/>
-          <p:cNvSpPr/>
-          <p:nvPr/>
-        </p:nvSpPr>
-        <p:spPr>
-          <a:xfrm>
-            <a:off x="4608576" y="2834640"/>
+          <p:cNvPr id="10" name="Text 8"/>
+          <p:cNvSpPr/>
+          <p:nvPr/>
+        </p:nvSpPr>
+        <p:spPr>
+          <a:xfrm>
+            <a:off x="7763256" y="2871216"/>
             <a:ext cx="1051560" cy="329184"/>
           </a:xfrm>
           <a:prstGeom prst="roundRect">
@@ -9741,14 +9813,14 @@
       </p:sp>
       <p:sp>
         <p:nvSpPr>
-          <p:cNvPr id="10" name="Text 8"/>
-          <p:cNvSpPr/>
-          <p:nvPr/>
-        </p:nvSpPr>
-        <p:spPr>
-          <a:xfrm>
-            <a:off x="658368" y="3346704"/>
-            <a:ext cx="5943600" cy="274320"/>
+          <p:cNvPr id="11" name="Text 9"/>
+          <p:cNvSpPr/>
+          <p:nvPr/>
+        </p:nvSpPr>
+        <p:spPr>
+          <a:xfrm>
+            <a:off x="3813048" y="3401568"/>
+            <a:ext cx="5486400" cy="274320"/>
           </a:xfrm>
           <a:prstGeom prst="rect">
             <a:avLst/>
@@ -9780,18 +9852,18 @@
       </p:sp>
       <p:sp>
         <p:nvSpPr>
-          <p:cNvPr id="11" name="Shape 9"/>
-          <p:cNvSpPr/>
-          <p:nvPr/>
-        </p:nvSpPr>
-        <p:spPr>
-          <a:xfrm>
-            <a:off x="7040880" y="1325880"/>
-            <a:ext cx="4480560" cy="2377440"/>
+          <p:cNvPr id="12" name="Shape 10"/>
+          <p:cNvSpPr/>
+          <p:nvPr/>
+        </p:nvSpPr>
+        <p:spPr>
+          <a:xfrm>
+            <a:off x="3813048" y="3950208"/>
+            <a:ext cx="7720279" cy="1417320"/>
           </a:xfrm>
           <a:prstGeom prst="roundRect">
             <a:avLst>
-              <a:gd name="adj" fmla="val 5000"/>
+              <a:gd name="adj" fmla="val 8387"/>
             </a:avLst>
           </a:prstGeom>
           <a:solidFill>
@@ -9807,13 +9879,13 @@
       </p:sp>
       <p:sp>
         <p:nvSpPr>
-          <p:cNvPr id="12" name="Text 10"/>
-          <p:cNvSpPr/>
-          <p:nvPr/>
-        </p:nvSpPr>
-        <p:spPr>
-          <a:xfrm>
-            <a:off x="7296912" y="1536192"/>
+          <p:cNvPr id="13" name="Text 11"/>
+          <p:cNvSpPr/>
+          <p:nvPr/>
+        </p:nvSpPr>
+        <p:spPr>
+          <a:xfrm>
+            <a:off x="4087368" y="4114800"/>
             <a:ext cx="3931920" cy="219456"/>
           </a:xfrm>
           <a:prstGeom prst="rect">
@@ -9846,14 +9918,14 @@
       </p:sp>
       <p:sp>
         <p:nvSpPr>
-          <p:cNvPr id="13" name="Text 11"/>
-          <p:cNvSpPr/>
-          <p:nvPr/>
-        </p:nvSpPr>
-        <p:spPr>
-          <a:xfrm>
-            <a:off x="7296912" y="1810512"/>
-            <a:ext cx="3968496" cy="1737360"/>
+          <p:cNvPr id="14" name="Text 12"/>
+          <p:cNvSpPr/>
+          <p:nvPr/>
+        </p:nvSpPr>
+        <p:spPr>
+          <a:xfrm>
+            <a:off x="4087368" y="4370832"/>
+            <a:ext cx="7171639" cy="914400"/>
           </a:xfrm>
           <a:prstGeom prst="rect">
             <a:avLst/>
@@ -9867,12 +9939,12 @@
           <a:p>
             <a:pPr indent="0" marL="0">
               <a:lnSpc>
-                <a:spcPts val="1850"/>
-              </a:lnSpc>
-              <a:buNone/>
-            </a:pPr>
-            <a:r>
-              <a:rPr lang="en-US" sz="1300" dirty="0">
+                <a:spcPts val="1900"/>
+              </a:lnSpc>
+              <a:buNone/>
+            </a:pPr>
+            <a:r>
+              <a:rPr lang="en-US" sz="1250" dirty="0">
                 <a:solidFill>
                   <a:srgbClr val="EDE4F3"/>
                 </a:solidFill>
@@ -9884,12 +9956,12 @@
             </a:r>
             <a:pPr indent="0" marL="0">
               <a:lnSpc>
-                <a:spcPts val="1850"/>
-              </a:lnSpc>
-              <a:buNone/>
-            </a:pPr>
-            <a:r>
-              <a:rPr lang="en-US" sz="1300" b="1" dirty="0">
+                <a:spcPts val="1900"/>
+              </a:lnSpc>
+              <a:buNone/>
+            </a:pPr>
+            <a:r>
+              <a:rPr lang="en-US" sz="1250" b="1" dirty="0">
                 <a:solidFill>
                   <a:srgbClr val="FFFFFF"/>
                 </a:solidFill>
@@ -9901,12 +9973,12 @@
             </a:r>
             <a:pPr indent="0" marL="0">
               <a:lnSpc>
-                <a:spcPts val="1850"/>
-              </a:lnSpc>
-              <a:buNone/>
-            </a:pPr>
-            <a:r>
-              <a:rPr lang="en-US" sz="1300" dirty="0">
+                <a:spcPts val="1900"/>
+              </a:lnSpc>
+              <a:buNone/>
+            </a:pPr>
+            <a:r>
+              <a:rPr lang="en-US" sz="1250" dirty="0">
                 <a:solidFill>
                   <a:srgbClr val="EDE4F3"/>
                 </a:solidFill>
@@ -9916,13 +9988,13 @@
               </a:rPr>
               <a:t>.</a:t>
             </a:r>
-            <a:endParaRPr lang="en-US" sz="1300" dirty="0"/>
-          </a:p>
-        </p:txBody>
-      </p:sp>
-      <p:sp>
-        <p:nvSpPr>
-          <p:cNvPr id="14" name="Text 12"/>
+            <a:endParaRPr lang="en-US" sz="1250" dirty="0"/>
+          </a:p>
+        </p:txBody>
+      </p:sp>
+      <p:sp>
+        <p:nvSpPr>
+          <p:cNvPr id="15" name="Text 13"/>
           <p:cNvSpPr/>
           <p:nvPr/>
         </p:nvSpPr>
@@ -9961,7 +10033,7 @@
       </p:sp>
       <p:sp>
         <p:nvSpPr>
-          <p:cNvPr id="15" name="Text 13"/>
+          <p:cNvPr id="16" name="Text 14"/>
           <p:cNvSpPr/>
           <p:nvPr/>
         </p:nvSpPr>

--- a/talks/serasa-ia-automacao/deck.pptx
+++ b/talks/serasa-ia-automacao/deck.pptx
@@ -1132,7 +1132,7 @@
           <a:p>
             <a:r>
               <a:rPr lang="en-US" dirty="0"/>
-              <a:t>Não é 'vocês perguntam errado'. É que a primeira pergunta pede um julgamento e a segunda pede uma memória — e memória sai mais fiel. Leia as duas respostas em voz alta. ~1,5 min.</a:t>
+              <a:t>As duas cartas têm a mesma anatomia de propósito: a plateia compara direto o desfecho, 'uma solução' contra 'o processo'. Não é que a pergunta 1 seja proibida — ela pede um julgamento, e a 2 pede uma memória. ~1,5 min.</a:t>
             </a:r>
             <a:endParaRPr lang="en-US" dirty="0"/>
           </a:p>
@@ -10150,7 +10150,7 @@
         <p:spPr>
           <a:xfrm>
             <a:off x="658368" y="1234440"/>
-            <a:ext cx="10424160" cy="1005840"/>
+            <a:ext cx="10424160" cy="548640"/>
           </a:xfrm>
           <a:prstGeom prst="rect">
             <a:avLst/>
@@ -10163,13 +10163,10 @@
           <a:lstStyle/>
           <a:p>
             <a:pPr indent="0" marL="0">
-              <a:lnSpc>
-                <a:spcPts val="3000"/>
-              </a:lnSpc>
-              <a:buNone/>
-            </a:pPr>
-            <a:r>
-              <a:rPr lang="en-US" sz="2800" b="1" spc="-62" kern="0" dirty="0">
+              <a:buNone/>
+            </a:pPr>
+            <a:r>
+              <a:rPr lang="en-US" sz="2900" b="1" spc="-64" kern="0" dirty="0">
                 <a:solidFill>
                   <a:srgbClr val="FFFFFF"/>
                 </a:solidFill>
@@ -10177,16 +10174,13 @@
                 <a:ea typeface="Arial" pitchFamily="34" charset="-122"/>
                 <a:cs typeface="Arial" pitchFamily="34" charset="-120"/>
               </a:rPr>
-              <a:t>A mesma conversa, duas perguntas — </a:t>
-            </a:r>
-            <a:pPr indent="0" marL="0">
-              <a:lnSpc>
-                <a:spcPts val="3000"/>
-              </a:lnSpc>
-              <a:buNone/>
-            </a:pPr>
-            <a:r>
-              <a:rPr lang="en-US" sz="2800" b="1" spc="-62" kern="0" dirty="0">
+              <a:t>Duas perguntas para o </a:t>
+            </a:r>
+            <a:pPr indent="0" marL="0">
+              <a:buNone/>
+            </a:pPr>
+            <a:r>
+              <a:rPr lang="en-US" sz="2900" b="1" spc="-64" kern="0" dirty="0">
                 <a:solidFill>
                   <a:srgbClr val="FF8FC0"/>
                 </a:solidFill>
@@ -10194,22 +10188,49 @@
                 <a:ea typeface="Arial" pitchFamily="34" charset="-122"/>
                 <a:cs typeface="Arial" pitchFamily="34" charset="-120"/>
               </a:rPr>
-              <a:t>e respostas muito diferentes</a:t>
-            </a:r>
-            <a:endParaRPr lang="en-US" sz="2800" dirty="0"/>
-          </a:p>
-        </p:txBody>
-      </p:sp>
-      <p:sp>
-        <p:nvSpPr>
-          <p:cNvPr id="4" name="Text 2"/>
-          <p:cNvSpPr/>
-          <p:nvPr/>
-        </p:nvSpPr>
-        <p:spPr>
-          <a:xfrm>
-            <a:off x="658368" y="2487168"/>
-            <a:ext cx="4937760" cy="219456"/>
+              <a:t>mesmo processo</a:t>
+            </a:r>
+            <a:endParaRPr lang="en-US" sz="2900" dirty="0"/>
+          </a:p>
+        </p:txBody>
+      </p:sp>
+      <p:sp>
+        <p:nvSpPr>
+          <p:cNvPr id="4" name="Shape 2"/>
+          <p:cNvSpPr/>
+          <p:nvPr/>
+        </p:nvSpPr>
+        <p:spPr>
+          <a:xfrm>
+            <a:off x="658368" y="1965960"/>
+            <a:ext cx="5254600" cy="3108960"/>
+          </a:xfrm>
+          <a:prstGeom prst="roundRect">
+            <a:avLst>
+              <a:gd name="adj" fmla="val 3235"/>
+            </a:avLst>
+          </a:prstGeom>
+          <a:solidFill>
+            <a:srgbClr val="5C2470"/>
+          </a:solidFill>
+          <a:ln w="12700">
+            <a:solidFill>
+              <a:srgbClr val="8E6FA6"/>
+            </a:solidFill>
+            <a:prstDash val="solid"/>
+          </a:ln>
+        </p:spPr>
+      </p:sp>
+      <p:sp>
+        <p:nvSpPr>
+          <p:cNvPr id="5" name="Text 3"/>
+          <p:cNvSpPr/>
+          <p:nvPr/>
+        </p:nvSpPr>
+        <p:spPr>
+          <a:xfrm>
+            <a:off x="950976" y="2203704"/>
+            <a:ext cx="4669384" cy="201168"/>
           </a:xfrm>
           <a:prstGeom prst="rect">
             <a:avLst/>
@@ -10225,7 +10246,7 @@
               <a:buNone/>
             </a:pPr>
             <a:r>
-              <a:rPr lang="en-US" sz="850" spc="120" kern="0" dirty="0">
+              <a:rPr lang="en-US" sz="900" b="1" spc="130" kern="0" dirty="0">
                 <a:solidFill>
                   <a:srgbClr val="B79ACB"/>
                 </a:solidFill>
@@ -10233,22 +10254,22 @@
                 <a:ea typeface="Courier New" pitchFamily="34" charset="-122"/>
                 <a:cs typeface="Courier New" pitchFamily="34" charset="-120"/>
               </a:rPr>
-              <a:t>SE A PERGUNTA É</a:t>
-            </a:r>
-            <a:endParaRPr lang="en-US" sz="850" dirty="0"/>
-          </a:p>
-        </p:txBody>
-      </p:sp>
-      <p:sp>
-        <p:nvSpPr>
-          <p:cNvPr id="5" name="Text 3"/>
-          <p:cNvSpPr/>
-          <p:nvPr/>
-        </p:nvSpPr>
-        <p:spPr>
-          <a:xfrm>
-            <a:off x="658368" y="2743200"/>
-            <a:ext cx="4937760" cy="713232"/>
+              <a:t>PERGUNTA 1</a:t>
+            </a:r>
+            <a:endParaRPr lang="en-US" sz="900" dirty="0"/>
+          </a:p>
+        </p:txBody>
+      </p:sp>
+      <p:sp>
+        <p:nvSpPr>
+          <p:cNvPr id="6" name="Text 4"/>
+          <p:cNvSpPr/>
+          <p:nvPr/>
+        </p:nvSpPr>
+        <p:spPr>
+          <a:xfrm>
+            <a:off x="950976" y="2496312"/>
+            <a:ext cx="4669384" cy="804672"/>
           </a:xfrm>
           <a:prstGeom prst="rect">
             <a:avLst/>
@@ -10262,12 +10283,12 @@
           <a:p>
             <a:pPr indent="0" marL="0">
               <a:lnSpc>
-                <a:spcPts val="2500"/>
-              </a:lnSpc>
-              <a:buNone/>
-            </a:pPr>
-            <a:r>
-              <a:rPr lang="en-US" sz="1900" spc="-19" kern="0" dirty="0">
+                <a:spcPts val="2400"/>
+              </a:lnSpc>
+              <a:buNone/>
+            </a:pPr>
+            <a:r>
+              <a:rPr lang="en-US" sz="1800" spc="-18" kern="0" dirty="0">
                 <a:solidFill>
                   <a:srgbClr val="FFFFFF"/>
                 </a:solidFill>
@@ -10277,26 +10298,26 @@
               </a:rPr>
               <a:t>“O que vocês querem automatizar?”</a:t>
             </a:r>
-            <a:endParaRPr lang="en-US" sz="1900" dirty="0"/>
-          </a:p>
-        </p:txBody>
-      </p:sp>
-      <p:sp>
-        <p:nvSpPr>
-          <p:cNvPr id="6" name="Shape 4"/>
-          <p:cNvSpPr/>
-          <p:nvPr/>
-        </p:nvSpPr>
-        <p:spPr>
-          <a:xfrm>
-            <a:off x="658368" y="3584448"/>
-            <a:ext cx="32004" cy="475488"/>
+            <a:endParaRPr lang="en-US" sz="1800" dirty="0"/>
+          </a:p>
+        </p:txBody>
+      </p:sp>
+      <p:sp>
+        <p:nvSpPr>
+          <p:cNvPr id="7" name="Shape 5"/>
+          <p:cNvSpPr/>
+          <p:nvPr/>
+        </p:nvSpPr>
+        <p:spPr>
+          <a:xfrm>
+            <a:off x="950976" y="3410712"/>
+            <a:ext cx="4669384" cy="10973"/>
           </a:xfrm>
           <a:prstGeom prst="rect">
             <a:avLst/>
           </a:prstGeom>
           <a:solidFill>
-            <a:srgbClr val="8E7FA0"/>
+            <a:srgbClr val="8E6FA6"/>
           </a:solidFill>
           <a:ln w="12700">
             <a:solidFill>
@@ -10308,132 +10329,14 @@
       </p:sp>
       <p:sp>
         <p:nvSpPr>
-          <p:cNvPr id="7" name="Text 5"/>
-          <p:cNvSpPr/>
-          <p:nvPr/>
-        </p:nvSpPr>
-        <p:spPr>
-          <a:xfrm>
-            <a:off x="841248" y="3566160"/>
-            <a:ext cx="4754880" cy="512064"/>
-          </a:xfrm>
-          <a:prstGeom prst="rect">
-            <a:avLst/>
-          </a:prstGeom>
-          <a:noFill/>
-          <a:ln/>
-        </p:spPr>
-        <p:txBody>
-          <a:bodyPr wrap="square" lIns="0" tIns="0" rIns="0" bIns="0" rtlCol="0" anchor="t"/>
-          <a:lstStyle/>
-          <a:p>
-            <a:pPr indent="0" marL="0">
-              <a:lnSpc>
-                <a:spcPts val="1850"/>
-              </a:lnSpc>
-              <a:buNone/>
-            </a:pPr>
-            <a:r>
-              <a:rPr lang="en-US" sz="1300" i="1" dirty="0">
-                <a:solidFill>
-                  <a:srgbClr val="D9C8E4"/>
-                </a:solidFill>
-                <a:latin typeface="Arial" pitchFamily="34" charset="0"/>
-                <a:ea typeface="Arial" pitchFamily="34" charset="-122"/>
-                <a:cs typeface="Arial" pitchFamily="34" charset="-120"/>
-              </a:rPr>
-              <a:t>“Queria um bot que respondesse os chamados.”</a:t>
-            </a:r>
-            <a:endParaRPr lang="en-US" sz="1300" dirty="0"/>
-          </a:p>
-        </p:txBody>
-      </p:sp>
-      <p:sp>
-        <p:nvSpPr>
           <p:cNvPr id="8" name="Text 6"/>
           <p:cNvSpPr/>
           <p:nvPr/>
         </p:nvSpPr>
         <p:spPr>
           <a:xfrm>
-            <a:off x="658368" y="4206240"/>
-            <a:ext cx="4937760" cy="512064"/>
-          </a:xfrm>
-          <a:prstGeom prst="rect">
-            <a:avLst/>
-          </a:prstGeom>
-          <a:noFill/>
-          <a:ln/>
-        </p:spPr>
-        <p:txBody>
-          <a:bodyPr wrap="square" lIns="0" tIns="0" rIns="0" bIns="0" rtlCol="0" anchor="t"/>
-          <a:lstStyle/>
-          <a:p>
-            <a:pPr indent="0" marL="0">
-              <a:lnSpc>
-                <a:spcPts val="1900"/>
-              </a:lnSpc>
-              <a:buNone/>
-            </a:pPr>
-            <a:r>
-              <a:rPr lang="en-US" sz="1250" dirty="0">
-                <a:solidFill>
-                  <a:srgbClr val="EDE4F3"/>
-                </a:solidFill>
-                <a:latin typeface="Arial" pitchFamily="34" charset="0"/>
-                <a:ea typeface="Arial" pitchFamily="34" charset="-122"/>
-                <a:cs typeface="Arial" pitchFamily="34" charset="-120"/>
-              </a:rPr>
-              <a:t>Vem </a:t>
-            </a:r>
-            <a:pPr indent="0" marL="0">
-              <a:lnSpc>
-                <a:spcPts val="1900"/>
-              </a:lnSpc>
-              <a:buNone/>
-            </a:pPr>
-            <a:r>
-              <a:rPr lang="en-US" sz="1250" b="1" dirty="0">
-                <a:solidFill>
-                  <a:srgbClr val="FFFFFF"/>
-                </a:solidFill>
-                <a:latin typeface="Arial" pitchFamily="34" charset="0"/>
-                <a:ea typeface="Arial" pitchFamily="34" charset="-122"/>
-                <a:cs typeface="Arial" pitchFamily="34" charset="-120"/>
-              </a:rPr>
-              <a:t>uma solução pronta</a:t>
-            </a:r>
-            <a:pPr indent="0" marL="0">
-              <a:lnSpc>
-                <a:spcPts val="1900"/>
-              </a:lnSpc>
-              <a:buNone/>
-            </a:pPr>
-            <a:r>
-              <a:rPr lang="en-US" sz="1250" dirty="0">
-                <a:solidFill>
-                  <a:srgbClr val="EDE4F3"/>
-                </a:solidFill>
-                <a:latin typeface="Arial" pitchFamily="34" charset="0"/>
-                <a:ea typeface="Arial" pitchFamily="34" charset="-122"/>
-                <a:cs typeface="Arial" pitchFamily="34" charset="-120"/>
-              </a:rPr>
-              <a:t> — sem o processo que ela deveria resolver.</a:t>
-            </a:r>
-            <a:endParaRPr lang="en-US" sz="1250" dirty="0"/>
-          </a:p>
-        </p:txBody>
-      </p:sp>
-      <p:sp>
-        <p:nvSpPr>
-          <p:cNvPr id="9" name="Text 7"/>
-          <p:cNvSpPr/>
-          <p:nvPr/>
-        </p:nvSpPr>
-        <p:spPr>
-          <a:xfrm>
-            <a:off x="6400800" y="2487168"/>
-            <a:ext cx="4937760" cy="219456"/>
+            <a:off x="950976" y="3557016"/>
+            <a:ext cx="4669384" cy="182880"/>
           </a:xfrm>
           <a:prstGeom prst="rect">
             <a:avLst/>
@@ -10449,17 +10352,59 @@
               <a:buNone/>
             </a:pPr>
             <a:r>
-              <a:rPr lang="en-US" sz="850" b="1" spc="120" kern="0" dirty="0">
-                <a:solidFill>
-                  <a:srgbClr val="FF8FC0"/>
+              <a:rPr lang="en-US" sz="800" spc="110" kern="0" dirty="0">
+                <a:solidFill>
+                  <a:srgbClr val="9B84AE"/>
                 </a:solidFill>
                 <a:latin typeface="Courier New" pitchFamily="34" charset="0"/>
                 <a:ea typeface="Courier New" pitchFamily="34" charset="-122"/>
                 <a:cs typeface="Courier New" pitchFamily="34" charset="-120"/>
               </a:rPr>
-              <a:t>SE A PERGUNTA É</a:t>
-            </a:r>
-            <a:endParaRPr lang="en-US" sz="850" dirty="0"/>
+              <a:t>A RESPOSTA QUE VEM</a:t>
+            </a:r>
+            <a:endParaRPr lang="en-US" sz="800" dirty="0"/>
+          </a:p>
+        </p:txBody>
+      </p:sp>
+      <p:sp>
+        <p:nvSpPr>
+          <p:cNvPr id="9" name="Text 7"/>
+          <p:cNvSpPr/>
+          <p:nvPr/>
+        </p:nvSpPr>
+        <p:spPr>
+          <a:xfrm>
+            <a:off x="950976" y="3758184"/>
+            <a:ext cx="4669384" cy="548640"/>
+          </a:xfrm>
+          <a:prstGeom prst="rect">
+            <a:avLst/>
+          </a:prstGeom>
+          <a:noFill/>
+          <a:ln/>
+        </p:spPr>
+        <p:txBody>
+          <a:bodyPr wrap="square" lIns="0" tIns="0" rIns="0" bIns="0" rtlCol="0" anchor="t"/>
+          <a:lstStyle/>
+          <a:p>
+            <a:pPr indent="0" marL="0">
+              <a:lnSpc>
+                <a:spcPts val="1700"/>
+              </a:lnSpc>
+              <a:buNone/>
+            </a:pPr>
+            <a:r>
+              <a:rPr lang="en-US" sz="1150" i="1" dirty="0">
+                <a:solidFill>
+                  <a:srgbClr val="DCCCE7"/>
+                </a:solidFill>
+                <a:latin typeface="Arial" pitchFamily="34" charset="0"/>
+                <a:ea typeface="Arial" pitchFamily="34" charset="-122"/>
+                <a:cs typeface="Arial" pitchFamily="34" charset="-120"/>
+              </a:rPr>
+              <a:t>“Queria um bot que respondesse os chamados.”</a:t>
+            </a:r>
+            <a:endParaRPr lang="en-US" sz="1150" dirty="0"/>
           </a:p>
         </p:txBody>
       </p:sp>
@@ -10471,8 +10416,47 @@
         </p:nvSpPr>
         <p:spPr>
           <a:xfrm>
-            <a:off x="6400800" y="2743200"/>
-            <a:ext cx="4937760" cy="713232"/>
+            <a:off x="950976" y="4361688"/>
+            <a:ext cx="4669384" cy="182880"/>
+          </a:xfrm>
+          <a:prstGeom prst="rect">
+            <a:avLst/>
+          </a:prstGeom>
+          <a:noFill/>
+          <a:ln/>
+        </p:spPr>
+        <p:txBody>
+          <a:bodyPr wrap="square" lIns="0" tIns="0" rIns="0" bIns="0" rtlCol="0" anchor="ctr"/>
+          <a:lstStyle/>
+          <a:p>
+            <a:pPr indent="0" marL="0">
+              <a:buNone/>
+            </a:pPr>
+            <a:r>
+              <a:rPr lang="en-US" sz="800" spc="110" kern="0" dirty="0">
+                <a:solidFill>
+                  <a:srgbClr val="9B84AE"/>
+                </a:solidFill>
+                <a:latin typeface="Courier New" pitchFamily="34" charset="0"/>
+                <a:ea typeface="Courier New" pitchFamily="34" charset="-122"/>
+                <a:cs typeface="Courier New" pitchFamily="34" charset="-120"/>
+              </a:rPr>
+              <a:t>VOCÊ RECEBE</a:t>
+            </a:r>
+            <a:endParaRPr lang="en-US" sz="800" dirty="0"/>
+          </a:p>
+        </p:txBody>
+      </p:sp>
+      <p:sp>
+        <p:nvSpPr>
+          <p:cNvPr id="11" name="Text 9"/>
+          <p:cNvSpPr/>
+          <p:nvPr/>
+        </p:nvSpPr>
+        <p:spPr>
+          <a:xfrm>
+            <a:off x="950976" y="4562856"/>
+            <a:ext cx="4669384" cy="420624"/>
           </a:xfrm>
           <a:prstGeom prst="rect">
             <a:avLst/>
@@ -10485,13 +10469,118 @@
           <a:lstStyle/>
           <a:p>
             <a:pPr indent="0" marL="0">
-              <a:lnSpc>
-                <a:spcPts val="2500"/>
-              </a:lnSpc>
-              <a:buNone/>
-            </a:pPr>
-            <a:r>
-              <a:rPr lang="en-US" sz="1900" spc="-19" kern="0" dirty="0">
+              <a:buNone/>
+            </a:pPr>
+            <a:r>
+              <a:rPr lang="en-US" sz="2400" b="1" spc="-53" kern="0" dirty="0">
+                <a:solidFill>
+                  <a:srgbClr val="EDE4F3"/>
+                </a:solidFill>
+                <a:latin typeface="Arial" pitchFamily="34" charset="0"/>
+                <a:ea typeface="Arial" pitchFamily="34" charset="-122"/>
+                <a:cs typeface="Arial" pitchFamily="34" charset="-120"/>
+              </a:rPr>
+              <a:t>uma solução</a:t>
+            </a:r>
+            <a:endParaRPr lang="en-US" sz="2400" dirty="0"/>
+          </a:p>
+        </p:txBody>
+      </p:sp>
+      <p:sp>
+        <p:nvSpPr>
+          <p:cNvPr id="12" name="Shape 10"/>
+          <p:cNvSpPr/>
+          <p:nvPr/>
+        </p:nvSpPr>
+        <p:spPr>
+          <a:xfrm>
+            <a:off x="6278728" y="1965960"/>
+            <a:ext cx="5254600" cy="3108960"/>
+          </a:xfrm>
+          <a:prstGeom prst="roundRect">
+            <a:avLst>
+              <a:gd name="adj" fmla="val 3235"/>
+            </a:avLst>
+          </a:prstGeom>
+          <a:solidFill>
+            <a:srgbClr val="6A1350"/>
+          </a:solidFill>
+          <a:ln w="12700">
+            <a:solidFill>
+              <a:srgbClr val="FF8FC0"/>
+            </a:solidFill>
+            <a:prstDash val="solid"/>
+          </a:ln>
+        </p:spPr>
+      </p:sp>
+      <p:sp>
+        <p:nvSpPr>
+          <p:cNvPr id="13" name="Text 11"/>
+          <p:cNvSpPr/>
+          <p:nvPr/>
+        </p:nvSpPr>
+        <p:spPr>
+          <a:xfrm>
+            <a:off x="6571336" y="2203704"/>
+            <a:ext cx="4669384" cy="201168"/>
+          </a:xfrm>
+          <a:prstGeom prst="rect">
+            <a:avLst/>
+          </a:prstGeom>
+          <a:noFill/>
+          <a:ln/>
+        </p:spPr>
+        <p:txBody>
+          <a:bodyPr wrap="square" lIns="0" tIns="0" rIns="0" bIns="0" rtlCol="0" anchor="ctr"/>
+          <a:lstStyle/>
+          <a:p>
+            <a:pPr indent="0" marL="0">
+              <a:buNone/>
+            </a:pPr>
+            <a:r>
+              <a:rPr lang="en-US" sz="900" b="1" spc="130" kern="0" dirty="0">
+                <a:solidFill>
+                  <a:srgbClr val="FF8FC0"/>
+                </a:solidFill>
+                <a:latin typeface="Courier New" pitchFamily="34" charset="0"/>
+                <a:ea typeface="Courier New" pitchFamily="34" charset="-122"/>
+                <a:cs typeface="Courier New" pitchFamily="34" charset="-120"/>
+              </a:rPr>
+              <a:t>PERGUNTA 2</a:t>
+            </a:r>
+            <a:endParaRPr lang="en-US" sz="900" dirty="0"/>
+          </a:p>
+        </p:txBody>
+      </p:sp>
+      <p:sp>
+        <p:nvSpPr>
+          <p:cNvPr id="14" name="Text 12"/>
+          <p:cNvSpPr/>
+          <p:nvPr/>
+        </p:nvSpPr>
+        <p:spPr>
+          <a:xfrm>
+            <a:off x="6571336" y="2496312"/>
+            <a:ext cx="4669384" cy="804672"/>
+          </a:xfrm>
+          <a:prstGeom prst="rect">
+            <a:avLst/>
+          </a:prstGeom>
+          <a:noFill/>
+          <a:ln/>
+        </p:spPr>
+        <p:txBody>
+          <a:bodyPr wrap="square" lIns="0" tIns="0" rIns="0" bIns="0" rtlCol="0" anchor="t"/>
+          <a:lstStyle/>
+          <a:p>
+            <a:pPr indent="0" marL="0">
+              <a:lnSpc>
+                <a:spcPts val="2400"/>
+              </a:lnSpc>
+              <a:buNone/>
+            </a:pPr>
+            <a:r>
+              <a:rPr lang="en-US" sz="1800" spc="-18" kern="0" dirty="0">
                 <a:solidFill>
                   <a:srgbClr val="FFFFFF"/>
                 </a:solidFill>
@@ -10501,26 +10590,26 @@
               </a:rPr>
               <a:t>“Me conta o que você fez ontem, na ordem.”</a:t>
             </a:r>
-            <a:endParaRPr lang="en-US" sz="1900" dirty="0"/>
-          </a:p>
-        </p:txBody>
-      </p:sp>
-      <p:sp>
-        <p:nvSpPr>
-          <p:cNvPr id="11" name="Shape 9"/>
-          <p:cNvSpPr/>
-          <p:nvPr/>
-        </p:nvSpPr>
-        <p:spPr>
-          <a:xfrm>
-            <a:off x="6400800" y="3584448"/>
-            <a:ext cx="32004" cy="475488"/>
+            <a:endParaRPr lang="en-US" sz="1800" dirty="0"/>
+          </a:p>
+        </p:txBody>
+      </p:sp>
+      <p:sp>
+        <p:nvSpPr>
+          <p:cNvPr id="15" name="Shape 13"/>
+          <p:cNvSpPr/>
+          <p:nvPr/>
+        </p:nvSpPr>
+        <p:spPr>
+          <a:xfrm>
+            <a:off x="6571336" y="3410712"/>
+            <a:ext cx="4669384" cy="10973"/>
           </a:xfrm>
           <a:prstGeom prst="rect">
             <a:avLst/>
           </a:prstGeom>
           <a:solidFill>
-            <a:srgbClr val="E80070"/>
+            <a:srgbClr val="C26A8A"/>
           </a:solidFill>
           <a:ln w="12700">
             <a:solidFill>
@@ -10532,14 +10621,53 @@
       </p:sp>
       <p:sp>
         <p:nvSpPr>
-          <p:cNvPr id="12" name="Text 10"/>
-          <p:cNvSpPr/>
-          <p:nvPr/>
-        </p:nvSpPr>
-        <p:spPr>
-          <a:xfrm>
-            <a:off x="6583680" y="3566160"/>
-            <a:ext cx="4754880" cy="512064"/>
+          <p:cNvPr id="16" name="Text 14"/>
+          <p:cNvSpPr/>
+          <p:nvPr/>
+        </p:nvSpPr>
+        <p:spPr>
+          <a:xfrm>
+            <a:off x="6571336" y="3557016"/>
+            <a:ext cx="4669384" cy="182880"/>
+          </a:xfrm>
+          <a:prstGeom prst="rect">
+            <a:avLst/>
+          </a:prstGeom>
+          <a:noFill/>
+          <a:ln/>
+        </p:spPr>
+        <p:txBody>
+          <a:bodyPr wrap="square" lIns="0" tIns="0" rIns="0" bIns="0" rtlCol="0" anchor="ctr"/>
+          <a:lstStyle/>
+          <a:p>
+            <a:pPr indent="0" marL="0">
+              <a:buNone/>
+            </a:pPr>
+            <a:r>
+              <a:rPr lang="en-US" sz="800" spc="110" kern="0" dirty="0">
+                <a:solidFill>
+                  <a:srgbClr val="C98BAC"/>
+                </a:solidFill>
+                <a:latin typeface="Courier New" pitchFamily="34" charset="0"/>
+                <a:ea typeface="Courier New" pitchFamily="34" charset="-122"/>
+                <a:cs typeface="Courier New" pitchFamily="34" charset="-120"/>
+              </a:rPr>
+              <a:t>A RESPOSTA QUE VEM</a:t>
+            </a:r>
+            <a:endParaRPr lang="en-US" sz="800" dirty="0"/>
+          </a:p>
+        </p:txBody>
+      </p:sp>
+      <p:sp>
+        <p:nvSpPr>
+          <p:cNvPr id="17" name="Text 15"/>
+          <p:cNvSpPr/>
+          <p:nvPr/>
+        </p:nvSpPr>
+        <p:spPr>
+          <a:xfrm>
+            <a:off x="6571336" y="3758184"/>
+            <a:ext cx="4669384" cy="548640"/>
           </a:xfrm>
           <a:prstGeom prst="rect">
             <a:avLst/>
@@ -10553,14 +10681,14 @@
           <a:p>
             <a:pPr indent="0" marL="0">
               <a:lnSpc>
-                <a:spcPts val="1850"/>
-              </a:lnSpc>
-              <a:buNone/>
-            </a:pPr>
-            <a:r>
-              <a:rPr lang="en-US" sz="1300" i="1" dirty="0">
-                <a:solidFill>
-                  <a:srgbClr val="D9C8E4"/>
+                <a:spcPts val="1700"/>
+              </a:lnSpc>
+              <a:buNone/>
+            </a:pPr>
+            <a:r>
+              <a:rPr lang="en-US" sz="1150" i="1" dirty="0">
+                <a:solidFill>
+                  <a:srgbClr val="DCCCE7"/>
                 </a:solidFill>
                 <a:latin typeface="Arial" pitchFamily="34" charset="0"/>
                 <a:ea typeface="Arial" pitchFamily="34" charset="-122"/>
@@ -10568,192 +10696,167 @@
               </a:rPr>
               <a:t>“Chega um e-mail, aí eu jogo no sistema, copio nome e CPF…”</a:t>
             </a:r>
+            <a:endParaRPr lang="en-US" sz="1150" dirty="0"/>
+          </a:p>
+        </p:txBody>
+      </p:sp>
+      <p:sp>
+        <p:nvSpPr>
+          <p:cNvPr id="18" name="Text 16"/>
+          <p:cNvSpPr/>
+          <p:nvPr/>
+        </p:nvSpPr>
+        <p:spPr>
+          <a:xfrm>
+            <a:off x="6571336" y="4361688"/>
+            <a:ext cx="4669384" cy="182880"/>
+          </a:xfrm>
+          <a:prstGeom prst="rect">
+            <a:avLst/>
+          </a:prstGeom>
+          <a:noFill/>
+          <a:ln/>
+        </p:spPr>
+        <p:txBody>
+          <a:bodyPr wrap="square" lIns="0" tIns="0" rIns="0" bIns="0" rtlCol="0" anchor="ctr"/>
+          <a:lstStyle/>
+          <a:p>
+            <a:pPr indent="0" marL="0">
+              <a:buNone/>
+            </a:pPr>
+            <a:r>
+              <a:rPr lang="en-US" sz="800" spc="110" kern="0" dirty="0">
+                <a:solidFill>
+                  <a:srgbClr val="C98BAC"/>
+                </a:solidFill>
+                <a:latin typeface="Courier New" pitchFamily="34" charset="0"/>
+                <a:ea typeface="Courier New" pitchFamily="34" charset="-122"/>
+                <a:cs typeface="Courier New" pitchFamily="34" charset="-120"/>
+              </a:rPr>
+              <a:t>VOCÊ RECEBE</a:t>
+            </a:r>
+            <a:endParaRPr lang="en-US" sz="800" dirty="0"/>
+          </a:p>
+        </p:txBody>
+      </p:sp>
+      <p:sp>
+        <p:nvSpPr>
+          <p:cNvPr id="19" name="Text 17"/>
+          <p:cNvSpPr/>
+          <p:nvPr/>
+        </p:nvSpPr>
+        <p:spPr>
+          <a:xfrm>
+            <a:off x="6571336" y="4562856"/>
+            <a:ext cx="4669384" cy="420624"/>
+          </a:xfrm>
+          <a:prstGeom prst="rect">
+            <a:avLst/>
+          </a:prstGeom>
+          <a:noFill/>
+          <a:ln/>
+        </p:spPr>
+        <p:txBody>
+          <a:bodyPr wrap="square" lIns="0" tIns="0" rIns="0" bIns="0" rtlCol="0" anchor="t"/>
+          <a:lstStyle/>
+          <a:p>
+            <a:pPr indent="0" marL="0">
+              <a:buNone/>
+            </a:pPr>
+            <a:r>
+              <a:rPr lang="en-US" sz="2400" b="1" spc="-53" kern="0" dirty="0">
+                <a:solidFill>
+                  <a:srgbClr val="FF8FC0"/>
+                </a:solidFill>
+                <a:latin typeface="Arial" pitchFamily="34" charset="0"/>
+                <a:ea typeface="Arial" pitchFamily="34" charset="-122"/>
+                <a:cs typeface="Arial" pitchFamily="34" charset="-120"/>
+              </a:rPr>
+              <a:t>o processo</a:t>
+            </a:r>
+            <a:endParaRPr lang="en-US" sz="2400" dirty="0"/>
+          </a:p>
+        </p:txBody>
+      </p:sp>
+      <p:sp>
+        <p:nvSpPr>
+          <p:cNvPr id="20" name="Text 18"/>
+          <p:cNvSpPr/>
+          <p:nvPr/>
+        </p:nvSpPr>
+        <p:spPr>
+          <a:xfrm>
+            <a:off x="658368" y="5257800"/>
+            <a:ext cx="10874959" cy="548640"/>
+          </a:xfrm>
+          <a:prstGeom prst="rect">
+            <a:avLst/>
+          </a:prstGeom>
+          <a:noFill/>
+          <a:ln/>
+        </p:spPr>
+        <p:txBody>
+          <a:bodyPr wrap="square" lIns="0" tIns="0" rIns="0" bIns="0" rtlCol="0" anchor="t"/>
+          <a:lstStyle/>
+          <a:p>
+            <a:pPr indent="0" marL="0">
+              <a:lnSpc>
+                <a:spcPts val="1950"/>
+              </a:lnSpc>
+              <a:buNone/>
+            </a:pPr>
+            <a:r>
+              <a:rPr lang="en-US" sz="1300" dirty="0">
+                <a:solidFill>
+                  <a:srgbClr val="C9B6D4"/>
+                </a:solidFill>
+                <a:latin typeface="Arial" pitchFamily="34" charset="0"/>
+                <a:ea typeface="Arial" pitchFamily="34" charset="-122"/>
+                <a:cs typeface="Arial" pitchFamily="34" charset="-120"/>
+              </a:rPr>
+              <a:t>A segunda não é mais esperta — é mais </a:t>
+            </a:r>
+            <a:pPr indent="0" marL="0">
+              <a:lnSpc>
+                <a:spcPts val="1950"/>
+              </a:lnSpc>
+              <a:buNone/>
+            </a:pPr>
+            <a:r>
+              <a:rPr lang="en-US" sz="1300" b="1" dirty="0">
+                <a:solidFill>
+                  <a:srgbClr val="FFFFFF"/>
+                </a:solidFill>
+                <a:latin typeface="Arial" pitchFamily="34" charset="0"/>
+                <a:ea typeface="Arial" pitchFamily="34" charset="-122"/>
+                <a:cs typeface="Arial" pitchFamily="34" charset="-120"/>
+              </a:rPr>
+              <a:t>fácil de responder</a:t>
+            </a:r>
+            <a:pPr indent="0" marL="0">
+              <a:lnSpc>
+                <a:spcPts val="1950"/>
+              </a:lnSpc>
+              <a:buNone/>
+            </a:pPr>
+            <a:r>
+              <a:rPr lang="en-US" sz="1300" dirty="0">
+                <a:solidFill>
+                  <a:srgbClr val="C9B6D4"/>
+                </a:solidFill>
+                <a:latin typeface="Arial" pitchFamily="34" charset="0"/>
+                <a:ea typeface="Arial" pitchFamily="34" charset="-122"/>
+                <a:cs typeface="Arial" pitchFamily="34" charset="-120"/>
+              </a:rPr>
+              <a:t>. A primeira pede um julgamento sobre o próprio trabalho; a segunda pede só uma memória.</a:t>
+            </a:r>
             <a:endParaRPr lang="en-US" sz="1300" dirty="0"/>
           </a:p>
         </p:txBody>
       </p:sp>
       <p:sp>
         <p:nvSpPr>
-          <p:cNvPr id="13" name="Text 11"/>
-          <p:cNvSpPr/>
-          <p:nvPr/>
-        </p:nvSpPr>
-        <p:spPr>
-          <a:xfrm>
-            <a:off x="6400800" y="4206240"/>
-            <a:ext cx="4937760" cy="512064"/>
-          </a:xfrm>
-          <a:prstGeom prst="rect">
-            <a:avLst/>
-          </a:prstGeom>
-          <a:noFill/>
-          <a:ln/>
-        </p:spPr>
-        <p:txBody>
-          <a:bodyPr wrap="square" lIns="0" tIns="0" rIns="0" bIns="0" rtlCol="0" anchor="t"/>
-          <a:lstStyle/>
-          <a:p>
-            <a:pPr indent="0" marL="0">
-              <a:lnSpc>
-                <a:spcPts val="1900"/>
-              </a:lnSpc>
-              <a:buNone/>
-            </a:pPr>
-            <a:r>
-              <a:rPr lang="en-US" sz="1250" dirty="0">
-                <a:solidFill>
-                  <a:srgbClr val="EDE4F3"/>
-                </a:solidFill>
-                <a:latin typeface="Arial" pitchFamily="34" charset="0"/>
-                <a:ea typeface="Arial" pitchFamily="34" charset="-122"/>
-                <a:cs typeface="Arial" pitchFamily="34" charset="-120"/>
-              </a:rPr>
-              <a:t>Vêm </a:t>
-            </a:r>
-            <a:pPr indent="0" marL="0">
-              <a:lnSpc>
-                <a:spcPts val="1900"/>
-              </a:lnSpc>
-              <a:buNone/>
-            </a:pPr>
-            <a:r>
-              <a:rPr lang="en-US" sz="1250" b="1" dirty="0">
-                <a:solidFill>
-                  <a:srgbClr val="FFFFFF"/>
-                </a:solidFill>
-                <a:latin typeface="Arial" pitchFamily="34" charset="0"/>
-                <a:ea typeface="Arial" pitchFamily="34" charset="-122"/>
-                <a:cs typeface="Arial" pitchFamily="34" charset="-120"/>
-              </a:rPr>
-              <a:t>as etapas reais</a:t>
-            </a:r>
-            <a:pPr indent="0" marL="0">
-              <a:lnSpc>
-                <a:spcPts val="1900"/>
-              </a:lnSpc>
-              <a:buNone/>
-            </a:pPr>
-            <a:r>
-              <a:rPr lang="en-US" sz="1250" dirty="0">
-                <a:solidFill>
-                  <a:srgbClr val="EDE4F3"/>
-                </a:solidFill>
-                <a:latin typeface="Arial" pitchFamily="34" charset="0"/>
-                <a:ea typeface="Arial" pitchFamily="34" charset="-122"/>
-                <a:cs typeface="Arial" pitchFamily="34" charset="-120"/>
-              </a:rPr>
-              <a:t>, na ordem em que acontecem.</a:t>
-            </a:r>
-            <a:endParaRPr lang="en-US" sz="1250" dirty="0"/>
-          </a:p>
-        </p:txBody>
-      </p:sp>
-      <p:sp>
-        <p:nvSpPr>
-          <p:cNvPr id="14" name="Shape 12"/>
-          <p:cNvSpPr/>
-          <p:nvPr/>
-        </p:nvSpPr>
-        <p:spPr>
-          <a:xfrm>
-            <a:off x="658368" y="4919472"/>
-            <a:ext cx="10874959" cy="10973"/>
-          </a:xfrm>
-          <a:prstGeom prst="rect">
-            <a:avLst/>
-          </a:prstGeom>
-          <a:solidFill>
-            <a:srgbClr val="FFFFFF">
-              <a:alpha val="16000"/>
-            </a:srgbClr>
-          </a:solidFill>
-          <a:ln w="12700">
-            <a:solidFill>
-              <a:srgbClr val="333333"/>
-            </a:solidFill>
-            <a:prstDash val="solid"/>
-          </a:ln>
-        </p:spPr>
-      </p:sp>
-      <p:sp>
-        <p:nvSpPr>
-          <p:cNvPr id="15" name="Text 13"/>
-          <p:cNvSpPr/>
-          <p:nvPr/>
-        </p:nvSpPr>
-        <p:spPr>
-          <a:xfrm>
-            <a:off x="658368" y="5120640"/>
-            <a:ext cx="10874959" cy="566928"/>
-          </a:xfrm>
-          <a:prstGeom prst="rect">
-            <a:avLst/>
-          </a:prstGeom>
-          <a:noFill/>
-          <a:ln/>
-        </p:spPr>
-        <p:txBody>
-          <a:bodyPr wrap="square" lIns="0" tIns="0" rIns="0" bIns="0" rtlCol="0" anchor="t"/>
-          <a:lstStyle/>
-          <a:p>
-            <a:pPr indent="0" marL="0">
-              <a:lnSpc>
-                <a:spcPts val="1900"/>
-              </a:lnSpc>
-              <a:buNone/>
-            </a:pPr>
-            <a:r>
-              <a:rPr lang="en-US" sz="1350" dirty="0">
-                <a:solidFill>
-                  <a:srgbClr val="C9B6D4"/>
-                </a:solidFill>
-                <a:latin typeface="Arial" pitchFamily="34" charset="0"/>
-                <a:ea typeface="Arial" pitchFamily="34" charset="-122"/>
-                <a:cs typeface="Arial" pitchFamily="34" charset="-120"/>
-              </a:rPr>
-              <a:t>A segunda não é uma pergunta mais esperta: é uma pergunta mais </a:t>
-            </a:r>
-            <a:pPr indent="0" marL="0">
-              <a:lnSpc>
-                <a:spcPts val="1900"/>
-              </a:lnSpc>
-              <a:buNone/>
-            </a:pPr>
-            <a:r>
-              <a:rPr lang="en-US" sz="1350" b="1" dirty="0">
-                <a:solidFill>
-                  <a:srgbClr val="FFFFFF"/>
-                </a:solidFill>
-                <a:latin typeface="Arial" pitchFamily="34" charset="0"/>
-                <a:ea typeface="Arial" pitchFamily="34" charset="-122"/>
-                <a:cs typeface="Arial" pitchFamily="34" charset="-120"/>
-              </a:rPr>
-              <a:t>fácil de responder</a:t>
-            </a:r>
-            <a:pPr indent="0" marL="0">
-              <a:lnSpc>
-                <a:spcPts val="1900"/>
-              </a:lnSpc>
-              <a:buNone/>
-            </a:pPr>
-            <a:r>
-              <a:rPr lang="en-US" sz="1350" dirty="0">
-                <a:solidFill>
-                  <a:srgbClr val="C9B6D4"/>
-                </a:solidFill>
-                <a:latin typeface="Arial" pitchFamily="34" charset="0"/>
-                <a:ea typeface="Arial" pitchFamily="34" charset="-122"/>
-                <a:cs typeface="Arial" pitchFamily="34" charset="-120"/>
-              </a:rPr>
-              <a:t>. A primeira pede um julgamento sobre o próprio trabalho; a segunda pede só uma memória — e memória sai mais fiel.</a:t>
-            </a:r>
-            <a:endParaRPr lang="en-US" sz="1350" dirty="0"/>
-          </a:p>
-        </p:txBody>
-      </p:sp>
-      <p:sp>
-        <p:nvSpPr>
-          <p:cNvPr id="16" name="Text 14"/>
+          <p:cNvPr id="21" name="Text 19"/>
           <p:cNvSpPr/>
           <p:nvPr/>
         </p:nvSpPr>

--- a/talks/serasa-ia-automacao/deck.pptx
+++ b/talks/serasa-ia-automacao/deck.pptx
@@ -1132,7 +1132,7 @@
           <a:p>
             <a:r>
               <a:rPr lang="en-US" dirty="0"/>
-              <a:t>As duas cartas têm a mesma anatomia de propósito: a plateia compara direto o desfecho, 'uma solução' contra 'o processo'. Não é que a pergunta 1 seja proibida — ela pede um julgamento, e a 2 pede uma memória. ~1,5 min.</a:t>
+              <a:t>As duas cartas têm a mesma anatomia de propósito: a plateia compara direto o desfecho, 'uma solução' contra 'o processo'. Não é que a pergunta 1 seja proibida — ela pergunta sobre o futuro que a pessoa imagina, e a 2 pergunta sobre o presente que ela executa. ~1,5 min.</a:t>
             </a:r>
             <a:endParaRPr lang="en-US" dirty="0"/>
           </a:p>
@@ -10588,7 +10588,7 @@
                 <a:ea typeface="Arial" pitchFamily="34" charset="-122"/>
                 <a:cs typeface="Arial" pitchFamily="34" charset="-120"/>
               </a:rPr>
-              <a:t>“Me conta o que você fez ontem, na ordem.”</a:t>
+              <a:t>“Como você faz esse processo hoje?”</a:t>
             </a:r>
             <a:endParaRPr lang="en-US" sz="1800" dirty="0"/>
           </a:p>
@@ -10814,7 +10814,7 @@
                 <a:ea typeface="Arial" pitchFamily="34" charset="-122"/>
                 <a:cs typeface="Arial" pitchFamily="34" charset="-120"/>
               </a:rPr>
-              <a:t>A segunda não é mais esperta — é mais </a:t>
+              <a:t>A segunda não é mais esperta — ela só pergunta sobre o </a:t>
             </a:r>
             <a:pPr indent="0" marL="0">
               <a:lnSpc>
@@ -10831,7 +10831,7 @@
                 <a:ea typeface="Arial" pitchFamily="34" charset="-122"/>
                 <a:cs typeface="Arial" pitchFamily="34" charset="-120"/>
               </a:rPr>
-              <a:t>fácil de responder</a:t>
+              <a:t>presente</a:t>
             </a:r>
             <a:pPr indent="0" marL="0">
               <a:lnSpc>
@@ -10848,7 +10848,7 @@
                 <a:ea typeface="Arial" pitchFamily="34" charset="-122"/>
                 <a:cs typeface="Arial" pitchFamily="34" charset="-120"/>
               </a:rPr>
-              <a:t>. A primeira pede um julgamento sobre o próprio trabalho; a segunda pede só uma memória.</a:t>
+              <a:t>. A primeira pede um palpite sobre o que deveria mudar; a segunda pede a descrição do que já acontece, e isso qualquer pessoa dá com precisão.</a:t>
             </a:r>
             <a:endParaRPr lang="en-US" sz="1300" dirty="0"/>
           </a:p>
@@ -11180,7 +11180,7 @@
                 <a:ea typeface="Arial" pitchFamily="34" charset="-122"/>
                 <a:cs typeface="Arial" pitchFamily="34" charset="-120"/>
               </a:rPr>
-              <a:t>“Me conta o que você fez ontem, na ordem.”</a:t>
+              <a:t>“Como você faz esse processo hoje? Me conta na ordem.”</a:t>
             </a:r>
             <a:endParaRPr lang="en-US" sz="1150" dirty="0"/>
           </a:p>

--- a/talks/serasa-ia-automacao/deck.pptx
+++ b/talks/serasa-ia-automacao/deck.pptx
@@ -779,7 +779,7 @@
           <a:p>
             <a:r>
               <a:rPr lang="en-US" dirty="0"/>
-              <a:t>PENDENTE: substituir pelos slides do caso real. Três blocos, na ordem: processo + a fala que virou losango; o fluxo pintado com placar; o resultado e o que quebrou. ~4 min quando estiver pronto.</a:t>
+              <a:t>Este é o método, não um case fechado — e é de propósito: o que dá para levar embora é a ordem. Pare na fase 3 e diga que o determinístico vem antes da IA porque é assim que sobra menos IA para escrever, testar e pagar. A fase 4 é a que mais gente pula: apresentar e pegar feedback. ~4 min.</a:t>
             </a:r>
             <a:endParaRPr lang="en-US" dirty="0"/>
           </a:p>
@@ -867,7 +867,7 @@
           <a:p>
             <a:r>
               <a:rPr lang="en-US" dirty="0"/>
-              <a:t>PENDENTE: publicar o repositório e trocar a caixa tracejada por link + QR. Diga que o kit é o motivo de ninguém precisar anotar nada durante a palestra. ~1 min.</a:t>
+              <a:t>O último slide antes do fecho. Diga que a skill é o método da palestra empacotado, e que o que ela NÃO faz é o mais importante: ela não chuta. Mostre o print e prometa o link. ~1 min.</a:t>
             </a:r>
             <a:endParaRPr lang="en-US" dirty="0"/>
           </a:p>
@@ -6746,7 +6746,7 @@
                 <a:ea typeface="Arial" pitchFamily="34" charset="-122"/>
                 <a:cs typeface="Arial" pitchFamily="34" charset="-120"/>
               </a:rPr>
-              <a:t>PASSO 5 · O CASO</a:t>
+              <a:t>PASSO 5 · NA PRÁTICA</a:t>
             </a:r>
             <a:endParaRPr lang="en-US" sz="1100" dirty="0"/>
           </a:p>
@@ -6775,12 +6775,12 @@
           <a:p>
             <a:pPr indent="0" marL="0">
               <a:lnSpc>
-                <a:spcPts val="3000"/>
-              </a:lnSpc>
-              <a:buNone/>
-            </a:pPr>
-            <a:r>
-              <a:rPr lang="en-US" sz="2800" b="1" spc="-62" kern="0" dirty="0">
+                <a:spcPts val="3100"/>
+              </a:lnSpc>
+              <a:buNone/>
+            </a:pPr>
+            <a:r>
+              <a:rPr lang="en-US" sz="2900" b="1" spc="-64" kern="0" dirty="0">
                 <a:solidFill>
                   <a:srgbClr val="16224E"/>
                 </a:solidFill>
@@ -6788,16 +6788,16 @@
                 <a:ea typeface="Arial" pitchFamily="34" charset="-122"/>
                 <a:cs typeface="Arial" pitchFamily="34" charset="-120"/>
               </a:rPr>
-              <a:t>Um processo real, </a:t>
-            </a:r>
-            <a:pPr indent="0" marL="0">
-              <a:lnSpc>
-                <a:spcPts val="3000"/>
-              </a:lnSpc>
-              <a:buNone/>
-            </a:pPr>
-            <a:r>
-              <a:rPr lang="en-US" sz="2800" b="1" spc="-62" kern="0" dirty="0">
+              <a:t>Como eu monto um projeto desses, </a:t>
+            </a:r>
+            <a:pPr indent="0" marL="0">
+              <a:lnSpc>
+                <a:spcPts val="3100"/>
+              </a:lnSpc>
+              <a:buNone/>
+            </a:pPr>
+            <a:r>
+              <a:rPr lang="en-US" sz="2900" b="1" spc="-64" kern="0" dirty="0">
                 <a:solidFill>
                   <a:srgbClr val="E80070"/>
                 </a:solidFill>
@@ -6805,9 +6805,9 @@
                 <a:ea typeface="Arial" pitchFamily="34" charset="-122"/>
                 <a:cs typeface="Arial" pitchFamily="34" charset="-120"/>
               </a:rPr>
-              <a:t>na mesma notação</a:t>
-            </a:r>
-            <a:endParaRPr lang="en-US" sz="2800" dirty="0"/>
+              <a:t>na ordem</a:t>
+            </a:r>
+            <a:endParaRPr lang="en-US" sz="2900" dirty="0"/>
           </a:p>
         </p:txBody>
       </p:sp>
@@ -6819,35 +6819,615 @@
         </p:nvSpPr>
         <p:spPr>
           <a:xfrm>
-            <a:off x="658368" y="1965960"/>
-            <a:ext cx="3442106" cy="2286000"/>
+            <a:off x="658368" y="1874520"/>
+            <a:ext cx="2526716" cy="3200400"/>
           </a:xfrm>
           <a:prstGeom prst="roundRect">
             <a:avLst>
-              <a:gd name="adj" fmla="val 4000"/>
+              <a:gd name="adj" fmla="val 3619"/>
+            </a:avLst>
+          </a:prstGeom>
+          <a:solidFill>
+            <a:srgbClr val="FFFFFF"/>
+          </a:solidFill>
+          <a:ln w="12700">
+            <a:solidFill>
+              <a:srgbClr val="E3DCEC"/>
+            </a:solidFill>
+            <a:prstDash val="solid"/>
+          </a:ln>
+        </p:spPr>
+      </p:sp>
+      <p:sp>
+        <p:nvSpPr>
+          <p:cNvPr id="6" name="Text 4"/>
+          <p:cNvSpPr/>
+          <p:nvPr/>
+        </p:nvSpPr>
+        <p:spPr>
+          <a:xfrm>
+            <a:off x="914400" y="2084832"/>
+            <a:ext cx="548640" cy="201168"/>
+          </a:xfrm>
+          <a:prstGeom prst="rect">
+            <a:avLst/>
+          </a:prstGeom>
+          <a:noFill/>
+          <a:ln/>
+        </p:spPr>
+        <p:txBody>
+          <a:bodyPr wrap="square" lIns="0" tIns="0" rIns="0" bIns="0" rtlCol="0" anchor="ctr"/>
+          <a:lstStyle/>
+          <a:p>
+            <a:pPr indent="0" marL="0">
+              <a:buNone/>
+            </a:pPr>
+            <a:r>
+              <a:rPr lang="en-US" sz="950" b="1" spc="60" kern="0" dirty="0">
+                <a:solidFill>
+                  <a:srgbClr val="B9AFC9"/>
+                </a:solidFill>
+                <a:latin typeface="Courier New" pitchFamily="34" charset="0"/>
+                <a:ea typeface="Courier New" pitchFamily="34" charset="-122"/>
+                <a:cs typeface="Courier New" pitchFamily="34" charset="-120"/>
+              </a:rPr>
+              <a:t>01</a:t>
+            </a:r>
+            <a:endParaRPr lang="en-US" sz="950" dirty="0"/>
+          </a:p>
+        </p:txBody>
+      </p:sp>
+      <p:sp>
+        <p:nvSpPr>
+          <p:cNvPr id="7" name="Text 5"/>
+          <p:cNvSpPr/>
+          <p:nvPr/>
+        </p:nvSpPr>
+        <p:spPr>
+          <a:xfrm>
+            <a:off x="914400" y="2340864"/>
+            <a:ext cx="2014652" cy="292608"/>
+          </a:xfrm>
+          <a:prstGeom prst="rect">
+            <a:avLst/>
+          </a:prstGeom>
+          <a:noFill/>
+          <a:ln/>
+        </p:spPr>
+        <p:txBody>
+          <a:bodyPr wrap="square" lIns="0" tIns="0" rIns="0" bIns="0" rtlCol="0" anchor="ctr"/>
+          <a:lstStyle/>
+          <a:p>
+            <a:pPr indent="0" marL="0">
+              <a:buNone/>
+            </a:pPr>
+            <a:r>
+              <a:rPr lang="en-US" sz="1400" b="1" spc="-14" kern="0" dirty="0">
+                <a:solidFill>
+                  <a:srgbClr val="16224E"/>
+                </a:solidFill>
+                <a:latin typeface="Arial" pitchFamily="34" charset="0"/>
+                <a:ea typeface="Arial" pitchFamily="34" charset="-122"/>
+                <a:cs typeface="Arial" pitchFamily="34" charset="-120"/>
+              </a:rPr>
+              <a:t>Entender</a:t>
+            </a:r>
+            <a:endParaRPr lang="en-US" sz="1400" dirty="0"/>
+          </a:p>
+        </p:txBody>
+      </p:sp>
+      <p:sp>
+        <p:nvSpPr>
+          <p:cNvPr id="8" name="Shape 6"/>
+          <p:cNvSpPr/>
+          <p:nvPr/>
+        </p:nvSpPr>
+        <p:spPr>
+          <a:xfrm>
+            <a:off x="932688" y="2825496"/>
+            <a:ext cx="64008" cy="64008"/>
+          </a:xfrm>
+          <a:prstGeom prst="ellipse">
+            <a:avLst/>
+          </a:prstGeom>
+          <a:solidFill>
+            <a:srgbClr val="C3BBD2"/>
+          </a:solidFill>
+          <a:ln w="12700">
+            <a:solidFill>
+              <a:srgbClr val="333333"/>
+            </a:solidFill>
+            <a:prstDash val="solid"/>
+          </a:ln>
+        </p:spPr>
+      </p:sp>
+      <p:sp>
+        <p:nvSpPr>
+          <p:cNvPr id="9" name="Text 7"/>
+          <p:cNvSpPr/>
+          <p:nvPr/>
+        </p:nvSpPr>
+        <p:spPr>
+          <a:xfrm>
+            <a:off x="1097280" y="2761488"/>
+            <a:ext cx="1831772" cy="804672"/>
+          </a:xfrm>
+          <a:prstGeom prst="rect">
+            <a:avLst/>
+          </a:prstGeom>
+          <a:noFill/>
+          <a:ln/>
+        </p:spPr>
+        <p:txBody>
+          <a:bodyPr wrap="square" lIns="0" tIns="0" rIns="0" bIns="0" rtlCol="0" anchor="t"/>
+          <a:lstStyle/>
+          <a:p>
+            <a:pPr indent="0" marL="0">
+              <a:lnSpc>
+                <a:spcPts val="1550"/>
+              </a:lnSpc>
+              <a:buNone/>
+            </a:pPr>
+            <a:r>
+              <a:rPr lang="en-US" sz="1050" dirty="0">
+                <a:solidFill>
+                  <a:srgbClr val="4A5578"/>
+                </a:solidFill>
+                <a:latin typeface="Arial" pitchFamily="34" charset="0"/>
+                <a:ea typeface="Arial" pitchFamily="34" charset="-122"/>
+                <a:cs typeface="Arial" pitchFamily="34" charset="-120"/>
+              </a:rPr>
+              <a:t>Mapeio o processo </a:t>
+            </a:r>
+            <a:pPr indent="0" marL="0">
+              <a:lnSpc>
+                <a:spcPts val="1550"/>
+              </a:lnSpc>
+              <a:buNone/>
+            </a:pPr>
+            <a:r>
+              <a:rPr lang="en-US" sz="1050" b="1" dirty="0">
+                <a:solidFill>
+                  <a:srgbClr val="16224E"/>
+                </a:solidFill>
+                <a:latin typeface="Arial" pitchFamily="34" charset="0"/>
+                <a:ea typeface="Arial" pitchFamily="34" charset="-122"/>
+                <a:cs typeface="Arial" pitchFamily="34" charset="-120"/>
+              </a:rPr>
+              <a:t>como é feito hoje</a:t>
+            </a:r>
+            <a:endParaRPr lang="en-US" sz="1050" dirty="0"/>
+          </a:p>
+        </p:txBody>
+      </p:sp>
+      <p:sp>
+        <p:nvSpPr>
+          <p:cNvPr id="10" name="Shape 8"/>
+          <p:cNvSpPr/>
+          <p:nvPr/>
+        </p:nvSpPr>
+        <p:spPr>
+          <a:xfrm>
+            <a:off x="932688" y="3648456"/>
+            <a:ext cx="64008" cy="64008"/>
+          </a:xfrm>
+          <a:prstGeom prst="ellipse">
+            <a:avLst/>
+          </a:prstGeom>
+          <a:solidFill>
+            <a:srgbClr val="C3BBD2"/>
+          </a:solidFill>
+          <a:ln w="12700">
+            <a:solidFill>
+              <a:srgbClr val="333333"/>
+            </a:solidFill>
+            <a:prstDash val="solid"/>
+          </a:ln>
+        </p:spPr>
+      </p:sp>
+      <p:sp>
+        <p:nvSpPr>
+          <p:cNvPr id="11" name="Text 9"/>
+          <p:cNvSpPr/>
+          <p:nvPr/>
+        </p:nvSpPr>
+        <p:spPr>
+          <a:xfrm>
+            <a:off x="1097280" y="3584448"/>
+            <a:ext cx="1831772" cy="804672"/>
+          </a:xfrm>
+          <a:prstGeom prst="rect">
+            <a:avLst/>
+          </a:prstGeom>
+          <a:noFill/>
+          <a:ln/>
+        </p:spPr>
+        <p:txBody>
+          <a:bodyPr wrap="square" lIns="0" tIns="0" rIns="0" bIns="0" rtlCol="0" anchor="t"/>
+          <a:lstStyle/>
+          <a:p>
+            <a:pPr indent="0" marL="0">
+              <a:lnSpc>
+                <a:spcPts val="1550"/>
+              </a:lnSpc>
+              <a:buNone/>
+            </a:pPr>
+            <a:r>
+              <a:rPr lang="en-US" sz="1050" dirty="0">
+                <a:solidFill>
+                  <a:srgbClr val="4A5578"/>
+                </a:solidFill>
+                <a:latin typeface="Arial" pitchFamily="34" charset="0"/>
+                <a:ea typeface="Arial" pitchFamily="34" charset="-122"/>
+                <a:cs typeface="Arial" pitchFamily="34" charset="-120"/>
+              </a:rPr>
+              <a:t>Defino </a:t>
+            </a:r>
+            <a:pPr indent="0" marL="0">
+              <a:lnSpc>
+                <a:spcPts val="1550"/>
+              </a:lnSpc>
+              <a:buNone/>
+            </a:pPr>
+            <a:r>
+              <a:rPr lang="en-US" sz="1050" b="1" dirty="0">
+                <a:solidFill>
+                  <a:srgbClr val="16224E"/>
+                </a:solidFill>
+                <a:latin typeface="Arial" pitchFamily="34" charset="0"/>
+                <a:ea typeface="Arial" pitchFamily="34" charset="-122"/>
+                <a:cs typeface="Arial" pitchFamily="34" charset="-120"/>
+              </a:rPr>
+              <a:t>de onde a informação vem</a:t>
+            </a:r>
+            <a:pPr indent="0" marL="0">
+              <a:lnSpc>
+                <a:spcPts val="1550"/>
+              </a:lnSpc>
+              <a:buNone/>
+            </a:pPr>
+            <a:r>
+              <a:rPr lang="en-US" sz="1050" dirty="0">
+                <a:solidFill>
+                  <a:srgbClr val="4A5578"/>
+                </a:solidFill>
+                <a:latin typeface="Arial" pitchFamily="34" charset="0"/>
+                <a:ea typeface="Arial" pitchFamily="34" charset="-122"/>
+                <a:cs typeface="Arial" pitchFamily="34" charset="-120"/>
+              </a:rPr>
+              <a:t> — planilha, ferramenta, base de dados, Slack</a:t>
+            </a:r>
+            <a:endParaRPr lang="en-US" sz="1050" dirty="0"/>
+          </a:p>
+        </p:txBody>
+      </p:sp>
+      <p:sp>
+        <p:nvSpPr>
+          <p:cNvPr id="12" name="Shape 10"/>
+          <p:cNvSpPr/>
+          <p:nvPr/>
+        </p:nvSpPr>
+        <p:spPr>
+          <a:xfrm>
+            <a:off x="3441116" y="1874520"/>
+            <a:ext cx="2526716" cy="3200400"/>
+          </a:xfrm>
+          <a:prstGeom prst="roundRect">
+            <a:avLst>
+              <a:gd name="adj" fmla="val 3619"/>
+            </a:avLst>
+          </a:prstGeom>
+          <a:solidFill>
+            <a:srgbClr val="FFFFFF"/>
+          </a:solidFill>
+          <a:ln w="12700">
+            <a:solidFill>
+              <a:srgbClr val="E3DCEC"/>
+            </a:solidFill>
+            <a:prstDash val="solid"/>
+          </a:ln>
+        </p:spPr>
+      </p:sp>
+      <p:sp>
+        <p:nvSpPr>
+          <p:cNvPr id="13" name="Text 11"/>
+          <p:cNvSpPr/>
+          <p:nvPr/>
+        </p:nvSpPr>
+        <p:spPr>
+          <a:xfrm>
+            <a:off x="3697148" y="2084832"/>
+            <a:ext cx="548640" cy="201168"/>
+          </a:xfrm>
+          <a:prstGeom prst="rect">
+            <a:avLst/>
+          </a:prstGeom>
+          <a:noFill/>
+          <a:ln/>
+        </p:spPr>
+        <p:txBody>
+          <a:bodyPr wrap="square" lIns="0" tIns="0" rIns="0" bIns="0" rtlCol="0" anchor="ctr"/>
+          <a:lstStyle/>
+          <a:p>
+            <a:pPr indent="0" marL="0">
+              <a:buNone/>
+            </a:pPr>
+            <a:r>
+              <a:rPr lang="en-US" sz="950" b="1" spc="60" kern="0" dirty="0">
+                <a:solidFill>
+                  <a:srgbClr val="B9AFC9"/>
+                </a:solidFill>
+                <a:latin typeface="Courier New" pitchFamily="34" charset="0"/>
+                <a:ea typeface="Courier New" pitchFamily="34" charset="-122"/>
+                <a:cs typeface="Courier New" pitchFamily="34" charset="-120"/>
+              </a:rPr>
+              <a:t>02</a:t>
+            </a:r>
+            <a:endParaRPr lang="en-US" sz="950" dirty="0"/>
+          </a:p>
+        </p:txBody>
+      </p:sp>
+      <p:sp>
+        <p:nvSpPr>
+          <p:cNvPr id="14" name="Text 12"/>
+          <p:cNvSpPr/>
+          <p:nvPr/>
+        </p:nvSpPr>
+        <p:spPr>
+          <a:xfrm>
+            <a:off x="3697148" y="2340864"/>
+            <a:ext cx="2014652" cy="292608"/>
+          </a:xfrm>
+          <a:prstGeom prst="rect">
+            <a:avLst/>
+          </a:prstGeom>
+          <a:noFill/>
+          <a:ln/>
+        </p:spPr>
+        <p:txBody>
+          <a:bodyPr wrap="square" lIns="0" tIns="0" rIns="0" bIns="0" rtlCol="0" anchor="ctr"/>
+          <a:lstStyle/>
+          <a:p>
+            <a:pPr indent="0" marL="0">
+              <a:buNone/>
+            </a:pPr>
+            <a:r>
+              <a:rPr lang="en-US" sz="1400" b="1" spc="-14" kern="0" dirty="0">
+                <a:solidFill>
+                  <a:srgbClr val="16224E"/>
+                </a:solidFill>
+                <a:latin typeface="Arial" pitchFamily="34" charset="0"/>
+                <a:ea typeface="Arial" pitchFamily="34" charset="-122"/>
+                <a:cs typeface="Arial" pitchFamily="34" charset="-120"/>
+              </a:rPr>
+              <a:t>Montar</a:t>
+            </a:r>
+            <a:endParaRPr lang="en-US" sz="1400" dirty="0"/>
+          </a:p>
+        </p:txBody>
+      </p:sp>
+      <p:sp>
+        <p:nvSpPr>
+          <p:cNvPr id="15" name="Shape 13"/>
+          <p:cNvSpPr/>
+          <p:nvPr/>
+        </p:nvSpPr>
+        <p:spPr>
+          <a:xfrm>
+            <a:off x="3715436" y="2825496"/>
+            <a:ext cx="64008" cy="64008"/>
+          </a:xfrm>
+          <a:prstGeom prst="ellipse">
+            <a:avLst/>
+          </a:prstGeom>
+          <a:solidFill>
+            <a:srgbClr val="C3BBD2"/>
+          </a:solidFill>
+          <a:ln w="12700">
+            <a:solidFill>
+              <a:srgbClr val="333333"/>
+            </a:solidFill>
+            <a:prstDash val="solid"/>
+          </a:ln>
+        </p:spPr>
+      </p:sp>
+      <p:sp>
+        <p:nvSpPr>
+          <p:cNvPr id="16" name="Text 14"/>
+          <p:cNvSpPr/>
+          <p:nvPr/>
+        </p:nvSpPr>
+        <p:spPr>
+          <a:xfrm>
+            <a:off x="3880028" y="2761488"/>
+            <a:ext cx="1831772" cy="804672"/>
+          </a:xfrm>
+          <a:prstGeom prst="rect">
+            <a:avLst/>
+          </a:prstGeom>
+          <a:noFill/>
+          <a:ln/>
+        </p:spPr>
+        <p:txBody>
+          <a:bodyPr wrap="square" lIns="0" tIns="0" rIns="0" bIns="0" rtlCol="0" anchor="t"/>
+          <a:lstStyle/>
+          <a:p>
+            <a:pPr indent="0" marL="0">
+              <a:lnSpc>
+                <a:spcPts val="1550"/>
+              </a:lnSpc>
+              <a:buNone/>
+            </a:pPr>
+            <a:r>
+              <a:rPr lang="en-US" sz="1050" dirty="0">
+                <a:solidFill>
+                  <a:srgbClr val="4A5578"/>
+                </a:solidFill>
+                <a:latin typeface="Arial" pitchFamily="34" charset="0"/>
+                <a:ea typeface="Arial" pitchFamily="34" charset="-122"/>
+                <a:cs typeface="Arial" pitchFamily="34" charset="-120"/>
+              </a:rPr>
+              <a:t>Crio o </a:t>
+            </a:r>
+            <a:pPr indent="0" marL="0">
+              <a:lnSpc>
+                <a:spcPts val="1550"/>
+              </a:lnSpc>
+              <a:buNone/>
+            </a:pPr>
+            <a:r>
+              <a:rPr lang="en-US" sz="1050" b="1" dirty="0">
+                <a:solidFill>
+                  <a:srgbClr val="16224E"/>
+                </a:solidFill>
+                <a:latin typeface="Arial" pitchFamily="34" charset="0"/>
+                <a:ea typeface="Arial" pitchFamily="34" charset="-122"/>
+                <a:cs typeface="Arial" pitchFamily="34" charset="-120"/>
+              </a:rPr>
+              <a:t>repositório</a:t>
+            </a:r>
+            <a:endParaRPr lang="en-US" sz="1050" dirty="0"/>
+          </a:p>
+        </p:txBody>
+      </p:sp>
+      <p:sp>
+        <p:nvSpPr>
+          <p:cNvPr id="17" name="Shape 15"/>
+          <p:cNvSpPr/>
+          <p:nvPr/>
+        </p:nvSpPr>
+        <p:spPr>
+          <a:xfrm>
+            <a:off x="3715436" y="3648456"/>
+            <a:ext cx="64008" cy="64008"/>
+          </a:xfrm>
+          <a:prstGeom prst="ellipse">
+            <a:avLst/>
+          </a:prstGeom>
+          <a:solidFill>
+            <a:srgbClr val="C3BBD2"/>
+          </a:solidFill>
+          <a:ln w="12700">
+            <a:solidFill>
+              <a:srgbClr val="333333"/>
+            </a:solidFill>
+            <a:prstDash val="solid"/>
+          </a:ln>
+        </p:spPr>
+      </p:sp>
+      <p:sp>
+        <p:nvSpPr>
+          <p:cNvPr id="18" name="Text 16"/>
+          <p:cNvSpPr/>
+          <p:nvPr/>
+        </p:nvSpPr>
+        <p:spPr>
+          <a:xfrm>
+            <a:off x="3880028" y="3584448"/>
+            <a:ext cx="1831772" cy="804672"/>
+          </a:xfrm>
+          <a:prstGeom prst="rect">
+            <a:avLst/>
+          </a:prstGeom>
+          <a:noFill/>
+          <a:ln/>
+        </p:spPr>
+        <p:txBody>
+          <a:bodyPr wrap="square" lIns="0" tIns="0" rIns="0" bIns="0" rtlCol="0" anchor="t"/>
+          <a:lstStyle/>
+          <a:p>
+            <a:pPr indent="0" marL="0">
+              <a:lnSpc>
+                <a:spcPts val="1550"/>
+              </a:lnSpc>
+              <a:buNone/>
+            </a:pPr>
+            <a:r>
+              <a:rPr lang="en-US" sz="1050" dirty="0">
+                <a:solidFill>
+                  <a:srgbClr val="4A5578"/>
+                </a:solidFill>
+                <a:latin typeface="Arial" pitchFamily="34" charset="0"/>
+                <a:ea typeface="Arial" pitchFamily="34" charset="-122"/>
+                <a:cs typeface="Arial" pitchFamily="34" charset="-120"/>
+              </a:rPr>
+              <a:t>Escrevo o código que </a:t>
+            </a:r>
+            <a:pPr indent="0" marL="0">
+              <a:lnSpc>
+                <a:spcPts val="1550"/>
+              </a:lnSpc>
+              <a:buNone/>
+            </a:pPr>
+            <a:r>
+              <a:rPr lang="en-US" sz="1050" b="1" dirty="0">
+                <a:solidFill>
+                  <a:srgbClr val="16224E"/>
+                </a:solidFill>
+                <a:latin typeface="Arial" pitchFamily="34" charset="0"/>
+                <a:ea typeface="Arial" pitchFamily="34" charset="-122"/>
+                <a:cs typeface="Arial" pitchFamily="34" charset="-120"/>
+              </a:rPr>
+              <a:t>pluga a fonte</a:t>
+            </a:r>
+            <a:pPr indent="0" marL="0">
+              <a:lnSpc>
+                <a:spcPts val="1550"/>
+              </a:lnSpc>
+              <a:buNone/>
+            </a:pPr>
+            <a:r>
+              <a:rPr lang="en-US" sz="1050" dirty="0">
+                <a:solidFill>
+                  <a:srgbClr val="4A5578"/>
+                </a:solidFill>
+                <a:latin typeface="Arial" pitchFamily="34" charset="0"/>
+                <a:ea typeface="Arial" pitchFamily="34" charset="-122"/>
+                <a:cs typeface="Arial" pitchFamily="34" charset="-120"/>
+              </a:rPr>
+              <a:t> da informação</a:t>
+            </a:r>
+            <a:endParaRPr lang="en-US" sz="1050" dirty="0"/>
+          </a:p>
+        </p:txBody>
+      </p:sp>
+      <p:sp>
+        <p:nvSpPr>
+          <p:cNvPr id="19" name="Shape 17"/>
+          <p:cNvSpPr/>
+          <p:nvPr/>
+        </p:nvSpPr>
+        <p:spPr>
+          <a:xfrm>
+            <a:off x="6223864" y="1874520"/>
+            <a:ext cx="2526716" cy="3200400"/>
+          </a:xfrm>
+          <a:prstGeom prst="roundRect">
+            <a:avLst>
+              <a:gd name="adj" fmla="val 3619"/>
             </a:avLst>
           </a:prstGeom>
           <a:solidFill>
             <a:srgbClr val="FEF6FA"/>
           </a:solidFill>
-          <a:ln w="15875">
+          <a:ln w="12700">
             <a:solidFill>
               <a:srgbClr val="E80070"/>
             </a:solidFill>
-            <a:prstDash val="dash"/>
+            <a:prstDash val="solid"/>
           </a:ln>
         </p:spPr>
       </p:sp>
       <p:sp>
         <p:nvSpPr>
-          <p:cNvPr id="6" name="Text 4"/>
-          <p:cNvSpPr/>
-          <p:nvPr/>
-        </p:nvSpPr>
-        <p:spPr>
-          <a:xfrm>
-            <a:off x="914400" y="2176272"/>
-            <a:ext cx="2930042" cy="201168"/>
+          <p:cNvPr id="20" name="Text 18"/>
+          <p:cNvSpPr/>
+          <p:nvPr/>
+        </p:nvSpPr>
+        <p:spPr>
+          <a:xfrm>
+            <a:off x="6479896" y="2084832"/>
+            <a:ext cx="548640" cy="201168"/>
           </a:xfrm>
           <a:prstGeom prst="rect">
             <a:avLst/>
@@ -6863,7 +7443,7 @@
               <a:buNone/>
             </a:pPr>
             <a:r>
-              <a:rPr lang="en-US" sz="850" b="1" spc="100" kern="0" dirty="0">
+              <a:rPr lang="en-US" sz="950" b="1" spc="60" kern="0" dirty="0">
                 <a:solidFill>
                   <a:srgbClr val="E80070"/>
                 </a:solidFill>
@@ -6871,22 +7451,86 @@
                 <a:ea typeface="Courier New" pitchFamily="34" charset="-122"/>
                 <a:cs typeface="Courier New" pitchFamily="34" charset="-120"/>
               </a:rPr>
-              <a:t>O PROCESSO E A CONVERSA</a:t>
-            </a:r>
-            <a:endParaRPr lang="en-US" sz="850" dirty="0"/>
-          </a:p>
-        </p:txBody>
-      </p:sp>
-      <p:sp>
-        <p:nvSpPr>
-          <p:cNvPr id="7" name="Text 5"/>
-          <p:cNvSpPr/>
-          <p:nvPr/>
-        </p:nvSpPr>
-        <p:spPr>
-          <a:xfrm>
-            <a:off x="914400" y="2432304"/>
-            <a:ext cx="2930042" cy="548640"/>
+              <a:t>03</a:t>
+            </a:r>
+            <a:endParaRPr lang="en-US" sz="950" dirty="0"/>
+          </a:p>
+        </p:txBody>
+      </p:sp>
+      <p:sp>
+        <p:nvSpPr>
+          <p:cNvPr id="21" name="Text 19"/>
+          <p:cNvSpPr/>
+          <p:nvPr/>
+        </p:nvSpPr>
+        <p:spPr>
+          <a:xfrm>
+            <a:off x="6479896" y="2340864"/>
+            <a:ext cx="2014652" cy="292608"/>
+          </a:xfrm>
+          <a:prstGeom prst="rect">
+            <a:avLst/>
+          </a:prstGeom>
+          <a:noFill/>
+          <a:ln/>
+        </p:spPr>
+        <p:txBody>
+          <a:bodyPr wrap="square" lIns="0" tIns="0" rIns="0" bIns="0" rtlCol="0" anchor="ctr"/>
+          <a:lstStyle/>
+          <a:p>
+            <a:pPr indent="0" marL="0">
+              <a:buNone/>
+            </a:pPr>
+            <a:r>
+              <a:rPr lang="en-US" sz="1400" b="1" spc="-14" kern="0" dirty="0">
+                <a:solidFill>
+                  <a:srgbClr val="16224E"/>
+                </a:solidFill>
+                <a:latin typeface="Arial" pitchFamily="34" charset="0"/>
+                <a:ea typeface="Arial" pitchFamily="34" charset="-122"/>
+                <a:cs typeface="Arial" pitchFamily="34" charset="-120"/>
+              </a:rPr>
+              <a:t>Dividir o trabalho</a:t>
+            </a:r>
+            <a:endParaRPr lang="en-US" sz="1400" dirty="0"/>
+          </a:p>
+        </p:txBody>
+      </p:sp>
+      <p:sp>
+        <p:nvSpPr>
+          <p:cNvPr id="22" name="Shape 20"/>
+          <p:cNvSpPr/>
+          <p:nvPr/>
+        </p:nvSpPr>
+        <p:spPr>
+          <a:xfrm>
+            <a:off x="6498184" y="2825496"/>
+            <a:ext cx="64008" cy="64008"/>
+          </a:xfrm>
+          <a:prstGeom prst="ellipse">
+            <a:avLst/>
+          </a:prstGeom>
+          <a:solidFill>
+            <a:srgbClr val="E80070"/>
+          </a:solidFill>
+          <a:ln w="12700">
+            <a:solidFill>
+              <a:srgbClr val="333333"/>
+            </a:solidFill>
+            <a:prstDash val="solid"/>
+          </a:ln>
+        </p:spPr>
+      </p:sp>
+      <p:sp>
+        <p:nvSpPr>
+          <p:cNvPr id="23" name="Text 21"/>
+          <p:cNvSpPr/>
+          <p:nvPr/>
+        </p:nvSpPr>
+        <p:spPr>
+          <a:xfrm>
+            <a:off x="6662776" y="2761488"/>
+            <a:ext cx="1831772" cy="804672"/>
           </a:xfrm>
           <a:prstGeom prst="rect">
             <a:avLst/>
@@ -6900,12 +7544,12 @@
           <a:p>
             <a:pPr indent="0" marL="0">
               <a:lnSpc>
-                <a:spcPts val="1700"/>
-              </a:lnSpc>
-              <a:buNone/>
-            </a:pPr>
-            <a:r>
-              <a:rPr lang="en-US" sz="1150" dirty="0">
+                <a:spcPts val="1550"/>
+              </a:lnSpc>
+              <a:buNone/>
+            </a:pPr>
+            <a:r>
+              <a:rPr lang="en-US" sz="1050" dirty="0">
                 <a:solidFill>
                   <a:srgbClr val="4A5578"/>
                 </a:solidFill>
@@ -6913,22 +7557,81 @@
                 <a:ea typeface="Arial" pitchFamily="34" charset="-122"/>
                 <a:cs typeface="Arial" pitchFamily="34" charset="-120"/>
               </a:rPr>
-              <a:t>Qual era o processo, quem executava, com que frequência acontecia.</a:t>
-            </a:r>
-            <a:endParaRPr lang="en-US" sz="1150" dirty="0"/>
-          </a:p>
-        </p:txBody>
-      </p:sp>
-      <p:sp>
-        <p:nvSpPr>
-          <p:cNvPr id="8" name="Text 6"/>
-          <p:cNvSpPr/>
-          <p:nvPr/>
-        </p:nvSpPr>
-        <p:spPr>
-          <a:xfrm>
-            <a:off x="914400" y="3017520"/>
-            <a:ext cx="2930042" cy="1097280"/>
+              <a:t>Codo as </a:t>
+            </a:r>
+            <a:pPr indent="0" marL="0">
+              <a:lnSpc>
+                <a:spcPts val="1550"/>
+              </a:lnSpc>
+              <a:buNone/>
+            </a:pPr>
+            <a:r>
+              <a:rPr lang="en-US" sz="1050" b="1" dirty="0">
+                <a:solidFill>
+                  <a:srgbClr val="E80070"/>
+                </a:solidFill>
+                <a:latin typeface="Arial" pitchFamily="34" charset="0"/>
+                <a:ea typeface="Arial" pitchFamily="34" charset="-122"/>
+                <a:cs typeface="Arial" pitchFamily="34" charset="-120"/>
+              </a:rPr>
+              <a:t>decisões determinísticas</a:t>
+            </a:r>
+            <a:pPr indent="0" marL="0">
+              <a:lnSpc>
+                <a:spcPts val="1550"/>
+              </a:lnSpc>
+              <a:buNone/>
+            </a:pPr>
+            <a:r>
+              <a:rPr lang="en-US" sz="1050" dirty="0">
+                <a:solidFill>
+                  <a:srgbClr val="4A5578"/>
+                </a:solidFill>
+                <a:latin typeface="Arial" pitchFamily="34" charset="0"/>
+                <a:ea typeface="Arial" pitchFamily="34" charset="-122"/>
+                <a:cs typeface="Arial" pitchFamily="34" charset="-120"/>
+              </a:rPr>
+              <a:t> — as de sim/não, conforme o fluxo se comporta</a:t>
+            </a:r>
+            <a:endParaRPr lang="en-US" sz="1050" dirty="0"/>
+          </a:p>
+        </p:txBody>
+      </p:sp>
+      <p:sp>
+        <p:nvSpPr>
+          <p:cNvPr id="24" name="Shape 22"/>
+          <p:cNvSpPr/>
+          <p:nvPr/>
+        </p:nvSpPr>
+        <p:spPr>
+          <a:xfrm>
+            <a:off x="6498184" y="3648456"/>
+            <a:ext cx="64008" cy="64008"/>
+          </a:xfrm>
+          <a:prstGeom prst="ellipse">
+            <a:avLst/>
+          </a:prstGeom>
+          <a:solidFill>
+            <a:srgbClr val="E80070"/>
+          </a:solidFill>
+          <a:ln w="12700">
+            <a:solidFill>
+              <a:srgbClr val="333333"/>
+            </a:solidFill>
+            <a:prstDash val="solid"/>
+          </a:ln>
+        </p:spPr>
+      </p:sp>
+      <p:sp>
+        <p:nvSpPr>
+          <p:cNvPr id="25" name="Text 23"/>
+          <p:cNvSpPr/>
+          <p:nvPr/>
+        </p:nvSpPr>
+        <p:spPr>
+          <a:xfrm>
+            <a:off x="6662776" y="3584448"/>
+            <a:ext cx="1831772" cy="804672"/>
           </a:xfrm>
           <a:prstGeom prst="rect">
             <a:avLst/>
@@ -6942,62 +7645,197 @@
           <a:p>
             <a:pPr indent="0" marL="0">
               <a:lnSpc>
-                <a:spcPts val="1450"/>
-              </a:lnSpc>
-              <a:buNone/>
-            </a:pPr>
-            <a:r>
-              <a:rPr lang="en-US" sz="1000" i="1" dirty="0">
-                <a:solidFill>
-                  <a:srgbClr val="A08BAA"/>
-                </a:solidFill>
-                <a:latin typeface="Arial" pitchFamily="34" charset="0"/>
-                <a:ea typeface="Arial" pitchFamily="34" charset="-122"/>
-                <a:cs typeface="Arial" pitchFamily="34" charset="-120"/>
-              </a:rPr>
-              <a:t>Uma frase literal de quem executava — a fala que virou losango. É o que amarra este slide ao slide 6.</a:t>
-            </a:r>
-            <a:endParaRPr lang="en-US" sz="1000" dirty="0"/>
-          </a:p>
-        </p:txBody>
-      </p:sp>
-      <p:sp>
-        <p:nvSpPr>
-          <p:cNvPr id="9" name="Shape 7"/>
-          <p:cNvSpPr/>
-          <p:nvPr/>
-        </p:nvSpPr>
-        <p:spPr>
-          <a:xfrm>
-            <a:off x="4374794" y="1965960"/>
-            <a:ext cx="3442106" cy="2286000"/>
+                <a:spcPts val="1550"/>
+              </a:lnSpc>
+              <a:buNone/>
+            </a:pPr>
+            <a:r>
+              <a:rPr lang="en-US" sz="1050" dirty="0">
+                <a:solidFill>
+                  <a:srgbClr val="4A5578"/>
+                </a:solidFill>
+                <a:latin typeface="Arial" pitchFamily="34" charset="0"/>
+                <a:ea typeface="Arial" pitchFamily="34" charset="-122"/>
+                <a:cs typeface="Arial" pitchFamily="34" charset="-120"/>
+              </a:rPr>
+              <a:t>Uso </a:t>
+            </a:r>
+            <a:pPr indent="0" marL="0">
+              <a:lnSpc>
+                <a:spcPts val="1550"/>
+              </a:lnSpc>
+              <a:buNone/>
+            </a:pPr>
+            <a:r>
+              <a:rPr lang="en-US" sz="1050" b="1" dirty="0">
+                <a:solidFill>
+                  <a:srgbClr val="E80070"/>
+                </a:solidFill>
+                <a:latin typeface="Arial" pitchFamily="34" charset="0"/>
+                <a:ea typeface="Arial" pitchFamily="34" charset="-122"/>
+                <a:cs typeface="Arial" pitchFamily="34" charset="-120"/>
+              </a:rPr>
+              <a:t>IA</a:t>
+            </a:r>
+            <a:pPr indent="0" marL="0">
+              <a:lnSpc>
+                <a:spcPts val="1550"/>
+              </a:lnSpc>
+              <a:buNone/>
+            </a:pPr>
+            <a:r>
+              <a:rPr lang="en-US" sz="1050" dirty="0">
+                <a:solidFill>
+                  <a:srgbClr val="4A5578"/>
+                </a:solidFill>
+                <a:latin typeface="Arial" pitchFamily="34" charset="0"/>
+                <a:ea typeface="Arial" pitchFamily="34" charset="-122"/>
+                <a:cs typeface="Arial" pitchFamily="34" charset="-120"/>
+              </a:rPr>
+              <a:t> só onde precisa interpretação e saída qualitativa</a:t>
+            </a:r>
+            <a:endParaRPr lang="en-US" sz="1050" dirty="0"/>
+          </a:p>
+        </p:txBody>
+      </p:sp>
+      <p:sp>
+        <p:nvSpPr>
+          <p:cNvPr id="26" name="Shape 24"/>
+          <p:cNvSpPr/>
+          <p:nvPr/>
+        </p:nvSpPr>
+        <p:spPr>
+          <a:xfrm>
+            <a:off x="6498184" y="4471416"/>
+            <a:ext cx="64008" cy="64008"/>
+          </a:xfrm>
+          <a:prstGeom prst="ellipse">
+            <a:avLst/>
+          </a:prstGeom>
+          <a:solidFill>
+            <a:srgbClr val="E80070"/>
+          </a:solidFill>
+          <a:ln w="12700">
+            <a:solidFill>
+              <a:srgbClr val="333333"/>
+            </a:solidFill>
+            <a:prstDash val="solid"/>
+          </a:ln>
+        </p:spPr>
+      </p:sp>
+      <p:sp>
+        <p:nvSpPr>
+          <p:cNvPr id="27" name="Text 25"/>
+          <p:cNvSpPr/>
+          <p:nvPr/>
+        </p:nvSpPr>
+        <p:spPr>
+          <a:xfrm>
+            <a:off x="6662776" y="4407408"/>
+            <a:ext cx="1831772" cy="804672"/>
+          </a:xfrm>
+          <a:prstGeom prst="rect">
+            <a:avLst/>
+          </a:prstGeom>
+          <a:noFill/>
+          <a:ln/>
+        </p:spPr>
+        <p:txBody>
+          <a:bodyPr wrap="square" lIns="0" tIns="0" rIns="0" bIns="0" rtlCol="0" anchor="t"/>
+          <a:lstStyle/>
+          <a:p>
+            <a:pPr indent="0" marL="0">
+              <a:lnSpc>
+                <a:spcPts val="1550"/>
+              </a:lnSpc>
+              <a:buNone/>
+            </a:pPr>
+            <a:r>
+              <a:rPr lang="en-US" sz="1050" dirty="0">
+                <a:solidFill>
+                  <a:srgbClr val="4A5578"/>
+                </a:solidFill>
+                <a:latin typeface="Arial" pitchFamily="34" charset="0"/>
+                <a:ea typeface="Arial" pitchFamily="34" charset="-122"/>
+                <a:cs typeface="Arial" pitchFamily="34" charset="-120"/>
+              </a:rPr>
+              <a:t>Defino o </a:t>
+            </a:r>
+            <a:pPr indent="0" marL="0">
+              <a:lnSpc>
+                <a:spcPts val="1550"/>
+              </a:lnSpc>
+              <a:buNone/>
+            </a:pPr>
+            <a:r>
+              <a:rPr lang="en-US" sz="1050" b="1" dirty="0">
+                <a:solidFill>
+                  <a:srgbClr val="E80070"/>
+                </a:solidFill>
+                <a:latin typeface="Arial" pitchFamily="34" charset="0"/>
+                <a:ea typeface="Arial" pitchFamily="34" charset="-122"/>
+                <a:cs typeface="Arial" pitchFamily="34" charset="-120"/>
+              </a:rPr>
+              <a:t>formato e o lugar</a:t>
+            </a:r>
+            <a:pPr indent="0" marL="0">
+              <a:lnSpc>
+                <a:spcPts val="1550"/>
+              </a:lnSpc>
+              <a:buNone/>
+            </a:pPr>
+            <a:r>
+              <a:rPr lang="en-US" sz="1050" dirty="0">
+                <a:solidFill>
+                  <a:srgbClr val="4A5578"/>
+                </a:solidFill>
+                <a:latin typeface="Arial" pitchFamily="34" charset="0"/>
+                <a:ea typeface="Arial" pitchFamily="34" charset="-122"/>
+                <a:cs typeface="Arial" pitchFamily="34" charset="-120"/>
+              </a:rPr>
+              <a:t> do output</a:t>
+            </a:r>
+            <a:endParaRPr lang="en-US" sz="1050" dirty="0"/>
+          </a:p>
+        </p:txBody>
+      </p:sp>
+      <p:sp>
+        <p:nvSpPr>
+          <p:cNvPr id="28" name="Shape 26"/>
+          <p:cNvSpPr/>
+          <p:nvPr/>
+        </p:nvSpPr>
+        <p:spPr>
+          <a:xfrm>
+            <a:off x="9006611" y="1874520"/>
+            <a:ext cx="2526716" cy="3200400"/>
           </a:xfrm>
           <a:prstGeom prst="roundRect">
             <a:avLst>
-              <a:gd name="adj" fmla="val 4000"/>
+              <a:gd name="adj" fmla="val 3619"/>
             </a:avLst>
           </a:prstGeom>
           <a:solidFill>
-            <a:srgbClr val="FEF6FA"/>
+            <a:srgbClr val="FFFFFF"/>
           </a:solidFill>
-          <a:ln w="15875">
+          <a:ln w="12700">
             <a:solidFill>
-              <a:srgbClr val="E80070"/>
+              <a:srgbClr val="E3DCEC"/>
             </a:solidFill>
-            <a:prstDash val="dash"/>
+            <a:prstDash val="solid"/>
           </a:ln>
         </p:spPr>
       </p:sp>
       <p:sp>
         <p:nvSpPr>
-          <p:cNvPr id="10" name="Text 8"/>
-          <p:cNvSpPr/>
-          <p:nvPr/>
-        </p:nvSpPr>
-        <p:spPr>
-          <a:xfrm>
-            <a:off x="4630826" y="2176272"/>
-            <a:ext cx="2930042" cy="201168"/>
+          <p:cNvPr id="29" name="Text 27"/>
+          <p:cNvSpPr/>
+          <p:nvPr/>
+        </p:nvSpPr>
+        <p:spPr>
+          <a:xfrm>
+            <a:off x="9262643" y="2084832"/>
+            <a:ext cx="548640" cy="201168"/>
           </a:xfrm>
           <a:prstGeom prst="rect">
             <a:avLst/>
@@ -7013,30 +7851,94 @@
               <a:buNone/>
             </a:pPr>
             <a:r>
-              <a:rPr lang="en-US" sz="850" b="1" spc="100" kern="0" dirty="0">
-                <a:solidFill>
-                  <a:srgbClr val="E80070"/>
+              <a:rPr lang="en-US" sz="950" b="1" spc="60" kern="0" dirty="0">
+                <a:solidFill>
+                  <a:srgbClr val="B9AFC9"/>
                 </a:solidFill>
                 <a:latin typeface="Courier New" pitchFamily="34" charset="0"/>
                 <a:ea typeface="Courier New" pitchFamily="34" charset="-122"/>
                 <a:cs typeface="Courier New" pitchFamily="34" charset="-120"/>
               </a:rPr>
-              <a:t>O FLUXO PINTADO + O PLACAR</a:t>
-            </a:r>
-            <a:endParaRPr lang="en-US" sz="850" dirty="0"/>
-          </a:p>
-        </p:txBody>
-      </p:sp>
-      <p:sp>
-        <p:nvSpPr>
-          <p:cNvPr id="11" name="Text 9"/>
-          <p:cNvSpPr/>
-          <p:nvPr/>
-        </p:nvSpPr>
-        <p:spPr>
-          <a:xfrm>
-            <a:off x="4630826" y="2432304"/>
-            <a:ext cx="2930042" cy="548640"/>
+              <a:t>04</a:t>
+            </a:r>
+            <a:endParaRPr lang="en-US" sz="950" dirty="0"/>
+          </a:p>
+        </p:txBody>
+      </p:sp>
+      <p:sp>
+        <p:nvSpPr>
+          <p:cNvPr id="30" name="Text 28"/>
+          <p:cNvSpPr/>
+          <p:nvPr/>
+        </p:nvSpPr>
+        <p:spPr>
+          <a:xfrm>
+            <a:off x="9262643" y="2340864"/>
+            <a:ext cx="2014652" cy="292608"/>
+          </a:xfrm>
+          <a:prstGeom prst="rect">
+            <a:avLst/>
+          </a:prstGeom>
+          <a:noFill/>
+          <a:ln/>
+        </p:spPr>
+        <p:txBody>
+          <a:bodyPr wrap="square" lIns="0" tIns="0" rIns="0" bIns="0" rtlCol="0" anchor="ctr"/>
+          <a:lstStyle/>
+          <a:p>
+            <a:pPr indent="0" marL="0">
+              <a:buNone/>
+            </a:pPr>
+            <a:r>
+              <a:rPr lang="en-US" sz="1400" b="1" spc="-14" kern="0" dirty="0">
+                <a:solidFill>
+                  <a:srgbClr val="16224E"/>
+                </a:solidFill>
+                <a:latin typeface="Arial" pitchFamily="34" charset="0"/>
+                <a:ea typeface="Arial" pitchFamily="34" charset="-122"/>
+                <a:cs typeface="Arial" pitchFamily="34" charset="-120"/>
+              </a:rPr>
+              <a:t>Fechar o ciclo</a:t>
+            </a:r>
+            <a:endParaRPr lang="en-US" sz="1400" dirty="0"/>
+          </a:p>
+        </p:txBody>
+      </p:sp>
+      <p:sp>
+        <p:nvSpPr>
+          <p:cNvPr id="31" name="Shape 29"/>
+          <p:cNvSpPr/>
+          <p:nvPr/>
+        </p:nvSpPr>
+        <p:spPr>
+          <a:xfrm>
+            <a:off x="9280931" y="2825496"/>
+            <a:ext cx="64008" cy="64008"/>
+          </a:xfrm>
+          <a:prstGeom prst="ellipse">
+            <a:avLst/>
+          </a:prstGeom>
+          <a:solidFill>
+            <a:srgbClr val="C3BBD2"/>
+          </a:solidFill>
+          <a:ln w="12700">
+            <a:solidFill>
+              <a:srgbClr val="333333"/>
+            </a:solidFill>
+            <a:prstDash val="solid"/>
+          </a:ln>
+        </p:spPr>
+      </p:sp>
+      <p:sp>
+        <p:nvSpPr>
+          <p:cNvPr id="32" name="Text 30"/>
+          <p:cNvSpPr/>
+          <p:nvPr/>
+        </p:nvSpPr>
+        <p:spPr>
+          <a:xfrm>
+            <a:off x="9445523" y="2761488"/>
+            <a:ext cx="1831772" cy="804672"/>
           </a:xfrm>
           <a:prstGeom prst="rect">
             <a:avLst/>
@@ -7050,12 +7952,12 @@
           <a:p>
             <a:pPr indent="0" marL="0">
               <a:lnSpc>
-                <a:spcPts val="1700"/>
-              </a:lnSpc>
-              <a:buNone/>
-            </a:pPr>
-            <a:r>
-              <a:rPr lang="en-US" sz="1150" dirty="0">
+                <a:spcPts val="1550"/>
+              </a:lnSpc>
+              <a:buNone/>
+            </a:pPr>
+            <a:r>
+              <a:rPr lang="en-US" sz="1050" dirty="0">
                 <a:solidFill>
                   <a:srgbClr val="4A5578"/>
                 </a:solidFill>
@@ -7063,22 +7965,64 @@
                 <a:ea typeface="Arial" pitchFamily="34" charset="-122"/>
                 <a:cs typeface="Arial" pitchFamily="34" charset="-120"/>
               </a:rPr>
-              <a:t>O mesmo desenho do slide 9, com as caixas reais.</a:t>
-            </a:r>
-            <a:endParaRPr lang="en-US" sz="1150" dirty="0"/>
-          </a:p>
-        </p:txBody>
-      </p:sp>
-      <p:sp>
-        <p:nvSpPr>
-          <p:cNvPr id="12" name="Text 10"/>
-          <p:cNvSpPr/>
-          <p:nvPr/>
-        </p:nvSpPr>
-        <p:spPr>
-          <a:xfrm>
-            <a:off x="4630826" y="3017520"/>
-            <a:ext cx="2930042" cy="1097280"/>
+              <a:t>Implemento e </a:t>
+            </a:r>
+            <a:pPr indent="0" marL="0">
+              <a:lnSpc>
+                <a:spcPts val="1550"/>
+              </a:lnSpc>
+              <a:buNone/>
+            </a:pPr>
+            <a:r>
+              <a:rPr lang="en-US" sz="1050" b="1" dirty="0">
+                <a:solidFill>
+                  <a:srgbClr val="16224E"/>
+                </a:solidFill>
+                <a:latin typeface="Arial" pitchFamily="34" charset="0"/>
+                <a:ea typeface="Arial" pitchFamily="34" charset="-122"/>
+                <a:cs typeface="Arial" pitchFamily="34" charset="-120"/>
+              </a:rPr>
+              <a:t>testo</a:t>
+            </a:r>
+            <a:endParaRPr lang="en-US" sz="1050" dirty="0"/>
+          </a:p>
+        </p:txBody>
+      </p:sp>
+      <p:sp>
+        <p:nvSpPr>
+          <p:cNvPr id="33" name="Shape 31"/>
+          <p:cNvSpPr/>
+          <p:nvPr/>
+        </p:nvSpPr>
+        <p:spPr>
+          <a:xfrm>
+            <a:off x="9280931" y="3648456"/>
+            <a:ext cx="64008" cy="64008"/>
+          </a:xfrm>
+          <a:prstGeom prst="ellipse">
+            <a:avLst/>
+          </a:prstGeom>
+          <a:solidFill>
+            <a:srgbClr val="C3BBD2"/>
+          </a:solidFill>
+          <a:ln w="12700">
+            <a:solidFill>
+              <a:srgbClr val="333333"/>
+            </a:solidFill>
+            <a:prstDash val="solid"/>
+          </a:ln>
+        </p:spPr>
+      </p:sp>
+      <p:sp>
+        <p:nvSpPr>
+          <p:cNvPr id="34" name="Text 32"/>
+          <p:cNvSpPr/>
+          <p:nvPr/>
+        </p:nvSpPr>
+        <p:spPr>
+          <a:xfrm>
+            <a:off x="9445523" y="3584448"/>
+            <a:ext cx="1831772" cy="804672"/>
           </a:xfrm>
           <a:prstGeom prst="rect">
             <a:avLst/>
@@ -7092,101 +8036,77 @@
           <a:p>
             <a:pPr indent="0" marL="0">
               <a:lnSpc>
-                <a:spcPts val="1450"/>
-              </a:lnSpc>
-              <a:buNone/>
-            </a:pPr>
-            <a:r>
-              <a:rPr lang="en-US" sz="1000" i="1" dirty="0">
-                <a:solidFill>
-                  <a:srgbClr val="A08BAA"/>
-                </a:solidFill>
-                <a:latin typeface="Arial" pitchFamily="34" charset="0"/>
-                <a:ea typeface="Arial" pitchFamily="34" charset="-122"/>
-                <a:cs typeface="Arial" pitchFamily="34" charset="-120"/>
-              </a:rPr>
-              <a:t>“N caixas → X Python · Y IA · Z humano”. Se a maioria virou Python, diga isso em voz alta: é o ponto da palestra.</a:t>
-            </a:r>
-            <a:endParaRPr lang="en-US" sz="1000" dirty="0"/>
-          </a:p>
-        </p:txBody>
-      </p:sp>
-      <p:sp>
-        <p:nvSpPr>
-          <p:cNvPr id="13" name="Shape 11"/>
-          <p:cNvSpPr/>
-          <p:nvPr/>
-        </p:nvSpPr>
-        <p:spPr>
-          <a:xfrm>
-            <a:off x="8091221" y="1965960"/>
-            <a:ext cx="3442106" cy="2286000"/>
-          </a:xfrm>
-          <a:prstGeom prst="roundRect">
-            <a:avLst>
-              <a:gd name="adj" fmla="val 4000"/>
-            </a:avLst>
+                <a:spcPts val="1550"/>
+              </a:lnSpc>
+              <a:buNone/>
+            </a:pPr>
+            <a:r>
+              <a:rPr lang="en-US" sz="1050" b="1" dirty="0">
+                <a:solidFill>
+                  <a:srgbClr val="16224E"/>
+                </a:solidFill>
+                <a:latin typeface="Arial" pitchFamily="34" charset="0"/>
+                <a:ea typeface="Arial" pitchFamily="34" charset="-122"/>
+                <a:cs typeface="Arial" pitchFamily="34" charset="-120"/>
+              </a:rPr>
+              <a:t>Apresento e pego feedback</a:t>
+            </a:r>
+            <a:pPr indent="0" marL="0">
+              <a:lnSpc>
+                <a:spcPts val="1550"/>
+              </a:lnSpc>
+              <a:buNone/>
+            </a:pPr>
+            <a:r>
+              <a:rPr lang="en-US" sz="1050" dirty="0">
+                <a:solidFill>
+                  <a:srgbClr val="4A5578"/>
+                </a:solidFill>
+                <a:latin typeface="Arial" pitchFamily="34" charset="0"/>
+                <a:ea typeface="Arial" pitchFamily="34" charset="-122"/>
+                <a:cs typeface="Arial" pitchFamily="34" charset="-120"/>
+              </a:rPr>
+              <a:t>: resolve mesmo a necessidade?</a:t>
+            </a:r>
+            <a:endParaRPr lang="en-US" sz="1050" dirty="0"/>
+          </a:p>
+        </p:txBody>
+      </p:sp>
+      <p:sp>
+        <p:nvSpPr>
+          <p:cNvPr id="35" name="Shape 33"/>
+          <p:cNvSpPr/>
+          <p:nvPr/>
+        </p:nvSpPr>
+        <p:spPr>
+          <a:xfrm>
+            <a:off x="9280931" y="4471416"/>
+            <a:ext cx="64008" cy="64008"/>
+          </a:xfrm>
+          <a:prstGeom prst="ellipse">
+            <a:avLst/>
           </a:prstGeom>
           <a:solidFill>
-            <a:srgbClr val="FEF6FA"/>
+            <a:srgbClr val="C3BBD2"/>
           </a:solidFill>
-          <a:ln w="15875">
+          <a:ln w="12700">
             <a:solidFill>
-              <a:srgbClr val="E80070"/>
+              <a:srgbClr val="333333"/>
             </a:solidFill>
-            <a:prstDash val="dash"/>
+            <a:prstDash val="solid"/>
           </a:ln>
         </p:spPr>
       </p:sp>
       <p:sp>
         <p:nvSpPr>
-          <p:cNvPr id="14" name="Text 12"/>
-          <p:cNvSpPr/>
-          <p:nvPr/>
-        </p:nvSpPr>
-        <p:spPr>
-          <a:xfrm>
-            <a:off x="8347253" y="2176272"/>
-            <a:ext cx="2930042" cy="201168"/>
-          </a:xfrm>
-          <a:prstGeom prst="rect">
-            <a:avLst/>
-          </a:prstGeom>
-          <a:noFill/>
-          <a:ln/>
-        </p:spPr>
-        <p:txBody>
-          <a:bodyPr wrap="square" lIns="0" tIns="0" rIns="0" bIns="0" rtlCol="0" anchor="ctr"/>
-          <a:lstStyle/>
-          <a:p>
-            <a:pPr indent="0" marL="0">
-              <a:buNone/>
-            </a:pPr>
-            <a:r>
-              <a:rPr lang="en-US" sz="850" b="1" spc="100" kern="0" dirty="0">
-                <a:solidFill>
-                  <a:srgbClr val="E80070"/>
-                </a:solidFill>
-                <a:latin typeface="Courier New" pitchFamily="34" charset="0"/>
-                <a:ea typeface="Courier New" pitchFamily="34" charset="-122"/>
-                <a:cs typeface="Courier New" pitchFamily="34" charset="-120"/>
-              </a:rPr>
-              <a:t>O QUE QUEBROU</a:t>
-            </a:r>
-            <a:endParaRPr lang="en-US" sz="850" dirty="0"/>
-          </a:p>
-        </p:txBody>
-      </p:sp>
-      <p:sp>
-        <p:nvSpPr>
-          <p:cNvPr id="15" name="Text 13"/>
-          <p:cNvSpPr/>
-          <p:nvPr/>
-        </p:nvSpPr>
-        <p:spPr>
-          <a:xfrm>
-            <a:off x="8347253" y="2432304"/>
-            <a:ext cx="2930042" cy="548640"/>
+          <p:cNvPr id="36" name="Text 34"/>
+          <p:cNvSpPr/>
+          <p:nvPr/>
+        </p:nvSpPr>
+        <p:spPr>
+          <a:xfrm>
+            <a:off x="9445523" y="4407408"/>
+            <a:ext cx="1831772" cy="804672"/>
           </a:xfrm>
           <a:prstGeom prst="rect">
             <a:avLst/>
@@ -7200,12 +8120,12 @@
           <a:p>
             <a:pPr indent="0" marL="0">
               <a:lnSpc>
-                <a:spcPts val="1700"/>
-              </a:lnSpc>
-              <a:buNone/>
-            </a:pPr>
-            <a:r>
-              <a:rPr lang="en-US" sz="1150" dirty="0">
+                <a:spcPts val="1550"/>
+              </a:lnSpc>
+              <a:buNone/>
+            </a:pPr>
+            <a:r>
+              <a:rPr lang="en-US" sz="1050" dirty="0">
                 <a:solidFill>
                   <a:srgbClr val="4A5578"/>
                 </a:solidFill>
@@ -7213,63 +8133,21 @@
                 <a:ea typeface="Arial" pitchFamily="34" charset="-122"/>
                 <a:cs typeface="Arial" pitchFamily="34" charset="-120"/>
               </a:rPr>
-              <a:t>Um número de antes → depois que você defenda no Q&amp;A.</a:t>
-            </a:r>
-            <a:endParaRPr lang="en-US" sz="1150" dirty="0"/>
-          </a:p>
-        </p:txBody>
-      </p:sp>
-      <p:sp>
-        <p:nvSpPr>
-          <p:cNvPr id="16" name="Text 14"/>
-          <p:cNvSpPr/>
-          <p:nvPr/>
-        </p:nvSpPr>
-        <p:spPr>
-          <a:xfrm>
-            <a:off x="8347253" y="3017520"/>
-            <a:ext cx="2930042" cy="1097280"/>
-          </a:xfrm>
-          <a:prstGeom prst="rect">
-            <a:avLst/>
-          </a:prstGeom>
-          <a:noFill/>
-          <a:ln/>
-        </p:spPr>
-        <p:txBody>
-          <a:bodyPr wrap="square" lIns="0" tIns="0" rIns="0" bIns="0" rtlCol="0" anchor="t"/>
-          <a:lstStyle/>
-          <a:p>
-            <a:pPr indent="0" marL="0">
-              <a:lnSpc>
-                <a:spcPts val="1450"/>
-              </a:lnSpc>
-              <a:buNone/>
-            </a:pPr>
-            <a:r>
-              <a:rPr lang="en-US" sz="1000" i="1" dirty="0">
-                <a:solidFill>
-                  <a:srgbClr val="A08BAA"/>
-                </a:solidFill>
-                <a:latin typeface="Arial" pitchFamily="34" charset="0"/>
-                <a:ea typeface="Arial" pitchFamily="34" charset="-122"/>
-                <a:cs typeface="Arial" pitchFamily="34" charset="-120"/>
-              </a:rPr>
-              <a:t>E a falha: de preferência uma em que o modelo errou com confiança e você só descobriu depois. Como detectou e qual guarda-corpo entrou.</a:t>
-            </a:r>
-            <a:endParaRPr lang="en-US" sz="1000" dirty="0"/>
-          </a:p>
-        </p:txBody>
-      </p:sp>
-      <p:sp>
-        <p:nvSpPr>
-          <p:cNvPr id="17" name="Shape 15"/>
-          <p:cNvSpPr/>
-          <p:nvPr/>
-        </p:nvSpPr>
-        <p:spPr>
-          <a:xfrm>
-            <a:off x="658368" y="4846320"/>
+              <a:t>Ajusto se precisar</a:t>
+            </a:r>
+            <a:endParaRPr lang="en-US" sz="1050" dirty="0"/>
+          </a:p>
+        </p:txBody>
+      </p:sp>
+      <p:sp>
+        <p:nvSpPr>
+          <p:cNvPr id="37" name="Shape 35"/>
+          <p:cNvSpPr/>
+          <p:nvPr/>
+        </p:nvSpPr>
+        <p:spPr>
+          <a:xfrm>
+            <a:off x="658368" y="5321808"/>
             <a:ext cx="10874959" cy="859536"/>
           </a:xfrm>
           <a:prstGeom prst="roundRect">
@@ -7290,13 +8168,13 @@
       </p:sp>
       <p:sp>
         <p:nvSpPr>
-          <p:cNvPr id="18" name="Shape 16"/>
-          <p:cNvSpPr/>
-          <p:nvPr/>
-        </p:nvSpPr>
-        <p:spPr>
-          <a:xfrm>
-            <a:off x="658368" y="4846320"/>
+          <p:cNvPr id="38" name="Shape 36"/>
+          <p:cNvSpPr/>
+          <p:nvPr/>
+        </p:nvSpPr>
+        <p:spPr>
+          <a:xfrm>
+            <a:off x="658368" y="5321808"/>
             <a:ext cx="45720" cy="859536"/>
           </a:xfrm>
           <a:prstGeom prst="rect">
@@ -7315,13 +8193,13 @@
       </p:sp>
       <p:sp>
         <p:nvSpPr>
-          <p:cNvPr id="19" name="Text 17"/>
-          <p:cNvSpPr/>
-          <p:nvPr/>
-        </p:nvSpPr>
-        <p:spPr>
-          <a:xfrm>
-            <a:off x="914400" y="4937760"/>
+          <p:cNvPr id="39" name="Text 37"/>
+          <p:cNvSpPr/>
+          <p:nvPr/>
+        </p:nvSpPr>
+        <p:spPr>
+          <a:xfrm>
+            <a:off x="914400" y="5413248"/>
             <a:ext cx="7315200" cy="201168"/>
           </a:xfrm>
           <a:prstGeom prst="rect">
@@ -7346,7 +8224,7 @@
                 <a:ea typeface="Arial" pitchFamily="34" charset="-122"/>
                 <a:cs typeface="Arial" pitchFamily="34" charset="-120"/>
               </a:rPr>
-              <a:t>AINDA A PREENCHER</a:t>
+              <a:t>A ORDEM DENTRO DA FASE 3 NÃO É ACASO</a:t>
             </a:r>
             <a:endParaRPr lang="en-US" sz="950" dirty="0"/>
           </a:p>
@@ -7354,13 +8232,13 @@
       </p:sp>
       <p:sp>
         <p:nvSpPr>
-          <p:cNvPr id="20" name="Text 18"/>
-          <p:cNvSpPr/>
-          <p:nvPr/>
-        </p:nvSpPr>
-        <p:spPr>
-          <a:xfrm>
-            <a:off x="914400" y="5157216"/>
+          <p:cNvPr id="40" name="Text 38"/>
+          <p:cNvSpPr/>
+          <p:nvPr/>
+        </p:nvSpPr>
+        <p:spPr>
+          <a:xfrm>
+            <a:off x="914400" y="5632704"/>
             <a:ext cx="10362895" cy="475488"/>
           </a:xfrm>
           <a:prstGeom prst="rect">
@@ -7388,7 +8266,7 @@
                 <a:ea typeface="Arial" pitchFamily="34" charset="-122"/>
                 <a:cs typeface="Arial" pitchFamily="34" charset="-120"/>
               </a:rPr>
-              <a:t>Este slide vira </a:t>
+              <a:t>O determinístico vem </a:t>
             </a:r>
             <a:pPr indent="0" marL="0">
               <a:lnSpc>
@@ -7405,7 +8283,7 @@
                 <a:ea typeface="Arial" pitchFamily="34" charset="-122"/>
                 <a:cs typeface="Arial" pitchFamily="34" charset="-120"/>
               </a:rPr>
-              <a:t>dois ou três</a:t>
+              <a:t>antes</a:t>
             </a:r>
             <a:pPr indent="0" marL="0">
               <a:lnSpc>
@@ -7422,7 +8300,7 @@
                 <a:ea typeface="Arial" pitchFamily="34" charset="-122"/>
                 <a:cs typeface="Arial" pitchFamily="34" charset="-120"/>
               </a:rPr>
-              <a:t> quando o caso estiver definido: um do processo e da conversa, um do fluxo pintado, um do resultado e das cicatrizes. A estrutura já está de pé — falta o conteúdo.</a:t>
+              <a:t> da IA. É a mesma cascata do slide 8, agora com as mãos no teclado: eu escrevo os if primeiro e só depois olho o que sobrou. O que sobra costuma ser bem menos do que parecia no começo.</a:t>
             </a:r>
             <a:endParaRPr lang="en-US" sz="1200" dirty="0"/>
           </a:p>
@@ -7430,7 +8308,7 @@
       </p:sp>
       <p:sp>
         <p:nvSpPr>
-          <p:cNvPr id="21" name="Text 19"/>
+          <p:cNvPr id="41" name="Text 39"/>
           <p:cNvSpPr/>
           <p:nvPr/>
         </p:nvSpPr>
@@ -7469,7 +8347,7 @@
       </p:sp>
       <p:sp>
         <p:nvSpPr>
-          <p:cNvPr id="22" name="Text 20"/>
+          <p:cNvPr id="42" name="Text 40"/>
           <p:cNvSpPr/>
           <p:nvPr/>
         </p:nvSpPr>
@@ -7500,7 +8378,7 @@
                 <a:ea typeface="Arial" pitchFamily="34" charset="-122"/>
                 <a:cs typeface="Arial" pitchFamily="34" charset="-120"/>
               </a:rPr>
-              <a:t>05 · O caso</a:t>
+              <a:t>05 · Na prática</a:t>
             </a:r>
             <a:endParaRPr lang="en-US" sz="900" dirty="0"/>
           </a:p>
@@ -7604,7 +8482,7 @@
         <p:spPr>
           <a:xfrm>
             <a:off x="658368" y="777240"/>
-            <a:ext cx="10874959" cy="594360"/>
+            <a:ext cx="10874959" cy="566928"/>
           </a:xfrm>
           <a:prstGeom prst="rect">
             <a:avLst/>
@@ -7618,118 +8496,145 @@
           <a:p>
             <a:pPr indent="0" marL="0">
               <a:lnSpc>
-                <a:spcPts val="3000"/>
-              </a:lnSpc>
-              <a:buNone/>
-            </a:pPr>
-            <a:r>
-              <a:rPr lang="en-US" sz="2800" b="1" spc="-62" kern="0" dirty="0">
+                <a:spcPts val="2700"/>
+              </a:lnSpc>
+              <a:buNone/>
+            </a:pPr>
+            <a:r>
+              <a:rPr lang="en-US" sz="2500" b="1" spc="-55" kern="0" dirty="0">
                 <a:solidFill>
                   <a:srgbClr val="16224E"/>
-                </a:solidFill>
-                <a:latin typeface="Arial" pitchFamily="34" charset="0"/>
-                <a:ea typeface="Arial" pitchFamily="34" charset="-122"/>
-                <a:cs typeface="Arial" pitchFamily="34" charset="-120"/>
-              </a:rPr>
-              <a:t>O kit — os arquivos que eu usei </a:t>
-            </a:r>
-            <a:pPr indent="0" marL="0">
-              <a:lnSpc>
-                <a:spcPts val="3000"/>
-              </a:lnSpc>
-              <a:buNone/>
-            </a:pPr>
-            <a:r>
-              <a:rPr lang="en-US" sz="2800" b="1" spc="-62" kern="0" dirty="0">
-                <a:solidFill>
-                  <a:srgbClr val="E80070"/>
-                </a:solidFill>
-                <a:latin typeface="Arial" pitchFamily="34" charset="0"/>
-                <a:ea typeface="Arial" pitchFamily="34" charset="-122"/>
-                <a:cs typeface="Arial" pitchFamily="34" charset="-120"/>
-              </a:rPr>
-              <a:t>pra montar tudo isso</a:t>
-            </a:r>
-            <a:endParaRPr lang="en-US" sz="2800" dirty="0"/>
-          </a:p>
-        </p:txBody>
-      </p:sp>
-      <p:sp>
-        <p:nvSpPr>
-          <p:cNvPr id="5" name="Shape 3"/>
-          <p:cNvSpPr/>
-          <p:nvPr/>
-        </p:nvSpPr>
-        <p:spPr>
-          <a:xfrm>
-            <a:off x="658368" y="1810512"/>
-            <a:ext cx="10874959" cy="457200"/>
-          </a:xfrm>
-          <a:prstGeom prst="roundRect">
-            <a:avLst>
-              <a:gd name="adj" fmla="val 14000"/>
-            </a:avLst>
-          </a:prstGeom>
-          <a:solidFill>
-            <a:srgbClr val="FFFFFF"/>
-          </a:solidFill>
-          <a:ln w="12700">
-            <a:solidFill>
-              <a:srgbClr val="E3DCEC"/>
-            </a:solidFill>
-            <a:prstDash val="solid"/>
-          </a:ln>
-        </p:spPr>
-      </p:sp>
-      <p:sp>
-        <p:nvSpPr>
-          <p:cNvPr id="6" name="Text 4"/>
-          <p:cNvSpPr/>
-          <p:nvPr/>
-        </p:nvSpPr>
-        <p:spPr>
-          <a:xfrm>
-            <a:off x="914400" y="1911096"/>
-            <a:ext cx="2377440" cy="256032"/>
-          </a:xfrm>
-          <a:prstGeom prst="rect">
-            <a:avLst/>
-          </a:prstGeom>
-          <a:noFill/>
-          <a:ln/>
-        </p:spPr>
-        <p:txBody>
-          <a:bodyPr wrap="square" lIns="0" tIns="0" rIns="0" bIns="0" rtlCol="0" anchor="ctr"/>
-          <a:lstStyle/>
-          <a:p>
-            <a:pPr indent="0" marL="0">
-              <a:buNone/>
-            </a:pPr>
-            <a:r>
-              <a:rPr lang="en-US" sz="1000" dirty="0">
-                <a:solidFill>
-                  <a:srgbClr val="E80070"/>
                 </a:solidFill>
                 <a:latin typeface="Courier New" pitchFamily="34" charset="0"/>
                 <a:ea typeface="Courier New" pitchFamily="34" charset="-122"/>
                 <a:cs typeface="Courier New" pitchFamily="34" charset="-120"/>
               </a:rPr>
-              <a:t>7-perguntas.md</a:t>
-            </a:r>
-            <a:endParaRPr lang="en-US" sz="1000" dirty="0"/>
-          </a:p>
-        </p:txBody>
-      </p:sp>
-      <p:sp>
-        <p:nvSpPr>
-          <p:cNvPr id="7" name="Text 5"/>
-          <p:cNvSpPr/>
-          <p:nvPr/>
-        </p:nvSpPr>
-        <p:spPr>
-          <a:xfrm>
-            <a:off x="3447288" y="1856232"/>
-            <a:ext cx="7811719" cy="420624"/>
+              <a:t>mapear-processo</a:t>
+            </a:r>
+            <a:pPr indent="0" marL="0">
+              <a:lnSpc>
+                <a:spcPts val="2700"/>
+              </a:lnSpc>
+              <a:buNone/>
+            </a:pPr>
+            <a:r>
+              <a:rPr lang="en-US" sz="2500" b="1" spc="-55" kern="0" dirty="0">
+                <a:solidFill>
+                  <a:srgbClr val="16224E"/>
+                </a:solidFill>
+                <a:latin typeface="Arial" pitchFamily="34" charset="0"/>
+                <a:ea typeface="Arial" pitchFamily="34" charset="-122"/>
+                <a:cs typeface="Arial" pitchFamily="34" charset="-120"/>
+              </a:rPr>
+              <a:t> — </a:t>
+            </a:r>
+            <a:pPr indent="0" marL="0">
+              <a:lnSpc>
+                <a:spcPts val="2700"/>
+              </a:lnSpc>
+              <a:buNone/>
+            </a:pPr>
+            <a:r>
+              <a:rPr lang="en-US" sz="2500" b="1" spc="-55" kern="0" dirty="0">
+                <a:solidFill>
+                  <a:srgbClr val="E80070"/>
+                </a:solidFill>
+                <a:latin typeface="Arial" pitchFamily="34" charset="0"/>
+                <a:ea typeface="Arial" pitchFamily="34" charset="-122"/>
+                <a:cs typeface="Arial" pitchFamily="34" charset="-120"/>
+              </a:rPr>
+              <a:t>o método desta palestra, instalável</a:t>
+            </a:r>
+            <a:endParaRPr lang="en-US" sz="2500" dirty="0"/>
+          </a:p>
+        </p:txBody>
+      </p:sp>
+      <p:sp>
+        <p:nvSpPr>
+          <p:cNvPr id="5" name="Text 3"/>
+          <p:cNvSpPr/>
+          <p:nvPr/>
+        </p:nvSpPr>
+        <p:spPr>
+          <a:xfrm>
+            <a:off x="658368" y="1874520"/>
+            <a:ext cx="5394960" cy="768096"/>
+          </a:xfrm>
+          <a:prstGeom prst="rect">
+            <a:avLst/>
+          </a:prstGeom>
+          <a:noFill/>
+          <a:ln/>
+        </p:spPr>
+        <p:txBody>
+          <a:bodyPr wrap="square" lIns="0" tIns="0" rIns="0" bIns="0" rtlCol="0" anchor="t"/>
+          <a:lstStyle/>
+          <a:p>
+            <a:pPr indent="0" marL="0">
+              <a:lnSpc>
+                <a:spcPts val="1950"/>
+              </a:lnSpc>
+              <a:buNone/>
+            </a:pPr>
+            <a:r>
+              <a:rPr lang="en-US" sz="1300" dirty="0">
+                <a:solidFill>
+                  <a:srgbClr val="4A5578"/>
+                </a:solidFill>
+                <a:latin typeface="Arial" pitchFamily="34" charset="0"/>
+                <a:ea typeface="Arial" pitchFamily="34" charset="-122"/>
+                <a:cs typeface="Arial" pitchFamily="34" charset="-120"/>
+              </a:rPr>
+              <a:t>Você descreve um processo em português corrido. Ela devolve o fluxo desenhado, com </a:t>
+            </a:r>
+            <a:pPr indent="0" marL="0">
+              <a:lnSpc>
+                <a:spcPts val="1950"/>
+              </a:lnSpc>
+              <a:buNone/>
+            </a:pPr>
+            <a:r>
+              <a:rPr lang="en-US" sz="1300" b="1" dirty="0">
+                <a:solidFill>
+                  <a:srgbClr val="16224E"/>
+                </a:solidFill>
+                <a:latin typeface="Arial" pitchFamily="34" charset="0"/>
+                <a:ea typeface="Arial" pitchFamily="34" charset="-122"/>
+                <a:cs typeface="Arial" pitchFamily="34" charset="-120"/>
+              </a:rPr>
+              <a:t>cada etapa classificada</a:t>
+            </a:r>
+            <a:pPr indent="0" marL="0">
+              <a:lnSpc>
+                <a:spcPts val="1950"/>
+              </a:lnSpc>
+              <a:buNone/>
+            </a:pPr>
+            <a:r>
+              <a:rPr lang="en-US" sz="1300" dirty="0">
+                <a:solidFill>
+                  <a:srgbClr val="4A5578"/>
+                </a:solidFill>
+                <a:latin typeface="Arial" pitchFamily="34" charset="0"/>
+                <a:ea typeface="Arial" pitchFamily="34" charset="-122"/>
+                <a:cs typeface="Arial" pitchFamily="34" charset="-120"/>
+              </a:rPr>
+              <a:t> e o motivo de cada classificação.</a:t>
+            </a:r>
+            <a:endParaRPr lang="en-US" sz="1300" dirty="0"/>
+          </a:p>
+        </p:txBody>
+      </p:sp>
+      <p:sp>
+        <p:nvSpPr>
+          <p:cNvPr id="6" name="Text 4"/>
+          <p:cNvSpPr/>
+          <p:nvPr/>
+        </p:nvSpPr>
+        <p:spPr>
+          <a:xfrm>
+            <a:off x="658368" y="2825496"/>
+            <a:ext cx="1051560" cy="219456"/>
           </a:xfrm>
           <a:prstGeom prst="rect">
             <a:avLst/>
@@ -7742,96 +8647,10 @@
           <a:lstStyle/>
           <a:p>
             <a:pPr indent="0" marL="0">
-              <a:lnSpc>
-                <a:spcPts val="1550"/>
-              </a:lnSpc>
-              <a:buNone/>
-            </a:pPr>
-            <a:r>
-              <a:rPr lang="en-US" sz="1050" b="1" dirty="0">
-                <a:solidFill>
-                  <a:srgbClr val="16224E"/>
-                </a:solidFill>
-                <a:latin typeface="Arial" pitchFamily="34" charset="0"/>
-                <a:ea typeface="Arial" pitchFamily="34" charset="-122"/>
-                <a:cs typeface="Arial" pitchFamily="34" charset="-120"/>
-              </a:rPr>
-              <a:t>O roteiro de entrevista</a:t>
-            </a:r>
-            <a:pPr indent="0" marL="0">
-              <a:lnSpc>
-                <a:spcPts val="1550"/>
-              </a:lnSpc>
-              <a:buNone/>
-            </a:pPr>
-            <a:r>
-              <a:rPr lang="en-US" sz="1050" dirty="0">
-                <a:solidFill>
-                  <a:srgbClr val="4A5578"/>
-                </a:solidFill>
-                <a:latin typeface="Arial" pitchFamily="34" charset="0"/>
-                <a:ea typeface="Arial" pitchFamily="34" charset="-122"/>
-                <a:cs typeface="Arial" pitchFamily="34" charset="-120"/>
-              </a:rPr>
-              <a:t> do slide 4, com o que anotar em cada resposta.</a:t>
-            </a:r>
-            <a:endParaRPr lang="en-US" sz="1050" dirty="0"/>
-          </a:p>
-        </p:txBody>
-      </p:sp>
-      <p:sp>
-        <p:nvSpPr>
-          <p:cNvPr id="8" name="Shape 6"/>
-          <p:cNvSpPr/>
-          <p:nvPr/>
-        </p:nvSpPr>
-        <p:spPr>
-          <a:xfrm>
-            <a:off x="658368" y="2340864"/>
-            <a:ext cx="10874959" cy="457200"/>
-          </a:xfrm>
-          <a:prstGeom prst="roundRect">
-            <a:avLst>
-              <a:gd name="adj" fmla="val 14000"/>
-            </a:avLst>
-          </a:prstGeom>
-          <a:solidFill>
-            <a:srgbClr val="FFFFFF"/>
-          </a:solidFill>
-          <a:ln w="12700">
-            <a:solidFill>
-              <a:srgbClr val="E3DCEC"/>
-            </a:solidFill>
-            <a:prstDash val="solid"/>
-          </a:ln>
-        </p:spPr>
-      </p:sp>
-      <p:sp>
-        <p:nvSpPr>
-          <p:cNvPr id="9" name="Text 7"/>
-          <p:cNvSpPr/>
-          <p:nvPr/>
-        </p:nvSpPr>
-        <p:spPr>
-          <a:xfrm>
-            <a:off x="914400" y="2441448"/>
-            <a:ext cx="2377440" cy="256032"/>
-          </a:xfrm>
-          <a:prstGeom prst="rect">
-            <a:avLst/>
-          </a:prstGeom>
-          <a:noFill/>
-          <a:ln/>
-        </p:spPr>
-        <p:txBody>
-          <a:bodyPr wrap="square" lIns="0" tIns="0" rIns="0" bIns="0" rtlCol="0" anchor="ctr"/>
-          <a:lstStyle/>
-          <a:p>
-            <a:pPr indent="0" marL="0">
-              <a:buNone/>
-            </a:pPr>
-            <a:r>
-              <a:rPr lang="en-US" sz="1000" dirty="0">
+              <a:buNone/>
+            </a:pPr>
+            <a:r>
+              <a:rPr lang="en-US" sz="850" b="1" spc="110" kern="0" dirty="0">
                 <a:solidFill>
                   <a:srgbClr val="E80070"/>
                 </a:solidFill>
@@ -7839,22 +8658,166 @@
                 <a:ea typeface="Courier New" pitchFamily="34" charset="-122"/>
                 <a:cs typeface="Courier New" pitchFamily="34" charset="-120"/>
               </a:rPr>
-              <a:t>quadro-notacao</a:t>
-            </a:r>
-            <a:endParaRPr lang="en-US" sz="1000" dirty="0"/>
-          </a:p>
-        </p:txBody>
-      </p:sp>
-      <p:sp>
-        <p:nvSpPr>
-          <p:cNvPr id="10" name="Text 8"/>
-          <p:cNvSpPr/>
-          <p:nvPr/>
-        </p:nvSpPr>
-        <p:spPr>
-          <a:xfrm>
-            <a:off x="3447288" y="2386584"/>
-            <a:ext cx="7811719" cy="420624"/>
+              <a:t>ENTREGA</a:t>
+            </a:r>
+            <a:endParaRPr lang="en-US" sz="850" dirty="0"/>
+          </a:p>
+        </p:txBody>
+      </p:sp>
+      <p:sp>
+        <p:nvSpPr>
+          <p:cNvPr id="7" name="Text 5"/>
+          <p:cNvSpPr/>
+          <p:nvPr/>
+        </p:nvSpPr>
+        <p:spPr>
+          <a:xfrm>
+            <a:off x="1865376" y="2798064"/>
+            <a:ext cx="4187952" cy="713232"/>
+          </a:xfrm>
+          <a:prstGeom prst="rect">
+            <a:avLst/>
+          </a:prstGeom>
+          <a:noFill/>
+          <a:ln/>
+        </p:spPr>
+        <p:txBody>
+          <a:bodyPr wrap="square" lIns="0" tIns="0" rIns="0" bIns="0" rtlCol="0" anchor="t"/>
+          <a:lstStyle/>
+          <a:p>
+            <a:pPr indent="0" marL="0">
+              <a:lnSpc>
+                <a:spcPts val="1600"/>
+              </a:lnSpc>
+              <a:buNone/>
+            </a:pPr>
+            <a:r>
+              <a:rPr lang="en-US" sz="1100" dirty="0">
+                <a:solidFill>
+                  <a:srgbClr val="4A5578"/>
+                </a:solidFill>
+                <a:latin typeface="Arial" pitchFamily="34" charset="0"/>
+                <a:ea typeface="Arial" pitchFamily="34" charset="-122"/>
+                <a:cs typeface="Arial" pitchFamily="34" charset="-120"/>
+              </a:rPr>
+              <a:t>um </a:t>
+            </a:r>
+            <a:pPr indent="0" marL="0">
+              <a:lnSpc>
+                <a:spcPts val="1600"/>
+              </a:lnSpc>
+              <a:buNone/>
+            </a:pPr>
+            <a:r>
+              <a:rPr lang="en-US" sz="1100" b="1" dirty="0">
+                <a:solidFill>
+                  <a:srgbClr val="16224E"/>
+                </a:solidFill>
+                <a:latin typeface="Arial" pitchFamily="34" charset="0"/>
+                <a:ea typeface="Arial" pitchFamily="34" charset="-122"/>
+                <a:cs typeface="Arial" pitchFamily="34" charset="-120"/>
+              </a:rPr>
+              <a:t>HTML interativo</a:t>
+            </a:r>
+            <a:pPr indent="0" marL="0">
+              <a:lnSpc>
+                <a:spcPts val="1600"/>
+              </a:lnSpc>
+              <a:buNone/>
+            </a:pPr>
+            <a:r>
+              <a:rPr lang="en-US" sz="1100" dirty="0">
+                <a:solidFill>
+                  <a:srgbClr val="4A5578"/>
+                </a:solidFill>
+                <a:latin typeface="Arial" pitchFamily="34" charset="0"/>
+                <a:ea typeface="Arial" pitchFamily="34" charset="-122"/>
+                <a:cs typeface="Arial" pitchFamily="34" charset="-120"/>
+              </a:rPr>
+              <a:t> que abre sem internet · um </a:t>
+            </a:r>
+            <a:pPr indent="0" marL="0">
+              <a:lnSpc>
+                <a:spcPts val="1600"/>
+              </a:lnSpc>
+              <a:buNone/>
+            </a:pPr>
+            <a:r>
+              <a:rPr lang="en-US" sz="1100" b="1" dirty="0">
+                <a:solidFill>
+                  <a:srgbClr val="16224E"/>
+                </a:solidFill>
+                <a:latin typeface="Arial" pitchFamily="34" charset="0"/>
+                <a:ea typeface="Arial" pitchFamily="34" charset="-122"/>
+                <a:cs typeface="Arial" pitchFamily="34" charset="-120"/>
+              </a:rPr>
+              <a:t>JSON</a:t>
+            </a:r>
+            <a:pPr indent="0" marL="0">
+              <a:lnSpc>
+                <a:spcPts val="1600"/>
+              </a:lnSpc>
+              <a:buNone/>
+            </a:pPr>
+            <a:r>
+              <a:rPr lang="en-US" sz="1100" dirty="0">
+                <a:solidFill>
+                  <a:srgbClr val="4A5578"/>
+                </a:solidFill>
+                <a:latin typeface="Arial" pitchFamily="34" charset="0"/>
+                <a:ea typeface="Arial" pitchFamily="34" charset="-122"/>
+                <a:cs typeface="Arial" pitchFamily="34" charset="-120"/>
+              </a:rPr>
+              <a:t> pra outro agente consumir · o </a:t>
+            </a:r>
+            <a:pPr indent="0" marL="0">
+              <a:lnSpc>
+                <a:spcPts val="1600"/>
+              </a:lnSpc>
+              <a:buNone/>
+            </a:pPr>
+            <a:r>
+              <a:rPr lang="en-US" sz="1100" b="1" dirty="0">
+                <a:solidFill>
+                  <a:srgbClr val="16224E"/>
+                </a:solidFill>
+                <a:latin typeface="Arial" pitchFamily="34" charset="0"/>
+                <a:ea typeface="Arial" pitchFamily="34" charset="-122"/>
+                <a:cs typeface="Arial" pitchFamily="34" charset="-120"/>
+              </a:rPr>
+              <a:t>placar</a:t>
+            </a:r>
+            <a:pPr indent="0" marL="0">
+              <a:lnSpc>
+                <a:spcPts val="1600"/>
+              </a:lnSpc>
+              <a:buNone/>
+            </a:pPr>
+            <a:r>
+              <a:rPr lang="en-US" sz="1100" dirty="0">
+                <a:solidFill>
+                  <a:srgbClr val="4A5578"/>
+                </a:solidFill>
+                <a:latin typeface="Arial" pitchFamily="34" charset="0"/>
+                <a:ea typeface="Arial" pitchFamily="34" charset="-122"/>
+                <a:cs typeface="Arial" pitchFamily="34" charset="-120"/>
+              </a:rPr>
+              <a:t> do processo</a:t>
+            </a:r>
+            <a:endParaRPr lang="en-US" sz="1100" dirty="0"/>
+          </a:p>
+        </p:txBody>
+      </p:sp>
+      <p:sp>
+        <p:nvSpPr>
+          <p:cNvPr id="8" name="Text 6"/>
+          <p:cNvSpPr/>
+          <p:nvPr/>
+        </p:nvSpPr>
+        <p:spPr>
+          <a:xfrm>
+            <a:off x="658368" y="3648456"/>
+            <a:ext cx="1051560" cy="219456"/>
           </a:xfrm>
           <a:prstGeom prst="rect">
             <a:avLst/>
@@ -7867,96 +8830,10 @@
           <a:lstStyle/>
           <a:p>
             <a:pPr indent="0" marL="0">
-              <a:lnSpc>
-                <a:spcPts val="1550"/>
-              </a:lnSpc>
-              <a:buNone/>
-            </a:pPr>
-            <a:r>
-              <a:rPr lang="en-US" sz="1050" b="1" dirty="0">
-                <a:solidFill>
-                  <a:srgbClr val="16224E"/>
-                </a:solidFill>
-                <a:latin typeface="Arial" pitchFamily="34" charset="0"/>
-                <a:ea typeface="Arial" pitchFamily="34" charset="-122"/>
-                <a:cs typeface="Arial" pitchFamily="34" charset="-120"/>
-              </a:rPr>
-              <a:t>O quadro de notação no Miro</a:t>
-            </a:r>
-            <a:pPr indent="0" marL="0">
-              <a:lnSpc>
-                <a:spcPts val="1550"/>
-              </a:lnSpc>
-              <a:buNone/>
-            </a:pPr>
-            <a:r>
-              <a:rPr lang="en-US" sz="1050" dirty="0">
-                <a:solidFill>
-                  <a:srgbClr val="4A5578"/>
-                </a:solidFill>
-                <a:latin typeface="Arial" pitchFamily="34" charset="0"/>
-                <a:ea typeface="Arial" pitchFamily="34" charset="-122"/>
-                <a:cs typeface="Arial" pitchFamily="34" charset="-120"/>
-              </a:rPr>
-              <a:t> — duplica, troca os nomes das caixas, e já sai pronto pra editar junto.</a:t>
-            </a:r>
-            <a:endParaRPr lang="en-US" sz="1050" dirty="0"/>
-          </a:p>
-        </p:txBody>
-      </p:sp>
-      <p:sp>
-        <p:nvSpPr>
-          <p:cNvPr id="11" name="Shape 9"/>
-          <p:cNvSpPr/>
-          <p:nvPr/>
-        </p:nvSpPr>
-        <p:spPr>
-          <a:xfrm>
-            <a:off x="658368" y="2871216"/>
-            <a:ext cx="10874959" cy="457200"/>
-          </a:xfrm>
-          <a:prstGeom prst="roundRect">
-            <a:avLst>
-              <a:gd name="adj" fmla="val 14000"/>
-            </a:avLst>
-          </a:prstGeom>
-          <a:solidFill>
-            <a:srgbClr val="FFFFFF"/>
-          </a:solidFill>
-          <a:ln w="12700">
-            <a:solidFill>
-              <a:srgbClr val="E3DCEC"/>
-            </a:solidFill>
-            <a:prstDash val="solid"/>
-          </a:ln>
-        </p:spPr>
-      </p:sp>
-      <p:sp>
-        <p:nvSpPr>
-          <p:cNvPr id="12" name="Text 10"/>
-          <p:cNvSpPr/>
-          <p:nvPr/>
-        </p:nvSpPr>
-        <p:spPr>
-          <a:xfrm>
-            <a:off x="914400" y="2971800"/>
-            <a:ext cx="2377440" cy="256032"/>
-          </a:xfrm>
-          <a:prstGeom prst="rect">
-            <a:avLst/>
-          </a:prstGeom>
-          <a:noFill/>
-          <a:ln/>
-        </p:spPr>
-        <p:txBody>
-          <a:bodyPr wrap="square" lIns="0" tIns="0" rIns="0" bIns="0" rtlCol="0" anchor="ctr"/>
-          <a:lstStyle/>
-          <a:p>
-            <a:pPr indent="0" marL="0">
-              <a:buNone/>
-            </a:pPr>
-            <a:r>
-              <a:rPr lang="en-US" sz="1000" dirty="0">
+              <a:buNone/>
+            </a:pPr>
+            <a:r>
+              <a:rPr lang="en-US" sz="850" b="1" spc="110" kern="0" dirty="0">
                 <a:solidFill>
                   <a:srgbClr val="E80070"/>
                 </a:solidFill>
@@ -7964,22 +8841,132 @@
                 <a:ea typeface="Courier New" pitchFamily="34" charset="-122"/>
                 <a:cs typeface="Courier New" pitchFamily="34" charset="-120"/>
               </a:rPr>
-              <a:t>canvas.md</a:t>
-            </a:r>
-            <a:endParaRPr lang="en-US" sz="1000" dirty="0"/>
-          </a:p>
-        </p:txBody>
-      </p:sp>
-      <p:sp>
-        <p:nvSpPr>
-          <p:cNvPr id="13" name="Text 11"/>
-          <p:cNvSpPr/>
-          <p:nvPr/>
-        </p:nvSpPr>
-        <p:spPr>
-          <a:xfrm>
-            <a:off x="3447288" y="2916936"/>
-            <a:ext cx="7811719" cy="420624"/>
+              <a:t>NÃO FAZ</a:t>
+            </a:r>
+            <a:endParaRPr lang="en-US" sz="850" dirty="0"/>
+          </a:p>
+        </p:txBody>
+      </p:sp>
+      <p:sp>
+        <p:nvSpPr>
+          <p:cNvPr id="9" name="Text 7"/>
+          <p:cNvSpPr/>
+          <p:nvPr/>
+        </p:nvSpPr>
+        <p:spPr>
+          <a:xfrm>
+            <a:off x="1865376" y="3621024"/>
+            <a:ext cx="4187952" cy="713232"/>
+          </a:xfrm>
+          <a:prstGeom prst="rect">
+            <a:avLst/>
+          </a:prstGeom>
+          <a:noFill/>
+          <a:ln/>
+        </p:spPr>
+        <p:txBody>
+          <a:bodyPr wrap="square" lIns="0" tIns="0" rIns="0" bIns="0" rtlCol="0" anchor="t"/>
+          <a:lstStyle/>
+          <a:p>
+            <a:pPr indent="0" marL="0">
+              <a:lnSpc>
+                <a:spcPts val="1600"/>
+              </a:lnSpc>
+              <a:buNone/>
+            </a:pPr>
+            <a:r>
+              <a:rPr lang="en-US" sz="1100" dirty="0">
+                <a:solidFill>
+                  <a:srgbClr val="4A5578"/>
+                </a:solidFill>
+                <a:latin typeface="Arial" pitchFamily="34" charset="0"/>
+                <a:ea typeface="Arial" pitchFamily="34" charset="-122"/>
+                <a:cs typeface="Arial" pitchFamily="34" charset="-120"/>
+              </a:rPr>
+              <a:t>Não chuta. Quando a descrição não diz </a:t>
+            </a:r>
+            <a:pPr indent="0" marL="0">
+              <a:lnSpc>
+                <a:spcPts val="1600"/>
+              </a:lnSpc>
+              <a:buNone/>
+            </a:pPr>
+            <a:r>
+              <a:rPr lang="en-US" sz="1100" b="1" dirty="0">
+                <a:solidFill>
+                  <a:srgbClr val="16224E"/>
+                </a:solidFill>
+                <a:latin typeface="Arial" pitchFamily="34" charset="0"/>
+                <a:ea typeface="Arial" pitchFamily="34" charset="-122"/>
+                <a:cs typeface="Arial" pitchFamily="34" charset="-120"/>
+              </a:rPr>
+              <a:t>quanto custa errar</a:t>
+            </a:r>
+            <a:pPr indent="0" marL="0">
+              <a:lnSpc>
+                <a:spcPts val="1600"/>
+              </a:lnSpc>
+              <a:buNone/>
+            </a:pPr>
+            <a:r>
+              <a:rPr lang="en-US" sz="1100" dirty="0">
+                <a:solidFill>
+                  <a:srgbClr val="4A5578"/>
+                </a:solidFill>
+                <a:latin typeface="Arial" pitchFamily="34" charset="0"/>
+                <a:ea typeface="Arial" pitchFamily="34" charset="-122"/>
+                <a:cs typeface="Arial" pitchFamily="34" charset="-120"/>
+              </a:rPr>
+              <a:t> ou </a:t>
+            </a:r>
+            <a:pPr indent="0" marL="0">
+              <a:lnSpc>
+                <a:spcPts val="1600"/>
+              </a:lnSpc>
+              <a:buNone/>
+            </a:pPr>
+            <a:r>
+              <a:rPr lang="en-US" sz="1100" b="1" dirty="0">
+                <a:solidFill>
+                  <a:srgbClr val="16224E"/>
+                </a:solidFill>
+                <a:latin typeface="Arial" pitchFamily="34" charset="0"/>
+                <a:ea typeface="Arial" pitchFamily="34" charset="-122"/>
+                <a:cs typeface="Arial" pitchFamily="34" charset="-120"/>
+              </a:rPr>
+              <a:t>como a falha é percebida</a:t>
+            </a:r>
+            <a:pPr indent="0" marL="0">
+              <a:lnSpc>
+                <a:spcPts val="1600"/>
+              </a:lnSpc>
+              <a:buNone/>
+            </a:pPr>
+            <a:r>
+              <a:rPr lang="en-US" sz="1100" dirty="0">
+                <a:solidFill>
+                  <a:srgbClr val="4A5578"/>
+                </a:solidFill>
+                <a:latin typeface="Arial" pitchFamily="34" charset="0"/>
+                <a:ea typeface="Arial" pitchFamily="34" charset="-122"/>
+                <a:cs typeface="Arial" pitchFamily="34" charset="-120"/>
+              </a:rPr>
+              <a:t>, ela marca a etapa como indefinida e devolve a pergunta.</a:t>
+            </a:r>
+            <a:endParaRPr lang="en-US" sz="1100" dirty="0"/>
+          </a:p>
+        </p:txBody>
+      </p:sp>
+      <p:sp>
+        <p:nvSpPr>
+          <p:cNvPr id="10" name="Text 8"/>
+          <p:cNvSpPr/>
+          <p:nvPr/>
+        </p:nvSpPr>
+        <p:spPr>
+          <a:xfrm>
+            <a:off x="658368" y="4544568"/>
+            <a:ext cx="1051560" cy="219456"/>
           </a:xfrm>
           <a:prstGeom prst="rect">
             <a:avLst/>
@@ -7992,96 +8979,10 @@
           <a:lstStyle/>
           <a:p>
             <a:pPr indent="0" marL="0">
-              <a:lnSpc>
-                <a:spcPts val="1550"/>
-              </a:lnSpc>
-              <a:buNone/>
-            </a:pPr>
-            <a:r>
-              <a:rPr lang="en-US" sz="1050" b="1" dirty="0">
-                <a:solidFill>
-                  <a:srgbClr val="16224E"/>
-                </a:solidFill>
-                <a:latin typeface="Arial" pitchFamily="34" charset="0"/>
-                <a:ea typeface="Arial" pitchFamily="34" charset="-122"/>
-                <a:cs typeface="Arial" pitchFamily="34" charset="-120"/>
-              </a:rPr>
-              <a:t>Uma linha por caixa</a:t>
-            </a:r>
-            <a:pPr indent="0" marL="0">
-              <a:lnSpc>
-                <a:spcPts val="1550"/>
-              </a:lnSpc>
-              <a:buNone/>
-            </a:pPr>
-            <a:r>
-              <a:rPr lang="en-US" sz="1050" dirty="0">
-                <a:solidFill>
-                  <a:srgbClr val="4A5578"/>
-                </a:solidFill>
-                <a:latin typeface="Arial" pitchFamily="34" charset="0"/>
-                <a:ea typeface="Arial" pitchFamily="34" charset="-122"/>
-                <a:cs typeface="Arial" pitchFamily="34" charset="-120"/>
-              </a:rPr>
-              <a:t>: entrada, saída, dono, frequência, exceções, custo do erro.</a:t>
-            </a:r>
-            <a:endParaRPr lang="en-US" sz="1050" dirty="0"/>
-          </a:p>
-        </p:txBody>
-      </p:sp>
-      <p:sp>
-        <p:nvSpPr>
-          <p:cNvPr id="14" name="Shape 12"/>
-          <p:cNvSpPr/>
-          <p:nvPr/>
-        </p:nvSpPr>
-        <p:spPr>
-          <a:xfrm>
-            <a:off x="658368" y="3401568"/>
-            <a:ext cx="10874959" cy="457200"/>
-          </a:xfrm>
-          <a:prstGeom prst="roundRect">
-            <a:avLst>
-              <a:gd name="adj" fmla="val 14000"/>
-            </a:avLst>
-          </a:prstGeom>
-          <a:solidFill>
-            <a:srgbClr val="FFFFFF"/>
-          </a:solidFill>
-          <a:ln w="12700">
-            <a:solidFill>
-              <a:srgbClr val="E3DCEC"/>
-            </a:solidFill>
-            <a:prstDash val="solid"/>
-          </a:ln>
-        </p:spPr>
-      </p:sp>
-      <p:sp>
-        <p:nvSpPr>
-          <p:cNvPr id="15" name="Text 13"/>
-          <p:cNvSpPr/>
-          <p:nvPr/>
-        </p:nvSpPr>
-        <p:spPr>
-          <a:xfrm>
-            <a:off x="914400" y="3502152"/>
-            <a:ext cx="2377440" cy="256032"/>
-          </a:xfrm>
-          <a:prstGeom prst="rect">
-            <a:avLst/>
-          </a:prstGeom>
-          <a:noFill/>
-          <a:ln/>
-        </p:spPr>
-        <p:txBody>
-          <a:bodyPr wrap="square" lIns="0" tIns="0" rIns="0" bIns="0" rtlCol="0" anchor="ctr"/>
-          <a:lstStyle/>
-          <a:p>
-            <a:pPr indent="0" marL="0">
-              <a:buNone/>
-            </a:pPr>
-            <a:r>
-              <a:rPr lang="en-US" sz="1000" dirty="0">
+              <a:buNone/>
+            </a:pPr>
+            <a:r>
+              <a:rPr lang="en-US" sz="850" b="1" spc="110" kern="0" dirty="0">
                 <a:solidFill>
                   <a:srgbClr val="E80070"/>
                 </a:solidFill>
@@ -8089,191 +8990,50 @@
                 <a:ea typeface="Courier New" pitchFamily="34" charset="-122"/>
                 <a:cs typeface="Courier New" pitchFamily="34" charset="-120"/>
               </a:rPr>
-              <a:t>classificar.md</a:t>
-            </a:r>
-            <a:endParaRPr lang="en-US" sz="1000" dirty="0"/>
-          </a:p>
-        </p:txBody>
-      </p:sp>
-      <p:sp>
-        <p:nvSpPr>
-          <p:cNvPr id="16" name="Text 14"/>
-          <p:cNvSpPr/>
-          <p:nvPr/>
-        </p:nvSpPr>
-        <p:spPr>
-          <a:xfrm>
-            <a:off x="3447288" y="3447288"/>
-            <a:ext cx="7811719" cy="420624"/>
-          </a:xfrm>
-          <a:prstGeom prst="rect">
-            <a:avLst/>
-          </a:prstGeom>
-          <a:noFill/>
-          <a:ln/>
-        </p:spPr>
-        <p:txBody>
-          <a:bodyPr wrap="square" lIns="0" tIns="0" rIns="0" bIns="0" rtlCol="0" anchor="ctr"/>
-          <a:lstStyle/>
-          <a:p>
-            <a:pPr indent="0" marL="0">
-              <a:lnSpc>
-                <a:spcPts val="1550"/>
-              </a:lnSpc>
-              <a:buNone/>
-            </a:pPr>
-            <a:r>
-              <a:rPr lang="en-US" sz="1050" b="1" dirty="0">
-                <a:solidFill>
-                  <a:srgbClr val="16224E"/>
-                </a:solidFill>
-                <a:latin typeface="Arial" pitchFamily="34" charset="0"/>
-                <a:ea typeface="Arial" pitchFamily="34" charset="-122"/>
-                <a:cs typeface="Arial" pitchFamily="34" charset="-120"/>
-              </a:rPr>
-              <a:t>As três perguntas do slide 8</a:t>
-            </a:r>
-            <a:pPr indent="0" marL="0">
-              <a:lnSpc>
-                <a:spcPts val="1550"/>
-              </a:lnSpc>
-              <a:buNone/>
-            </a:pPr>
-            <a:r>
-              <a:rPr lang="en-US" sz="1050" dirty="0">
-                <a:solidFill>
-                  <a:srgbClr val="4A5578"/>
-                </a:solidFill>
-                <a:latin typeface="Arial" pitchFamily="34" charset="0"/>
-                <a:ea typeface="Arial" pitchFamily="34" charset="-122"/>
-                <a:cs typeface="Arial" pitchFamily="34" charset="-120"/>
-              </a:rPr>
-              <a:t> em forma de checklist — rode uma vez por caixa.</a:t>
-            </a:r>
-            <a:endParaRPr lang="en-US" sz="1050" dirty="0"/>
-          </a:p>
-        </p:txBody>
-      </p:sp>
-      <p:sp>
-        <p:nvSpPr>
-          <p:cNvPr id="17" name="Shape 15"/>
-          <p:cNvSpPr/>
-          <p:nvPr/>
-        </p:nvSpPr>
-        <p:spPr>
-          <a:xfrm>
-            <a:off x="658368" y="3931920"/>
-            <a:ext cx="10874959" cy="457200"/>
+              <a:t>INSTALAR</a:t>
+            </a:r>
+            <a:endParaRPr lang="en-US" sz="850" dirty="0"/>
+          </a:p>
+        </p:txBody>
+      </p:sp>
+      <p:sp>
+        <p:nvSpPr>
+          <p:cNvPr id="11" name="Text 9"/>
+          <p:cNvSpPr/>
+          <p:nvPr/>
+        </p:nvSpPr>
+        <p:spPr>
+          <a:xfrm>
+            <a:off x="1865376" y="4443984"/>
+            <a:ext cx="3931920" cy="384048"/>
           </a:xfrm>
           <a:prstGeom prst="roundRect">
             <a:avLst>
-              <a:gd name="adj" fmla="val 14000"/>
+              <a:gd name="adj" fmla="val 14286"/>
             </a:avLst>
           </a:prstGeom>
           <a:solidFill>
-            <a:srgbClr val="FFFFFF"/>
+            <a:srgbClr val="F4F0F9"/>
           </a:solidFill>
-          <a:ln w="12700">
-            <a:solidFill>
-              <a:srgbClr val="E3DCEC"/>
-            </a:solidFill>
-            <a:prstDash val="solid"/>
-          </a:ln>
-        </p:spPr>
-      </p:sp>
-      <p:sp>
-        <p:nvSpPr>
-          <p:cNvPr id="18" name="Text 16"/>
-          <p:cNvSpPr/>
-          <p:nvPr/>
-        </p:nvSpPr>
-        <p:spPr>
-          <a:xfrm>
-            <a:off x="914400" y="4032504"/>
-            <a:ext cx="2377440" cy="256032"/>
-          </a:xfrm>
-          <a:prstGeom prst="rect">
-            <a:avLst/>
-          </a:prstGeom>
-          <a:noFill/>
-          <a:ln/>
-        </p:spPr>
-        <p:txBody>
-          <a:bodyPr wrap="square" lIns="0" tIns="0" rIns="0" bIns="0" rtlCol="0" anchor="ctr"/>
-          <a:lstStyle/>
-          <a:p>
-            <a:pPr indent="0" marL="0">
-              <a:buNone/>
-            </a:pPr>
-            <a:r>
-              <a:rPr lang="en-US" sz="1000" dirty="0">
-                <a:solidFill>
-                  <a:srgbClr val="E80070"/>
+          <a:ln/>
+        </p:spPr>
+        <p:txBody>
+          <a:bodyPr wrap="square" lIns="1270" tIns="1270" rIns="1270" bIns="1270" rtlCol="0" anchor="ctr"/>
+          <a:lstStyle/>
+          <a:p>
+            <a:pPr algn="l" indent="0" marL="0">
+              <a:buNone/>
+            </a:pPr>
+            <a:r>
+              <a:rPr lang="en-US" sz="1050" dirty="0">
+                <a:solidFill>
+                  <a:srgbClr val="16224E"/>
                 </a:solidFill>
                 <a:latin typeface="Courier New" pitchFamily="34" charset="0"/>
                 <a:ea typeface="Courier New" pitchFamily="34" charset="-122"/>
                 <a:cs typeface="Courier New" pitchFamily="34" charset="-120"/>
               </a:rPr>
-              <a:t>prompt.template.md</a:t>
-            </a:r>
-            <a:endParaRPr lang="en-US" sz="1000" dirty="0"/>
-          </a:p>
-        </p:txBody>
-      </p:sp>
-      <p:sp>
-        <p:nvSpPr>
-          <p:cNvPr id="19" name="Text 17"/>
-          <p:cNvSpPr/>
-          <p:nvPr/>
-        </p:nvSpPr>
-        <p:spPr>
-          <a:xfrm>
-            <a:off x="3447288" y="3977640"/>
-            <a:ext cx="7811719" cy="420624"/>
-          </a:xfrm>
-          <a:prstGeom prst="rect">
-            <a:avLst/>
-          </a:prstGeom>
-          <a:noFill/>
-          <a:ln/>
-        </p:spPr>
-        <p:txBody>
-          <a:bodyPr wrap="square" lIns="0" tIns="0" rIns="0" bIns="0" rtlCol="0" anchor="ctr"/>
-          <a:lstStyle/>
-          <a:p>
-            <a:pPr indent="0" marL="0">
-              <a:lnSpc>
-                <a:spcPts val="1550"/>
-              </a:lnSpc>
-              <a:buNone/>
-            </a:pPr>
-            <a:r>
-              <a:rPr lang="en-US" sz="1050" b="1" dirty="0">
-                <a:solidFill>
-                  <a:srgbClr val="16224E"/>
-                </a:solidFill>
-                <a:latin typeface="Arial" pitchFamily="34" charset="0"/>
-                <a:ea typeface="Arial" pitchFamily="34" charset="-122"/>
-                <a:cs typeface="Arial" pitchFamily="34" charset="-120"/>
-              </a:rPr>
-              <a:t>As sete seções de um prompt de produção</a:t>
-            </a:r>
-            <a:pPr indent="0" marL="0">
-              <a:lnSpc>
-                <a:spcPts val="1550"/>
-              </a:lnSpc>
-              <a:buNone/>
-            </a:pPr>
-            <a:r>
-              <a:rPr lang="en-US" sz="1050" dirty="0">
-                <a:solidFill>
-                  <a:srgbClr val="4A5578"/>
-                </a:solidFill>
-                <a:latin typeface="Arial" pitchFamily="34" charset="0"/>
-                <a:ea typeface="Arial" pitchFamily="34" charset="-122"/>
-                <a:cs typeface="Arial" pitchFamily="34" charset="-120"/>
-              </a:rPr>
-              <a:t>: papel, tarefa, dados, regras, formato de saída, quando NÃO decidir, casos de borda.</a:t>
+              <a:t>cp -r mapear-processo ~/.claude/skills/</a:t>
             </a:r>
             <a:endParaRPr lang="en-US" sz="1050" dirty="0"/>
           </a:p>
@@ -8281,268 +9041,18 @@
       </p:sp>
       <p:sp>
         <p:nvSpPr>
-          <p:cNvPr id="20" name="Shape 18"/>
-          <p:cNvSpPr/>
-          <p:nvPr/>
-        </p:nvSpPr>
-        <p:spPr>
-          <a:xfrm>
-            <a:off x="658368" y="4462272"/>
-            <a:ext cx="10874959" cy="457200"/>
+          <p:cNvPr id="12" name="Shape 10"/>
+          <p:cNvSpPr/>
+          <p:nvPr/>
+        </p:nvSpPr>
+        <p:spPr>
+          <a:xfrm>
+            <a:off x="658368" y="5010912"/>
+            <a:ext cx="5394960" cy="566928"/>
           </a:xfrm>
           <a:prstGeom prst="roundRect">
             <a:avLst>
-              <a:gd name="adj" fmla="val 14000"/>
-            </a:avLst>
-          </a:prstGeom>
-          <a:solidFill>
-            <a:srgbClr val="FFFFFF"/>
-          </a:solidFill>
-          <a:ln w="12700">
-            <a:solidFill>
-              <a:srgbClr val="E3DCEC"/>
-            </a:solidFill>
-            <a:prstDash val="solid"/>
-          </a:ln>
-        </p:spPr>
-      </p:sp>
-      <p:sp>
-        <p:nvSpPr>
-          <p:cNvPr id="21" name="Text 19"/>
-          <p:cNvSpPr/>
-          <p:nvPr/>
-        </p:nvSpPr>
-        <p:spPr>
-          <a:xfrm>
-            <a:off x="914400" y="4562856"/>
-            <a:ext cx="2377440" cy="256032"/>
-          </a:xfrm>
-          <a:prstGeom prst="rect">
-            <a:avLst/>
-          </a:prstGeom>
-          <a:noFill/>
-          <a:ln/>
-        </p:spPr>
-        <p:txBody>
-          <a:bodyPr wrap="square" lIns="0" tIns="0" rIns="0" bIns="0" rtlCol="0" anchor="ctr"/>
-          <a:lstStyle/>
-          <a:p>
-            <a:pPr indent="0" marL="0">
-              <a:buNone/>
-            </a:pPr>
-            <a:r>
-              <a:rPr lang="en-US" sz="1000" dirty="0">
-                <a:solidFill>
-                  <a:srgbClr val="E80070"/>
-                </a:solidFill>
-                <a:latin typeface="Courier New" pitchFamily="34" charset="0"/>
-                <a:ea typeface="Courier New" pitchFamily="34" charset="-122"/>
-                <a:cs typeface="Courier New" pitchFamily="34" charset="-120"/>
-              </a:rPr>
-              <a:t>evals/exemplo.yaml</a:t>
-            </a:r>
-            <a:endParaRPr lang="en-US" sz="1000" dirty="0"/>
-          </a:p>
-        </p:txBody>
-      </p:sp>
-      <p:sp>
-        <p:nvSpPr>
-          <p:cNvPr id="22" name="Text 20"/>
-          <p:cNvSpPr/>
-          <p:nvPr/>
-        </p:nvSpPr>
-        <p:spPr>
-          <a:xfrm>
-            <a:off x="3447288" y="4507992"/>
-            <a:ext cx="7811719" cy="420624"/>
-          </a:xfrm>
-          <a:prstGeom prst="rect">
-            <a:avLst/>
-          </a:prstGeom>
-          <a:noFill/>
-          <a:ln/>
-        </p:spPr>
-        <p:txBody>
-          <a:bodyPr wrap="square" lIns="0" tIns="0" rIns="0" bIns="0" rtlCol="0" anchor="ctr"/>
-          <a:lstStyle/>
-          <a:p>
-            <a:pPr indent="0" marL="0">
-              <a:lnSpc>
-                <a:spcPts val="1550"/>
-              </a:lnSpc>
-              <a:buNone/>
-            </a:pPr>
-            <a:r>
-              <a:rPr lang="en-US" sz="1050" b="1" dirty="0">
-                <a:solidFill>
-                  <a:srgbClr val="16224E"/>
-                </a:solidFill>
-                <a:latin typeface="Arial" pitchFamily="34" charset="0"/>
-                <a:ea typeface="Arial" pitchFamily="34" charset="-122"/>
-                <a:cs typeface="Arial" pitchFamily="34" charset="-120"/>
-              </a:rPr>
-              <a:t>Vinte casos, cinco de borda</a:t>
-            </a:r>
-            <a:pPr indent="0" marL="0">
-              <a:lnSpc>
-                <a:spcPts val="1550"/>
-              </a:lnSpc>
-              <a:buNone/>
-            </a:pPr>
-            <a:r>
-              <a:rPr lang="en-US" sz="1050" dirty="0">
-                <a:solidFill>
-                  <a:srgbClr val="4A5578"/>
-                </a:solidFill>
-                <a:latin typeface="Arial" pitchFamily="34" charset="0"/>
-                <a:ea typeface="Arial" pitchFamily="34" charset="-122"/>
-                <a:cs typeface="Arial" pitchFamily="34" charset="-120"/>
-              </a:rPr>
-              <a:t>, mais o comando que roda no CI e bloqueia o merge.</a:t>
-            </a:r>
-            <a:endParaRPr lang="en-US" sz="1050" dirty="0"/>
-          </a:p>
-        </p:txBody>
-      </p:sp>
-      <p:sp>
-        <p:nvSpPr>
-          <p:cNvPr id="23" name="Shape 21"/>
-          <p:cNvSpPr/>
-          <p:nvPr/>
-        </p:nvSpPr>
-        <p:spPr>
-          <a:xfrm>
-            <a:off x="658368" y="4992624"/>
-            <a:ext cx="10874959" cy="457200"/>
-          </a:xfrm>
-          <a:prstGeom prst="roundRect">
-            <a:avLst>
-              <a:gd name="adj" fmla="val 14000"/>
-            </a:avLst>
-          </a:prstGeom>
-          <a:solidFill>
-            <a:srgbClr val="FFFFFF"/>
-          </a:solidFill>
-          <a:ln w="12700">
-            <a:solidFill>
-              <a:srgbClr val="E3DCEC"/>
-            </a:solidFill>
-            <a:prstDash val="solid"/>
-          </a:ln>
-        </p:spPr>
-      </p:sp>
-      <p:sp>
-        <p:nvSpPr>
-          <p:cNvPr id="24" name="Text 22"/>
-          <p:cNvSpPr/>
-          <p:nvPr/>
-        </p:nvSpPr>
-        <p:spPr>
-          <a:xfrm>
-            <a:off x="914400" y="5093208"/>
-            <a:ext cx="2377440" cy="256032"/>
-          </a:xfrm>
-          <a:prstGeom prst="rect">
-            <a:avLst/>
-          </a:prstGeom>
-          <a:noFill/>
-          <a:ln/>
-        </p:spPr>
-        <p:txBody>
-          <a:bodyPr wrap="square" lIns="0" tIns="0" rIns="0" bIns="0" rtlCol="0" anchor="ctr"/>
-          <a:lstStyle/>
-          <a:p>
-            <a:pPr indent="0" marL="0">
-              <a:buNone/>
-            </a:pPr>
-            <a:r>
-              <a:rPr lang="en-US" sz="1000" dirty="0">
-                <a:solidFill>
-                  <a:srgbClr val="E80070"/>
-                </a:solidFill>
-                <a:latin typeface="Courier New" pitchFamily="34" charset="0"/>
-                <a:ea typeface="Courier New" pitchFamily="34" charset="-122"/>
-                <a:cs typeface="Courier New" pitchFamily="34" charset="-120"/>
-              </a:rPr>
-              <a:t>checklist-producao.md</a:t>
-            </a:r>
-            <a:endParaRPr lang="en-US" sz="1000" dirty="0"/>
-          </a:p>
-        </p:txBody>
-      </p:sp>
-      <p:sp>
-        <p:nvSpPr>
-          <p:cNvPr id="25" name="Text 23"/>
-          <p:cNvSpPr/>
-          <p:nvPr/>
-        </p:nvSpPr>
-        <p:spPr>
-          <a:xfrm>
-            <a:off x="3447288" y="5038344"/>
-            <a:ext cx="7811719" cy="420624"/>
-          </a:xfrm>
-          <a:prstGeom prst="rect">
-            <a:avLst/>
-          </a:prstGeom>
-          <a:noFill/>
-          <a:ln/>
-        </p:spPr>
-        <p:txBody>
-          <a:bodyPr wrap="square" lIns="0" tIns="0" rIns="0" bIns="0" rtlCol="0" anchor="ctr"/>
-          <a:lstStyle/>
-          <a:p>
-            <a:pPr indent="0" marL="0">
-              <a:lnSpc>
-                <a:spcPts val="1550"/>
-              </a:lnSpc>
-              <a:buNone/>
-            </a:pPr>
-            <a:r>
-              <a:rPr lang="en-US" sz="1050" b="1" dirty="0">
-                <a:solidFill>
-                  <a:srgbClr val="16224E"/>
-                </a:solidFill>
-                <a:latin typeface="Arial" pitchFamily="34" charset="0"/>
-                <a:ea typeface="Arial" pitchFamily="34" charset="-122"/>
-                <a:cs typeface="Arial" pitchFamily="34" charset="-120"/>
-              </a:rPr>
-              <a:t>Doze itens antes de ligar o fluxo.</a:t>
-            </a:r>
-            <a:pPr indent="0" marL="0">
-              <a:lnSpc>
-                <a:spcPts val="1550"/>
-              </a:lnSpc>
-              <a:buNone/>
-            </a:pPr>
-            <a:r>
-              <a:rPr lang="en-US" sz="1050" dirty="0">
-                <a:solidFill>
-                  <a:srgbClr val="4A5578"/>
-                </a:solidFill>
-                <a:latin typeface="Arial" pitchFamily="34" charset="0"/>
-                <a:ea typeface="Arial" pitchFamily="34" charset="-122"/>
-                <a:cs typeface="Arial" pitchFamily="34" charset="-120"/>
-              </a:rPr>
-              <a:t> Item desmarcado é risco aceito, com nome e data ao lado.</a:t>
-            </a:r>
-            <a:endParaRPr lang="en-US" sz="1050" dirty="0"/>
-          </a:p>
-        </p:txBody>
-      </p:sp>
-      <p:sp>
-        <p:nvSpPr>
-          <p:cNvPr id="26" name="Shape 24"/>
-          <p:cNvSpPr/>
-          <p:nvPr/>
-        </p:nvSpPr>
-        <p:spPr>
-          <a:xfrm>
-            <a:off x="658368" y="5504688"/>
-            <a:ext cx="10874959" cy="658368"/>
-          </a:xfrm>
-          <a:prstGeom prst="roundRect">
-            <a:avLst>
-              <a:gd name="adj" fmla="val 13889"/>
+              <a:gd name="adj" fmla="val 16129"/>
             </a:avLst>
           </a:prstGeom>
           <a:solidFill>
@@ -8558,14 +9068,14 @@
       </p:sp>
       <p:sp>
         <p:nvSpPr>
-          <p:cNvPr id="27" name="Text 25"/>
-          <p:cNvSpPr/>
-          <p:nvPr/>
-        </p:nvSpPr>
-        <p:spPr>
-          <a:xfrm>
-            <a:off x="914400" y="5705856"/>
-            <a:ext cx="2103120" cy="256032"/>
+          <p:cNvPr id="13" name="Text 11"/>
+          <p:cNvSpPr/>
+          <p:nvPr/>
+        </p:nvSpPr>
+        <p:spPr>
+          <a:xfrm>
+            <a:off x="914400" y="5129784"/>
+            <a:ext cx="1188720" cy="329184"/>
           </a:xfrm>
           <a:prstGeom prst="rect">
             <a:avLst/>
@@ -8589,7 +9099,7 @@
                 <a:ea typeface="Courier New" pitchFamily="34" charset="-122"/>
                 <a:cs typeface="Courier New" pitchFamily="34" charset="-120"/>
               </a:rPr>
-              <a:t>LINK / QR A DEFINIR</a:t>
+              <a:t>LINK / QR</a:t>
             </a:r>
             <a:endParaRPr lang="en-US" sz="950" dirty="0"/>
           </a:p>
@@ -8597,14 +9107,14 @@
       </p:sp>
       <p:sp>
         <p:nvSpPr>
-          <p:cNvPr id="28" name="Text 26"/>
-          <p:cNvSpPr/>
-          <p:nvPr/>
-        </p:nvSpPr>
-        <p:spPr>
-          <a:xfrm>
-            <a:off x="3172968" y="5614416"/>
-            <a:ext cx="8086039" cy="457200"/>
+          <p:cNvPr id="14" name="Text 12"/>
+          <p:cNvSpPr/>
+          <p:nvPr/>
+        </p:nvSpPr>
+        <p:spPr>
+          <a:xfrm>
+            <a:off x="2212848" y="5129784"/>
+            <a:ext cx="3566160" cy="329184"/>
           </a:xfrm>
           <a:prstGeom prst="rect">
             <a:avLst/>
@@ -8617,9 +9127,6 @@
           <a:lstStyle/>
           <a:p>
             <a:pPr indent="0" marL="0">
-              <a:lnSpc>
-                <a:spcPts val="1450"/>
-              </a:lnSpc>
               <a:buNone/>
             </a:pPr>
             <a:r>
@@ -8631,7 +9138,7 @@
                 <a:ea typeface="Arial" pitchFamily="34" charset="-122"/>
                 <a:cs typeface="Arial" pitchFamily="34" charset="-120"/>
               </a:rPr>
-              <a:t>Repositório público ou pasta compartilhada. Definir também se vai junto a versão instalável como skills, ou só os arquivos em Markdown — que funcionam com qualquer ferramenta.</a:t>
+              <a:t>O endereço do repositório entra aqui antes da palestra.</a:t>
             </a:r>
             <a:endParaRPr lang="en-US" sz="1000" dirty="0"/>
           </a:p>
@@ -8639,7 +9146,57 @@
       </p:sp>
       <p:sp>
         <p:nvSpPr>
-          <p:cNvPr id="29" name="Text 27"/>
+          <p:cNvPr id="15" name="Shape 13"/>
+          <p:cNvSpPr/>
+          <p:nvPr/>
+        </p:nvSpPr>
+        <p:spPr>
+          <a:xfrm>
+            <a:off x="6400800" y="1874520"/>
+            <a:ext cx="5132527" cy="3977640"/>
+          </a:xfrm>
+          <a:prstGeom prst="roundRect">
+            <a:avLst>
+              <a:gd name="adj" fmla="val 2069"/>
+            </a:avLst>
+          </a:prstGeom>
+          <a:solidFill>
+            <a:srgbClr val="0F1117"/>
+          </a:solidFill>
+          <a:ln w="12700">
+            <a:solidFill>
+              <a:srgbClr val="2A2F3D"/>
+            </a:solidFill>
+            <a:prstDash val="solid"/>
+          </a:ln>
+        </p:spPr>
+      </p:sp>
+      <p:pic>
+        <p:nvPicPr>
+          <p:cNvPr id="16" name="Image 0" descr="/home/user/casamentos-app/talks/serasa-ia-automacao/assets/skill-preview.png">    </p:cNvPr>
+          <p:cNvPicPr>
+            <a:picLocks noChangeAspect="1"/>
+          </p:cNvPicPr>
+          <p:nvPr/>
+        </p:nvPicPr>
+        <p:blipFill>
+          <a:blip r:embed="rId1"/>
+          <a:srcRect l="0" r="0" t="0" b="0"/>
+          <a:stretch/>
+        </p:blipFill>
+        <p:spPr>
+          <a:xfrm>
+            <a:off x="6510528" y="1984248"/>
+            <a:ext cx="4913071" cy="3758184"/>
+          </a:xfrm>
+          <a:prstGeom prst="rect">
+            <a:avLst/>
+          </a:prstGeom>
+        </p:spPr>
+      </p:pic>
+      <p:sp>
+        <p:nvSpPr>
+          <p:cNvPr id="17" name="Text 14"/>
           <p:cNvSpPr/>
           <p:nvPr/>
         </p:nvSpPr>
@@ -8678,7 +9235,7 @@
       </p:sp>
       <p:sp>
         <p:nvSpPr>
-          <p:cNvPr id="30" name="Text 28"/>
+          <p:cNvPr id="18" name="Text 15"/>
           <p:cNvSpPr/>
           <p:nvPr/>
         </p:nvSpPr>

--- a/talks/serasa-ia-automacao/deck.pptx
+++ b/talks/serasa-ia-automacao/deck.pptx
@@ -5908,7 +5908,7 @@
             </a:avLst>
           </a:prstGeom>
           <a:solidFill>
-            <a:srgbClr val="FBE0EE"/>
+            <a:srgbClr val="FDEDF6"/>
           </a:solidFill>
           <a:ln/>
         </p:spPr>
@@ -5951,7 +5951,7 @@
             </a:avLst>
           </a:prstGeom>
           <a:solidFill>
-            <a:srgbClr val="FBE0EE"/>
+            <a:srgbClr val="FDEDF6"/>
           </a:solidFill>
           <a:ln/>
         </p:spPr>
@@ -5994,7 +5994,7 @@
             </a:avLst>
           </a:prstGeom>
           <a:solidFill>
-            <a:srgbClr val="FBE0EE"/>
+            <a:srgbClr val="FDEDF6"/>
           </a:solidFill>
           <a:ln/>
         </p:spPr>
@@ -6037,7 +6037,7 @@
             </a:avLst>
           </a:prstGeom>
           <a:solidFill>
-            <a:srgbClr val="FBE0EE"/>
+            <a:srgbClr val="FDEDF6"/>
           </a:solidFill>
           <a:ln/>
         </p:spPr>
@@ -6080,7 +6080,7 @@
             </a:avLst>
           </a:prstGeom>
           <a:solidFill>
-            <a:srgbClr val="FBE0EE"/>
+            <a:srgbClr val="FDEDF6"/>
           </a:solidFill>
           <a:ln/>
         </p:spPr>
@@ -6255,7 +6255,7 @@
             </a:avLst>
           </a:prstGeom>
           <a:solidFill>
-            <a:srgbClr val="FBE0EE"/>
+            <a:srgbClr val="FDEDF6"/>
           </a:solidFill>
           <a:ln/>
         </p:spPr>
@@ -6298,7 +6298,7 @@
             </a:avLst>
           </a:prstGeom>
           <a:solidFill>
-            <a:srgbClr val="FBE0EE"/>
+            <a:srgbClr val="FDEDF6"/>
           </a:solidFill>
           <a:ln/>
         </p:spPr>
@@ -6341,7 +6341,7 @@
             </a:avLst>
           </a:prstGeom>
           <a:solidFill>
-            <a:srgbClr val="FBE0EE"/>
+            <a:srgbClr val="FDEDF6"/>
           </a:solidFill>
           <a:ln/>
         </p:spPr>
@@ -17582,7 +17582,7 @@
             </a:avLst>
           </a:prstGeom>
           <a:solidFill>
-            <a:srgbClr val="F2F7FC"/>
+            <a:srgbClr val="D6E6F8"/>
           </a:solidFill>
           <a:ln w="12700">
             <a:solidFill>
@@ -17648,7 +17648,7 @@
             </a:avLst>
           </a:prstGeom>
           <a:solidFill>
-            <a:srgbClr val="DCE8F6"/>
+            <a:srgbClr val="BFD8F2"/>
           </a:solidFill>
           <a:ln/>
         </p:spPr>
@@ -17691,7 +17691,7 @@
             </a:avLst>
           </a:prstGeom>
           <a:solidFill>
-            <a:srgbClr val="DCE8F6"/>
+            <a:srgbClr val="BFD8F2"/>
           </a:solidFill>
           <a:ln/>
         </p:spPr>
@@ -17734,7 +17734,7 @@
             </a:avLst>
           </a:prstGeom>
           <a:solidFill>
-            <a:srgbClr val="DCE8F6"/>
+            <a:srgbClr val="BFD8F2"/>
           </a:solidFill>
           <a:ln/>
         </p:spPr>
@@ -17777,7 +17777,7 @@
             </a:avLst>
           </a:prstGeom>
           <a:solidFill>
-            <a:srgbClr val="DCE8F6"/>
+            <a:srgbClr val="BFD8F2"/>
           </a:solidFill>
           <a:ln/>
         </p:spPr>
@@ -17820,7 +17820,7 @@
             </a:avLst>
           </a:prstGeom>
           <a:solidFill>
-            <a:srgbClr val="DCE8F6"/>
+            <a:srgbClr val="BFD8F2"/>
           </a:solidFill>
           <a:ln/>
         </p:spPr>
@@ -18123,7 +18123,7 @@
             </a:avLst>
           </a:prstGeom>
           <a:solidFill>
-            <a:srgbClr val="FEF6FA"/>
+            <a:srgbClr val="FDEDF6"/>
           </a:solidFill>
           <a:ln w="12700">
             <a:solidFill>
@@ -18189,7 +18189,7 @@
             </a:avLst>
           </a:prstGeom>
           <a:solidFill>
-            <a:srgbClr val="FBDCEC"/>
+            <a:srgbClr val="F8D3E7"/>
           </a:solidFill>
           <a:ln/>
         </p:spPr>
@@ -18232,7 +18232,7 @@
             </a:avLst>
           </a:prstGeom>
           <a:solidFill>
-            <a:srgbClr val="FBDCEC"/>
+            <a:srgbClr val="F8D3E7"/>
           </a:solidFill>
           <a:ln/>
         </p:spPr>
@@ -18275,7 +18275,7 @@
             </a:avLst>
           </a:prstGeom>
           <a:solidFill>
-            <a:srgbClr val="FBDCEC"/>
+            <a:srgbClr val="F8D3E7"/>
           </a:solidFill>
           <a:ln/>
         </p:spPr>
@@ -18561,11 +18561,11 @@
             </a:avLst>
           </a:prstGeom>
           <a:solidFill>
-            <a:srgbClr val="F4F0F9"/>
+            <a:srgbClr val="F9E8CD"/>
           </a:solidFill>
           <a:ln w="12700">
             <a:solidFill>
-              <a:srgbClr val="6D2077"/>
+              <a:srgbClr val="B4620A"/>
             </a:solidFill>
             <a:prstDash val="solid"/>
           </a:ln>
@@ -18598,7 +18598,7 @@
             <a:r>
               <a:rPr lang="en-US" sz="1450" b="1" spc="-14" kern="0" dirty="0">
                 <a:solidFill>
-                  <a:srgbClr val="6D2077"/>
+                  <a:srgbClr val="B4620A"/>
                 </a:solidFill>
                 <a:latin typeface="Arial" pitchFamily="34" charset="0"/>
                 <a:ea typeface="Arial" pitchFamily="34" charset="-122"/>
@@ -18627,7 +18627,7 @@
             </a:avLst>
           </a:prstGeom>
           <a:solidFill>
-            <a:srgbClr val="E6D8EE"/>
+            <a:srgbClr val="EDD1A2"/>
           </a:solidFill>
           <a:ln/>
         </p:spPr>
@@ -18641,7 +18641,7 @@
             <a:r>
               <a:rPr lang="en-US" sz="850" dirty="0">
                 <a:solidFill>
-                  <a:srgbClr val="6D2077"/>
+                  <a:srgbClr val="B4620A"/>
                 </a:solidFill>
                 <a:latin typeface="Courier New" pitchFamily="34" charset="0"/>
                 <a:ea typeface="Courier New" pitchFamily="34" charset="-122"/>
@@ -18680,7 +18680,7 @@
             <a:r>
               <a:rPr lang="en-US" sz="800" b="1" spc="100" kern="0" dirty="0">
                 <a:solidFill>
-                  <a:srgbClr val="6D2077"/>
+                  <a:srgbClr val="B4620A"/>
                 </a:solidFill>
                 <a:latin typeface="Courier New" pitchFamily="34" charset="0"/>
                 <a:ea typeface="Courier New" pitchFamily="34" charset="-122"/>
@@ -18761,7 +18761,7 @@
             <a:r>
               <a:rPr lang="en-US" sz="800" b="1" spc="100" kern="0" dirty="0">
                 <a:solidFill>
-                  <a:srgbClr val="6D2077"/>
+                  <a:srgbClr val="B4620A"/>
                 </a:solidFill>
                 <a:latin typeface="Courier New" pitchFamily="34" charset="0"/>
                 <a:ea typeface="Courier New" pitchFamily="34" charset="-122"/>
@@ -18842,7 +18842,7 @@
             <a:r>
               <a:rPr lang="en-US" sz="800" b="1" spc="100" kern="0" dirty="0">
                 <a:solidFill>
-                  <a:srgbClr val="6D2077"/>
+                  <a:srgbClr val="B4620A"/>
                 </a:solidFill>
                 <a:latin typeface="Courier New" pitchFamily="34" charset="0"/>
                 <a:ea typeface="Courier New" pitchFamily="34" charset="-122"/>
@@ -19830,7 +19830,7 @@
             </a:avLst>
           </a:prstGeom>
           <a:solidFill>
-            <a:srgbClr val="E4EDF8"/>
+            <a:srgbClr val="9CC0EA"/>
           </a:solidFill>
           <a:ln w="15875">
             <a:solidFill>
@@ -19880,7 +19880,7 @@
             </a:avLst>
           </a:prstGeom>
           <a:solidFill>
-            <a:srgbClr val="FBE0EE"/>
+            <a:srgbClr val="FDEDF6"/>
           </a:solidFill>
           <a:ln w="15875">
             <a:solidFill>
@@ -19930,7 +19930,7 @@
             </a:avLst>
           </a:prstGeom>
           <a:solidFill>
-            <a:srgbClr val="FBE0EE"/>
+            <a:srgbClr val="FDEDF6"/>
           </a:solidFill>
           <a:ln w="15875">
             <a:solidFill>
@@ -19978,7 +19978,7 @@
             <a:avLst/>
           </a:prstGeom>
           <a:solidFill>
-            <a:srgbClr val="E4EDF8"/>
+            <a:srgbClr val="9CC0EA"/>
           </a:solidFill>
           <a:ln w="15875">
             <a:solidFill>
@@ -20048,11 +20048,11 @@
             </a:avLst>
           </a:prstGeom>
           <a:solidFill>
-            <a:srgbClr val="EEE3F4"/>
+            <a:srgbClr val="EFCB8F"/>
           </a:solidFill>
           <a:ln w="15875">
             <a:solidFill>
-              <a:srgbClr val="6D2077"/>
+              <a:srgbClr val="B4620A"/>
             </a:solidFill>
           </a:ln>
         </p:spPr>
@@ -20098,7 +20098,7 @@
             </a:avLst>
           </a:prstGeom>
           <a:solidFill>
-            <a:srgbClr val="E4EDF8"/>
+            <a:srgbClr val="9CC0EA"/>
           </a:solidFill>
           <a:ln w="15875">
             <a:solidFill>
@@ -20647,7 +20647,7 @@
             <a:r>
               <a:rPr lang="en-US" sz="796" b="1" spc="50" kern="0" dirty="0">
                 <a:solidFill>
-                  <a:srgbClr val="6D2077"/>
+                  <a:srgbClr val="B4620A"/>
                 </a:solidFill>
                 <a:latin typeface="Arial" pitchFamily="34" charset="0"/>
                 <a:ea typeface="Arial" pitchFamily="34" charset="-122"/>
@@ -20896,7 +20896,7 @@
             <a:r>
               <a:rPr lang="en-US" sz="1250" b="1" dirty="0">
                 <a:solidFill>
-                  <a:srgbClr val="6D2077"/>
+                  <a:srgbClr val="B4620A"/>
                 </a:solidFill>
                 <a:latin typeface="Arial" pitchFamily="34" charset="0"/>
                 <a:ea typeface="Arial" pitchFamily="34" charset="-122"/>
@@ -21312,7 +21312,7 @@
             </a:avLst>
           </a:prstGeom>
           <a:solidFill>
-            <a:srgbClr val="E4EDF8"/>
+            <a:srgbClr val="9CC0EA"/>
           </a:solidFill>
           <a:ln w="15875">
             <a:solidFill>
@@ -21378,7 +21378,7 @@
             </a:avLst>
           </a:prstGeom>
           <a:solidFill>
-            <a:srgbClr val="FBE0EE"/>
+            <a:srgbClr val="FDEDF6"/>
           </a:solidFill>
           <a:ln w="15875">
             <a:solidFill>
@@ -21444,11 +21444,11 @@
             </a:avLst>
           </a:prstGeom>
           <a:solidFill>
-            <a:srgbClr val="EEE3F4"/>
+            <a:srgbClr val="EFCB8F"/>
           </a:solidFill>
           <a:ln w="15875">
             <a:solidFill>
-              <a:srgbClr val="6D2077"/>
+              <a:srgbClr val="B4620A"/>
             </a:solidFill>
             <a:prstDash val="solid"/>
           </a:ln>

--- a/talks/serasa-ia-automacao/deck.pptx
+++ b/talks/serasa-ia-automacao/deck.pptx
@@ -1044,7 +1044,7 @@
             <a:r>
               <a:rPr lang="en-US" dirty="0"/>
               <a:t>Credencial em 30 segundos, não currículo. A frase do painel escuro é a tese da palestra inteira: script / IA / pessoa. Ela volta no slide 8. ~1 min.
-PENDENTE: salvar a foto em assets/bruno.jpg e rodar node make_pptx.js de novo.</a:t>
+A FOTO ENTRA À MÃO: selecione o quadrado lavanda e substitua por Imagem. Ou salve em assets/bruno.jpg e rode node make_pptx.js.</a:t>
             </a:r>
             <a:endParaRPr lang="en-US" dirty="0"/>
           </a:p>
@@ -10050,13 +10050,12 @@
             </a:avLst>
           </a:prstGeom>
           <a:solidFill>
-            <a:srgbClr val="FEF6FA"/>
+            <a:srgbClr val="F4F0F9"/>
           </a:solidFill>
-          <a:ln w="15875">
+          <a:ln w="12700">
             <a:solidFill>
-              <a:srgbClr val="E80070"/>
+              <a:srgbClr val="EAE3F3"/>
             </a:solidFill>
-            <a:prstDash val="dash"/>
           </a:ln>
         </p:spPr>
         <p:txBody>
@@ -10064,43 +10063,20 @@
           <a:lstStyle/>
           <a:p>
             <a:pPr algn="ctr" indent="0" marL="0">
-              <a:lnSpc>
-                <a:spcPts val="1400"/>
-              </a:lnSpc>
-              <a:buNone/>
-            </a:pPr>
-            <a:r>
-              <a:rPr lang="en-US" sz="950" i="1" dirty="0">
-                <a:solidFill>
-                  <a:srgbClr val="A08BAA"/>
+              <a:buNone/>
+            </a:pPr>
+            <a:r>
+              <a:rPr lang="en-US" sz="1100" spc="160" kern="0" dirty="0">
+                <a:solidFill>
+                  <a:srgbClr val="B9AFC9"/>
                 </a:solidFill>
                 <a:latin typeface="Courier New" pitchFamily="34" charset="0"/>
                 <a:ea typeface="Courier New" pitchFamily="34" charset="-122"/>
                 <a:cs typeface="Courier New" pitchFamily="34" charset="-120"/>
               </a:rPr>
-              <a:t>foto: salve em</a:t>
-            </a:r>
-            <a:endParaRPr lang="en-US" sz="950" dirty="0"/>
-          </a:p>
-          <a:p>
-            <a:pPr algn="ctr" indent="0" marL="0">
-              <a:lnSpc>
-                <a:spcPts val="1400"/>
-              </a:lnSpc>
-              <a:buNone/>
-            </a:pPr>
-            <a:r>
-              <a:rPr lang="en-US" sz="950" i="1" dirty="0">
-                <a:solidFill>
-                  <a:srgbClr val="A08BAA"/>
-                </a:solidFill>
-                <a:latin typeface="Courier New" pitchFamily="34" charset="0"/>
-                <a:ea typeface="Courier New" pitchFamily="34" charset="-122"/>
-                <a:cs typeface="Courier New" pitchFamily="34" charset="-120"/>
-              </a:rPr>
-              <a:t>assets/bruno.jpg</a:t>
-            </a:r>
-            <a:endParaRPr lang="en-US" sz="950" dirty="0"/>
+              <a:t>FOTO</a:t>
+            </a:r>
+            <a:endParaRPr lang="en-US" sz="1100" dirty="0"/>
           </a:p>
         </p:txBody>
       </p:sp>
